--- a/docs/proposal/slides.pptx
+++ b/docs/proposal/slides.pptx
@@ -34,6 +34,7 @@
     <p:sldId id="279" r:id="rId30"/>
     <p:sldId id="280" r:id="rId31"/>
     <p:sldId id="281" r:id="rId32"/>
+    <p:sldId id="282" r:id="rId33"/>
   </p:sldIdLst>
   <p:sldSz cy="6858000" cx="9144000"/>
   <p:notesSz cx="7315200" cy="9601200"/>
@@ -975,7 +976,7 @@
   <p:cSld>
     <p:spTree>
       <p:nvGrpSpPr>
-        <p:cNvPr id="143" name="Shape 143"/>
+        <p:cNvPr id="145" name="Shape 145"/>
         <p:cNvGrpSpPr/>
         <p:nvPr/>
       </p:nvGrpSpPr>
@@ -989,7 +990,7 @@
       </p:grpSpPr>
       <p:sp>
         <p:nvSpPr>
-          <p:cNvPr id="144" name="Google Shape;144;p9:notes"/>
+          <p:cNvPr id="146" name="Google Shape;146;p8:notes"/>
           <p:cNvSpPr txBox="1"/>
           <p:nvPr>
             <p:ph idx="1" type="body"/>
@@ -1036,7 +1037,7 @@
       </p:sp>
       <p:sp>
         <p:nvSpPr>
-          <p:cNvPr id="145" name="Google Shape;145;p9:notes"/>
+          <p:cNvPr id="147" name="Google Shape;147;p8:notes"/>
           <p:cNvSpPr/>
           <p:nvPr>
             <p:ph idx="2" type="sldImg"/>
@@ -1106,7 +1107,7 @@
       </p:grpSpPr>
       <p:sp>
         <p:nvSpPr>
-          <p:cNvPr id="152" name="Google Shape;152;g3fa1e6576f6_0_190:notes"/>
+          <p:cNvPr id="152" name="Google Shape;152;p9:notes"/>
           <p:cNvSpPr txBox="1"/>
           <p:nvPr>
             <p:ph idx="1" type="body"/>
@@ -1153,7 +1154,7 @@
       </p:sp>
       <p:sp>
         <p:nvSpPr>
-          <p:cNvPr id="153" name="Google Shape;153;g3fa1e6576f6_0_190:notes"/>
+          <p:cNvPr id="153" name="Google Shape;153;p9:notes"/>
           <p:cNvSpPr/>
           <p:nvPr>
             <p:ph idx="2" type="sldImg"/>
@@ -1223,7 +1224,7 @@
       </p:grpSpPr>
       <p:sp>
         <p:nvSpPr>
-          <p:cNvPr id="160" name="Google Shape;160;p10:notes"/>
+          <p:cNvPr id="160" name="Google Shape;160;g3fa1e6576f6_0_190:notes"/>
           <p:cNvSpPr txBox="1"/>
           <p:nvPr>
             <p:ph idx="1" type="body"/>
@@ -1232,7 +1233,7 @@
         <p:spPr>
           <a:xfrm>
             <a:off x="731500" y="4560550"/>
-            <a:ext cx="5852150" cy="4320525"/>
+            <a:ext cx="5852100" cy="4320600"/>
           </a:xfrm>
           <a:prstGeom prst="rect">
             <a:avLst/>
@@ -1270,7 +1271,7 @@
       </p:sp>
       <p:sp>
         <p:nvSpPr>
-          <p:cNvPr id="161" name="Google Shape;161;p10:notes"/>
+          <p:cNvPr id="161" name="Google Shape;161;g3fa1e6576f6_0_190:notes"/>
           <p:cNvSpPr/>
           <p:nvPr>
             <p:ph idx="2" type="sldImg"/>
@@ -1279,7 +1280,7 @@
         <p:spPr>
           <a:xfrm>
             <a:off x="1219425" y="720075"/>
-            <a:ext cx="4877025" cy="3600450"/>
+            <a:ext cx="4877100" cy="3600600"/>
           </a:xfrm>
           <a:custGeom>
             <a:rect b="b" l="l" r="r" t="t"/>
@@ -1326,7 +1327,7 @@
   <p:cSld>
     <p:spTree>
       <p:nvGrpSpPr>
-        <p:cNvPr id="165" name="Shape 165"/>
+        <p:cNvPr id="167" name="Shape 167"/>
         <p:cNvGrpSpPr/>
         <p:nvPr/>
       </p:nvGrpSpPr>
@@ -1340,7 +1341,7 @@
       </p:grpSpPr>
       <p:sp>
         <p:nvSpPr>
-          <p:cNvPr id="166" name="Google Shape;166;p11:notes"/>
+          <p:cNvPr id="168" name="Google Shape;168;p10:notes"/>
           <p:cNvSpPr txBox="1"/>
           <p:nvPr>
             <p:ph idx="1" type="body"/>
@@ -1387,7 +1388,7 @@
       </p:sp>
       <p:sp>
         <p:nvSpPr>
-          <p:cNvPr id="167" name="Google Shape;167;p11:notes"/>
+          <p:cNvPr id="169" name="Google Shape;169;p10:notes"/>
           <p:cNvSpPr/>
           <p:nvPr>
             <p:ph idx="2" type="sldImg"/>
@@ -1443,7 +1444,7 @@
   <p:cSld>
     <p:spTree>
       <p:nvGrpSpPr>
-        <p:cNvPr id="171" name="Shape 171"/>
+        <p:cNvPr id="173" name="Shape 173"/>
         <p:cNvGrpSpPr/>
         <p:nvPr/>
       </p:nvGrpSpPr>
@@ -1457,7 +1458,7 @@
       </p:grpSpPr>
       <p:sp>
         <p:nvSpPr>
-          <p:cNvPr id="172" name="Google Shape;172;p12:notes"/>
+          <p:cNvPr id="174" name="Google Shape;174;p11:notes"/>
           <p:cNvSpPr txBox="1"/>
           <p:nvPr>
             <p:ph idx="1" type="body"/>
@@ -1504,7 +1505,124 @@
       </p:sp>
       <p:sp>
         <p:nvSpPr>
-          <p:cNvPr id="173" name="Google Shape;173;p12:notes"/>
+          <p:cNvPr id="175" name="Google Shape;175;p11:notes"/>
+          <p:cNvSpPr/>
+          <p:nvPr>
+            <p:ph idx="2" type="sldImg"/>
+          </p:nvPr>
+        </p:nvSpPr>
+        <p:spPr>
+          <a:xfrm>
+            <a:off x="1219425" y="720075"/>
+            <a:ext cx="4877025" cy="3600450"/>
+          </a:xfrm>
+          <a:custGeom>
+            <a:rect b="b" l="l" r="r" t="t"/>
+            <a:pathLst>
+              <a:path extrusionOk="0" h="120000" w="120000">
+                <a:moveTo>
+                  <a:pt x="0" y="0"/>
+                </a:moveTo>
+                <a:lnTo>
+                  <a:pt x="120000" y="0"/>
+                </a:lnTo>
+                <a:lnTo>
+                  <a:pt x="120000" y="120000"/>
+                </a:lnTo>
+                <a:lnTo>
+                  <a:pt x="0" y="120000"/>
+                </a:lnTo>
+                <a:close/>
+              </a:path>
+            </a:pathLst>
+          </a:custGeom>
+          <a:noFill/>
+          <a:ln cap="flat" cmpd="sng" w="9525">
+            <a:solidFill>
+              <a:srgbClr val="000000"/>
+            </a:solidFill>
+            <a:prstDash val="solid"/>
+            <a:round/>
+            <a:headEnd len="sm" w="sm" type="none"/>
+            <a:tailEnd len="sm" w="sm" type="none"/>
+          </a:ln>
+        </p:spPr>
+      </p:sp>
+    </p:spTree>
+  </p:cSld>
+  <p:clrMapOvr>
+    <a:masterClrMapping/>
+  </p:clrMapOvr>
+</p:notes>
+</file>
+
+<file path=ppt/notesSlides/notesSlide15.xml><?xml version="1.0" encoding="utf-8"?>
+<p:notes xmlns:a="http://schemas.openxmlformats.org/drawingml/2006/main" xmlns:r="http://schemas.openxmlformats.org/officeDocument/2006/relationships" xmlns:mc="http://schemas.openxmlformats.org/markup-compatibility/2006" xmlns:mv="urn:schemas-microsoft-com:mac:vml" xmlns:p="http://schemas.openxmlformats.org/presentationml/2006/main" xmlns:c="http://schemas.openxmlformats.org/drawingml/2006/chart" xmlns:dgm="http://schemas.openxmlformats.org/drawingml/2006/diagram" xmlns:o="urn:schemas-microsoft-com:office:office" xmlns:v="urn:schemas-microsoft-com:vml" xmlns:pvml="urn:schemas-microsoft-com:office:powerpoint" xmlns:com="http://schemas.openxmlformats.org/drawingml/2006/compatibility" xmlns:p14="http://schemas.microsoft.com/office/powerpoint/2010/main" xmlns:p15="http://schemas.microsoft.com/office/powerpoint/2012/main" xmlns:ahyp="http://schemas.microsoft.com/office/drawing/2018/hyperlinkcolor" showMasterPhAnim="0" showMasterSp="0">
+  <p:cSld>
+    <p:spTree>
+      <p:nvGrpSpPr>
+        <p:cNvPr id="179" name="Shape 179"/>
+        <p:cNvGrpSpPr/>
+        <p:nvPr/>
+      </p:nvGrpSpPr>
+      <p:grpSpPr>
+        <a:xfrm>
+          <a:off x="0" y="0"/>
+          <a:ext cx="0" cy="0"/>
+          <a:chOff x="0" y="0"/>
+          <a:chExt cx="0" cy="0"/>
+        </a:xfrm>
+      </p:grpSpPr>
+      <p:sp>
+        <p:nvSpPr>
+          <p:cNvPr id="180" name="Google Shape;180;p12:notes"/>
+          <p:cNvSpPr txBox="1"/>
+          <p:nvPr>
+            <p:ph idx="1" type="body"/>
+          </p:nvPr>
+        </p:nvSpPr>
+        <p:spPr>
+          <a:xfrm>
+            <a:off x="731500" y="4560550"/>
+            <a:ext cx="5852150" cy="4320525"/>
+          </a:xfrm>
+          <a:prstGeom prst="rect">
+            <a:avLst/>
+          </a:prstGeom>
+          <a:noFill/>
+          <a:ln>
+            <a:noFill/>
+          </a:ln>
+        </p:spPr>
+        <p:txBody>
+          <a:bodyPr anchorCtr="0" anchor="t" bIns="91425" lIns="91425" spcFirstLastPara="1" rIns="91425" wrap="square" tIns="91425">
+            <a:noAutofit/>
+          </a:bodyPr>
+          <a:lstStyle/>
+          <a:p>
+            <a:pPr indent="0" lvl="0" marL="0" rtl="0" algn="l">
+              <a:lnSpc>
+                <a:spcPct val="100000"/>
+              </a:lnSpc>
+              <a:spcBef>
+                <a:spcPts val="0"/>
+              </a:spcBef>
+              <a:spcAft>
+                <a:spcPts val="0"/>
+              </a:spcAft>
+              <a:buSzPts val="1100"/>
+              <a:buNone/>
+            </a:pPr>
+            <a:r>
+              <a:t/>
+            </a:r>
+            <a:endParaRPr/>
+          </a:p>
+        </p:txBody>
+      </p:sp>
+      <p:sp>
+        <p:nvSpPr>
+          <p:cNvPr id="181" name="Google Shape;181;p12:notes"/>
           <p:cNvSpPr/>
           <p:nvPr>
             <p:ph idx="2" type="sldImg"/>
@@ -1555,12 +1673,12 @@
 </p:notes>
 </file>
 
-<file path=ppt/notesSlides/notesSlide15.xml><?xml version="1.0" encoding="utf-8"?>
+<file path=ppt/notesSlides/notesSlide16.xml><?xml version="1.0" encoding="utf-8"?>
 <p:notes xmlns:a="http://schemas.openxmlformats.org/drawingml/2006/main" xmlns:r="http://schemas.openxmlformats.org/officeDocument/2006/relationships" xmlns:mc="http://schemas.openxmlformats.org/markup-compatibility/2006" xmlns:mv="urn:schemas-microsoft-com:mac:vml" xmlns:p="http://schemas.openxmlformats.org/presentationml/2006/main" xmlns:c="http://schemas.openxmlformats.org/drawingml/2006/chart" xmlns:dgm="http://schemas.openxmlformats.org/drawingml/2006/diagram" xmlns:o="urn:schemas-microsoft-com:office:office" xmlns:v="urn:schemas-microsoft-com:vml" xmlns:pvml="urn:schemas-microsoft-com:office:powerpoint" xmlns:com="http://schemas.openxmlformats.org/drawingml/2006/compatibility" xmlns:p14="http://schemas.microsoft.com/office/powerpoint/2010/main" xmlns:p15="http://schemas.microsoft.com/office/powerpoint/2012/main" xmlns:ahyp="http://schemas.microsoft.com/office/drawing/2018/hyperlinkcolor" showMasterPhAnim="0" showMasterSp="0">
   <p:cSld>
     <p:spTree>
       <p:nvGrpSpPr>
-        <p:cNvPr id="177" name="Shape 177"/>
+        <p:cNvPr id="185" name="Shape 185"/>
         <p:cNvGrpSpPr/>
         <p:nvPr/>
       </p:nvGrpSpPr>
@@ -1574,7 +1692,7 @@
       </p:grpSpPr>
       <p:sp>
         <p:nvSpPr>
-          <p:cNvPr id="178" name="Google Shape;178;p15:notes"/>
+          <p:cNvPr id="186" name="Google Shape;186;p15:notes"/>
           <p:cNvSpPr txBox="1"/>
           <p:nvPr>
             <p:ph idx="1" type="body"/>
@@ -1621,124 +1739,7 @@
       </p:sp>
       <p:sp>
         <p:nvSpPr>
-          <p:cNvPr id="179" name="Google Shape;179;p15:notes"/>
-          <p:cNvSpPr/>
-          <p:nvPr>
-            <p:ph idx="2" type="sldImg"/>
-          </p:nvPr>
-        </p:nvSpPr>
-        <p:spPr>
-          <a:xfrm>
-            <a:off x="1219425" y="720075"/>
-            <a:ext cx="4877025" cy="3600450"/>
-          </a:xfrm>
-          <a:custGeom>
-            <a:rect b="b" l="l" r="r" t="t"/>
-            <a:pathLst>
-              <a:path extrusionOk="0" h="120000" w="120000">
-                <a:moveTo>
-                  <a:pt x="0" y="0"/>
-                </a:moveTo>
-                <a:lnTo>
-                  <a:pt x="120000" y="0"/>
-                </a:lnTo>
-                <a:lnTo>
-                  <a:pt x="120000" y="120000"/>
-                </a:lnTo>
-                <a:lnTo>
-                  <a:pt x="0" y="120000"/>
-                </a:lnTo>
-                <a:close/>
-              </a:path>
-            </a:pathLst>
-          </a:custGeom>
-          <a:noFill/>
-          <a:ln cap="flat" cmpd="sng" w="9525">
-            <a:solidFill>
-              <a:srgbClr val="000000"/>
-            </a:solidFill>
-            <a:prstDash val="solid"/>
-            <a:round/>
-            <a:headEnd len="sm" w="sm" type="none"/>
-            <a:tailEnd len="sm" w="sm" type="none"/>
-          </a:ln>
-        </p:spPr>
-      </p:sp>
-    </p:spTree>
-  </p:cSld>
-  <p:clrMapOvr>
-    <a:masterClrMapping/>
-  </p:clrMapOvr>
-</p:notes>
-</file>
-
-<file path=ppt/notesSlides/notesSlide16.xml><?xml version="1.0" encoding="utf-8"?>
-<p:notes xmlns:a="http://schemas.openxmlformats.org/drawingml/2006/main" xmlns:r="http://schemas.openxmlformats.org/officeDocument/2006/relationships" xmlns:mc="http://schemas.openxmlformats.org/markup-compatibility/2006" xmlns:mv="urn:schemas-microsoft-com:mac:vml" xmlns:p="http://schemas.openxmlformats.org/presentationml/2006/main" xmlns:c="http://schemas.openxmlformats.org/drawingml/2006/chart" xmlns:dgm="http://schemas.openxmlformats.org/drawingml/2006/diagram" xmlns:o="urn:schemas-microsoft-com:office:office" xmlns:v="urn:schemas-microsoft-com:vml" xmlns:pvml="urn:schemas-microsoft-com:office:powerpoint" xmlns:com="http://schemas.openxmlformats.org/drawingml/2006/compatibility" xmlns:p14="http://schemas.microsoft.com/office/powerpoint/2010/main" xmlns:p15="http://schemas.microsoft.com/office/powerpoint/2012/main" xmlns:ahyp="http://schemas.microsoft.com/office/drawing/2018/hyperlinkcolor" showMasterPhAnim="0" showMasterSp="0">
-  <p:cSld>
-    <p:spTree>
-      <p:nvGrpSpPr>
-        <p:cNvPr id="186" name="Shape 186"/>
-        <p:cNvGrpSpPr/>
-        <p:nvPr/>
-      </p:nvGrpSpPr>
-      <p:grpSpPr>
-        <a:xfrm>
-          <a:off x="0" y="0"/>
-          <a:ext cx="0" cy="0"/>
-          <a:chOff x="0" y="0"/>
-          <a:chExt cx="0" cy="0"/>
-        </a:xfrm>
-      </p:grpSpPr>
-      <p:sp>
-        <p:nvSpPr>
-          <p:cNvPr id="187" name="Google Shape;187;p13:notes"/>
-          <p:cNvSpPr txBox="1"/>
-          <p:nvPr>
-            <p:ph idx="1" type="body"/>
-          </p:nvPr>
-        </p:nvSpPr>
-        <p:spPr>
-          <a:xfrm>
-            <a:off x="731500" y="4560550"/>
-            <a:ext cx="5852150" cy="4320525"/>
-          </a:xfrm>
-          <a:prstGeom prst="rect">
-            <a:avLst/>
-          </a:prstGeom>
-          <a:noFill/>
-          <a:ln>
-            <a:noFill/>
-          </a:ln>
-        </p:spPr>
-        <p:txBody>
-          <a:bodyPr anchorCtr="0" anchor="t" bIns="91425" lIns="91425" spcFirstLastPara="1" rIns="91425" wrap="square" tIns="91425">
-            <a:noAutofit/>
-          </a:bodyPr>
-          <a:lstStyle/>
-          <a:p>
-            <a:pPr indent="0" lvl="0" marL="0" rtl="0" algn="l">
-              <a:lnSpc>
-                <a:spcPct val="100000"/>
-              </a:lnSpc>
-              <a:spcBef>
-                <a:spcPts val="0"/>
-              </a:spcBef>
-              <a:spcAft>
-                <a:spcPts val="0"/>
-              </a:spcAft>
-              <a:buSzPts val="1100"/>
-              <a:buNone/>
-            </a:pPr>
-            <a:r>
-              <a:t/>
-            </a:r>
-            <a:endParaRPr/>
-          </a:p>
-        </p:txBody>
-      </p:sp>
-      <p:sp>
-        <p:nvSpPr>
-          <p:cNvPr id="188" name="Google Shape;188;p13:notes"/>
+          <p:cNvPr id="187" name="Google Shape;187;p15:notes"/>
           <p:cNvSpPr/>
           <p:nvPr>
             <p:ph idx="2" type="sldImg"/>
@@ -1794,7 +1795,7 @@
   <p:cSld>
     <p:spTree>
       <p:nvGrpSpPr>
-        <p:cNvPr id="237" name="Shape 237"/>
+        <p:cNvPr id="194" name="Shape 194"/>
         <p:cNvGrpSpPr/>
         <p:nvPr/>
       </p:nvGrpSpPr>
@@ -1808,7 +1809,7 @@
       </p:grpSpPr>
       <p:sp>
         <p:nvSpPr>
-          <p:cNvPr id="238" name="Google Shape;238;p14:notes"/>
+          <p:cNvPr id="195" name="Google Shape;195;p13:notes"/>
           <p:cNvSpPr txBox="1"/>
           <p:nvPr>
             <p:ph idx="1" type="body"/>
@@ -1855,7 +1856,7 @@
       </p:sp>
       <p:sp>
         <p:nvSpPr>
-          <p:cNvPr id="239" name="Google Shape;239;p14:notes"/>
+          <p:cNvPr id="196" name="Google Shape;196;p13:notes"/>
           <p:cNvSpPr/>
           <p:nvPr>
             <p:ph idx="2" type="sldImg"/>
@@ -1911,7 +1912,7 @@
   <p:cSld>
     <p:spTree>
       <p:nvGrpSpPr>
-        <p:cNvPr id="243" name="Shape 243"/>
+        <p:cNvPr id="245" name="Shape 245"/>
         <p:cNvGrpSpPr/>
         <p:nvPr/>
       </p:nvGrpSpPr>
@@ -1925,7 +1926,7 @@
       </p:grpSpPr>
       <p:sp>
         <p:nvSpPr>
-          <p:cNvPr id="244" name="Google Shape;244;g3fa1e6576f6_0_95:notes"/>
+          <p:cNvPr id="246" name="Google Shape;246;p14:notes"/>
           <p:cNvSpPr txBox="1"/>
           <p:nvPr>
             <p:ph idx="1" type="body"/>
@@ -1934,7 +1935,7 @@
         <p:spPr>
           <a:xfrm>
             <a:off x="731500" y="4560550"/>
-            <a:ext cx="5852100" cy="4320600"/>
+            <a:ext cx="5852150" cy="4320525"/>
           </a:xfrm>
           <a:prstGeom prst="rect">
             <a:avLst/>
@@ -1972,7 +1973,7 @@
       </p:sp>
       <p:sp>
         <p:nvSpPr>
-          <p:cNvPr id="245" name="Google Shape;245;g3fa1e6576f6_0_95:notes"/>
+          <p:cNvPr id="247" name="Google Shape;247;p14:notes"/>
           <p:cNvSpPr/>
           <p:nvPr>
             <p:ph idx="2" type="sldImg"/>
@@ -1981,7 +1982,7 @@
         <p:spPr>
           <a:xfrm>
             <a:off x="1219425" y="720075"/>
-            <a:ext cx="4877100" cy="3600600"/>
+            <a:ext cx="4877025" cy="3600450"/>
           </a:xfrm>
           <a:custGeom>
             <a:rect b="b" l="l" r="r" t="t"/>
@@ -2028,7 +2029,7 @@
   <p:cSld>
     <p:spTree>
       <p:nvGrpSpPr>
-        <p:cNvPr id="249" name="Shape 249"/>
+        <p:cNvPr id="251" name="Shape 251"/>
         <p:cNvGrpSpPr/>
         <p:nvPr/>
       </p:nvGrpSpPr>
@@ -2042,7 +2043,7 @@
       </p:grpSpPr>
       <p:sp>
         <p:nvSpPr>
-          <p:cNvPr id="250" name="Google Shape;250;g3fa1e6576f6_0_156:notes"/>
+          <p:cNvPr id="252" name="Google Shape;252;g3fa1e6576f6_0_95:notes"/>
           <p:cNvSpPr txBox="1"/>
           <p:nvPr>
             <p:ph idx="1" type="body"/>
@@ -2089,7 +2090,7 @@
       </p:sp>
       <p:sp>
         <p:nvSpPr>
-          <p:cNvPr id="251" name="Google Shape;251;g3fa1e6576f6_0_156:notes"/>
+          <p:cNvPr id="253" name="Google Shape;253;g3fa1e6576f6_0_95:notes"/>
           <p:cNvSpPr/>
           <p:nvPr>
             <p:ph idx="2" type="sldImg"/>
@@ -2097,8 +2098,8 @@
         </p:nvSpPr>
         <p:spPr>
           <a:xfrm>
-            <a:off x="1257300" y="720725"/>
-            <a:ext cx="4800600" cy="3600600"/>
+            <a:off x="1219425" y="720075"/>
+            <a:ext cx="4877100" cy="3600600"/>
           </a:xfrm>
           <a:custGeom>
             <a:rect b="b" l="l" r="r" t="t"/>
@@ -2262,7 +2263,7 @@
   <p:cSld>
     <p:spTree>
       <p:nvGrpSpPr>
-        <p:cNvPr id="255" name="Shape 255"/>
+        <p:cNvPr id="257" name="Shape 257"/>
         <p:cNvGrpSpPr/>
         <p:nvPr/>
       </p:nvGrpSpPr>
@@ -2276,7 +2277,124 @@
       </p:grpSpPr>
       <p:sp>
         <p:nvSpPr>
-          <p:cNvPr id="256" name="Google Shape;256;p17:notes"/>
+          <p:cNvPr id="258" name="Google Shape;258;g3fa1e6576f6_0_156:notes"/>
+          <p:cNvSpPr txBox="1"/>
+          <p:nvPr>
+            <p:ph idx="1" type="body"/>
+          </p:nvPr>
+        </p:nvSpPr>
+        <p:spPr>
+          <a:xfrm>
+            <a:off x="731500" y="4560550"/>
+            <a:ext cx="5852100" cy="4320600"/>
+          </a:xfrm>
+          <a:prstGeom prst="rect">
+            <a:avLst/>
+          </a:prstGeom>
+          <a:noFill/>
+          <a:ln>
+            <a:noFill/>
+          </a:ln>
+        </p:spPr>
+        <p:txBody>
+          <a:bodyPr anchorCtr="0" anchor="t" bIns="91425" lIns="91425" spcFirstLastPara="1" rIns="91425" wrap="square" tIns="91425">
+            <a:noAutofit/>
+          </a:bodyPr>
+          <a:lstStyle/>
+          <a:p>
+            <a:pPr indent="0" lvl="0" marL="0" rtl="0" algn="l">
+              <a:lnSpc>
+                <a:spcPct val="100000"/>
+              </a:lnSpc>
+              <a:spcBef>
+                <a:spcPts val="0"/>
+              </a:spcBef>
+              <a:spcAft>
+                <a:spcPts val="0"/>
+              </a:spcAft>
+              <a:buSzPts val="1100"/>
+              <a:buNone/>
+            </a:pPr>
+            <a:r>
+              <a:t/>
+            </a:r>
+            <a:endParaRPr/>
+          </a:p>
+        </p:txBody>
+      </p:sp>
+      <p:sp>
+        <p:nvSpPr>
+          <p:cNvPr id="259" name="Google Shape;259;g3fa1e6576f6_0_156:notes"/>
+          <p:cNvSpPr/>
+          <p:nvPr>
+            <p:ph idx="2" type="sldImg"/>
+          </p:nvPr>
+        </p:nvSpPr>
+        <p:spPr>
+          <a:xfrm>
+            <a:off x="1257300" y="720725"/>
+            <a:ext cx="4800600" cy="3600600"/>
+          </a:xfrm>
+          <a:custGeom>
+            <a:rect b="b" l="l" r="r" t="t"/>
+            <a:pathLst>
+              <a:path extrusionOk="0" h="120000" w="120000">
+                <a:moveTo>
+                  <a:pt x="0" y="0"/>
+                </a:moveTo>
+                <a:lnTo>
+                  <a:pt x="120000" y="0"/>
+                </a:lnTo>
+                <a:lnTo>
+                  <a:pt x="120000" y="120000"/>
+                </a:lnTo>
+                <a:lnTo>
+                  <a:pt x="0" y="120000"/>
+                </a:lnTo>
+                <a:close/>
+              </a:path>
+            </a:pathLst>
+          </a:custGeom>
+          <a:noFill/>
+          <a:ln cap="flat" cmpd="sng" w="9525">
+            <a:solidFill>
+              <a:srgbClr val="000000"/>
+            </a:solidFill>
+            <a:prstDash val="solid"/>
+            <a:round/>
+            <a:headEnd len="sm" w="sm" type="none"/>
+            <a:tailEnd len="sm" w="sm" type="none"/>
+          </a:ln>
+        </p:spPr>
+      </p:sp>
+    </p:spTree>
+  </p:cSld>
+  <p:clrMapOvr>
+    <a:masterClrMapping/>
+  </p:clrMapOvr>
+</p:notes>
+</file>
+
+<file path=ppt/notesSlides/notesSlide21.xml><?xml version="1.0" encoding="utf-8"?>
+<p:notes xmlns:a="http://schemas.openxmlformats.org/drawingml/2006/main" xmlns:r="http://schemas.openxmlformats.org/officeDocument/2006/relationships" xmlns:mc="http://schemas.openxmlformats.org/markup-compatibility/2006" xmlns:mv="urn:schemas-microsoft-com:mac:vml" xmlns:p="http://schemas.openxmlformats.org/presentationml/2006/main" xmlns:c="http://schemas.openxmlformats.org/drawingml/2006/chart" xmlns:dgm="http://schemas.openxmlformats.org/drawingml/2006/diagram" xmlns:o="urn:schemas-microsoft-com:office:office" xmlns:v="urn:schemas-microsoft-com:vml" xmlns:pvml="urn:schemas-microsoft-com:office:powerpoint" xmlns:com="http://schemas.openxmlformats.org/drawingml/2006/compatibility" xmlns:p14="http://schemas.microsoft.com/office/powerpoint/2010/main" xmlns:p15="http://schemas.microsoft.com/office/powerpoint/2012/main" xmlns:ahyp="http://schemas.microsoft.com/office/drawing/2018/hyperlinkcolor" showMasterPhAnim="0" showMasterSp="0">
+  <p:cSld>
+    <p:spTree>
+      <p:nvGrpSpPr>
+        <p:cNvPr id="263" name="Shape 263"/>
+        <p:cNvGrpSpPr/>
+        <p:nvPr/>
+      </p:nvGrpSpPr>
+      <p:grpSpPr>
+        <a:xfrm>
+          <a:off x="0" y="0"/>
+          <a:ext cx="0" cy="0"/>
+          <a:chOff x="0" y="0"/>
+          <a:chExt cx="0" cy="0"/>
+        </a:xfrm>
+      </p:grpSpPr>
+      <p:sp>
+        <p:nvSpPr>
+          <p:cNvPr id="264" name="Google Shape;264;p17:notes"/>
           <p:cNvSpPr txBox="1"/>
           <p:nvPr>
             <p:ph idx="1" type="body"/>
@@ -2323,7 +2441,7 @@
       </p:sp>
       <p:sp>
         <p:nvSpPr>
-          <p:cNvPr id="257" name="Google Shape;257;p17:notes"/>
+          <p:cNvPr id="265" name="Google Shape;265;p17:notes"/>
           <p:cNvSpPr/>
           <p:nvPr>
             <p:ph idx="2" type="sldImg"/>
@@ -2374,12 +2492,12 @@
 </p:notes>
 </file>
 
-<file path=ppt/notesSlides/notesSlide21.xml><?xml version="1.0" encoding="utf-8"?>
+<file path=ppt/notesSlides/notesSlide22.xml><?xml version="1.0" encoding="utf-8"?>
 <p:notes xmlns:a="http://schemas.openxmlformats.org/drawingml/2006/main" xmlns:r="http://schemas.openxmlformats.org/officeDocument/2006/relationships" xmlns:mc="http://schemas.openxmlformats.org/markup-compatibility/2006" xmlns:mv="urn:schemas-microsoft-com:mac:vml" xmlns:p="http://schemas.openxmlformats.org/presentationml/2006/main" xmlns:c="http://schemas.openxmlformats.org/drawingml/2006/chart" xmlns:dgm="http://schemas.openxmlformats.org/drawingml/2006/diagram" xmlns:o="urn:schemas-microsoft-com:office:office" xmlns:v="urn:schemas-microsoft-com:vml" xmlns:pvml="urn:schemas-microsoft-com:office:powerpoint" xmlns:com="http://schemas.openxmlformats.org/drawingml/2006/compatibility" xmlns:p14="http://schemas.microsoft.com/office/powerpoint/2010/main" xmlns:p15="http://schemas.microsoft.com/office/powerpoint/2012/main" xmlns:ahyp="http://schemas.microsoft.com/office/drawing/2018/hyperlinkcolor" showMasterPhAnim="0" showMasterSp="0">
   <p:cSld>
     <p:spTree>
       <p:nvGrpSpPr>
-        <p:cNvPr id="261" name="Shape 261"/>
+        <p:cNvPr id="269" name="Shape 269"/>
         <p:cNvGrpSpPr/>
         <p:nvPr/>
       </p:nvGrpSpPr>
@@ -2393,7 +2511,7 @@
       </p:grpSpPr>
       <p:sp>
         <p:nvSpPr>
-          <p:cNvPr id="262" name="Google Shape;262;g3fa40b541af_0_3:notes"/>
+          <p:cNvPr id="270" name="Google Shape;270;g3fa40b541af_0_3:notes"/>
           <p:cNvSpPr txBox="1"/>
           <p:nvPr>
             <p:ph idx="1" type="body"/>
@@ -2440,124 +2558,7 @@
       </p:sp>
       <p:sp>
         <p:nvSpPr>
-          <p:cNvPr id="263" name="Google Shape;263;g3fa40b541af_0_3:notes"/>
-          <p:cNvSpPr/>
-          <p:nvPr>
-            <p:ph idx="2" type="sldImg"/>
-          </p:nvPr>
-        </p:nvSpPr>
-        <p:spPr>
-          <a:xfrm>
-            <a:off x="1257300" y="720725"/>
-            <a:ext cx="4800600" cy="3600600"/>
-          </a:xfrm>
-          <a:custGeom>
-            <a:rect b="b" l="l" r="r" t="t"/>
-            <a:pathLst>
-              <a:path extrusionOk="0" h="120000" w="120000">
-                <a:moveTo>
-                  <a:pt x="0" y="0"/>
-                </a:moveTo>
-                <a:lnTo>
-                  <a:pt x="120000" y="0"/>
-                </a:lnTo>
-                <a:lnTo>
-                  <a:pt x="120000" y="120000"/>
-                </a:lnTo>
-                <a:lnTo>
-                  <a:pt x="0" y="120000"/>
-                </a:lnTo>
-                <a:close/>
-              </a:path>
-            </a:pathLst>
-          </a:custGeom>
-          <a:noFill/>
-          <a:ln cap="flat" cmpd="sng" w="9525">
-            <a:solidFill>
-              <a:srgbClr val="000000"/>
-            </a:solidFill>
-            <a:prstDash val="solid"/>
-            <a:round/>
-            <a:headEnd len="sm" w="sm" type="none"/>
-            <a:tailEnd len="sm" w="sm" type="none"/>
-          </a:ln>
-        </p:spPr>
-      </p:sp>
-    </p:spTree>
-  </p:cSld>
-  <p:clrMapOvr>
-    <a:masterClrMapping/>
-  </p:clrMapOvr>
-</p:notes>
-</file>
-
-<file path=ppt/notesSlides/notesSlide22.xml><?xml version="1.0" encoding="utf-8"?>
-<p:notes xmlns:a="http://schemas.openxmlformats.org/drawingml/2006/main" xmlns:r="http://schemas.openxmlformats.org/officeDocument/2006/relationships" xmlns:mc="http://schemas.openxmlformats.org/markup-compatibility/2006" xmlns:mv="urn:schemas-microsoft-com:mac:vml" xmlns:p="http://schemas.openxmlformats.org/presentationml/2006/main" xmlns:c="http://schemas.openxmlformats.org/drawingml/2006/chart" xmlns:dgm="http://schemas.openxmlformats.org/drawingml/2006/diagram" xmlns:o="urn:schemas-microsoft-com:office:office" xmlns:v="urn:schemas-microsoft-com:vml" xmlns:pvml="urn:schemas-microsoft-com:office:powerpoint" xmlns:com="http://schemas.openxmlformats.org/drawingml/2006/compatibility" xmlns:p14="http://schemas.microsoft.com/office/powerpoint/2010/main" xmlns:p15="http://schemas.microsoft.com/office/powerpoint/2012/main" xmlns:ahyp="http://schemas.microsoft.com/office/drawing/2018/hyperlinkcolor" showMasterPhAnim="0" showMasterSp="0">
-  <p:cSld>
-    <p:spTree>
-      <p:nvGrpSpPr>
-        <p:cNvPr id="267" name="Shape 267"/>
-        <p:cNvGrpSpPr/>
-        <p:nvPr/>
-      </p:nvGrpSpPr>
-      <p:grpSpPr>
-        <a:xfrm>
-          <a:off x="0" y="0"/>
-          <a:ext cx="0" cy="0"/>
-          <a:chOff x="0" y="0"/>
-          <a:chExt cx="0" cy="0"/>
-        </a:xfrm>
-      </p:grpSpPr>
-      <p:sp>
-        <p:nvSpPr>
-          <p:cNvPr id="268" name="Google Shape;268;g3fa40b541af_0_8:notes"/>
-          <p:cNvSpPr txBox="1"/>
-          <p:nvPr>
-            <p:ph idx="1" type="body"/>
-          </p:nvPr>
-        </p:nvSpPr>
-        <p:spPr>
-          <a:xfrm>
-            <a:off x="731500" y="4560550"/>
-            <a:ext cx="5852100" cy="4320600"/>
-          </a:xfrm>
-          <a:prstGeom prst="rect">
-            <a:avLst/>
-          </a:prstGeom>
-          <a:noFill/>
-          <a:ln>
-            <a:noFill/>
-          </a:ln>
-        </p:spPr>
-        <p:txBody>
-          <a:bodyPr anchorCtr="0" anchor="t" bIns="91425" lIns="91425" spcFirstLastPara="1" rIns="91425" wrap="square" tIns="91425">
-            <a:noAutofit/>
-          </a:bodyPr>
-          <a:lstStyle/>
-          <a:p>
-            <a:pPr indent="0" lvl="0" marL="0" rtl="0" algn="l">
-              <a:lnSpc>
-                <a:spcPct val="100000"/>
-              </a:lnSpc>
-              <a:spcBef>
-                <a:spcPts val="0"/>
-              </a:spcBef>
-              <a:spcAft>
-                <a:spcPts val="0"/>
-              </a:spcAft>
-              <a:buSzPts val="1100"/>
-              <a:buNone/>
-            </a:pPr>
-            <a:r>
-              <a:t/>
-            </a:r>
-            <a:endParaRPr/>
-          </a:p>
-        </p:txBody>
-      </p:sp>
-      <p:sp>
-        <p:nvSpPr>
-          <p:cNvPr id="269" name="Google Shape;269;g3fa40b541af_0_8:notes"/>
+          <p:cNvPr id="271" name="Google Shape;271;g3fa40b541af_0_3:notes"/>
           <p:cNvSpPr/>
           <p:nvPr>
             <p:ph idx="2" type="sldImg"/>
@@ -2613,7 +2614,7 @@
   <p:cSld>
     <p:spTree>
       <p:nvGrpSpPr>
-        <p:cNvPr id="273" name="Shape 273"/>
+        <p:cNvPr id="275" name="Shape 275"/>
         <p:cNvGrpSpPr/>
         <p:nvPr/>
       </p:nvGrpSpPr>
@@ -2627,7 +2628,7 @@
       </p:grpSpPr>
       <p:sp>
         <p:nvSpPr>
-          <p:cNvPr id="274" name="Google Shape;274;g3fa1e6576f6_0_163:notes"/>
+          <p:cNvPr id="276" name="Google Shape;276;g3fa40b541af_0_8:notes"/>
           <p:cNvSpPr txBox="1"/>
           <p:nvPr>
             <p:ph idx="1" type="body"/>
@@ -2674,7 +2675,7 @@
       </p:sp>
       <p:sp>
         <p:nvSpPr>
-          <p:cNvPr id="275" name="Google Shape;275;g3fa1e6576f6_0_163:notes"/>
+          <p:cNvPr id="277" name="Google Shape;277;g3fa40b541af_0_8:notes"/>
           <p:cNvSpPr/>
           <p:nvPr>
             <p:ph idx="2" type="sldImg"/>
@@ -2730,7 +2731,7 @@
   <p:cSld>
     <p:spTree>
       <p:nvGrpSpPr>
-        <p:cNvPr id="279" name="Shape 279"/>
+        <p:cNvPr id="281" name="Shape 281"/>
         <p:cNvGrpSpPr/>
         <p:nvPr/>
       </p:nvGrpSpPr>
@@ -2744,7 +2745,124 @@
       </p:grpSpPr>
       <p:sp>
         <p:nvSpPr>
-          <p:cNvPr id="280" name="Google Shape;280;p16:notes"/>
+          <p:cNvPr id="282" name="Google Shape;282;g3fa1e6576f6_0_163:notes"/>
+          <p:cNvSpPr txBox="1"/>
+          <p:nvPr>
+            <p:ph idx="1" type="body"/>
+          </p:nvPr>
+        </p:nvSpPr>
+        <p:spPr>
+          <a:xfrm>
+            <a:off x="731500" y="4560550"/>
+            <a:ext cx="5852100" cy="4320600"/>
+          </a:xfrm>
+          <a:prstGeom prst="rect">
+            <a:avLst/>
+          </a:prstGeom>
+          <a:noFill/>
+          <a:ln>
+            <a:noFill/>
+          </a:ln>
+        </p:spPr>
+        <p:txBody>
+          <a:bodyPr anchorCtr="0" anchor="t" bIns="91425" lIns="91425" spcFirstLastPara="1" rIns="91425" wrap="square" tIns="91425">
+            <a:noAutofit/>
+          </a:bodyPr>
+          <a:lstStyle/>
+          <a:p>
+            <a:pPr indent="0" lvl="0" marL="0" rtl="0" algn="l">
+              <a:lnSpc>
+                <a:spcPct val="100000"/>
+              </a:lnSpc>
+              <a:spcBef>
+                <a:spcPts val="0"/>
+              </a:spcBef>
+              <a:spcAft>
+                <a:spcPts val="0"/>
+              </a:spcAft>
+              <a:buSzPts val="1100"/>
+              <a:buNone/>
+            </a:pPr>
+            <a:r>
+              <a:t/>
+            </a:r>
+            <a:endParaRPr/>
+          </a:p>
+        </p:txBody>
+      </p:sp>
+      <p:sp>
+        <p:nvSpPr>
+          <p:cNvPr id="283" name="Google Shape;283;g3fa1e6576f6_0_163:notes"/>
+          <p:cNvSpPr/>
+          <p:nvPr>
+            <p:ph idx="2" type="sldImg"/>
+          </p:nvPr>
+        </p:nvSpPr>
+        <p:spPr>
+          <a:xfrm>
+            <a:off x="1257300" y="720725"/>
+            <a:ext cx="4800600" cy="3600600"/>
+          </a:xfrm>
+          <a:custGeom>
+            <a:rect b="b" l="l" r="r" t="t"/>
+            <a:pathLst>
+              <a:path extrusionOk="0" h="120000" w="120000">
+                <a:moveTo>
+                  <a:pt x="0" y="0"/>
+                </a:moveTo>
+                <a:lnTo>
+                  <a:pt x="120000" y="0"/>
+                </a:lnTo>
+                <a:lnTo>
+                  <a:pt x="120000" y="120000"/>
+                </a:lnTo>
+                <a:lnTo>
+                  <a:pt x="0" y="120000"/>
+                </a:lnTo>
+                <a:close/>
+              </a:path>
+            </a:pathLst>
+          </a:custGeom>
+          <a:noFill/>
+          <a:ln cap="flat" cmpd="sng" w="9525">
+            <a:solidFill>
+              <a:srgbClr val="000000"/>
+            </a:solidFill>
+            <a:prstDash val="solid"/>
+            <a:round/>
+            <a:headEnd len="sm" w="sm" type="none"/>
+            <a:tailEnd len="sm" w="sm" type="none"/>
+          </a:ln>
+        </p:spPr>
+      </p:sp>
+    </p:spTree>
+  </p:cSld>
+  <p:clrMapOvr>
+    <a:masterClrMapping/>
+  </p:clrMapOvr>
+</p:notes>
+</file>
+
+<file path=ppt/notesSlides/notesSlide25.xml><?xml version="1.0" encoding="utf-8"?>
+<p:notes xmlns:a="http://schemas.openxmlformats.org/drawingml/2006/main" xmlns:r="http://schemas.openxmlformats.org/officeDocument/2006/relationships" xmlns:mc="http://schemas.openxmlformats.org/markup-compatibility/2006" xmlns:mv="urn:schemas-microsoft-com:mac:vml" xmlns:p="http://schemas.openxmlformats.org/presentationml/2006/main" xmlns:c="http://schemas.openxmlformats.org/drawingml/2006/chart" xmlns:dgm="http://schemas.openxmlformats.org/drawingml/2006/diagram" xmlns:o="urn:schemas-microsoft-com:office:office" xmlns:v="urn:schemas-microsoft-com:vml" xmlns:pvml="urn:schemas-microsoft-com:office:powerpoint" xmlns:com="http://schemas.openxmlformats.org/drawingml/2006/compatibility" xmlns:p14="http://schemas.microsoft.com/office/powerpoint/2010/main" xmlns:p15="http://schemas.microsoft.com/office/powerpoint/2012/main" xmlns:ahyp="http://schemas.microsoft.com/office/drawing/2018/hyperlinkcolor" showMasterPhAnim="0" showMasterSp="0">
+  <p:cSld>
+    <p:spTree>
+      <p:nvGrpSpPr>
+        <p:cNvPr id="287" name="Shape 287"/>
+        <p:cNvGrpSpPr/>
+        <p:nvPr/>
+      </p:nvGrpSpPr>
+      <p:grpSpPr>
+        <a:xfrm>
+          <a:off x="0" y="0"/>
+          <a:ext cx="0" cy="0"/>
+          <a:chOff x="0" y="0"/>
+          <a:chExt cx="0" cy="0"/>
+        </a:xfrm>
+      </p:grpSpPr>
+      <p:sp>
+        <p:nvSpPr>
+          <p:cNvPr id="288" name="Google Shape;288;p16:notes"/>
           <p:cNvSpPr txBox="1"/>
           <p:nvPr>
             <p:ph idx="1" type="body"/>
@@ -2791,7 +2909,7 @@
       </p:sp>
       <p:sp>
         <p:nvSpPr>
-          <p:cNvPr id="281" name="Google Shape;281;p16:notes"/>
+          <p:cNvPr id="289" name="Google Shape;289;p16:notes"/>
           <p:cNvSpPr/>
           <p:nvPr>
             <p:ph idx="2" type="sldImg"/>
@@ -2842,12 +2960,12 @@
 </p:notes>
 </file>
 
-<file path=ppt/notesSlides/notesSlide25.xml><?xml version="1.0" encoding="utf-8"?>
+<file path=ppt/notesSlides/notesSlide26.xml><?xml version="1.0" encoding="utf-8"?>
 <p:notes xmlns:a="http://schemas.openxmlformats.org/drawingml/2006/main" xmlns:r="http://schemas.openxmlformats.org/officeDocument/2006/relationships" xmlns:mc="http://schemas.openxmlformats.org/markup-compatibility/2006" xmlns:mv="urn:schemas-microsoft-com:mac:vml" xmlns:p="http://schemas.openxmlformats.org/presentationml/2006/main" xmlns:c="http://schemas.openxmlformats.org/drawingml/2006/chart" xmlns:dgm="http://schemas.openxmlformats.org/drawingml/2006/diagram" xmlns:o="urn:schemas-microsoft-com:office:office" xmlns:v="urn:schemas-microsoft-com:vml" xmlns:pvml="urn:schemas-microsoft-com:office:powerpoint" xmlns:com="http://schemas.openxmlformats.org/drawingml/2006/compatibility" xmlns:p14="http://schemas.microsoft.com/office/powerpoint/2010/main" xmlns:p15="http://schemas.microsoft.com/office/powerpoint/2012/main" xmlns:ahyp="http://schemas.microsoft.com/office/drawing/2018/hyperlinkcolor" showMasterPhAnim="0" showMasterSp="0">
   <p:cSld>
     <p:spTree>
       <p:nvGrpSpPr>
-        <p:cNvPr id="285" name="Shape 285"/>
+        <p:cNvPr id="293" name="Shape 293"/>
         <p:cNvGrpSpPr/>
         <p:nvPr/>
       </p:nvGrpSpPr>
@@ -2861,7 +2979,7 @@
       </p:grpSpPr>
       <p:sp>
         <p:nvSpPr>
-          <p:cNvPr id="286" name="Google Shape;286;g3fa1e6576f6_0_107:notes"/>
+          <p:cNvPr id="294" name="Google Shape;294;g3fa1e6576f6_0_107:notes"/>
           <p:cNvSpPr txBox="1"/>
           <p:nvPr>
             <p:ph idx="1" type="body"/>
@@ -2908,7 +3026,7 @@
       </p:sp>
       <p:sp>
         <p:nvSpPr>
-          <p:cNvPr id="287" name="Google Shape;287;g3fa1e6576f6_0_107:notes"/>
+          <p:cNvPr id="295" name="Google Shape;295;g3fa1e6576f6_0_107:notes"/>
           <p:cNvSpPr/>
           <p:nvPr>
             <p:ph idx="2" type="sldImg"/>
@@ -2959,12 +3077,12 @@
 </p:notes>
 </file>
 
-<file path=ppt/notesSlides/notesSlide26.xml><?xml version="1.0" encoding="utf-8"?>
+<file path=ppt/notesSlides/notesSlide27.xml><?xml version="1.0" encoding="utf-8"?>
 <p:notes xmlns:a="http://schemas.openxmlformats.org/drawingml/2006/main" xmlns:r="http://schemas.openxmlformats.org/officeDocument/2006/relationships" xmlns:mc="http://schemas.openxmlformats.org/markup-compatibility/2006" xmlns:mv="urn:schemas-microsoft-com:mac:vml" xmlns:p="http://schemas.openxmlformats.org/presentationml/2006/main" xmlns:c="http://schemas.openxmlformats.org/drawingml/2006/chart" xmlns:dgm="http://schemas.openxmlformats.org/drawingml/2006/diagram" xmlns:o="urn:schemas-microsoft-com:office:office" xmlns:v="urn:schemas-microsoft-com:vml" xmlns:pvml="urn:schemas-microsoft-com:office:powerpoint" xmlns:com="http://schemas.openxmlformats.org/drawingml/2006/compatibility" xmlns:p14="http://schemas.microsoft.com/office/powerpoint/2010/main" xmlns:p15="http://schemas.microsoft.com/office/powerpoint/2012/main" xmlns:ahyp="http://schemas.microsoft.com/office/drawing/2018/hyperlinkcolor" showMasterPhAnim="0" showMasterSp="0">
   <p:cSld>
     <p:spTree>
       <p:nvGrpSpPr>
-        <p:cNvPr id="291" name="Shape 291"/>
+        <p:cNvPr id="299" name="Shape 299"/>
         <p:cNvGrpSpPr/>
         <p:nvPr/>
       </p:nvGrpSpPr>
@@ -2978,7 +3096,7 @@
       </p:grpSpPr>
       <p:sp>
         <p:nvSpPr>
-          <p:cNvPr id="292" name="Google Shape;292;g3fa40b541af_0_19:notes"/>
+          <p:cNvPr id="300" name="Google Shape;300;g3fa40b541af_0_19:notes"/>
           <p:cNvSpPr txBox="1"/>
           <p:nvPr>
             <p:ph idx="1" type="body"/>
@@ -3025,7 +3143,7 @@
       </p:sp>
       <p:sp>
         <p:nvSpPr>
-          <p:cNvPr id="293" name="Google Shape;293;g3fa40b541af_0_19:notes"/>
+          <p:cNvPr id="301" name="Google Shape;301;g3fa40b541af_0_19:notes"/>
           <p:cNvSpPr/>
           <p:nvPr>
             <p:ph idx="2" type="sldImg"/>
@@ -3329,7 +3447,7 @@
       </p:grpSpPr>
       <p:sp>
         <p:nvSpPr>
-          <p:cNvPr id="106" name="Google Shape;106;p5:notes"/>
+          <p:cNvPr id="106" name="Google Shape;106;g3fb4a8ef356_0_22:notes"/>
           <p:cNvSpPr txBox="1"/>
           <p:nvPr>
             <p:ph idx="1" type="body"/>
@@ -3338,7 +3456,7 @@
         <p:spPr>
           <a:xfrm>
             <a:off x="731500" y="4560550"/>
-            <a:ext cx="5852150" cy="4320525"/>
+            <a:ext cx="5852100" cy="4320600"/>
           </a:xfrm>
           <a:prstGeom prst="rect">
             <a:avLst/>
@@ -3376,7 +3494,7 @@
       </p:sp>
       <p:sp>
         <p:nvSpPr>
-          <p:cNvPr id="107" name="Google Shape;107;p5:notes"/>
+          <p:cNvPr id="107" name="Google Shape;107;g3fb4a8ef356_0_22:notes"/>
           <p:cNvSpPr/>
           <p:nvPr>
             <p:ph idx="2" type="sldImg"/>
@@ -3385,7 +3503,7 @@
         <p:spPr>
           <a:xfrm>
             <a:off x="1219425" y="720075"/>
-            <a:ext cx="4877025" cy="3600450"/>
+            <a:ext cx="4877100" cy="3600600"/>
           </a:xfrm>
           <a:custGeom>
             <a:rect b="b" l="l" r="r" t="t"/>
@@ -3432,7 +3550,7 @@
   <p:cSld>
     <p:spTree>
       <p:nvGrpSpPr>
-        <p:cNvPr id="119" name="Shape 119"/>
+        <p:cNvPr id="113" name="Shape 113"/>
         <p:cNvGrpSpPr/>
         <p:nvPr/>
       </p:nvGrpSpPr>
@@ -3446,7 +3564,7 @@
       </p:grpSpPr>
       <p:sp>
         <p:nvSpPr>
-          <p:cNvPr id="120" name="Google Shape;120;p6:notes"/>
+          <p:cNvPr id="114" name="Google Shape;114;g3fb4a8ef356_0_5:notes"/>
           <p:cNvSpPr txBox="1"/>
           <p:nvPr>
             <p:ph idx="1" type="body"/>
@@ -3455,7 +3573,7 @@
         <p:spPr>
           <a:xfrm>
             <a:off x="731500" y="4560550"/>
-            <a:ext cx="5852150" cy="4320525"/>
+            <a:ext cx="5852100" cy="4320600"/>
           </a:xfrm>
           <a:prstGeom prst="rect">
             <a:avLst/>
@@ -3493,7 +3611,7 @@
       </p:sp>
       <p:sp>
         <p:nvSpPr>
-          <p:cNvPr id="121" name="Google Shape;121;p6:notes"/>
+          <p:cNvPr id="115" name="Google Shape;115;g3fb4a8ef356_0_5:notes"/>
           <p:cNvSpPr/>
           <p:nvPr>
             <p:ph idx="2" type="sldImg"/>
@@ -3502,7 +3620,7 @@
         <p:spPr>
           <a:xfrm>
             <a:off x="1219425" y="720075"/>
-            <a:ext cx="4877025" cy="3600450"/>
+            <a:ext cx="4877100" cy="3600600"/>
           </a:xfrm>
           <a:custGeom>
             <a:rect b="b" l="l" r="r" t="t"/>
@@ -3549,7 +3667,7 @@
   <p:cSld>
     <p:spTree>
       <p:nvGrpSpPr>
-        <p:cNvPr id="125" name="Shape 125"/>
+        <p:cNvPr id="127" name="Shape 127"/>
         <p:cNvGrpSpPr/>
         <p:nvPr/>
       </p:nvGrpSpPr>
@@ -3563,7 +3681,7 @@
       </p:grpSpPr>
       <p:sp>
         <p:nvSpPr>
-          <p:cNvPr id="126" name="Google Shape;126;p7:notes"/>
+          <p:cNvPr id="128" name="Google Shape;128;p6:notes"/>
           <p:cNvSpPr txBox="1"/>
           <p:nvPr>
             <p:ph idx="1" type="body"/>
@@ -3610,7 +3728,7 @@
       </p:sp>
       <p:sp>
         <p:nvSpPr>
-          <p:cNvPr id="127" name="Google Shape;127;p7:notes"/>
+          <p:cNvPr id="129" name="Google Shape;129;p6:notes"/>
           <p:cNvSpPr/>
           <p:nvPr>
             <p:ph idx="2" type="sldImg"/>
@@ -3666,7 +3784,7 @@
   <p:cSld>
     <p:spTree>
       <p:nvGrpSpPr>
-        <p:cNvPr id="131" name="Shape 131"/>
+        <p:cNvPr id="133" name="Shape 133"/>
         <p:cNvGrpSpPr/>
         <p:nvPr/>
       </p:nvGrpSpPr>
@@ -3680,7 +3798,7 @@
       </p:grpSpPr>
       <p:sp>
         <p:nvSpPr>
-          <p:cNvPr id="132" name="Google Shape;132;g3f9fbfbdbe5_5_69:notes"/>
+          <p:cNvPr id="134" name="Google Shape;134;p7:notes"/>
           <p:cNvSpPr txBox="1"/>
           <p:nvPr>
             <p:ph idx="1" type="body"/>
@@ -3689,7 +3807,7 @@
         <p:spPr>
           <a:xfrm>
             <a:off x="731500" y="4560550"/>
-            <a:ext cx="5852100" cy="4320600"/>
+            <a:ext cx="5852150" cy="4320525"/>
           </a:xfrm>
           <a:prstGeom prst="rect">
             <a:avLst/>
@@ -3727,7 +3845,7 @@
       </p:sp>
       <p:sp>
         <p:nvSpPr>
-          <p:cNvPr id="133" name="Google Shape;133;g3f9fbfbdbe5_5_69:notes"/>
+          <p:cNvPr id="135" name="Google Shape;135;p7:notes"/>
           <p:cNvSpPr/>
           <p:nvPr>
             <p:ph idx="2" type="sldImg"/>
@@ -3736,7 +3854,7 @@
         <p:spPr>
           <a:xfrm>
             <a:off x="1219425" y="720075"/>
-            <a:ext cx="4877100" cy="3600600"/>
+            <a:ext cx="4877025" cy="3600450"/>
           </a:xfrm>
           <a:custGeom>
             <a:rect b="b" l="l" r="r" t="t"/>
@@ -3783,7 +3901,7 @@
   <p:cSld>
     <p:spTree>
       <p:nvGrpSpPr>
-        <p:cNvPr id="137" name="Shape 137"/>
+        <p:cNvPr id="139" name="Shape 139"/>
         <p:cNvGrpSpPr/>
         <p:nvPr/>
       </p:nvGrpSpPr>
@@ -3797,7 +3915,7 @@
       </p:grpSpPr>
       <p:sp>
         <p:nvSpPr>
-          <p:cNvPr id="138" name="Google Shape;138;p8:notes"/>
+          <p:cNvPr id="140" name="Google Shape;140;g3f9fbfbdbe5_5_69:notes"/>
           <p:cNvSpPr txBox="1"/>
           <p:nvPr>
             <p:ph idx="1" type="body"/>
@@ -3844,7 +3962,7 @@
       </p:sp>
       <p:sp>
         <p:nvSpPr>
-          <p:cNvPr id="139" name="Google Shape;139;p8:notes"/>
+          <p:cNvPr id="141" name="Google Shape;141;g3f9fbfbdbe5_5_69:notes"/>
           <p:cNvSpPr/>
           <p:nvPr>
             <p:ph idx="2" type="sldImg"/>
@@ -17168,7 +17286,7 @@
   <p:cSld>
     <p:spTree>
       <p:nvGrpSpPr>
-        <p:cNvPr id="146" name="Shape 146"/>
+        <p:cNvPr id="148" name="Shape 148"/>
         <p:cNvGrpSpPr/>
         <p:nvPr/>
       </p:nvGrpSpPr>
@@ -17182,7 +17300,7 @@
       </p:grpSpPr>
       <p:sp>
         <p:nvSpPr>
-          <p:cNvPr id="147" name="Google Shape;147;p22"/>
+          <p:cNvPr id="149" name="Google Shape;149;p22"/>
           <p:cNvSpPr txBox="1"/>
           <p:nvPr>
             <p:ph type="title"/>
@@ -17190,61 +17308,8 @@
         </p:nvSpPr>
         <p:spPr>
           <a:xfrm>
-            <a:off x="457200" y="274638"/>
-            <a:ext cx="8229600" cy="1143000"/>
-          </a:xfrm>
-          <a:prstGeom prst="rect">
-            <a:avLst/>
-          </a:prstGeom>
-          <a:noFill/>
-          <a:ln>
-            <a:noFill/>
-          </a:ln>
-        </p:spPr>
-        <p:txBody>
-          <a:bodyPr anchorCtr="0" anchor="ctr" bIns="45700" lIns="91425" spcFirstLastPara="1" rIns="91425" wrap="square" tIns="45700">
-            <a:noAutofit/>
-          </a:bodyPr>
-          <a:lstStyle/>
-          <a:p>
-            <a:pPr indent="0" lvl="0" marL="0" rtl="0" algn="ctr">
-              <a:spcBef>
-                <a:spcPts val="0"/>
-              </a:spcBef>
-              <a:spcAft>
-                <a:spcPts val="0"/>
-              </a:spcAft>
-              <a:buSzPts val="1400"/>
-              <a:buNone/>
-            </a:pPr>
-            <a:r>
-              <a:rPr b="1" lang="en-US" sz="4000">
-                <a:solidFill>
-                  <a:srgbClr val="0B3D59"/>
-                </a:solidFill>
-              </a:rPr>
-              <a:t>Gap Analysis</a:t>
-            </a:r>
-            <a:endParaRPr b="1" sz="4000">
-              <a:solidFill>
-                <a:srgbClr val="0B3D59"/>
-              </a:solidFill>
-            </a:endParaRPr>
-          </a:p>
-        </p:txBody>
-      </p:sp>
-      <p:sp>
-        <p:nvSpPr>
-          <p:cNvPr id="148" name="Google Shape;148;p22"/>
-          <p:cNvSpPr txBox="1"/>
-          <p:nvPr>
-            <p:ph idx="1" type="body"/>
-          </p:nvPr>
-        </p:nvSpPr>
-        <p:spPr>
-          <a:xfrm>
-            <a:off x="457200" y="1470530"/>
-            <a:ext cx="8229600" cy="1402500"/>
+            <a:off x="722313" y="4406900"/>
+            <a:ext cx="7772400" cy="1362000"/>
           </a:xfrm>
           <a:prstGeom prst="rect">
             <a:avLst/>
@@ -17256,75 +17321,51 @@
         </p:spPr>
         <p:txBody>
           <a:bodyPr anchorCtr="0" anchor="t" bIns="45700" lIns="91425" spcFirstLastPara="1" rIns="91425" wrap="square" tIns="45700">
-            <a:noAutofit/>
+            <a:normAutofit/>
           </a:bodyPr>
           <a:lstStyle/>
           <a:p>
-            <a:pPr indent="0" lvl="0" marL="0" rtl="0" algn="just">
-              <a:lnSpc>
-                <a:spcPct val="150000"/>
-              </a:lnSpc>
-              <a:spcBef>
-                <a:spcPts val="0"/>
-              </a:spcBef>
-              <a:spcAft>
-                <a:spcPts val="0"/>
-              </a:spcAft>
-              <a:buClr>
-                <a:schemeClr val="dk1"/>
-              </a:buClr>
-              <a:buSzPts val="3200"/>
+            <a:pPr indent="0" lvl="0" marL="0" rtl="0" algn="l">
+              <a:lnSpc>
+                <a:spcPct val="100000"/>
+              </a:lnSpc>
+              <a:spcBef>
+                <a:spcPts val="0"/>
+              </a:spcBef>
+              <a:spcAft>
+                <a:spcPts val="0"/>
+              </a:spcAft>
+              <a:buSzPts val="1400"/>
               <a:buNone/>
             </a:pPr>
             <a:r>
-              <a:rPr b="1" lang="en-US" sz="2100"/>
-              <a:t>1. Single-surface tools dominate the field.</a:t>
+              <a:rPr lang="en-US">
+                <a:solidFill>
+                  <a:srgbClr val="0B3D59"/>
+                </a:solidFill>
+              </a:rPr>
+              <a:t>Gap Analysis</a:t>
             </a:r>
-            <a:r>
-              <a:rPr lang="en-US" sz="2100"/>
-              <a:t> Conjunctival pallor detection, nail-based anemia/clubbing classifiers, and oral cavity OSCC screeners each work on one body surface only. None combine surfaces.</a:t>
-            </a:r>
-            <a:endParaRPr sz="2100"/>
-          </a:p>
-          <a:p>
-            <a:pPr indent="-139700" lvl="0" marL="342900" rtl="0" algn="l">
-              <a:lnSpc>
-                <a:spcPct val="150000"/>
-              </a:lnSpc>
-              <a:spcBef>
-                <a:spcPts val="0"/>
-              </a:spcBef>
-              <a:spcAft>
-                <a:spcPts val="0"/>
-              </a:spcAft>
-              <a:buClr>
-                <a:schemeClr val="dk1"/>
-              </a:buClr>
-              <a:buSzPts val="3200"/>
-              <a:buNone/>
-            </a:pPr>
-            <a:r>
-              <a:t/>
-            </a:r>
-            <a:endParaRPr sz="1200">
-              <a:latin typeface="Arial"/>
-              <a:ea typeface="Arial"/>
-              <a:cs typeface="Arial"/>
-              <a:sym typeface="Arial"/>
+            <a:endParaRPr>
+              <a:solidFill>
+                <a:srgbClr val="0B3D59"/>
+              </a:solidFill>
             </a:endParaRPr>
           </a:p>
         </p:txBody>
       </p:sp>
       <p:sp>
         <p:nvSpPr>
-          <p:cNvPr id="149" name="Google Shape;149;p22"/>
+          <p:cNvPr id="150" name="Google Shape;150;p22"/>
           <p:cNvSpPr txBox="1"/>
-          <p:nvPr/>
+          <p:nvPr>
+            <p:ph idx="1" type="body"/>
+          </p:nvPr>
         </p:nvSpPr>
         <p:spPr>
           <a:xfrm>
-            <a:off x="478325" y="2944900"/>
-            <a:ext cx="8208600" cy="1383000"/>
+            <a:off x="722313" y="2906713"/>
+            <a:ext cx="7772400" cy="1500300"/>
           </a:xfrm>
           <a:prstGeom prst="rect">
             <a:avLst/>
@@ -17335,139 +17376,32 @@
           </a:ln>
         </p:spPr>
         <p:txBody>
-          <a:bodyPr anchorCtr="0" anchor="t" bIns="91425" lIns="91425" spcFirstLastPara="1" rIns="91425" wrap="square" tIns="91425">
-            <a:noAutofit/>
+          <a:bodyPr anchorCtr="0" anchor="b" bIns="45700" lIns="91425" spcFirstLastPara="1" rIns="91425" wrap="square" tIns="45700">
+            <a:normAutofit/>
           </a:bodyPr>
           <a:lstStyle/>
           <a:p>
-            <a:pPr indent="0" lvl="0" marL="0" rtl="0" algn="just">
-              <a:lnSpc>
-                <a:spcPct val="150000"/>
-              </a:lnSpc>
-              <a:spcBef>
-                <a:spcPts val="0"/>
-              </a:spcBef>
-              <a:spcAft>
-                <a:spcPts val="1200"/>
-              </a:spcAft>
-              <a:buClr>
-                <a:schemeClr val="dk1"/>
-              </a:buClr>
-              <a:buSzPts val="1100"/>
+            <a:pPr indent="0" lvl="0" marL="44450" rtl="0" algn="l">
+              <a:lnSpc>
+                <a:spcPct val="100000"/>
+              </a:lnSpc>
+              <a:spcBef>
+                <a:spcPts val="0"/>
+              </a:spcBef>
+              <a:spcAft>
+                <a:spcPts val="0"/>
+              </a:spcAft>
+              <a:buClr>
+                <a:srgbClr val="888888"/>
+              </a:buClr>
+              <a:buSzPts val="2000"/>
               <a:buFont typeface="Arial"/>
               <a:buNone/>
             </a:pPr>
             <a:r>
-              <a:rPr b="1" lang="en-US" sz="2100">
-                <a:solidFill>
-                  <a:schemeClr val="dk1"/>
-                </a:solidFill>
-                <a:latin typeface="Calibri"/>
-                <a:ea typeface="Calibri"/>
-                <a:cs typeface="Calibri"/>
-                <a:sym typeface="Calibri"/>
-              </a:rPr>
-              <a:t>2. No cross-surface fusion.</a:t>
+              <a:t/>
             </a:r>
-            <a:r>
-              <a:rPr lang="en-US" sz="2100">
-                <a:solidFill>
-                  <a:schemeClr val="dk1"/>
-                </a:solidFill>
-                <a:latin typeface="Calibri"/>
-                <a:ea typeface="Calibri"/>
-                <a:cs typeface="Calibri"/>
-                <a:sym typeface="Calibri"/>
-              </a:rPr>
-              <a:t> Asare et al. (2023) collected fingernail, palm, and conjunctiva images from the same patients but only compared them, never fused them into one model.</a:t>
-            </a:r>
-            <a:endParaRPr sz="3200">
-              <a:solidFill>
-                <a:schemeClr val="dk1"/>
-              </a:solidFill>
-              <a:latin typeface="Calibri"/>
-              <a:ea typeface="Calibri"/>
-              <a:cs typeface="Calibri"/>
-              <a:sym typeface="Calibri"/>
-            </a:endParaRPr>
-          </a:p>
-        </p:txBody>
-      </p:sp>
-      <p:sp>
-        <p:nvSpPr>
-          <p:cNvPr id="150" name="Google Shape;150;p22"/>
-          <p:cNvSpPr txBox="1"/>
-          <p:nvPr/>
-        </p:nvSpPr>
-        <p:spPr>
-          <a:xfrm>
-            <a:off x="492750" y="4428875"/>
-            <a:ext cx="8229600" cy="1311000"/>
-          </a:xfrm>
-          <a:prstGeom prst="rect">
-            <a:avLst/>
-          </a:prstGeom>
-          <a:noFill/>
-          <a:ln>
-            <a:noFill/>
-          </a:ln>
-        </p:spPr>
-        <p:txBody>
-          <a:bodyPr anchorCtr="0" anchor="t" bIns="91425" lIns="91425" spcFirstLastPara="1" rIns="91425" wrap="square" tIns="91425">
-            <a:noAutofit/>
-          </a:bodyPr>
-          <a:lstStyle/>
-          <a:p>
-            <a:pPr indent="0" lvl="0" marL="0" rtl="0" algn="just">
-              <a:lnSpc>
-                <a:spcPct val="150000"/>
-              </a:lnSpc>
-              <a:spcBef>
-                <a:spcPts val="0"/>
-              </a:spcBef>
-              <a:spcAft>
-                <a:spcPts val="1200"/>
-              </a:spcAft>
-              <a:buClr>
-                <a:schemeClr val="dk1"/>
-              </a:buClr>
-              <a:buSzPts val="1100"/>
-              <a:buFont typeface="Arial"/>
-              <a:buNone/>
-            </a:pPr>
-            <a:r>
-              <a:rPr b="1" lang="en-US" sz="2100">
-                <a:solidFill>
-                  <a:schemeClr val="dk1"/>
-                </a:solidFill>
-                <a:latin typeface="Calibri"/>
-                <a:ea typeface="Calibri"/>
-                <a:cs typeface="Calibri"/>
-                <a:sym typeface="Calibri"/>
-              </a:rPr>
-              <a:t>3. Fusion exists, but needs dedicated hardware.</a:t>
-            </a:r>
-            <a:r>
-              <a:rPr lang="en-US" sz="2100">
-                <a:solidFill>
-                  <a:schemeClr val="dk1"/>
-                </a:solidFill>
-                <a:latin typeface="Calibri"/>
-                <a:ea typeface="Calibri"/>
-                <a:cs typeface="Calibri"/>
-                <a:sym typeface="Calibri"/>
-              </a:rPr>
-              <a:t> iMES (Ye et al., 2026) fuses face, tongue, and pulse for 9 diseases at 92%+ accuracy, but requires a purpose-built capture device, not a smartphone.</a:t>
-            </a:r>
-            <a:endParaRPr sz="3200">
-              <a:solidFill>
-                <a:schemeClr val="dk1"/>
-              </a:solidFill>
-              <a:latin typeface="Calibri"/>
-              <a:ea typeface="Calibri"/>
-              <a:cs typeface="Calibri"/>
-              <a:sym typeface="Calibri"/>
-            </a:endParaRPr>
+            <a:endParaRPr/>
           </a:p>
         </p:txBody>
       </p:sp>
@@ -17476,195 +17410,6 @@
   <p:clrMapOvr>
     <a:masterClrMapping/>
   </p:clrMapOvr>
-  <p:timing>
-    <p:tnLst>
-      <p:par>
-        <p:cTn dur="indefinite" nodeType="tmRoot" restart="never">
-          <p:childTnLst>
-            <p:seq concurrent="1" nextAc="seek">
-              <p:cTn dur="indefinite" id="2" nodeType="mainSeq">
-                <p:childTnLst>
-                  <p:par>
-                    <p:cTn fill="hold">
-                      <p:stCondLst>
-                        <p:cond delay="indefinite"/>
-                      </p:stCondLst>
-                      <p:childTnLst>
-                        <p:par>
-                          <p:cTn fill="hold">
-                            <p:stCondLst>
-                              <p:cond delay="0"/>
-                            </p:stCondLst>
-                            <p:childTnLst>
-                              <p:par>
-                                <p:cTn fill="hold" nodeType="clickEffect" presetClass="entr" presetID="10" presetSubtype="0">
-                                  <p:stCondLst>
-                                    <p:cond delay="0"/>
-                                  </p:stCondLst>
-                                  <p:childTnLst>
-                                    <p:set>
-                                      <p:cBhvr>
-                                        <p:cTn dur="1" fill="hold">
-                                          <p:stCondLst>
-                                            <p:cond delay="0"/>
-                                          </p:stCondLst>
-                                        </p:cTn>
-                                        <p:tgtEl>
-                                          <p:spTgt spid="148"/>
-                                        </p:tgtEl>
-                                        <p:attrNameLst>
-                                          <p:attrName>style.visibility</p:attrName>
-                                        </p:attrNameLst>
-                                      </p:cBhvr>
-                                      <p:to>
-                                        <p:strVal val="visible"/>
-                                      </p:to>
-                                    </p:set>
-                                    <p:animEffect filter="fade" transition="in">
-                                      <p:cBhvr>
-                                        <p:cTn dur="1000"/>
-                                        <p:tgtEl>
-                                          <p:spTgt spid="148"/>
-                                        </p:tgtEl>
-                                      </p:cBhvr>
-                                    </p:animEffect>
-                                  </p:childTnLst>
-                                </p:cTn>
-                              </p:par>
-                            </p:childTnLst>
-                          </p:cTn>
-                        </p:par>
-                      </p:childTnLst>
-                    </p:cTn>
-                  </p:par>
-                  <p:par>
-                    <p:cTn fill="hold">
-                      <p:stCondLst>
-                        <p:cond delay="indefinite"/>
-                      </p:stCondLst>
-                      <p:childTnLst>
-                        <p:par>
-                          <p:cTn fill="hold">
-                            <p:stCondLst>
-                              <p:cond delay="0"/>
-                            </p:stCondLst>
-                            <p:childTnLst>
-                              <p:par>
-                                <p:cTn fill="hold" nodeType="clickEffect" presetClass="entr" presetID="10" presetSubtype="0">
-                                  <p:stCondLst>
-                                    <p:cond delay="0"/>
-                                  </p:stCondLst>
-                                  <p:childTnLst>
-                                    <p:set>
-                                      <p:cBhvr>
-                                        <p:cTn dur="1" fill="hold">
-                                          <p:stCondLst>
-                                            <p:cond delay="0"/>
-                                          </p:stCondLst>
-                                        </p:cTn>
-                                        <p:tgtEl>
-                                          <p:spTgt spid="149"/>
-                                        </p:tgtEl>
-                                        <p:attrNameLst>
-                                          <p:attrName>style.visibility</p:attrName>
-                                        </p:attrNameLst>
-                                      </p:cBhvr>
-                                      <p:to>
-                                        <p:strVal val="visible"/>
-                                      </p:to>
-                                    </p:set>
-                                    <p:animEffect filter="fade" transition="in">
-                                      <p:cBhvr>
-                                        <p:cTn dur="1000"/>
-                                        <p:tgtEl>
-                                          <p:spTgt spid="149"/>
-                                        </p:tgtEl>
-                                      </p:cBhvr>
-                                    </p:animEffect>
-                                  </p:childTnLst>
-                                </p:cTn>
-                              </p:par>
-                            </p:childTnLst>
-                          </p:cTn>
-                        </p:par>
-                      </p:childTnLst>
-                    </p:cTn>
-                  </p:par>
-                  <p:par>
-                    <p:cTn fill="hold">
-                      <p:stCondLst>
-                        <p:cond delay="indefinite"/>
-                      </p:stCondLst>
-                      <p:childTnLst>
-                        <p:par>
-                          <p:cTn fill="hold">
-                            <p:stCondLst>
-                              <p:cond delay="0"/>
-                            </p:stCondLst>
-                            <p:childTnLst>
-                              <p:par>
-                                <p:cTn fill="hold" nodeType="clickEffect" presetClass="entr" presetID="10" presetSubtype="0">
-                                  <p:stCondLst>
-                                    <p:cond delay="0"/>
-                                  </p:stCondLst>
-                                  <p:childTnLst>
-                                    <p:set>
-                                      <p:cBhvr>
-                                        <p:cTn dur="1" fill="hold">
-                                          <p:stCondLst>
-                                            <p:cond delay="0"/>
-                                          </p:stCondLst>
-                                        </p:cTn>
-                                        <p:tgtEl>
-                                          <p:spTgt spid="150"/>
-                                        </p:tgtEl>
-                                        <p:attrNameLst>
-                                          <p:attrName>style.visibility</p:attrName>
-                                        </p:attrNameLst>
-                                      </p:cBhvr>
-                                      <p:to>
-                                        <p:strVal val="visible"/>
-                                      </p:to>
-                                    </p:set>
-                                    <p:animEffect filter="fade" transition="in">
-                                      <p:cBhvr>
-                                        <p:cTn dur="1000"/>
-                                        <p:tgtEl>
-                                          <p:spTgt spid="150"/>
-                                        </p:tgtEl>
-                                      </p:cBhvr>
-                                    </p:animEffect>
-                                  </p:childTnLst>
-                                </p:cTn>
-                              </p:par>
-                            </p:childTnLst>
-                          </p:cTn>
-                        </p:par>
-                      </p:childTnLst>
-                    </p:cTn>
-                  </p:par>
-                </p:childTnLst>
-              </p:cTn>
-              <p:prevCondLst>
-                <p:cond evt="onPrev">
-                  <p:tgtEl>
-                    <p:sldTgt/>
-                  </p:tgtEl>
-                </p:cond>
-              </p:prevCondLst>
-              <p:nextCondLst>
-                <p:cond evt="onNext">
-                  <p:tgtEl>
-                    <p:sldTgt/>
-                  </p:tgtEl>
-                </p:cond>
-              </p:nextCondLst>
-            </p:seq>
-          </p:childTnLst>
-        </p:cTn>
-      </p:par>
-    </p:tnLst>
-  </p:timing>
 </p:sld>
 </file>
 
@@ -17713,9 +17458,6 @@
           <a:lstStyle/>
           <a:p>
             <a:pPr indent="0" lvl="0" marL="0" rtl="0" algn="ctr">
-              <a:lnSpc>
-                <a:spcPct val="150000"/>
-              </a:lnSpc>
               <a:spcBef>
                 <a:spcPts val="0"/>
               </a:spcBef>
@@ -17751,8 +17493,8 @@
         </p:nvSpPr>
         <p:spPr>
           <a:xfrm>
-            <a:off x="457200" y="1470527"/>
-            <a:ext cx="8229600" cy="890400"/>
+            <a:off x="457200" y="1470530"/>
+            <a:ext cx="8229600" cy="1402500"/>
           </a:xfrm>
           <a:prstGeom prst="rect">
             <a:avLst/>
@@ -17773,7 +17515,7 @@
                 <a:spcPct val="150000"/>
               </a:lnSpc>
               <a:spcBef>
-                <a:spcPts val="1200"/>
+                <a:spcPts val="0"/>
               </a:spcBef>
               <a:spcAft>
                 <a:spcPts val="0"/>
@@ -17781,18 +17523,18 @@
               <a:buClr>
                 <a:schemeClr val="dk1"/>
               </a:buClr>
-              <a:buSzPts val="1100"/>
+              <a:buSzPts val="3200"/>
               <a:buNone/>
             </a:pPr>
             <a:r>
-              <a:rPr b="1" lang="en-US" sz="2000"/>
-              <a:t>4. No uncertainty output.</a:t>
+              <a:rPr b="1" lang="en-US" sz="2100"/>
+              <a:t>1. Single-surface tools dominate the field.</a:t>
             </a:r>
             <a:r>
-              <a:rPr lang="en-US" sz="2000"/>
-              <a:t> iMES's CCA-based fusion and Asare et al.'s classifiers all return a bare label or SHAP heatmap, never a confidence score.</a:t>
+              <a:rPr lang="en-US" sz="2100"/>
+              <a:t> Conjunctival pallor detection, nail-based anemia/clubbing classifiers, and oral cavity OSCC screeners each work on one body surface only. None combine surfaces.</a:t>
             </a:r>
-            <a:endParaRPr b="1" sz="2100"/>
+            <a:endParaRPr sz="2100"/>
           </a:p>
           <a:p>
             <a:pPr indent="-139700" lvl="0" marL="342900" rtl="0" algn="l">
@@ -17800,7 +17542,7 @@
                 <a:spcPct val="150000"/>
               </a:lnSpc>
               <a:spcBef>
-                <a:spcPts val="1200"/>
+                <a:spcPts val="0"/>
               </a:spcBef>
               <a:spcAft>
                 <a:spcPts val="0"/>
@@ -17831,7 +17573,7 @@
         </p:nvSpPr>
         <p:spPr>
           <a:xfrm>
-            <a:off x="478325" y="2471664"/>
+            <a:off x="478325" y="2944900"/>
             <a:ext cx="8208600" cy="1383000"/>
           </a:xfrm>
           <a:prstGeom prst="rect">
@@ -17853,15 +17595,20 @@
                 <a:spcPct val="150000"/>
               </a:lnSpc>
               <a:spcBef>
+                <a:spcPts val="0"/>
+              </a:spcBef>
+              <a:spcAft>
                 <a:spcPts val="1200"/>
-              </a:spcBef>
-              <a:spcAft>
-                <a:spcPts val="0"/>
-              </a:spcAft>
+              </a:spcAft>
+              <a:buClr>
+                <a:schemeClr val="dk1"/>
+              </a:buClr>
+              <a:buSzPts val="1100"/>
+              <a:buFont typeface="Arial"/>
               <a:buNone/>
             </a:pPr>
             <a:r>
-              <a:rPr b="1" lang="en-US" sz="2000">
+              <a:rPr b="1" lang="en-US" sz="2100">
                 <a:solidFill>
                   <a:schemeClr val="dk1"/>
                 </a:solidFill>
@@ -17870,10 +17617,10 @@
                 <a:cs typeface="Calibri"/>
                 <a:sym typeface="Calibri"/>
               </a:rPr>
-              <a:t>5. Severe class imbalance, unaddressed.</a:t>
+              <a:t>2. No cross-surface fusion.</a:t>
             </a:r>
             <a:r>
-              <a:rPr lang="en-US" sz="2000">
+              <a:rPr lang="en-US" sz="2100">
                 <a:solidFill>
                   <a:schemeClr val="dk1"/>
                 </a:solidFill>
@@ -17882,35 +17629,9 @@
                 <a:cs typeface="Calibri"/>
                 <a:sym typeface="Calibri"/>
               </a:rPr>
-              <a:t> Rabinovici-Cohen et al. (2024) report OSCC accuracy on datasets where positive samples (129) are dwarfed by negatives (700 to 1,400), with no stated imbalance strategy.</a:t>
+              <a:t> Asare et al. (2023) collected fingernail, palm, and conjunctiva images from the same patients but only compared them, never fused them into one model.</a:t>
             </a:r>
-            <a:endParaRPr sz="2000">
-              <a:solidFill>
-                <a:schemeClr val="dk1"/>
-              </a:solidFill>
-              <a:latin typeface="Calibri"/>
-              <a:ea typeface="Calibri"/>
-              <a:cs typeface="Calibri"/>
-              <a:sym typeface="Calibri"/>
-            </a:endParaRPr>
-          </a:p>
-          <a:p>
-            <a:pPr indent="0" lvl="0" marL="0" rtl="0" algn="l">
-              <a:lnSpc>
-                <a:spcPct val="150000"/>
-              </a:lnSpc>
-              <a:spcBef>
-                <a:spcPts val="1200"/>
-              </a:spcBef>
-              <a:spcAft>
-                <a:spcPts val="1200"/>
-              </a:spcAft>
-              <a:buNone/>
-            </a:pPr>
-            <a:r>
-              <a:t/>
-            </a:r>
-            <a:endParaRPr b="1" sz="2100">
+            <a:endParaRPr sz="3200">
               <a:solidFill>
                 <a:schemeClr val="dk1"/>
               </a:solidFill>
@@ -17930,7 +17651,7 @@
         </p:nvSpPr>
         <p:spPr>
           <a:xfrm>
-            <a:off x="479662" y="3944266"/>
+            <a:off x="492750" y="4428875"/>
             <a:ext cx="8229600" cy="1311000"/>
           </a:xfrm>
           <a:prstGeom prst="rect">
@@ -17952,15 +17673,20 @@
                 <a:spcPct val="150000"/>
               </a:lnSpc>
               <a:spcBef>
+                <a:spcPts val="0"/>
+              </a:spcBef>
+              <a:spcAft>
                 <a:spcPts val="1200"/>
-              </a:spcBef>
-              <a:spcAft>
-                <a:spcPts val="0"/>
-              </a:spcAft>
+              </a:spcAft>
+              <a:buClr>
+                <a:schemeClr val="dk1"/>
+              </a:buClr>
+              <a:buSzPts val="1100"/>
+              <a:buFont typeface="Arial"/>
               <a:buNone/>
             </a:pPr>
             <a:r>
-              <a:rPr b="1" lang="en-US" sz="2000">
+              <a:rPr b="1" lang="en-US" sz="2100">
                 <a:solidFill>
                   <a:schemeClr val="dk1"/>
                 </a:solidFill>
@@ -17969,10 +17695,10 @@
                 <a:cs typeface="Calibri"/>
                 <a:sym typeface="Calibri"/>
               </a:rPr>
-              <a:t>6. No missing-modality robustness.</a:t>
+              <a:t>3. Fusion exists, but needs dedicated hardware.</a:t>
             </a:r>
             <a:r>
-              <a:rPr lang="en-US" sz="2000">
+              <a:rPr lang="en-US" sz="2100">
                 <a:solidFill>
                   <a:schemeClr val="dk1"/>
                 </a:solidFill>
@@ -17981,35 +17707,9 @@
                 <a:cs typeface="Calibri"/>
                 <a:sym typeface="Calibri"/>
               </a:rPr>
-              <a:t> Every reviewed system (Asare et al., iMES, single-surface classifiers) assumes all inputs are always present and well-captured.</a:t>
+              <a:t> iMES (Ye et al., 2026) fuses face, tongue, and pulse for 9 diseases at 92%+ accuracy, but requires a purpose-built capture device, not a smartphone.</a:t>
             </a:r>
-            <a:endParaRPr sz="2000">
-              <a:solidFill>
-                <a:schemeClr val="dk1"/>
-              </a:solidFill>
-              <a:latin typeface="Calibri"/>
-              <a:ea typeface="Calibri"/>
-              <a:cs typeface="Calibri"/>
-              <a:sym typeface="Calibri"/>
-            </a:endParaRPr>
-          </a:p>
-          <a:p>
-            <a:pPr indent="0" lvl="0" marL="0" rtl="0" algn="l">
-              <a:lnSpc>
-                <a:spcPct val="150000"/>
-              </a:lnSpc>
-              <a:spcBef>
-                <a:spcPts val="1200"/>
-              </a:spcBef>
-              <a:spcAft>
-                <a:spcPts val="1200"/>
-              </a:spcAft>
-              <a:buNone/>
-            </a:pPr>
-            <a:r>
-              <a:t/>
-            </a:r>
-            <a:endParaRPr b="1" sz="2100">
+            <a:endParaRPr sz="3200">
               <a:solidFill>
                 <a:schemeClr val="dk1"/>
               </a:solidFill>
@@ -18245,6 +17945,556 @@
         </p:nvSpPr>
         <p:spPr>
           <a:xfrm>
+            <a:off x="457200" y="274638"/>
+            <a:ext cx="8229600" cy="1143000"/>
+          </a:xfrm>
+          <a:prstGeom prst="rect">
+            <a:avLst/>
+          </a:prstGeom>
+          <a:noFill/>
+          <a:ln>
+            <a:noFill/>
+          </a:ln>
+        </p:spPr>
+        <p:txBody>
+          <a:bodyPr anchorCtr="0" anchor="ctr" bIns="45700" lIns="91425" spcFirstLastPara="1" rIns="91425" wrap="square" tIns="45700">
+            <a:noAutofit/>
+          </a:bodyPr>
+          <a:lstStyle/>
+          <a:p>
+            <a:pPr indent="0" lvl="0" marL="0" rtl="0" algn="ctr">
+              <a:lnSpc>
+                <a:spcPct val="150000"/>
+              </a:lnSpc>
+              <a:spcBef>
+                <a:spcPts val="0"/>
+              </a:spcBef>
+              <a:spcAft>
+                <a:spcPts val="0"/>
+              </a:spcAft>
+              <a:buSzPts val="1400"/>
+              <a:buNone/>
+            </a:pPr>
+            <a:r>
+              <a:rPr b="1" lang="en-US" sz="4000">
+                <a:solidFill>
+                  <a:srgbClr val="0B3D59"/>
+                </a:solidFill>
+              </a:rPr>
+              <a:t>Gap Analysis</a:t>
+            </a:r>
+            <a:endParaRPr b="1" sz="4000">
+              <a:solidFill>
+                <a:srgbClr val="0B3D59"/>
+              </a:solidFill>
+            </a:endParaRPr>
+          </a:p>
+        </p:txBody>
+      </p:sp>
+      <p:sp>
+        <p:nvSpPr>
+          <p:cNvPr id="164" name="Google Shape;164;p24"/>
+          <p:cNvSpPr txBox="1"/>
+          <p:nvPr>
+            <p:ph idx="1" type="body"/>
+          </p:nvPr>
+        </p:nvSpPr>
+        <p:spPr>
+          <a:xfrm>
+            <a:off x="457200" y="1470527"/>
+            <a:ext cx="8229600" cy="890400"/>
+          </a:xfrm>
+          <a:prstGeom prst="rect">
+            <a:avLst/>
+          </a:prstGeom>
+          <a:noFill/>
+          <a:ln>
+            <a:noFill/>
+          </a:ln>
+        </p:spPr>
+        <p:txBody>
+          <a:bodyPr anchorCtr="0" anchor="t" bIns="45700" lIns="91425" spcFirstLastPara="1" rIns="91425" wrap="square" tIns="45700">
+            <a:noAutofit/>
+          </a:bodyPr>
+          <a:lstStyle/>
+          <a:p>
+            <a:pPr indent="0" lvl="0" marL="0" rtl="0" algn="just">
+              <a:lnSpc>
+                <a:spcPct val="150000"/>
+              </a:lnSpc>
+              <a:spcBef>
+                <a:spcPts val="1200"/>
+              </a:spcBef>
+              <a:spcAft>
+                <a:spcPts val="0"/>
+              </a:spcAft>
+              <a:buClr>
+                <a:schemeClr val="dk1"/>
+              </a:buClr>
+              <a:buSzPts val="1100"/>
+              <a:buNone/>
+            </a:pPr>
+            <a:r>
+              <a:rPr b="1" lang="en-US" sz="2000"/>
+              <a:t>4. No uncertainty output.</a:t>
+            </a:r>
+            <a:r>
+              <a:rPr lang="en-US" sz="2000"/>
+              <a:t> iMES's CCA-based fusion and Asare et al.'s classifiers all return a bare label or SHAP heatmap, never a confidence score.</a:t>
+            </a:r>
+            <a:endParaRPr b="1" sz="2100"/>
+          </a:p>
+          <a:p>
+            <a:pPr indent="-139700" lvl="0" marL="342900" rtl="0" algn="l">
+              <a:lnSpc>
+                <a:spcPct val="150000"/>
+              </a:lnSpc>
+              <a:spcBef>
+                <a:spcPts val="1200"/>
+              </a:spcBef>
+              <a:spcAft>
+                <a:spcPts val="0"/>
+              </a:spcAft>
+              <a:buClr>
+                <a:schemeClr val="dk1"/>
+              </a:buClr>
+              <a:buSzPts val="3200"/>
+              <a:buNone/>
+            </a:pPr>
+            <a:r>
+              <a:t/>
+            </a:r>
+            <a:endParaRPr sz="1200">
+              <a:latin typeface="Arial"/>
+              <a:ea typeface="Arial"/>
+              <a:cs typeface="Arial"/>
+              <a:sym typeface="Arial"/>
+            </a:endParaRPr>
+          </a:p>
+        </p:txBody>
+      </p:sp>
+      <p:sp>
+        <p:nvSpPr>
+          <p:cNvPr id="165" name="Google Shape;165;p24"/>
+          <p:cNvSpPr txBox="1"/>
+          <p:nvPr/>
+        </p:nvSpPr>
+        <p:spPr>
+          <a:xfrm>
+            <a:off x="478325" y="2471664"/>
+            <a:ext cx="8208600" cy="1383000"/>
+          </a:xfrm>
+          <a:prstGeom prst="rect">
+            <a:avLst/>
+          </a:prstGeom>
+          <a:noFill/>
+          <a:ln>
+            <a:noFill/>
+          </a:ln>
+        </p:spPr>
+        <p:txBody>
+          <a:bodyPr anchorCtr="0" anchor="t" bIns="91425" lIns="91425" spcFirstLastPara="1" rIns="91425" wrap="square" tIns="91425">
+            <a:noAutofit/>
+          </a:bodyPr>
+          <a:lstStyle/>
+          <a:p>
+            <a:pPr indent="0" lvl="0" marL="0" rtl="0" algn="just">
+              <a:lnSpc>
+                <a:spcPct val="150000"/>
+              </a:lnSpc>
+              <a:spcBef>
+                <a:spcPts val="1200"/>
+              </a:spcBef>
+              <a:spcAft>
+                <a:spcPts val="0"/>
+              </a:spcAft>
+              <a:buNone/>
+            </a:pPr>
+            <a:r>
+              <a:rPr b="1" lang="en-US" sz="2000">
+                <a:solidFill>
+                  <a:schemeClr val="dk1"/>
+                </a:solidFill>
+                <a:latin typeface="Calibri"/>
+                <a:ea typeface="Calibri"/>
+                <a:cs typeface="Calibri"/>
+                <a:sym typeface="Calibri"/>
+              </a:rPr>
+              <a:t>5. Severe class imbalance, unaddressed.</a:t>
+            </a:r>
+            <a:r>
+              <a:rPr lang="en-US" sz="2000">
+                <a:solidFill>
+                  <a:schemeClr val="dk1"/>
+                </a:solidFill>
+                <a:latin typeface="Calibri"/>
+                <a:ea typeface="Calibri"/>
+                <a:cs typeface="Calibri"/>
+                <a:sym typeface="Calibri"/>
+              </a:rPr>
+              <a:t> Rabinovici-Cohen et al. (2024) report OSCC accuracy on datasets where positive samples (540) are dwarfed by negatives (1,500), with no stated imbalance strategy.</a:t>
+            </a:r>
+            <a:endParaRPr sz="2000">
+              <a:solidFill>
+                <a:schemeClr val="dk1"/>
+              </a:solidFill>
+              <a:latin typeface="Calibri"/>
+              <a:ea typeface="Calibri"/>
+              <a:cs typeface="Calibri"/>
+              <a:sym typeface="Calibri"/>
+            </a:endParaRPr>
+          </a:p>
+          <a:p>
+            <a:pPr indent="0" lvl="0" marL="0" rtl="0" algn="l">
+              <a:lnSpc>
+                <a:spcPct val="150000"/>
+              </a:lnSpc>
+              <a:spcBef>
+                <a:spcPts val="1200"/>
+              </a:spcBef>
+              <a:spcAft>
+                <a:spcPts val="1200"/>
+              </a:spcAft>
+              <a:buNone/>
+            </a:pPr>
+            <a:r>
+              <a:t/>
+            </a:r>
+            <a:endParaRPr b="1" sz="2100">
+              <a:solidFill>
+                <a:schemeClr val="dk1"/>
+              </a:solidFill>
+              <a:latin typeface="Calibri"/>
+              <a:ea typeface="Calibri"/>
+              <a:cs typeface="Calibri"/>
+              <a:sym typeface="Calibri"/>
+            </a:endParaRPr>
+          </a:p>
+        </p:txBody>
+      </p:sp>
+      <p:sp>
+        <p:nvSpPr>
+          <p:cNvPr id="166" name="Google Shape;166;p24"/>
+          <p:cNvSpPr txBox="1"/>
+          <p:nvPr/>
+        </p:nvSpPr>
+        <p:spPr>
+          <a:xfrm>
+            <a:off x="479662" y="3944266"/>
+            <a:ext cx="8229600" cy="1311000"/>
+          </a:xfrm>
+          <a:prstGeom prst="rect">
+            <a:avLst/>
+          </a:prstGeom>
+          <a:noFill/>
+          <a:ln>
+            <a:noFill/>
+          </a:ln>
+        </p:spPr>
+        <p:txBody>
+          <a:bodyPr anchorCtr="0" anchor="t" bIns="91425" lIns="91425" spcFirstLastPara="1" rIns="91425" wrap="square" tIns="91425">
+            <a:noAutofit/>
+          </a:bodyPr>
+          <a:lstStyle/>
+          <a:p>
+            <a:pPr indent="0" lvl="0" marL="0" rtl="0" algn="just">
+              <a:lnSpc>
+                <a:spcPct val="150000"/>
+              </a:lnSpc>
+              <a:spcBef>
+                <a:spcPts val="1200"/>
+              </a:spcBef>
+              <a:spcAft>
+                <a:spcPts val="0"/>
+              </a:spcAft>
+              <a:buNone/>
+            </a:pPr>
+            <a:r>
+              <a:rPr b="1" lang="en-US" sz="2000">
+                <a:solidFill>
+                  <a:schemeClr val="dk1"/>
+                </a:solidFill>
+                <a:latin typeface="Calibri"/>
+                <a:ea typeface="Calibri"/>
+                <a:cs typeface="Calibri"/>
+                <a:sym typeface="Calibri"/>
+              </a:rPr>
+              <a:t>6. No missing-modality robustness.</a:t>
+            </a:r>
+            <a:r>
+              <a:rPr lang="en-US" sz="2000">
+                <a:solidFill>
+                  <a:schemeClr val="dk1"/>
+                </a:solidFill>
+                <a:latin typeface="Calibri"/>
+                <a:ea typeface="Calibri"/>
+                <a:cs typeface="Calibri"/>
+                <a:sym typeface="Calibri"/>
+              </a:rPr>
+              <a:t> Every reviewed system (Asare et al., iMES, single-surface classifiers) assumes all inputs are always present and well-captured.</a:t>
+            </a:r>
+            <a:endParaRPr sz="2000">
+              <a:solidFill>
+                <a:schemeClr val="dk1"/>
+              </a:solidFill>
+              <a:latin typeface="Calibri"/>
+              <a:ea typeface="Calibri"/>
+              <a:cs typeface="Calibri"/>
+              <a:sym typeface="Calibri"/>
+            </a:endParaRPr>
+          </a:p>
+          <a:p>
+            <a:pPr indent="0" lvl="0" marL="0" rtl="0" algn="l">
+              <a:lnSpc>
+                <a:spcPct val="150000"/>
+              </a:lnSpc>
+              <a:spcBef>
+                <a:spcPts val="1200"/>
+              </a:spcBef>
+              <a:spcAft>
+                <a:spcPts val="1200"/>
+              </a:spcAft>
+              <a:buNone/>
+            </a:pPr>
+            <a:r>
+              <a:t/>
+            </a:r>
+            <a:endParaRPr b="1" sz="2100">
+              <a:solidFill>
+                <a:schemeClr val="dk1"/>
+              </a:solidFill>
+              <a:latin typeface="Calibri"/>
+              <a:ea typeface="Calibri"/>
+              <a:cs typeface="Calibri"/>
+              <a:sym typeface="Calibri"/>
+            </a:endParaRPr>
+          </a:p>
+        </p:txBody>
+      </p:sp>
+    </p:spTree>
+  </p:cSld>
+  <p:clrMapOvr>
+    <a:masterClrMapping/>
+  </p:clrMapOvr>
+  <p:timing>
+    <p:tnLst>
+      <p:par>
+        <p:cTn dur="indefinite" nodeType="tmRoot" restart="never">
+          <p:childTnLst>
+            <p:seq concurrent="1" nextAc="seek">
+              <p:cTn dur="indefinite" id="2" nodeType="mainSeq">
+                <p:childTnLst>
+                  <p:par>
+                    <p:cTn fill="hold">
+                      <p:stCondLst>
+                        <p:cond delay="indefinite"/>
+                      </p:stCondLst>
+                      <p:childTnLst>
+                        <p:par>
+                          <p:cTn fill="hold">
+                            <p:stCondLst>
+                              <p:cond delay="0"/>
+                            </p:stCondLst>
+                            <p:childTnLst>
+                              <p:par>
+                                <p:cTn fill="hold" nodeType="clickEffect" presetClass="entr" presetID="10" presetSubtype="0">
+                                  <p:stCondLst>
+                                    <p:cond delay="0"/>
+                                  </p:stCondLst>
+                                  <p:childTnLst>
+                                    <p:set>
+                                      <p:cBhvr>
+                                        <p:cTn dur="1" fill="hold">
+                                          <p:stCondLst>
+                                            <p:cond delay="0"/>
+                                          </p:stCondLst>
+                                        </p:cTn>
+                                        <p:tgtEl>
+                                          <p:spTgt spid="164"/>
+                                        </p:tgtEl>
+                                        <p:attrNameLst>
+                                          <p:attrName>style.visibility</p:attrName>
+                                        </p:attrNameLst>
+                                      </p:cBhvr>
+                                      <p:to>
+                                        <p:strVal val="visible"/>
+                                      </p:to>
+                                    </p:set>
+                                    <p:animEffect filter="fade" transition="in">
+                                      <p:cBhvr>
+                                        <p:cTn dur="1000"/>
+                                        <p:tgtEl>
+                                          <p:spTgt spid="164"/>
+                                        </p:tgtEl>
+                                      </p:cBhvr>
+                                    </p:animEffect>
+                                  </p:childTnLst>
+                                </p:cTn>
+                              </p:par>
+                            </p:childTnLst>
+                          </p:cTn>
+                        </p:par>
+                      </p:childTnLst>
+                    </p:cTn>
+                  </p:par>
+                  <p:par>
+                    <p:cTn fill="hold">
+                      <p:stCondLst>
+                        <p:cond delay="indefinite"/>
+                      </p:stCondLst>
+                      <p:childTnLst>
+                        <p:par>
+                          <p:cTn fill="hold">
+                            <p:stCondLst>
+                              <p:cond delay="0"/>
+                            </p:stCondLst>
+                            <p:childTnLst>
+                              <p:par>
+                                <p:cTn fill="hold" nodeType="clickEffect" presetClass="entr" presetID="10" presetSubtype="0">
+                                  <p:stCondLst>
+                                    <p:cond delay="0"/>
+                                  </p:stCondLst>
+                                  <p:childTnLst>
+                                    <p:set>
+                                      <p:cBhvr>
+                                        <p:cTn dur="1" fill="hold">
+                                          <p:stCondLst>
+                                            <p:cond delay="0"/>
+                                          </p:stCondLst>
+                                        </p:cTn>
+                                        <p:tgtEl>
+                                          <p:spTgt spid="165"/>
+                                        </p:tgtEl>
+                                        <p:attrNameLst>
+                                          <p:attrName>style.visibility</p:attrName>
+                                        </p:attrNameLst>
+                                      </p:cBhvr>
+                                      <p:to>
+                                        <p:strVal val="visible"/>
+                                      </p:to>
+                                    </p:set>
+                                    <p:animEffect filter="fade" transition="in">
+                                      <p:cBhvr>
+                                        <p:cTn dur="1000"/>
+                                        <p:tgtEl>
+                                          <p:spTgt spid="165"/>
+                                        </p:tgtEl>
+                                      </p:cBhvr>
+                                    </p:animEffect>
+                                  </p:childTnLst>
+                                </p:cTn>
+                              </p:par>
+                            </p:childTnLst>
+                          </p:cTn>
+                        </p:par>
+                      </p:childTnLst>
+                    </p:cTn>
+                  </p:par>
+                  <p:par>
+                    <p:cTn fill="hold">
+                      <p:stCondLst>
+                        <p:cond delay="indefinite"/>
+                      </p:stCondLst>
+                      <p:childTnLst>
+                        <p:par>
+                          <p:cTn fill="hold">
+                            <p:stCondLst>
+                              <p:cond delay="0"/>
+                            </p:stCondLst>
+                            <p:childTnLst>
+                              <p:par>
+                                <p:cTn fill="hold" nodeType="clickEffect" presetClass="entr" presetID="10" presetSubtype="0">
+                                  <p:stCondLst>
+                                    <p:cond delay="0"/>
+                                  </p:stCondLst>
+                                  <p:childTnLst>
+                                    <p:set>
+                                      <p:cBhvr>
+                                        <p:cTn dur="1" fill="hold">
+                                          <p:stCondLst>
+                                            <p:cond delay="0"/>
+                                          </p:stCondLst>
+                                        </p:cTn>
+                                        <p:tgtEl>
+                                          <p:spTgt spid="166"/>
+                                        </p:tgtEl>
+                                        <p:attrNameLst>
+                                          <p:attrName>style.visibility</p:attrName>
+                                        </p:attrNameLst>
+                                      </p:cBhvr>
+                                      <p:to>
+                                        <p:strVal val="visible"/>
+                                      </p:to>
+                                    </p:set>
+                                    <p:animEffect filter="fade" transition="in">
+                                      <p:cBhvr>
+                                        <p:cTn dur="1000"/>
+                                        <p:tgtEl>
+                                          <p:spTgt spid="166"/>
+                                        </p:tgtEl>
+                                      </p:cBhvr>
+                                    </p:animEffect>
+                                  </p:childTnLst>
+                                </p:cTn>
+                              </p:par>
+                            </p:childTnLst>
+                          </p:cTn>
+                        </p:par>
+                      </p:childTnLst>
+                    </p:cTn>
+                  </p:par>
+                </p:childTnLst>
+              </p:cTn>
+              <p:prevCondLst>
+                <p:cond evt="onPrev">
+                  <p:tgtEl>
+                    <p:sldTgt/>
+                  </p:tgtEl>
+                </p:cond>
+              </p:prevCondLst>
+              <p:nextCondLst>
+                <p:cond evt="onNext">
+                  <p:tgtEl>
+                    <p:sldTgt/>
+                  </p:tgtEl>
+                </p:cond>
+              </p:nextCondLst>
+            </p:seq>
+          </p:childTnLst>
+        </p:cTn>
+      </p:par>
+    </p:tnLst>
+  </p:timing>
+</p:sld>
+</file>
+
+<file path=ppt/slides/slide13.xml><?xml version="1.0" encoding="utf-8"?>
+<p:sld xmlns:a="http://schemas.openxmlformats.org/drawingml/2006/main" xmlns:r="http://schemas.openxmlformats.org/officeDocument/2006/relationships" xmlns:mc="http://schemas.openxmlformats.org/markup-compatibility/2006" xmlns:mv="urn:schemas-microsoft-com:mac:vml" xmlns:p="http://schemas.openxmlformats.org/presentationml/2006/main" xmlns:c="http://schemas.openxmlformats.org/drawingml/2006/chart" xmlns:dgm="http://schemas.openxmlformats.org/drawingml/2006/diagram" xmlns:o="urn:schemas-microsoft-com:office:office" xmlns:v="urn:schemas-microsoft-com:vml" xmlns:pvml="urn:schemas-microsoft-com:office:powerpoint" xmlns:com="http://schemas.openxmlformats.org/drawingml/2006/compatibility" xmlns:p14="http://schemas.microsoft.com/office/powerpoint/2010/main" xmlns:p15="http://schemas.microsoft.com/office/powerpoint/2012/main" xmlns:ahyp="http://schemas.microsoft.com/office/drawing/2018/hyperlinkcolor">
+  <p:cSld>
+    <p:spTree>
+      <p:nvGrpSpPr>
+        <p:cNvPr id="170" name="Shape 170"/>
+        <p:cNvGrpSpPr/>
+        <p:nvPr/>
+      </p:nvGrpSpPr>
+      <p:grpSpPr>
+        <a:xfrm>
+          <a:off x="0" y="0"/>
+          <a:ext cx="0" cy="0"/>
+          <a:chOff x="0" y="0"/>
+          <a:chExt cx="0" cy="0"/>
+        </a:xfrm>
+      </p:grpSpPr>
+      <p:sp>
+        <p:nvSpPr>
+          <p:cNvPr id="171" name="Google Shape;171;p25"/>
+          <p:cNvSpPr txBox="1"/>
+          <p:nvPr>
+            <p:ph type="title"/>
+          </p:nvPr>
+        </p:nvSpPr>
+        <p:spPr>
+          <a:xfrm>
             <a:off x="722313" y="4406900"/>
             <a:ext cx="7772400" cy="1362075"/>
           </a:xfrm>
@@ -18293,7 +18543,7 @@
       </p:sp>
       <p:sp>
         <p:nvSpPr>
-          <p:cNvPr id="164" name="Google Shape;164;p24"/>
+          <p:cNvPr id="172" name="Google Shape;172;p25"/>
           <p:cNvSpPr txBox="1"/>
           <p:nvPr>
             <p:ph idx="1" type="body"/>
@@ -18350,12 +18600,12 @@
 </p:sld>
 </file>
 
-<file path=ppt/slides/slide13.xml><?xml version="1.0" encoding="utf-8"?>
+<file path=ppt/slides/slide14.xml><?xml version="1.0" encoding="utf-8"?>
 <p:sld xmlns:a="http://schemas.openxmlformats.org/drawingml/2006/main" xmlns:r="http://schemas.openxmlformats.org/officeDocument/2006/relationships" xmlns:mc="http://schemas.openxmlformats.org/markup-compatibility/2006" xmlns:mv="urn:schemas-microsoft-com:mac:vml" xmlns:p="http://schemas.openxmlformats.org/presentationml/2006/main" xmlns:c="http://schemas.openxmlformats.org/drawingml/2006/chart" xmlns:dgm="http://schemas.openxmlformats.org/drawingml/2006/diagram" xmlns:o="urn:schemas-microsoft-com:office:office" xmlns:v="urn:schemas-microsoft-com:vml" xmlns:pvml="urn:schemas-microsoft-com:office:powerpoint" xmlns:com="http://schemas.openxmlformats.org/drawingml/2006/compatibility" xmlns:p14="http://schemas.microsoft.com/office/powerpoint/2010/main" xmlns:p15="http://schemas.microsoft.com/office/powerpoint/2012/main" xmlns:ahyp="http://schemas.microsoft.com/office/drawing/2018/hyperlinkcolor">
   <p:cSld>
     <p:spTree>
       <p:nvGrpSpPr>
-        <p:cNvPr id="168" name="Shape 168"/>
+        <p:cNvPr id="176" name="Shape 176"/>
         <p:cNvGrpSpPr/>
         <p:nvPr/>
       </p:nvGrpSpPr>
@@ -18369,7 +18619,7 @@
       </p:grpSpPr>
       <p:sp>
         <p:nvSpPr>
-          <p:cNvPr id="169" name="Google Shape;169;p25"/>
+          <p:cNvPr id="177" name="Google Shape;177;p26"/>
           <p:cNvSpPr txBox="1"/>
           <p:nvPr>
             <p:ph type="title"/>
@@ -18422,7 +18672,7 @@
       </p:sp>
       <p:sp>
         <p:nvSpPr>
-          <p:cNvPr id="170" name="Google Shape;170;p25"/>
+          <p:cNvPr id="178" name="Google Shape;178;p26"/>
           <p:cNvSpPr txBox="1"/>
           <p:nvPr/>
         </p:nvSpPr>
@@ -18486,12 +18736,12 @@
 </p:sld>
 </file>
 
-<file path=ppt/slides/slide14.xml><?xml version="1.0" encoding="utf-8"?>
+<file path=ppt/slides/slide15.xml><?xml version="1.0" encoding="utf-8"?>
 <p:sld xmlns:a="http://schemas.openxmlformats.org/drawingml/2006/main" xmlns:r="http://schemas.openxmlformats.org/officeDocument/2006/relationships" xmlns:mc="http://schemas.openxmlformats.org/markup-compatibility/2006" xmlns:mv="urn:schemas-microsoft-com:mac:vml" xmlns:p="http://schemas.openxmlformats.org/presentationml/2006/main" xmlns:c="http://schemas.openxmlformats.org/drawingml/2006/chart" xmlns:dgm="http://schemas.openxmlformats.org/drawingml/2006/diagram" xmlns:o="urn:schemas-microsoft-com:office:office" xmlns:v="urn:schemas-microsoft-com:vml" xmlns:pvml="urn:schemas-microsoft-com:office:powerpoint" xmlns:com="http://schemas.openxmlformats.org/drawingml/2006/compatibility" xmlns:p14="http://schemas.microsoft.com/office/powerpoint/2010/main" xmlns:p15="http://schemas.microsoft.com/office/powerpoint/2012/main" xmlns:ahyp="http://schemas.microsoft.com/office/drawing/2018/hyperlinkcolor">
   <p:cSld>
     <p:spTree>
       <p:nvGrpSpPr>
-        <p:cNvPr id="174" name="Shape 174"/>
+        <p:cNvPr id="182" name="Shape 182"/>
         <p:cNvGrpSpPr/>
         <p:nvPr/>
       </p:nvGrpSpPr>
@@ -18505,7 +18755,7 @@
       </p:grpSpPr>
       <p:sp>
         <p:nvSpPr>
-          <p:cNvPr id="175" name="Google Shape;175;p26"/>
+          <p:cNvPr id="183" name="Google Shape;183;p27"/>
           <p:cNvSpPr txBox="1"/>
           <p:nvPr>
             <p:ph type="title"/>
@@ -18561,7 +18811,7 @@
       </p:sp>
       <p:sp>
         <p:nvSpPr>
-          <p:cNvPr id="176" name="Google Shape;176;p26"/>
+          <p:cNvPr id="184" name="Google Shape;184;p27"/>
           <p:cNvSpPr txBox="1"/>
           <p:nvPr>
             <p:ph idx="1" type="body"/>
@@ -18618,12 +18868,12 @@
 </p:sld>
 </file>
 
-<file path=ppt/slides/slide15.xml><?xml version="1.0" encoding="utf-8"?>
+<file path=ppt/slides/slide16.xml><?xml version="1.0" encoding="utf-8"?>
 <p:sld xmlns:a="http://schemas.openxmlformats.org/drawingml/2006/main" xmlns:r="http://schemas.openxmlformats.org/officeDocument/2006/relationships" xmlns:mc="http://schemas.openxmlformats.org/markup-compatibility/2006" xmlns:mv="urn:schemas-microsoft-com:mac:vml" xmlns:p="http://schemas.openxmlformats.org/presentationml/2006/main" xmlns:c="http://schemas.openxmlformats.org/drawingml/2006/chart" xmlns:dgm="http://schemas.openxmlformats.org/drawingml/2006/diagram" xmlns:o="urn:schemas-microsoft-com:office:office" xmlns:v="urn:schemas-microsoft-com:vml" xmlns:pvml="urn:schemas-microsoft-com:office:powerpoint" xmlns:com="http://schemas.openxmlformats.org/drawingml/2006/compatibility" xmlns:p14="http://schemas.microsoft.com/office/powerpoint/2010/main" xmlns:p15="http://schemas.microsoft.com/office/powerpoint/2012/main" xmlns:ahyp="http://schemas.microsoft.com/office/drawing/2018/hyperlinkcolor">
   <p:cSld>
     <p:spTree>
       <p:nvGrpSpPr>
-        <p:cNvPr id="180" name="Shape 180"/>
+        <p:cNvPr id="188" name="Shape 188"/>
         <p:cNvGrpSpPr/>
         <p:nvPr/>
       </p:nvGrpSpPr>
@@ -18637,7 +18887,7 @@
       </p:grpSpPr>
       <p:sp>
         <p:nvSpPr>
-          <p:cNvPr id="181" name="Google Shape;181;p27"/>
+          <p:cNvPr id="189" name="Google Shape;189;p28"/>
           <p:cNvSpPr txBox="1"/>
           <p:nvPr>
             <p:ph type="title"/>
@@ -18694,7 +18944,7 @@
       </p:sp>
       <p:sp>
         <p:nvSpPr>
-          <p:cNvPr id="182" name="Google Shape;182;p27"/>
+          <p:cNvPr id="190" name="Google Shape;190;p28"/>
           <p:cNvSpPr txBox="1"/>
           <p:nvPr>
             <p:ph idx="1" type="body"/>
@@ -18734,7 +18984,15 @@
             </a:pPr>
             <a:r>
               <a:rPr lang="en-US" sz="2000"/>
-              <a:t>GLANCE captures five smartphone photographs, one per body surface: oral cavity, fingernails, conjunctiva, tongue, and palm.</a:t>
+              <a:t>GLANCE captures </a:t>
+            </a:r>
+            <a:r>
+              <a:rPr b="1" lang="en-US" sz="2000"/>
+              <a:t>five smartphone photographs</a:t>
+            </a:r>
+            <a:r>
+              <a:rPr lang="en-US" sz="2000"/>
+              <a:t>, one per body surface: oral cavity, fingernails, conjunctiva, tongue, and palm.</a:t>
             </a:r>
             <a:endParaRPr sz="2000"/>
           </a:p>
@@ -18742,7 +19000,7 @@
       </p:sp>
       <p:sp>
         <p:nvSpPr>
-          <p:cNvPr id="183" name="Google Shape;183;p27"/>
+          <p:cNvPr id="191" name="Google Shape;191;p28"/>
           <p:cNvSpPr txBox="1"/>
           <p:nvPr/>
         </p:nvSpPr>
@@ -18791,7 +19049,55 @@
                 <a:cs typeface="Calibri"/>
                 <a:sym typeface="Calibri"/>
               </a:rPr>
-              <a:t>Each surface is processed by its own ViT-B/16 encoder. A custom cross-modal attention fusion transformer combines the five encoder outputs into one joint assessment.</a:t>
+              <a:t>Each surface is processed by its own </a:t>
+            </a:r>
+            <a:r>
+              <a:rPr b="1" lang="en-US" sz="2000">
+                <a:solidFill>
+                  <a:schemeClr val="dk1"/>
+                </a:solidFill>
+                <a:latin typeface="Calibri"/>
+                <a:ea typeface="Calibri"/>
+                <a:cs typeface="Calibri"/>
+                <a:sym typeface="Calibri"/>
+              </a:rPr>
+              <a:t>ViT-B/16</a:t>
+            </a:r>
+            <a:r>
+              <a:rPr lang="en-US" sz="2000">
+                <a:solidFill>
+                  <a:schemeClr val="dk1"/>
+                </a:solidFill>
+                <a:latin typeface="Calibri"/>
+                <a:ea typeface="Calibri"/>
+                <a:cs typeface="Calibri"/>
+                <a:sym typeface="Calibri"/>
+              </a:rPr>
+              <a:t> encoder. A custom </a:t>
+            </a:r>
+            <a:r>
+              <a:rPr b="1" lang="en-US" sz="2000">
+                <a:solidFill>
+                  <a:schemeClr val="dk1"/>
+                </a:solidFill>
+                <a:latin typeface="Calibri"/>
+                <a:ea typeface="Calibri"/>
+                <a:cs typeface="Calibri"/>
+                <a:sym typeface="Calibri"/>
+              </a:rPr>
+              <a:t>cross-modal attention fusion transformer</a:t>
+            </a:r>
+            <a:r>
+              <a:rPr lang="en-US" sz="2000">
+                <a:solidFill>
+                  <a:schemeClr val="dk1"/>
+                </a:solidFill>
+                <a:latin typeface="Calibri"/>
+                <a:ea typeface="Calibri"/>
+                <a:cs typeface="Calibri"/>
+                <a:sym typeface="Calibri"/>
+              </a:rPr>
+              <a:t> combines the five encoder outputs into one joint assessment.</a:t>
             </a:r>
             <a:endParaRPr sz="2000">
               <a:solidFill>
@@ -18830,7 +19136,7 @@
       </p:sp>
       <p:sp>
         <p:nvSpPr>
-          <p:cNvPr id="184" name="Google Shape;184;p27"/>
+          <p:cNvPr id="192" name="Google Shape;192;p28"/>
           <p:cNvSpPr txBox="1"/>
           <p:nvPr/>
         </p:nvSpPr>
@@ -18879,7 +19185,79 @@
                 <a:cs typeface="Calibri"/>
                 <a:sym typeface="Calibri"/>
               </a:rPr>
-              <a:t>The system adds three things current approaches lack: a confidence score via Monte Carlo Dropout, an attention-based visual explanation of what drove the result, and robustness when a surface image is missing or low quality.</a:t>
+              <a:t>The system adds three things current approaches lack: a </a:t>
+            </a:r>
+            <a:r>
+              <a:rPr b="1" lang="en-US" sz="2000">
+                <a:solidFill>
+                  <a:schemeClr val="dk1"/>
+                </a:solidFill>
+                <a:latin typeface="Calibri"/>
+                <a:ea typeface="Calibri"/>
+                <a:cs typeface="Calibri"/>
+                <a:sym typeface="Calibri"/>
+              </a:rPr>
+              <a:t>confidence score</a:t>
+            </a:r>
+            <a:r>
+              <a:rPr lang="en-US" sz="2000">
+                <a:solidFill>
+                  <a:schemeClr val="dk1"/>
+                </a:solidFill>
+                <a:latin typeface="Calibri"/>
+                <a:ea typeface="Calibri"/>
+                <a:cs typeface="Calibri"/>
+                <a:sym typeface="Calibri"/>
+              </a:rPr>
+              <a:t> via Monte Carlo Dropout, an attention-based</a:t>
+            </a:r>
+            <a:r>
+              <a:rPr b="1" lang="en-US" sz="2000">
+                <a:solidFill>
+                  <a:schemeClr val="dk1"/>
+                </a:solidFill>
+                <a:latin typeface="Calibri"/>
+                <a:ea typeface="Calibri"/>
+                <a:cs typeface="Calibri"/>
+                <a:sym typeface="Calibri"/>
+              </a:rPr>
+              <a:t> visual explanation</a:t>
+            </a:r>
+            <a:r>
+              <a:rPr lang="en-US" sz="2000">
+                <a:solidFill>
+                  <a:schemeClr val="dk1"/>
+                </a:solidFill>
+                <a:latin typeface="Calibri"/>
+                <a:ea typeface="Calibri"/>
+                <a:cs typeface="Calibri"/>
+                <a:sym typeface="Calibri"/>
+              </a:rPr>
+              <a:t> of what drove the result, and robustness when a surface image is </a:t>
+            </a:r>
+            <a:r>
+              <a:rPr b="1" lang="en-US" sz="2000">
+                <a:solidFill>
+                  <a:schemeClr val="dk1"/>
+                </a:solidFill>
+                <a:latin typeface="Calibri"/>
+                <a:ea typeface="Calibri"/>
+                <a:cs typeface="Calibri"/>
+                <a:sym typeface="Calibri"/>
+              </a:rPr>
+              <a:t>missing or low quality</a:t>
+            </a:r>
+            <a:r>
+              <a:rPr lang="en-US" sz="2000">
+                <a:solidFill>
+                  <a:schemeClr val="dk1"/>
+                </a:solidFill>
+                <a:latin typeface="Calibri"/>
+                <a:ea typeface="Calibri"/>
+                <a:cs typeface="Calibri"/>
+                <a:sym typeface="Calibri"/>
+              </a:rPr>
+              <a:t>.</a:t>
             </a:r>
             <a:endParaRPr sz="3200">
               <a:solidFill>
@@ -18895,7 +19273,7 @@
       </p:sp>
       <p:sp>
         <p:nvSpPr>
-          <p:cNvPr id="185" name="Google Shape;185;p27"/>
+          <p:cNvPr id="193" name="Google Shape;193;p28"/>
           <p:cNvSpPr txBox="1"/>
           <p:nvPr/>
         </p:nvSpPr>
@@ -18944,7 +19322,79 @@
                 <a:cs typeface="Calibri"/>
                 <a:sym typeface="Calibri"/>
               </a:rPr>
-              <a:t>The final output is a risk score with its confidence and explanation.</a:t>
+              <a:t>The final output is a </a:t>
+            </a:r>
+            <a:r>
+              <a:rPr b="1" lang="en-US" sz="2000">
+                <a:solidFill>
+                  <a:schemeClr val="dk1"/>
+                </a:solidFill>
+                <a:latin typeface="Calibri"/>
+                <a:ea typeface="Calibri"/>
+                <a:cs typeface="Calibri"/>
+                <a:sym typeface="Calibri"/>
+              </a:rPr>
+              <a:t>risk score</a:t>
+            </a:r>
+            <a:r>
+              <a:rPr lang="en-US" sz="2000">
+                <a:solidFill>
+                  <a:schemeClr val="dk1"/>
+                </a:solidFill>
+                <a:latin typeface="Calibri"/>
+                <a:ea typeface="Calibri"/>
+                <a:cs typeface="Calibri"/>
+                <a:sym typeface="Calibri"/>
+              </a:rPr>
+              <a:t> with its </a:t>
+            </a:r>
+            <a:r>
+              <a:rPr b="1" lang="en-US" sz="2000">
+                <a:solidFill>
+                  <a:schemeClr val="dk1"/>
+                </a:solidFill>
+                <a:latin typeface="Calibri"/>
+                <a:ea typeface="Calibri"/>
+                <a:cs typeface="Calibri"/>
+                <a:sym typeface="Calibri"/>
+              </a:rPr>
+              <a:t>confidence</a:t>
+            </a:r>
+            <a:r>
+              <a:rPr lang="en-US" sz="2000">
+                <a:solidFill>
+                  <a:schemeClr val="dk1"/>
+                </a:solidFill>
+                <a:latin typeface="Calibri"/>
+                <a:ea typeface="Calibri"/>
+                <a:cs typeface="Calibri"/>
+                <a:sym typeface="Calibri"/>
+              </a:rPr>
+              <a:t> and </a:t>
+            </a:r>
+            <a:r>
+              <a:rPr b="1" lang="en-US" sz="2000">
+                <a:solidFill>
+                  <a:schemeClr val="dk1"/>
+                </a:solidFill>
+                <a:latin typeface="Calibri"/>
+                <a:ea typeface="Calibri"/>
+                <a:cs typeface="Calibri"/>
+                <a:sym typeface="Calibri"/>
+              </a:rPr>
+              <a:t>explanation</a:t>
+            </a:r>
+            <a:r>
+              <a:rPr lang="en-US" sz="2000">
+                <a:solidFill>
+                  <a:schemeClr val="dk1"/>
+                </a:solidFill>
+                <a:latin typeface="Calibri"/>
+                <a:ea typeface="Calibri"/>
+                <a:cs typeface="Calibri"/>
+                <a:sym typeface="Calibri"/>
+              </a:rPr>
+              <a:t>.</a:t>
             </a:r>
             <a:endParaRPr sz="3200">
               <a:solidFill>
@@ -18966,12 +19416,12 @@
 </p:sld>
 </file>
 
-<file path=ppt/slides/slide16.xml><?xml version="1.0" encoding="utf-8"?>
+<file path=ppt/slides/slide17.xml><?xml version="1.0" encoding="utf-8"?>
 <p:sld xmlns:a="http://schemas.openxmlformats.org/drawingml/2006/main" xmlns:r="http://schemas.openxmlformats.org/officeDocument/2006/relationships" xmlns:mc="http://schemas.openxmlformats.org/markup-compatibility/2006" xmlns:mv="urn:schemas-microsoft-com:mac:vml" xmlns:p="http://schemas.openxmlformats.org/presentationml/2006/main" xmlns:c="http://schemas.openxmlformats.org/drawingml/2006/chart" xmlns:dgm="http://schemas.openxmlformats.org/drawingml/2006/diagram" xmlns:o="urn:schemas-microsoft-com:office:office" xmlns:v="urn:schemas-microsoft-com:vml" xmlns:pvml="urn:schemas-microsoft-com:office:powerpoint" xmlns:com="http://schemas.openxmlformats.org/drawingml/2006/compatibility" xmlns:p14="http://schemas.microsoft.com/office/powerpoint/2010/main" xmlns:p15="http://schemas.microsoft.com/office/powerpoint/2012/main" xmlns:ahyp="http://schemas.microsoft.com/office/drawing/2018/hyperlinkcolor">
   <p:cSld>
     <p:spTree>
       <p:nvGrpSpPr>
-        <p:cNvPr id="189" name="Shape 189"/>
+        <p:cNvPr id="197" name="Shape 197"/>
         <p:cNvGrpSpPr/>
         <p:nvPr/>
       </p:nvGrpSpPr>
@@ -18985,7 +19435,7 @@
       </p:grpSpPr>
       <p:sp>
         <p:nvSpPr>
-          <p:cNvPr id="190" name="Google Shape;190;p28"/>
+          <p:cNvPr id="198" name="Google Shape;198;p29"/>
           <p:cNvSpPr txBox="1"/>
           <p:nvPr>
             <p:ph type="title"/>
@@ -19042,7 +19492,7 @@
       </p:sp>
       <p:sp>
         <p:nvSpPr>
-          <p:cNvPr id="191" name="Google Shape;191;p28"/>
+          <p:cNvPr id="199" name="Google Shape;199;p29"/>
           <p:cNvSpPr/>
           <p:nvPr/>
         </p:nvSpPr>
@@ -19093,7 +19543,7 @@
       </p:sp>
       <p:sp>
         <p:nvSpPr>
-          <p:cNvPr id="192" name="Google Shape;192;p28"/>
+          <p:cNvPr id="200" name="Google Shape;200;p29"/>
           <p:cNvSpPr/>
           <p:nvPr/>
         </p:nvSpPr>
@@ -19156,7 +19606,7 @@
       </p:sp>
       <p:cxnSp>
         <p:nvCxnSpPr>
-          <p:cNvPr id="193" name="Google Shape;193;p28"/>
+          <p:cNvPr id="201" name="Google Shape;201;p29"/>
           <p:cNvCxnSpPr/>
           <p:nvPr/>
         </p:nvCxnSpPr>
@@ -19182,7 +19632,7 @@
       </p:cxnSp>
       <p:sp>
         <p:nvSpPr>
-          <p:cNvPr id="194" name="Google Shape;194;p28"/>
+          <p:cNvPr id="202" name="Google Shape;202;p29"/>
           <p:cNvSpPr/>
           <p:nvPr/>
         </p:nvSpPr>
@@ -19233,7 +19683,7 @@
       </p:sp>
       <p:sp>
         <p:nvSpPr>
-          <p:cNvPr id="195" name="Google Shape;195;p28"/>
+          <p:cNvPr id="203" name="Google Shape;203;p29"/>
           <p:cNvSpPr/>
           <p:nvPr/>
         </p:nvSpPr>
@@ -19296,7 +19746,7 @@
       </p:sp>
       <p:cxnSp>
         <p:nvCxnSpPr>
-          <p:cNvPr id="196" name="Google Shape;196;p28"/>
+          <p:cNvPr id="204" name="Google Shape;204;p29"/>
           <p:cNvCxnSpPr/>
           <p:nvPr/>
         </p:nvCxnSpPr>
@@ -19322,7 +19772,7 @@
       </p:cxnSp>
       <p:sp>
         <p:nvSpPr>
-          <p:cNvPr id="197" name="Google Shape;197;p28"/>
+          <p:cNvPr id="205" name="Google Shape;205;p29"/>
           <p:cNvSpPr/>
           <p:nvPr/>
         </p:nvSpPr>
@@ -19373,7 +19823,7 @@
       </p:sp>
       <p:sp>
         <p:nvSpPr>
-          <p:cNvPr id="198" name="Google Shape;198;p28"/>
+          <p:cNvPr id="206" name="Google Shape;206;p29"/>
           <p:cNvSpPr/>
           <p:nvPr/>
         </p:nvSpPr>
@@ -19436,7 +19886,7 @@
       </p:sp>
       <p:cxnSp>
         <p:nvCxnSpPr>
-          <p:cNvPr id="199" name="Google Shape;199;p28"/>
+          <p:cNvPr id="207" name="Google Shape;207;p29"/>
           <p:cNvCxnSpPr/>
           <p:nvPr/>
         </p:nvCxnSpPr>
@@ -19462,7 +19912,7 @@
       </p:cxnSp>
       <p:sp>
         <p:nvSpPr>
-          <p:cNvPr id="200" name="Google Shape;200;p28"/>
+          <p:cNvPr id="208" name="Google Shape;208;p29"/>
           <p:cNvSpPr/>
           <p:nvPr/>
         </p:nvSpPr>
@@ -19513,7 +19963,7 @@
       </p:sp>
       <p:sp>
         <p:nvSpPr>
-          <p:cNvPr id="201" name="Google Shape;201;p28"/>
+          <p:cNvPr id="209" name="Google Shape;209;p29"/>
           <p:cNvSpPr/>
           <p:nvPr/>
         </p:nvSpPr>
@@ -19576,7 +20026,7 @@
       </p:sp>
       <p:cxnSp>
         <p:nvCxnSpPr>
-          <p:cNvPr id="202" name="Google Shape;202;p28"/>
+          <p:cNvPr id="210" name="Google Shape;210;p29"/>
           <p:cNvCxnSpPr/>
           <p:nvPr/>
         </p:nvCxnSpPr>
@@ -19602,7 +20052,7 @@
       </p:cxnSp>
       <p:sp>
         <p:nvSpPr>
-          <p:cNvPr id="203" name="Google Shape;203;p28"/>
+          <p:cNvPr id="211" name="Google Shape;211;p29"/>
           <p:cNvSpPr/>
           <p:nvPr/>
         </p:nvSpPr>
@@ -19653,7 +20103,7 @@
       </p:sp>
       <p:sp>
         <p:nvSpPr>
-          <p:cNvPr id="204" name="Google Shape;204;p28"/>
+          <p:cNvPr id="212" name="Google Shape;212;p29"/>
           <p:cNvSpPr/>
           <p:nvPr/>
         </p:nvSpPr>
@@ -19716,7 +20166,7 @@
       </p:sp>
       <p:cxnSp>
         <p:nvCxnSpPr>
-          <p:cNvPr id="205" name="Google Shape;205;p28"/>
+          <p:cNvPr id="213" name="Google Shape;213;p29"/>
           <p:cNvCxnSpPr/>
           <p:nvPr/>
         </p:nvCxnSpPr>
@@ -19742,7 +20192,7 @@
       </p:cxnSp>
       <p:sp>
         <p:nvSpPr>
-          <p:cNvPr id="206" name="Google Shape;206;p28"/>
+          <p:cNvPr id="214" name="Google Shape;214;p29"/>
           <p:cNvSpPr/>
           <p:nvPr/>
         </p:nvSpPr>
@@ -19787,7 +20237,7 @@
       </p:sp>
       <p:sp>
         <p:nvSpPr>
-          <p:cNvPr id="207" name="Google Shape;207;p28"/>
+          <p:cNvPr id="215" name="Google Shape;215;p29"/>
           <p:cNvSpPr/>
           <p:nvPr/>
         </p:nvSpPr>
@@ -19850,7 +20300,7 @@
       </p:sp>
       <p:cxnSp>
         <p:nvCxnSpPr>
-          <p:cNvPr id="208" name="Google Shape;208;p28"/>
+          <p:cNvPr id="216" name="Google Shape;216;p29"/>
           <p:cNvCxnSpPr/>
           <p:nvPr/>
         </p:nvCxnSpPr>
@@ -19876,7 +20326,7 @@
       </p:cxnSp>
       <p:sp>
         <p:nvSpPr>
-          <p:cNvPr id="209" name="Google Shape;209;p28"/>
+          <p:cNvPr id="217" name="Google Shape;217;p29"/>
           <p:cNvSpPr/>
           <p:nvPr/>
         </p:nvSpPr>
@@ -19921,7 +20371,7 @@
       </p:sp>
       <p:sp>
         <p:nvSpPr>
-          <p:cNvPr id="210" name="Google Shape;210;p28"/>
+          <p:cNvPr id="218" name="Google Shape;218;p29"/>
           <p:cNvSpPr/>
           <p:nvPr/>
         </p:nvSpPr>
@@ -19984,7 +20434,7 @@
       </p:sp>
       <p:cxnSp>
         <p:nvCxnSpPr>
-          <p:cNvPr id="211" name="Google Shape;211;p28"/>
+          <p:cNvPr id="219" name="Google Shape;219;p29"/>
           <p:cNvCxnSpPr/>
           <p:nvPr/>
         </p:nvCxnSpPr>
@@ -20010,7 +20460,7 @@
       </p:cxnSp>
       <p:sp>
         <p:nvSpPr>
-          <p:cNvPr id="212" name="Google Shape;212;p28"/>
+          <p:cNvPr id="220" name="Google Shape;220;p29"/>
           <p:cNvSpPr/>
           <p:nvPr/>
         </p:nvSpPr>
@@ -20055,7 +20505,7 @@
       </p:sp>
       <p:sp>
         <p:nvSpPr>
-          <p:cNvPr id="213" name="Google Shape;213;p28"/>
+          <p:cNvPr id="221" name="Google Shape;221;p29"/>
           <p:cNvSpPr/>
           <p:nvPr/>
         </p:nvSpPr>
@@ -20118,7 +20568,7 @@
       </p:sp>
       <p:cxnSp>
         <p:nvCxnSpPr>
-          <p:cNvPr id="214" name="Google Shape;214;p28"/>
+          <p:cNvPr id="222" name="Google Shape;222;p29"/>
           <p:cNvCxnSpPr/>
           <p:nvPr/>
         </p:nvCxnSpPr>
@@ -20144,7 +20594,7 @@
       </p:cxnSp>
       <p:sp>
         <p:nvSpPr>
-          <p:cNvPr id="215" name="Google Shape;215;p28"/>
+          <p:cNvPr id="223" name="Google Shape;223;p29"/>
           <p:cNvSpPr/>
           <p:nvPr/>
         </p:nvSpPr>
@@ -20189,7 +20639,7 @@
       </p:sp>
       <p:sp>
         <p:nvSpPr>
-          <p:cNvPr id="216" name="Google Shape;216;p28"/>
+          <p:cNvPr id="224" name="Google Shape;224;p29"/>
           <p:cNvSpPr/>
           <p:nvPr/>
         </p:nvSpPr>
@@ -20252,7 +20702,7 @@
       </p:sp>
       <p:cxnSp>
         <p:nvCxnSpPr>
-          <p:cNvPr id="217" name="Google Shape;217;p28"/>
+          <p:cNvPr id="225" name="Google Shape;225;p29"/>
           <p:cNvCxnSpPr/>
           <p:nvPr/>
         </p:nvCxnSpPr>
@@ -20278,7 +20728,7 @@
       </p:cxnSp>
       <p:sp>
         <p:nvSpPr>
-          <p:cNvPr id="218" name="Google Shape;218;p28"/>
+          <p:cNvPr id="226" name="Google Shape;226;p29"/>
           <p:cNvSpPr/>
           <p:nvPr/>
         </p:nvSpPr>
@@ -20323,7 +20773,7 @@
       </p:sp>
       <p:sp>
         <p:nvSpPr>
-          <p:cNvPr id="219" name="Google Shape;219;p28"/>
+          <p:cNvPr id="227" name="Google Shape;227;p29"/>
           <p:cNvSpPr/>
           <p:nvPr/>
         </p:nvSpPr>
@@ -20386,7 +20836,7 @@
       </p:sp>
       <p:cxnSp>
         <p:nvCxnSpPr>
-          <p:cNvPr id="220" name="Google Shape;220;p28"/>
+          <p:cNvPr id="228" name="Google Shape;228;p29"/>
           <p:cNvCxnSpPr/>
           <p:nvPr/>
         </p:nvCxnSpPr>
@@ -20412,7 +20862,7 @@
       </p:cxnSp>
       <p:cxnSp>
         <p:nvCxnSpPr>
-          <p:cNvPr id="221" name="Google Shape;221;p28"/>
+          <p:cNvPr id="229" name="Google Shape;229;p29"/>
           <p:cNvCxnSpPr/>
           <p:nvPr/>
         </p:nvCxnSpPr>
@@ -20438,7 +20888,7 @@
       </p:cxnSp>
       <p:cxnSp>
         <p:nvCxnSpPr>
-          <p:cNvPr id="222" name="Google Shape;222;p28"/>
+          <p:cNvPr id="230" name="Google Shape;230;p29"/>
           <p:cNvCxnSpPr/>
           <p:nvPr/>
         </p:nvCxnSpPr>
@@ -20464,7 +20914,7 @@
       </p:cxnSp>
       <p:cxnSp>
         <p:nvCxnSpPr>
-          <p:cNvPr id="223" name="Google Shape;223;p28"/>
+          <p:cNvPr id="231" name="Google Shape;231;p29"/>
           <p:cNvCxnSpPr/>
           <p:nvPr/>
         </p:nvCxnSpPr>
@@ -20490,7 +20940,7 @@
       </p:cxnSp>
       <p:cxnSp>
         <p:nvCxnSpPr>
-          <p:cNvPr id="224" name="Google Shape;224;p28"/>
+          <p:cNvPr id="232" name="Google Shape;232;p29"/>
           <p:cNvCxnSpPr/>
           <p:nvPr/>
         </p:nvCxnSpPr>
@@ -20516,7 +20966,7 @@
       </p:cxnSp>
       <p:cxnSp>
         <p:nvCxnSpPr>
-          <p:cNvPr id="225" name="Google Shape;225;p28"/>
+          <p:cNvPr id="233" name="Google Shape;233;p29"/>
           <p:cNvCxnSpPr/>
           <p:nvPr/>
         </p:nvCxnSpPr>
@@ -20542,7 +20992,7 @@
       </p:cxnSp>
       <p:sp>
         <p:nvSpPr>
-          <p:cNvPr id="226" name="Google Shape;226;p28"/>
+          <p:cNvPr id="234" name="Google Shape;234;p29"/>
           <p:cNvSpPr/>
           <p:nvPr/>
         </p:nvSpPr>
@@ -20594,7 +21044,7 @@
       </p:sp>
       <p:sp>
         <p:nvSpPr>
-          <p:cNvPr id="227" name="Google Shape;227;p28"/>
+          <p:cNvPr id="235" name="Google Shape;235;p29"/>
           <p:cNvSpPr/>
           <p:nvPr/>
         </p:nvSpPr>
@@ -20780,7 +21230,7 @@
       </p:sp>
       <p:cxnSp>
         <p:nvCxnSpPr>
-          <p:cNvPr id="228" name="Google Shape;228;p28"/>
+          <p:cNvPr id="236" name="Google Shape;236;p29"/>
           <p:cNvCxnSpPr/>
           <p:nvPr/>
         </p:nvCxnSpPr>
@@ -20806,7 +21256,7 @@
       </p:cxnSp>
       <p:sp>
         <p:nvSpPr>
-          <p:cNvPr id="229" name="Google Shape;229;p28"/>
+          <p:cNvPr id="237" name="Google Shape;237;p29"/>
           <p:cNvSpPr/>
           <p:nvPr/>
         </p:nvSpPr>
@@ -20857,7 +21307,7 @@
       </p:sp>
       <p:sp>
         <p:nvSpPr>
-          <p:cNvPr id="230" name="Google Shape;230;p28"/>
+          <p:cNvPr id="238" name="Google Shape;238;p29"/>
           <p:cNvSpPr/>
           <p:nvPr/>
         </p:nvSpPr>
@@ -20923,7 +21373,7 @@
       </p:sp>
       <p:sp>
         <p:nvSpPr>
-          <p:cNvPr id="231" name="Google Shape;231;p28"/>
+          <p:cNvPr id="239" name="Google Shape;239;p29"/>
           <p:cNvSpPr/>
           <p:nvPr/>
         </p:nvSpPr>
@@ -20974,7 +21424,7 @@
       </p:sp>
       <p:sp>
         <p:nvSpPr>
-          <p:cNvPr id="232" name="Google Shape;232;p28"/>
+          <p:cNvPr id="240" name="Google Shape;240;p29"/>
           <p:cNvSpPr/>
           <p:nvPr/>
         </p:nvSpPr>
@@ -21080,7 +21530,7 @@
       </p:sp>
       <p:sp>
         <p:nvSpPr>
-          <p:cNvPr id="233" name="Google Shape;233;p28"/>
+          <p:cNvPr id="241" name="Google Shape;241;p29"/>
           <p:cNvSpPr/>
           <p:nvPr/>
         </p:nvSpPr>
@@ -21131,7 +21581,7 @@
       </p:sp>
       <p:sp>
         <p:nvSpPr>
-          <p:cNvPr id="234" name="Google Shape;234;p28"/>
+          <p:cNvPr id="242" name="Google Shape;242;p29"/>
           <p:cNvSpPr/>
           <p:nvPr/>
         </p:nvSpPr>
@@ -21197,7 +21647,7 @@
       </p:sp>
       <p:sp>
         <p:nvSpPr>
-          <p:cNvPr id="235" name="Google Shape;235;p28"/>
+          <p:cNvPr id="243" name="Google Shape;243;p29"/>
           <p:cNvSpPr/>
           <p:nvPr/>
         </p:nvSpPr>
@@ -21248,7 +21698,7 @@
       </p:sp>
       <p:sp>
         <p:nvSpPr>
-          <p:cNvPr id="236" name="Google Shape;236;p28"/>
+          <p:cNvPr id="244" name="Google Shape;244;p29"/>
           <p:cNvSpPr/>
           <p:nvPr/>
         </p:nvSpPr>
@@ -21320,12 +21770,12 @@
 </p:sld>
 </file>
 
-<file path=ppt/slides/slide17.xml><?xml version="1.0" encoding="utf-8"?>
+<file path=ppt/slides/slide18.xml><?xml version="1.0" encoding="utf-8"?>
 <p:sld xmlns:a="http://schemas.openxmlformats.org/drawingml/2006/main" xmlns:r="http://schemas.openxmlformats.org/officeDocument/2006/relationships" xmlns:mc="http://schemas.openxmlformats.org/markup-compatibility/2006" xmlns:mv="urn:schemas-microsoft-com:mac:vml" xmlns:p="http://schemas.openxmlformats.org/presentationml/2006/main" xmlns:c="http://schemas.openxmlformats.org/drawingml/2006/chart" xmlns:dgm="http://schemas.openxmlformats.org/drawingml/2006/diagram" xmlns:o="urn:schemas-microsoft-com:office:office" xmlns:v="urn:schemas-microsoft-com:vml" xmlns:pvml="urn:schemas-microsoft-com:office:powerpoint" xmlns:com="http://schemas.openxmlformats.org/drawingml/2006/compatibility" xmlns:p14="http://schemas.microsoft.com/office/powerpoint/2010/main" xmlns:p15="http://schemas.microsoft.com/office/powerpoint/2012/main" xmlns:ahyp="http://schemas.microsoft.com/office/drawing/2018/hyperlinkcolor">
   <p:cSld>
     <p:spTree>
       <p:nvGrpSpPr>
-        <p:cNvPr id="240" name="Shape 240"/>
+        <p:cNvPr id="248" name="Shape 248"/>
         <p:cNvGrpSpPr/>
         <p:nvPr/>
       </p:nvGrpSpPr>
@@ -21339,7 +21789,7 @@
       </p:grpSpPr>
       <p:sp>
         <p:nvSpPr>
-          <p:cNvPr id="241" name="Google Shape;241;p29"/>
+          <p:cNvPr id="249" name="Google Shape;249;p30"/>
           <p:cNvSpPr txBox="1"/>
           <p:nvPr>
             <p:ph type="title"/>
@@ -21395,7 +21845,7 @@
       </p:sp>
       <p:sp>
         <p:nvSpPr>
-          <p:cNvPr id="242" name="Google Shape;242;p29"/>
+          <p:cNvPr id="250" name="Google Shape;250;p30"/>
           <p:cNvSpPr txBox="1"/>
           <p:nvPr>
             <p:ph idx="1" type="body"/>
@@ -21452,12 +21902,12 @@
 </p:sld>
 </file>
 
-<file path=ppt/slides/slide18.xml><?xml version="1.0" encoding="utf-8"?>
+<file path=ppt/slides/slide19.xml><?xml version="1.0" encoding="utf-8"?>
 <p:sld xmlns:a="http://schemas.openxmlformats.org/drawingml/2006/main" xmlns:r="http://schemas.openxmlformats.org/officeDocument/2006/relationships" xmlns:mc="http://schemas.openxmlformats.org/markup-compatibility/2006" xmlns:mv="urn:schemas-microsoft-com:mac:vml" xmlns:p="http://schemas.openxmlformats.org/presentationml/2006/main" xmlns:c="http://schemas.openxmlformats.org/drawingml/2006/chart" xmlns:dgm="http://schemas.openxmlformats.org/drawingml/2006/diagram" xmlns:o="urn:schemas-microsoft-com:office:office" xmlns:v="urn:schemas-microsoft-com:vml" xmlns:pvml="urn:schemas-microsoft-com:office:powerpoint" xmlns:com="http://schemas.openxmlformats.org/drawingml/2006/compatibility" xmlns:p14="http://schemas.microsoft.com/office/powerpoint/2010/main" xmlns:p15="http://schemas.microsoft.com/office/powerpoint/2012/main" xmlns:ahyp="http://schemas.microsoft.com/office/drawing/2018/hyperlinkcolor">
   <p:cSld>
     <p:spTree>
       <p:nvGrpSpPr>
-        <p:cNvPr id="246" name="Shape 246"/>
+        <p:cNvPr id="254" name="Shape 254"/>
         <p:cNvGrpSpPr/>
         <p:nvPr/>
       </p:nvGrpSpPr>
@@ -21471,7 +21921,7 @@
       </p:grpSpPr>
       <p:sp>
         <p:nvSpPr>
-          <p:cNvPr id="247" name="Google Shape;247;p30"/>
+          <p:cNvPr id="255" name="Google Shape;255;p31"/>
           <p:cNvSpPr txBox="1"/>
           <p:nvPr>
             <p:ph type="title"/>
@@ -21520,7 +21970,7 @@
       </p:sp>
       <p:sp>
         <p:nvSpPr>
-          <p:cNvPr id="248" name="Google Shape;248;p30"/>
+          <p:cNvPr id="256" name="Google Shape;256;p31"/>
           <p:cNvSpPr txBox="1"/>
           <p:nvPr>
             <p:ph idx="1" type="body"/>
@@ -21559,8 +22009,12 @@
               <a:buChar char="○"/>
             </a:pPr>
             <a:r>
+              <a:rPr b="1" lang="en-US" sz="2000"/>
+              <a:t>Cross-platform mobile application</a:t>
+            </a:r>
+            <a:r>
               <a:rPr lang="en-US" sz="2000"/>
-              <a:t>Cross-platform mobile application for capturing and submitting body-surface images, and viewing results</a:t>
+              <a:t> for capturing and submitting body-surface images, and viewing results</a:t>
             </a:r>
             <a:endParaRPr sz="2000"/>
           </a:p>
@@ -21580,7 +22034,15 @@
             </a:pPr>
             <a:r>
               <a:rPr lang="en-US" sz="2000"/>
-              <a:t>Screening across five body surfaces: oral cavity, fingernails, conjunctiva, tongue, palm, with a modular design allowing a surface to be substituted if needed</a:t>
+              <a:t>Screening across </a:t>
+            </a:r>
+            <a:r>
+              <a:rPr b="1" lang="en-US" sz="2000"/>
+              <a:t>five body surfaces</a:t>
+            </a:r>
+            <a:r>
+              <a:rPr lang="en-US" sz="2000"/>
+              <a:t>: oral cavity, fingernails, conjunctiva, tongue, palm, with a modular design allowing a surface to be substituted if needed</a:t>
             </a:r>
             <a:endParaRPr sz="2000"/>
           </a:p>
@@ -21600,7 +22062,15 @@
             </a:pPr>
             <a:r>
               <a:rPr lang="en-US" sz="2000"/>
-              <a:t>Custom cross-modal attention fusion transformer, built in PyTorch</a:t>
+              <a:t>Custom </a:t>
+            </a:r>
+            <a:r>
+              <a:rPr b="1" lang="en-US" sz="2000"/>
+              <a:t>cross-modal attention fusion </a:t>
+            </a:r>
+            <a:r>
+              <a:rPr lang="en-US" sz="2000"/>
+              <a:t>transformer, built in PyTorch</a:t>
             </a:r>
             <a:endParaRPr sz="2000"/>
           </a:p>
@@ -21620,7 +22090,39 @@
             </a:pPr>
             <a:r>
               <a:rPr lang="en-US" sz="2000"/>
-              <a:t>Monte Carlo Dropout for uncertainty estimation</a:t>
+              <a:t>Monte Carlo Dropout for </a:t>
+            </a:r>
+            <a:r>
+              <a:rPr b="1" lang="en-US" sz="2000"/>
+              <a:t>uncertainty estimation</a:t>
+            </a:r>
+            <a:endParaRPr b="1" sz="2000"/>
+          </a:p>
+          <a:p>
+            <a:pPr indent="-355600" lvl="0" marL="457200" rtl="0" algn="just">
+              <a:lnSpc>
+                <a:spcPct val="150000"/>
+              </a:lnSpc>
+              <a:spcBef>
+                <a:spcPts val="0"/>
+              </a:spcBef>
+              <a:spcAft>
+                <a:spcPts val="0"/>
+              </a:spcAft>
+              <a:buSzPts val="2000"/>
+              <a:buChar char="○"/>
+            </a:pPr>
+            <a:r>
+              <a:rPr lang="en-US" sz="2000"/>
+              <a:t>Attention-based </a:t>
+            </a:r>
+            <a:r>
+              <a:rPr b="1" lang="en-US" sz="2000"/>
+              <a:t>Visual explanation</a:t>
+            </a:r>
+            <a:r>
+              <a:rPr lang="en-US" sz="2000"/>
+              <a:t> showing which regions influenced the result</a:t>
             </a:r>
             <a:endParaRPr sz="2000"/>
           </a:p>
@@ -21639,162 +22141,14 @@
               <a:buChar char="○"/>
             </a:pPr>
             <a:r>
+              <a:rPr b="1" lang="en-US" sz="2000"/>
+              <a:t>Missing-modality robustness</a:t>
+            </a:r>
+            <a:r>
               <a:rPr lang="en-US" sz="2000"/>
-              <a:t>Attention-based Visual explanation showing which regions influenced the result</a:t>
+              <a:t> handling</a:t>
             </a:r>
             <a:endParaRPr sz="2000"/>
-          </a:p>
-          <a:p>
-            <a:pPr indent="-355600" lvl="0" marL="457200" rtl="0" algn="just">
-              <a:lnSpc>
-                <a:spcPct val="150000"/>
-              </a:lnSpc>
-              <a:spcBef>
-                <a:spcPts val="0"/>
-              </a:spcBef>
-              <a:spcAft>
-                <a:spcPts val="0"/>
-              </a:spcAft>
-              <a:buSzPts val="2000"/>
-              <a:buChar char="○"/>
-            </a:pPr>
-            <a:r>
-              <a:rPr lang="en-US" sz="2000"/>
-              <a:t>Missing-modality robustness handling</a:t>
-            </a:r>
-            <a:endParaRPr sz="2000"/>
-          </a:p>
-        </p:txBody>
-      </p:sp>
-    </p:spTree>
-  </p:cSld>
-  <p:clrMapOvr>
-    <a:masterClrMapping/>
-  </p:clrMapOvr>
-</p:sld>
-</file>
-
-<file path=ppt/slides/slide19.xml><?xml version="1.0" encoding="utf-8"?>
-<p:sld xmlns:a="http://schemas.openxmlformats.org/drawingml/2006/main" xmlns:r="http://schemas.openxmlformats.org/officeDocument/2006/relationships" xmlns:mc="http://schemas.openxmlformats.org/markup-compatibility/2006" xmlns:mv="urn:schemas-microsoft-com:mac:vml" xmlns:p="http://schemas.openxmlformats.org/presentationml/2006/main" xmlns:c="http://schemas.openxmlformats.org/drawingml/2006/chart" xmlns:dgm="http://schemas.openxmlformats.org/drawingml/2006/diagram" xmlns:o="urn:schemas-microsoft-com:office:office" xmlns:v="urn:schemas-microsoft-com:vml" xmlns:pvml="urn:schemas-microsoft-com:office:powerpoint" xmlns:com="http://schemas.openxmlformats.org/drawingml/2006/compatibility" xmlns:p14="http://schemas.microsoft.com/office/powerpoint/2010/main" xmlns:p15="http://schemas.microsoft.com/office/powerpoint/2012/main" xmlns:ahyp="http://schemas.microsoft.com/office/drawing/2018/hyperlinkcolor">
-  <p:cSld>
-    <p:spTree>
-      <p:nvGrpSpPr>
-        <p:cNvPr id="252" name="Shape 252"/>
-        <p:cNvGrpSpPr/>
-        <p:nvPr/>
-      </p:nvGrpSpPr>
-      <p:grpSpPr>
-        <a:xfrm>
-          <a:off x="0" y="0"/>
-          <a:ext cx="0" cy="0"/>
-          <a:chOff x="0" y="0"/>
-          <a:chExt cx="0" cy="0"/>
-        </a:xfrm>
-      </p:grpSpPr>
-      <p:sp>
-        <p:nvSpPr>
-          <p:cNvPr id="253" name="Google Shape;253;p31"/>
-          <p:cNvSpPr txBox="1"/>
-          <p:nvPr>
-            <p:ph type="title"/>
-          </p:nvPr>
-        </p:nvSpPr>
-        <p:spPr>
-          <a:xfrm>
-            <a:off x="722313" y="4406900"/>
-            <a:ext cx="7772400" cy="1362000"/>
-          </a:xfrm>
-          <a:prstGeom prst="rect">
-            <a:avLst/>
-          </a:prstGeom>
-          <a:noFill/>
-          <a:ln>
-            <a:noFill/>
-          </a:ln>
-        </p:spPr>
-        <p:txBody>
-          <a:bodyPr anchorCtr="0" anchor="t" bIns="45700" lIns="91425" spcFirstLastPara="1" rIns="91425" wrap="square" tIns="45700">
-            <a:normAutofit/>
-          </a:bodyPr>
-          <a:lstStyle/>
-          <a:p>
-            <a:pPr indent="0" lvl="0" marL="0" rtl="0" algn="l">
-              <a:lnSpc>
-                <a:spcPct val="100000"/>
-              </a:lnSpc>
-              <a:spcBef>
-                <a:spcPts val="0"/>
-              </a:spcBef>
-              <a:spcAft>
-                <a:spcPts val="0"/>
-              </a:spcAft>
-              <a:buSzPts val="1400"/>
-              <a:buNone/>
-            </a:pPr>
-            <a:r>
-              <a:rPr lang="en-US">
-                <a:solidFill>
-                  <a:srgbClr val="0B3D59"/>
-                </a:solidFill>
-              </a:rPr>
-              <a:t>Major Challenges</a:t>
-            </a:r>
-            <a:endParaRPr>
-              <a:solidFill>
-                <a:srgbClr val="0B3D59"/>
-              </a:solidFill>
-            </a:endParaRPr>
-          </a:p>
-        </p:txBody>
-      </p:sp>
-      <p:sp>
-        <p:nvSpPr>
-          <p:cNvPr id="254" name="Google Shape;254;p31"/>
-          <p:cNvSpPr txBox="1"/>
-          <p:nvPr>
-            <p:ph idx="1" type="body"/>
-          </p:nvPr>
-        </p:nvSpPr>
-        <p:spPr>
-          <a:xfrm>
-            <a:off x="722313" y="2906713"/>
-            <a:ext cx="7772400" cy="1500300"/>
-          </a:xfrm>
-          <a:prstGeom prst="rect">
-            <a:avLst/>
-          </a:prstGeom>
-          <a:noFill/>
-          <a:ln>
-            <a:noFill/>
-          </a:ln>
-        </p:spPr>
-        <p:txBody>
-          <a:bodyPr anchorCtr="0" anchor="b" bIns="45700" lIns="91425" spcFirstLastPara="1" rIns="91425" wrap="square" tIns="45700">
-            <a:normAutofit/>
-          </a:bodyPr>
-          <a:lstStyle/>
-          <a:p>
-            <a:pPr indent="0" lvl="0" marL="44450" rtl="0" algn="l">
-              <a:lnSpc>
-                <a:spcPct val="100000"/>
-              </a:lnSpc>
-              <a:spcBef>
-                <a:spcPts val="0"/>
-              </a:spcBef>
-              <a:spcAft>
-                <a:spcPts val="0"/>
-              </a:spcAft>
-              <a:buClr>
-                <a:srgbClr val="888888"/>
-              </a:buClr>
-              <a:buSzPts val="2000"/>
-              <a:buFont typeface="Arial"/>
-              <a:buNone/>
-            </a:pPr>
-            <a:r>
-              <a:t/>
-            </a:r>
-            <a:endParaRPr/>
           </a:p>
         </p:txBody>
       </p:sp>
@@ -22039,7 +22393,7 @@
   <p:cSld>
     <p:spTree>
       <p:nvGrpSpPr>
-        <p:cNvPr id="258" name="Shape 258"/>
+        <p:cNvPr id="260" name="Shape 260"/>
         <p:cNvGrpSpPr/>
         <p:nvPr/>
       </p:nvGrpSpPr>
@@ -22053,7 +22407,139 @@
       </p:grpSpPr>
       <p:sp>
         <p:nvSpPr>
-          <p:cNvPr id="259" name="Google Shape;259;p32"/>
+          <p:cNvPr id="261" name="Google Shape;261;p32"/>
+          <p:cNvSpPr txBox="1"/>
+          <p:nvPr>
+            <p:ph type="title"/>
+          </p:nvPr>
+        </p:nvSpPr>
+        <p:spPr>
+          <a:xfrm>
+            <a:off x="722313" y="4406900"/>
+            <a:ext cx="7772400" cy="1362000"/>
+          </a:xfrm>
+          <a:prstGeom prst="rect">
+            <a:avLst/>
+          </a:prstGeom>
+          <a:noFill/>
+          <a:ln>
+            <a:noFill/>
+          </a:ln>
+        </p:spPr>
+        <p:txBody>
+          <a:bodyPr anchorCtr="0" anchor="t" bIns="45700" lIns="91425" spcFirstLastPara="1" rIns="91425" wrap="square" tIns="45700">
+            <a:normAutofit/>
+          </a:bodyPr>
+          <a:lstStyle/>
+          <a:p>
+            <a:pPr indent="0" lvl="0" marL="0" rtl="0" algn="l">
+              <a:lnSpc>
+                <a:spcPct val="100000"/>
+              </a:lnSpc>
+              <a:spcBef>
+                <a:spcPts val="0"/>
+              </a:spcBef>
+              <a:spcAft>
+                <a:spcPts val="0"/>
+              </a:spcAft>
+              <a:buSzPts val="1400"/>
+              <a:buNone/>
+            </a:pPr>
+            <a:r>
+              <a:rPr lang="en-US">
+                <a:solidFill>
+                  <a:srgbClr val="0B3D59"/>
+                </a:solidFill>
+              </a:rPr>
+              <a:t>Major Challenges</a:t>
+            </a:r>
+            <a:endParaRPr>
+              <a:solidFill>
+                <a:srgbClr val="0B3D59"/>
+              </a:solidFill>
+            </a:endParaRPr>
+          </a:p>
+        </p:txBody>
+      </p:sp>
+      <p:sp>
+        <p:nvSpPr>
+          <p:cNvPr id="262" name="Google Shape;262;p32"/>
+          <p:cNvSpPr txBox="1"/>
+          <p:nvPr>
+            <p:ph idx="1" type="body"/>
+          </p:nvPr>
+        </p:nvSpPr>
+        <p:spPr>
+          <a:xfrm>
+            <a:off x="722313" y="2906713"/>
+            <a:ext cx="7772400" cy="1500300"/>
+          </a:xfrm>
+          <a:prstGeom prst="rect">
+            <a:avLst/>
+          </a:prstGeom>
+          <a:noFill/>
+          <a:ln>
+            <a:noFill/>
+          </a:ln>
+        </p:spPr>
+        <p:txBody>
+          <a:bodyPr anchorCtr="0" anchor="b" bIns="45700" lIns="91425" spcFirstLastPara="1" rIns="91425" wrap="square" tIns="45700">
+            <a:normAutofit/>
+          </a:bodyPr>
+          <a:lstStyle/>
+          <a:p>
+            <a:pPr indent="0" lvl="0" marL="44450" rtl="0" algn="l">
+              <a:lnSpc>
+                <a:spcPct val="100000"/>
+              </a:lnSpc>
+              <a:spcBef>
+                <a:spcPts val="0"/>
+              </a:spcBef>
+              <a:spcAft>
+                <a:spcPts val="0"/>
+              </a:spcAft>
+              <a:buClr>
+                <a:srgbClr val="888888"/>
+              </a:buClr>
+              <a:buSzPts val="2000"/>
+              <a:buFont typeface="Arial"/>
+              <a:buNone/>
+            </a:pPr>
+            <a:r>
+              <a:t/>
+            </a:r>
+            <a:endParaRPr/>
+          </a:p>
+        </p:txBody>
+      </p:sp>
+    </p:spTree>
+  </p:cSld>
+  <p:clrMapOvr>
+    <a:masterClrMapping/>
+  </p:clrMapOvr>
+</p:sld>
+</file>
+
+<file path=ppt/slides/slide21.xml><?xml version="1.0" encoding="utf-8"?>
+<p:sld xmlns:a="http://schemas.openxmlformats.org/drawingml/2006/main" xmlns:r="http://schemas.openxmlformats.org/officeDocument/2006/relationships" xmlns:mc="http://schemas.openxmlformats.org/markup-compatibility/2006" xmlns:mv="urn:schemas-microsoft-com:mac:vml" xmlns:p="http://schemas.openxmlformats.org/presentationml/2006/main" xmlns:c="http://schemas.openxmlformats.org/drawingml/2006/chart" xmlns:dgm="http://schemas.openxmlformats.org/drawingml/2006/diagram" xmlns:o="urn:schemas-microsoft-com:office:office" xmlns:v="urn:schemas-microsoft-com:vml" xmlns:pvml="urn:schemas-microsoft-com:office:powerpoint" xmlns:com="http://schemas.openxmlformats.org/drawingml/2006/compatibility" xmlns:p14="http://schemas.microsoft.com/office/powerpoint/2010/main" xmlns:p15="http://schemas.microsoft.com/office/powerpoint/2012/main" xmlns:ahyp="http://schemas.microsoft.com/office/drawing/2018/hyperlinkcolor">
+  <p:cSld>
+    <p:spTree>
+      <p:nvGrpSpPr>
+        <p:cNvPr id="266" name="Shape 266"/>
+        <p:cNvGrpSpPr/>
+        <p:nvPr/>
+      </p:nvGrpSpPr>
+      <p:grpSpPr>
+        <a:xfrm>
+          <a:off x="0" y="0"/>
+          <a:ext cx="0" cy="0"/>
+          <a:chOff x="0" y="0"/>
+          <a:chExt cx="0" cy="0"/>
+        </a:xfrm>
+      </p:grpSpPr>
+      <p:sp>
+        <p:nvSpPr>
+          <p:cNvPr id="267" name="Google Shape;267;p33"/>
           <p:cNvSpPr txBox="1"/>
           <p:nvPr>
             <p:ph type="title"/>
@@ -22106,7 +22592,7 @@
       </p:sp>
       <p:sp>
         <p:nvSpPr>
-          <p:cNvPr id="260" name="Google Shape;260;p32"/>
+          <p:cNvPr id="268" name="Google Shape;268;p33"/>
           <p:cNvSpPr txBox="1"/>
           <p:nvPr/>
         </p:nvSpPr>
@@ -22365,12 +22851,12 @@
 </p:sld>
 </file>
 
-<file path=ppt/slides/slide21.xml><?xml version="1.0" encoding="utf-8"?>
+<file path=ppt/slides/slide22.xml><?xml version="1.0" encoding="utf-8"?>
 <p:sld xmlns:a="http://schemas.openxmlformats.org/drawingml/2006/main" xmlns:r="http://schemas.openxmlformats.org/officeDocument/2006/relationships" xmlns:mc="http://schemas.openxmlformats.org/markup-compatibility/2006" xmlns:mv="urn:schemas-microsoft-com:mac:vml" xmlns:p="http://schemas.openxmlformats.org/presentationml/2006/main" xmlns:c="http://schemas.openxmlformats.org/drawingml/2006/chart" xmlns:dgm="http://schemas.openxmlformats.org/drawingml/2006/diagram" xmlns:o="urn:schemas-microsoft-com:office:office" xmlns:v="urn:schemas-microsoft-com:vml" xmlns:pvml="urn:schemas-microsoft-com:office:powerpoint" xmlns:com="http://schemas.openxmlformats.org/drawingml/2006/compatibility" xmlns:p14="http://schemas.microsoft.com/office/powerpoint/2010/main" xmlns:p15="http://schemas.microsoft.com/office/powerpoint/2012/main" xmlns:ahyp="http://schemas.microsoft.com/office/drawing/2018/hyperlinkcolor">
   <p:cSld>
     <p:spTree>
       <p:nvGrpSpPr>
-        <p:cNvPr id="264" name="Shape 264"/>
+        <p:cNvPr id="272" name="Shape 272"/>
         <p:cNvGrpSpPr/>
         <p:nvPr/>
       </p:nvGrpSpPr>
@@ -22384,7 +22870,7 @@
       </p:grpSpPr>
       <p:sp>
         <p:nvSpPr>
-          <p:cNvPr id="265" name="Google Shape;265;p33"/>
+          <p:cNvPr id="273" name="Google Shape;273;p34"/>
           <p:cNvSpPr txBox="1"/>
           <p:nvPr>
             <p:ph type="title"/>
@@ -22440,7 +22926,7 @@
       </p:sp>
       <p:sp>
         <p:nvSpPr>
-          <p:cNvPr id="266" name="Google Shape;266;p33"/>
+          <p:cNvPr id="274" name="Google Shape;274;p34"/>
           <p:cNvSpPr txBox="1"/>
           <p:nvPr>
             <p:ph idx="1" type="body"/>
@@ -22497,12 +22983,12 @@
 </p:sld>
 </file>
 
-<file path=ppt/slides/slide22.xml><?xml version="1.0" encoding="utf-8"?>
+<file path=ppt/slides/slide23.xml><?xml version="1.0" encoding="utf-8"?>
 <p:sld xmlns:a="http://schemas.openxmlformats.org/drawingml/2006/main" xmlns:r="http://schemas.openxmlformats.org/officeDocument/2006/relationships" xmlns:mc="http://schemas.openxmlformats.org/markup-compatibility/2006" xmlns:mv="urn:schemas-microsoft-com:mac:vml" xmlns:p="http://schemas.openxmlformats.org/presentationml/2006/main" xmlns:c="http://schemas.openxmlformats.org/drawingml/2006/chart" xmlns:dgm="http://schemas.openxmlformats.org/drawingml/2006/diagram" xmlns:o="urn:schemas-microsoft-com:office:office" xmlns:v="urn:schemas-microsoft-com:vml" xmlns:pvml="urn:schemas-microsoft-com:office:powerpoint" xmlns:com="http://schemas.openxmlformats.org/drawingml/2006/compatibility" xmlns:p14="http://schemas.microsoft.com/office/powerpoint/2010/main" xmlns:p15="http://schemas.microsoft.com/office/powerpoint/2012/main" xmlns:ahyp="http://schemas.microsoft.com/office/drawing/2018/hyperlinkcolor">
   <p:cSld>
     <p:spTree>
       <p:nvGrpSpPr>
-        <p:cNvPr id="270" name="Shape 270"/>
+        <p:cNvPr id="278" name="Shape 278"/>
         <p:cNvGrpSpPr/>
         <p:nvPr/>
       </p:nvGrpSpPr>
@@ -22516,7 +23002,7 @@
       </p:grpSpPr>
       <p:sp>
         <p:nvSpPr>
-          <p:cNvPr id="271" name="Google Shape;271;p34"/>
+          <p:cNvPr id="279" name="Google Shape;279;p35"/>
           <p:cNvSpPr txBox="1"/>
           <p:nvPr>
             <p:ph type="title"/>
@@ -22569,7 +23055,7 @@
       </p:sp>
       <p:sp>
         <p:nvSpPr>
-          <p:cNvPr id="272" name="Google Shape;272;p34"/>
+          <p:cNvPr id="280" name="Google Shape;280;p35"/>
           <p:cNvSpPr txBox="1"/>
           <p:nvPr/>
         </p:nvSpPr>
@@ -22610,7 +23096,7 @@
               <a:buNone/>
             </a:pPr>
             <a:r>
-              <a:rPr b="1" lang="en-US" sz="1800">
+              <a:rPr b="1" lang="en-US" sz="1900">
                 <a:solidFill>
                   <a:srgbClr val="0B3D59"/>
                 </a:solidFill>
@@ -22622,7 +23108,7 @@
               <a:t>Phase 1: Proposal &amp; Literature Foundation (Weeks 1–4)</a:t>
             </a:r>
             <a:br>
-              <a:rPr b="1" lang="en-US" sz="1800">
+              <a:rPr b="1" lang="en-US" sz="1900">
                 <a:solidFill>
                   <a:schemeClr val="dk1"/>
                 </a:solidFill>
@@ -22633,7 +23119,7 @@
               </a:rPr>
             </a:br>
             <a:r>
-              <a:rPr lang="en-US" sz="1800">
+              <a:rPr lang="en-US" sz="1900">
                 <a:solidFill>
                   <a:schemeClr val="dk1"/>
                 </a:solidFill>
@@ -22644,7 +23130,7 @@
               </a:rPr>
               <a:t>Finalize literature review, gap analysis, problem statement. Build and deliver proposal presentation.</a:t>
             </a:r>
-            <a:endParaRPr i="1" sz="1800">
+            <a:endParaRPr i="1" sz="1900">
               <a:solidFill>
                 <a:schemeClr val="dk1"/>
               </a:solidFill>
@@ -22673,7 +23159,7 @@
               <a:buNone/>
             </a:pPr>
             <a:r>
-              <a:rPr b="1" lang="en-US" sz="1800">
+              <a:rPr b="1" lang="en-US" sz="1900">
                 <a:solidFill>
                   <a:srgbClr val="0B3D59"/>
                 </a:solidFill>
@@ -22685,7 +23171,7 @@
               <a:t>Phase 2: Data Pipeline &amp; Preprocessing (Weeks 5–7)</a:t>
             </a:r>
             <a:br>
-              <a:rPr b="1" lang="en-US" sz="1800">
+              <a:rPr b="1" lang="en-US" sz="1900">
                 <a:solidFill>
                   <a:schemeClr val="dk1"/>
                 </a:solidFill>
@@ -22696,7 +23182,7 @@
               </a:rPr>
             </a:br>
             <a:r>
-              <a:rPr lang="en-US" sz="1800">
+              <a:rPr lang="en-US" sz="1900">
                 <a:solidFill>
                   <a:schemeClr val="dk1"/>
                 </a:solidFill>
@@ -22707,7 +23193,7 @@
               </a:rPr>
               <a:t>Collect and standardize all five modality datasets. Address class imbalance. Build train/validation/test splits.</a:t>
             </a:r>
-            <a:endParaRPr sz="1800">
+            <a:endParaRPr sz="1900">
               <a:solidFill>
                 <a:schemeClr val="dk1"/>
               </a:solidFill>
@@ -22736,7 +23222,7 @@
               <a:buNone/>
             </a:pPr>
             <a:r>
-              <a:rPr b="1" lang="en-US" sz="1800">
+              <a:rPr b="1" lang="en-US" sz="1900">
                 <a:solidFill>
                   <a:srgbClr val="0B3D59"/>
                 </a:solidFill>
@@ -22748,7 +23234,7 @@
               <a:t>Phase 3: Encoder &amp; Fusion Development (Weeks 8–10)</a:t>
             </a:r>
             <a:br>
-              <a:rPr b="1" lang="en-US" sz="1800">
+              <a:rPr b="1" lang="en-US" sz="1900">
                 <a:solidFill>
                   <a:srgbClr val="0B3D59"/>
                 </a:solidFill>
@@ -22759,7 +23245,7 @@
               </a:rPr>
             </a:br>
             <a:r>
-              <a:rPr lang="en-US" sz="1800">
+              <a:rPr lang="en-US" sz="1900">
                 <a:solidFill>
                   <a:schemeClr val="dk1"/>
                 </a:solidFill>
@@ -22770,7 +23256,7 @@
               </a:rPr>
               <a:t>Train five ViT-B/16 specialist encoders. Implement the cross-modal attention fusion transformer, designed to handle a missing modality input. Begin mobile app development in parallel.</a:t>
             </a:r>
-            <a:endParaRPr sz="1800">
+            <a:endParaRPr sz="1900">
               <a:solidFill>
                 <a:schemeClr val="dk1"/>
               </a:solidFill>
@@ -22796,7 +23282,7 @@
             <a:r>
               <a:t/>
             </a:r>
-            <a:endParaRPr b="1" sz="2700">
+            <a:endParaRPr b="1" sz="2800">
               <a:solidFill>
                 <a:schemeClr val="dk1"/>
               </a:solidFill>
@@ -22816,12 +23302,12 @@
 </p:sld>
 </file>
 
-<file path=ppt/slides/slide23.xml><?xml version="1.0" encoding="utf-8"?>
+<file path=ppt/slides/slide24.xml><?xml version="1.0" encoding="utf-8"?>
 <p:sld xmlns:a="http://schemas.openxmlformats.org/drawingml/2006/main" xmlns:r="http://schemas.openxmlformats.org/officeDocument/2006/relationships" xmlns:mc="http://schemas.openxmlformats.org/markup-compatibility/2006" xmlns:mv="urn:schemas-microsoft-com:mac:vml" xmlns:p="http://schemas.openxmlformats.org/presentationml/2006/main" xmlns:c="http://schemas.openxmlformats.org/drawingml/2006/chart" xmlns:dgm="http://schemas.openxmlformats.org/drawingml/2006/diagram" xmlns:o="urn:schemas-microsoft-com:office:office" xmlns:v="urn:schemas-microsoft-com:vml" xmlns:pvml="urn:schemas-microsoft-com:office:powerpoint" xmlns:com="http://schemas.openxmlformats.org/drawingml/2006/compatibility" xmlns:p14="http://schemas.microsoft.com/office/powerpoint/2010/main" xmlns:p15="http://schemas.microsoft.com/office/powerpoint/2012/main" xmlns:ahyp="http://schemas.microsoft.com/office/drawing/2018/hyperlinkcolor">
   <p:cSld>
     <p:spTree>
       <p:nvGrpSpPr>
-        <p:cNvPr id="276" name="Shape 276"/>
+        <p:cNvPr id="284" name="Shape 284"/>
         <p:cNvGrpSpPr/>
         <p:nvPr/>
       </p:nvGrpSpPr>
@@ -22835,7 +23321,7 @@
       </p:grpSpPr>
       <p:sp>
         <p:nvSpPr>
-          <p:cNvPr id="277" name="Google Shape;277;p35"/>
+          <p:cNvPr id="285" name="Google Shape;285;p36"/>
           <p:cNvSpPr txBox="1"/>
           <p:nvPr>
             <p:ph type="title"/>
@@ -22884,7 +23370,7 @@
       </p:sp>
       <p:sp>
         <p:nvSpPr>
-          <p:cNvPr id="278" name="Google Shape;278;p35"/>
+          <p:cNvPr id="286" name="Google Shape;286;p36"/>
           <p:cNvSpPr txBox="1"/>
           <p:nvPr/>
         </p:nvSpPr>
@@ -22925,7 +23411,7 @@
               <a:buNone/>
             </a:pPr>
             <a:r>
-              <a:rPr b="1" lang="en-US" sz="1800">
+              <a:rPr b="1" lang="en-US" sz="1900">
                 <a:solidFill>
                   <a:srgbClr val="0B3D59"/>
                 </a:solidFill>
@@ -22937,7 +23423,7 @@
               <a:t>Phase 4: Model Testing &amp; App Integration (Weeks 11–13)</a:t>
             </a:r>
             <a:br>
-              <a:rPr b="1" lang="en-US" sz="1800">
+              <a:rPr b="1" lang="en-US" sz="1900">
                 <a:solidFill>
                   <a:schemeClr val="dk1"/>
                 </a:solidFill>
@@ -22948,7 +23434,7 @@
               </a:rPr>
             </a:br>
             <a:r>
-              <a:rPr lang="en-US" sz="1800">
+              <a:rPr lang="en-US" sz="1900">
                 <a:solidFill>
                   <a:schemeClr val="dk1"/>
                 </a:solidFill>
@@ -22959,7 +23445,7 @@
               </a:rPr>
               <a:t>Full model training and evaluation. Continue app development, connect app to the model pipeline end-to-end.</a:t>
             </a:r>
-            <a:endParaRPr sz="1800">
+            <a:endParaRPr sz="1900">
               <a:solidFill>
                 <a:schemeClr val="dk1"/>
               </a:solidFill>
@@ -22988,7 +23474,7 @@
               <a:buNone/>
             </a:pPr>
             <a:r>
-              <a:rPr b="1" lang="en-US" sz="1800">
+              <a:rPr b="1" lang="en-US" sz="1900">
                 <a:solidFill>
                   <a:srgbClr val="0B3D59"/>
                 </a:solidFill>
@@ -23000,7 +23486,7 @@
               <a:t>Phase 5: Integration, Testing &amp; Documentation (Weeks 14–16)</a:t>
             </a:r>
             <a:br>
-              <a:rPr b="1" lang="en-US" sz="1800">
+              <a:rPr b="1" lang="en-US" sz="1900">
                 <a:solidFill>
                   <a:srgbClr val="0B3D59"/>
                 </a:solidFill>
@@ -23011,7 +23497,7 @@
               </a:rPr>
             </a:br>
             <a:r>
-              <a:rPr lang="en-US" sz="1800">
+              <a:rPr lang="en-US" sz="1900">
                 <a:solidFill>
                   <a:schemeClr val="dk1"/>
                 </a:solidFill>
@@ -23022,7 +23508,7 @@
               </a:rPr>
               <a:t>Final integration testing between app and model. Benchmark against literature baselines. Finalize documentation.</a:t>
             </a:r>
-            <a:endParaRPr sz="1800">
+            <a:endParaRPr sz="1900">
               <a:solidFill>
                 <a:schemeClr val="dk1"/>
               </a:solidFill>
@@ -23051,7 +23537,7 @@
               <a:buNone/>
             </a:pPr>
             <a:r>
-              <a:rPr b="1" lang="en-US" sz="1800">
+              <a:rPr b="1" lang="en-US" sz="1900">
                 <a:solidFill>
                   <a:srgbClr val="0B3D59"/>
                 </a:solidFill>
@@ -23063,7 +23549,7 @@
               <a:t>Phase 6: Part 1 Defense Prep (After Finals)</a:t>
             </a:r>
             <a:br>
-              <a:rPr b="1" lang="en-US" sz="1800">
+              <a:rPr b="1" lang="en-US" sz="1900">
                 <a:solidFill>
                   <a:schemeClr val="dk1"/>
                 </a:solidFill>
@@ -23074,7 +23560,7 @@
               </a:rPr>
             </a:br>
             <a:r>
-              <a:rPr lang="en-US" sz="1800">
+              <a:rPr lang="en-US" sz="1900">
                 <a:solidFill>
                   <a:schemeClr val="dk1"/>
                 </a:solidFill>
@@ -23085,7 +23571,7 @@
               </a:rPr>
               <a:t>Rehearse and deliver Part 1 Defense.</a:t>
             </a:r>
-            <a:endParaRPr b="1" sz="1800">
+            <a:endParaRPr b="1" sz="1900">
               <a:solidFill>
                 <a:schemeClr val="dk1"/>
               </a:solidFill>
@@ -23105,12 +23591,12 @@
 </p:sld>
 </file>
 
-<file path=ppt/slides/slide24.xml><?xml version="1.0" encoding="utf-8"?>
+<file path=ppt/slides/slide25.xml><?xml version="1.0" encoding="utf-8"?>
 <p:sld xmlns:a="http://schemas.openxmlformats.org/drawingml/2006/main" xmlns:r="http://schemas.openxmlformats.org/officeDocument/2006/relationships" xmlns:mc="http://schemas.openxmlformats.org/markup-compatibility/2006" xmlns:mv="urn:schemas-microsoft-com:mac:vml" xmlns:p="http://schemas.openxmlformats.org/presentationml/2006/main" xmlns:c="http://schemas.openxmlformats.org/drawingml/2006/chart" xmlns:dgm="http://schemas.openxmlformats.org/drawingml/2006/diagram" xmlns:o="urn:schemas-microsoft-com:office:office" xmlns:v="urn:schemas-microsoft-com:vml" xmlns:pvml="urn:schemas-microsoft-com:office:powerpoint" xmlns:com="http://schemas.openxmlformats.org/drawingml/2006/compatibility" xmlns:p14="http://schemas.microsoft.com/office/powerpoint/2010/main" xmlns:p15="http://schemas.microsoft.com/office/powerpoint/2012/main" xmlns:ahyp="http://schemas.microsoft.com/office/drawing/2018/hyperlinkcolor">
   <p:cSld>
     <p:spTree>
       <p:nvGrpSpPr>
-        <p:cNvPr id="282" name="Shape 282"/>
+        <p:cNvPr id="290" name="Shape 290"/>
         <p:cNvGrpSpPr/>
         <p:nvPr/>
       </p:nvGrpSpPr>
@@ -23124,7 +23610,7 @@
       </p:grpSpPr>
       <p:sp>
         <p:nvSpPr>
-          <p:cNvPr id="283" name="Google Shape;283;p36"/>
+          <p:cNvPr id="291" name="Google Shape;291;p37"/>
           <p:cNvSpPr txBox="1"/>
           <p:nvPr>
             <p:ph type="title"/>
@@ -23173,7 +23659,7 @@
       </p:sp>
       <p:sp>
         <p:nvSpPr>
-          <p:cNvPr id="284" name="Google Shape;284;p36"/>
+          <p:cNvPr id="292" name="Google Shape;292;p37"/>
           <p:cNvSpPr txBox="1"/>
           <p:nvPr>
             <p:ph idx="1" type="body"/>
@@ -23230,12 +23716,12 @@
 </p:sld>
 </file>
 
-<file path=ppt/slides/slide25.xml><?xml version="1.0" encoding="utf-8"?>
+<file path=ppt/slides/slide26.xml><?xml version="1.0" encoding="utf-8"?>
 <p:sld xmlns:a="http://schemas.openxmlformats.org/drawingml/2006/main" xmlns:r="http://schemas.openxmlformats.org/officeDocument/2006/relationships" xmlns:mc="http://schemas.openxmlformats.org/markup-compatibility/2006" xmlns:mv="urn:schemas-microsoft-com:mac:vml" xmlns:p="http://schemas.openxmlformats.org/presentationml/2006/main" xmlns:c="http://schemas.openxmlformats.org/drawingml/2006/chart" xmlns:dgm="http://schemas.openxmlformats.org/drawingml/2006/diagram" xmlns:o="urn:schemas-microsoft-com:office:office" xmlns:v="urn:schemas-microsoft-com:vml" xmlns:pvml="urn:schemas-microsoft-com:office:powerpoint" xmlns:com="http://schemas.openxmlformats.org/drawingml/2006/compatibility" xmlns:p14="http://schemas.microsoft.com/office/powerpoint/2010/main" xmlns:p15="http://schemas.microsoft.com/office/powerpoint/2012/main" xmlns:ahyp="http://schemas.microsoft.com/office/drawing/2018/hyperlinkcolor">
   <p:cSld>
     <p:spTree>
       <p:nvGrpSpPr>
-        <p:cNvPr id="288" name="Shape 288"/>
+        <p:cNvPr id="296" name="Shape 296"/>
         <p:cNvGrpSpPr/>
         <p:nvPr/>
       </p:nvGrpSpPr>
@@ -23249,7 +23735,7 @@
       </p:grpSpPr>
       <p:sp>
         <p:nvSpPr>
-          <p:cNvPr id="289" name="Google Shape;289;p37"/>
+          <p:cNvPr id="297" name="Google Shape;297;p38"/>
           <p:cNvSpPr txBox="1"/>
           <p:nvPr>
             <p:ph type="title"/>
@@ -23305,7 +23791,7 @@
       </p:sp>
       <p:graphicFrame>
         <p:nvGraphicFramePr>
-          <p:cNvPr id="290" name="Google Shape;290;p37"/>
+          <p:cNvPr id="298" name="Google Shape;298;p38"/>
           <p:cNvGraphicFramePr/>
           <p:nvPr/>
         </p:nvGraphicFramePr>
@@ -23318,7 +23804,7 @@
             <a:tbl>
               <a:tblPr>
                 <a:noFill/>
-                <a:tableStyleId>{6DCBE433-D38A-414C-8CE7-A03D4E96D332}</a:tableStyleId>
+                <a:tableStyleId>{B72C5A8D-5030-47FC-9FBE-639BE6E02443}</a:tableStyleId>
               </a:tblPr>
               <a:tblGrid>
                 <a:gridCol w="2720975"/>
@@ -23765,12 +24251,12 @@
 </p:sld>
 </file>
 
-<file path=ppt/slides/slide26.xml><?xml version="1.0" encoding="utf-8"?>
+<file path=ppt/slides/slide27.xml><?xml version="1.0" encoding="utf-8"?>
 <p:sld xmlns:a="http://schemas.openxmlformats.org/drawingml/2006/main" xmlns:r="http://schemas.openxmlformats.org/officeDocument/2006/relationships" xmlns:mc="http://schemas.openxmlformats.org/markup-compatibility/2006" xmlns:mv="urn:schemas-microsoft-com:mac:vml" xmlns:p="http://schemas.openxmlformats.org/presentationml/2006/main" xmlns:c="http://schemas.openxmlformats.org/drawingml/2006/chart" xmlns:dgm="http://schemas.openxmlformats.org/drawingml/2006/diagram" xmlns:o="urn:schemas-microsoft-com:office:office" xmlns:v="urn:schemas-microsoft-com:vml" xmlns:pvml="urn:schemas-microsoft-com:office:powerpoint" xmlns:com="http://schemas.openxmlformats.org/drawingml/2006/compatibility" xmlns:p14="http://schemas.microsoft.com/office/powerpoint/2010/main" xmlns:p15="http://schemas.microsoft.com/office/powerpoint/2012/main" xmlns:ahyp="http://schemas.microsoft.com/office/drawing/2018/hyperlinkcolor">
   <p:cSld>
     <p:spTree>
       <p:nvGrpSpPr>
-        <p:cNvPr id="294" name="Shape 294"/>
+        <p:cNvPr id="302" name="Shape 302"/>
         <p:cNvGrpSpPr/>
         <p:nvPr/>
       </p:nvGrpSpPr>
@@ -23784,7 +24270,7 @@
       </p:grpSpPr>
       <p:sp>
         <p:nvSpPr>
-          <p:cNvPr id="295" name="Google Shape;295;p38"/>
+          <p:cNvPr id="303" name="Google Shape;303;p39"/>
           <p:cNvSpPr txBox="1"/>
           <p:nvPr>
             <p:ph type="title"/>
@@ -23840,7 +24326,7 @@
       </p:sp>
       <p:graphicFrame>
         <p:nvGraphicFramePr>
-          <p:cNvPr id="296" name="Google Shape;296;p38"/>
+          <p:cNvPr id="304" name="Google Shape;304;p39"/>
           <p:cNvGraphicFramePr/>
           <p:nvPr/>
         </p:nvGraphicFramePr>
@@ -23853,7 +24339,7 @@
             <a:tbl>
               <a:tblPr>
                 <a:noFill/>
-                <a:tableStyleId>{6DCBE433-D38A-414C-8CE7-A03D4E96D332}</a:tableStyleId>
+                <a:tableStyleId>{B72C5A8D-5030-47FC-9FBE-639BE6E02443}</a:tableStyleId>
               </a:tblPr>
               <a:tblGrid>
                 <a:gridCol w="2720975"/>
@@ -24149,7 +24635,7 @@
                   <a:tcPr marT="91425" marB="91425" marR="91425" marL="91425"/>
                 </a:tc>
               </a:tr>
-              <a:tr h="1030450">
+              <a:tr h="2396300">
                 <a:tc>
                   <a:txBody>
                     <a:bodyPr/>
@@ -24874,6 +25360,1833 @@
         </p:nvSpPr>
         <p:spPr>
           <a:xfrm>
+            <a:off x="457200" y="168230"/>
+            <a:ext cx="8229600" cy="876900"/>
+          </a:xfrm>
+          <a:prstGeom prst="rect">
+            <a:avLst/>
+          </a:prstGeom>
+          <a:noFill/>
+          <a:ln>
+            <a:noFill/>
+          </a:ln>
+        </p:spPr>
+        <p:txBody>
+          <a:bodyPr anchorCtr="0" anchor="ctr" bIns="45700" lIns="91425" spcFirstLastPara="1" rIns="91425" wrap="square" tIns="45700">
+            <a:noAutofit/>
+          </a:bodyPr>
+          <a:lstStyle/>
+          <a:p>
+            <a:pPr indent="0" lvl="0" marL="0" rtl="0" algn="ctr">
+              <a:spcBef>
+                <a:spcPts val="0"/>
+              </a:spcBef>
+              <a:spcAft>
+                <a:spcPts val="0"/>
+              </a:spcAft>
+              <a:buSzPts val="1400"/>
+              <a:buNone/>
+            </a:pPr>
+            <a:r>
+              <a:rPr b="1" lang="en-US" sz="4000">
+                <a:solidFill>
+                  <a:srgbClr val="0B3D59"/>
+                </a:solidFill>
+              </a:rPr>
+              <a:t>Physician Density</a:t>
+            </a:r>
+            <a:endParaRPr>
+              <a:solidFill>
+                <a:srgbClr val="0B3D59"/>
+              </a:solidFill>
+            </a:endParaRPr>
+          </a:p>
+        </p:txBody>
+      </p:sp>
+      <p:graphicFrame>
+        <p:nvGraphicFramePr>
+          <p:cNvPr id="110" name="Google Shape;110;p17"/>
+          <p:cNvGraphicFramePr/>
+          <p:nvPr/>
+        </p:nvGraphicFramePr>
+        <p:xfrm>
+          <a:off x="457190" y="1516502"/>
+          <a:ext cx="3000000" cy="3000000"/>
+        </p:xfrm>
+        <a:graphic>
+          <a:graphicData uri="http://schemas.openxmlformats.org/drawingml/2006/table">
+            <a:tbl>
+              <a:tblPr>
+                <a:noFill/>
+                <a:tableStyleId>{5F5D670A-1C51-49B9-9B8F-6BC062B6B0A7}</a:tableStyleId>
+              </a:tblPr>
+              <a:tblGrid>
+                <a:gridCol w="2743175"/>
+                <a:gridCol w="2743175"/>
+                <a:gridCol w="2743175"/>
+              </a:tblGrid>
+              <a:tr h="539350">
+                <a:tc>
+                  <a:txBody>
+                    <a:bodyPr/>
+                    <a:lstStyle/>
+                    <a:p>
+                      <a:pPr indent="0" lvl="0" marL="0" rtl="0" algn="ctr">
+                        <a:lnSpc>
+                          <a:spcPct val="115000"/>
+                        </a:lnSpc>
+                        <a:spcBef>
+                          <a:spcPts val="0"/>
+                        </a:spcBef>
+                        <a:spcAft>
+                          <a:spcPts val="0"/>
+                        </a:spcAft>
+                        <a:buNone/>
+                      </a:pPr>
+                      <a:r>
+                        <a:rPr b="1" lang="en-US" sz="2000">
+                          <a:solidFill>
+                            <a:schemeClr val="lt1"/>
+                          </a:solidFill>
+                          <a:latin typeface="Times New Roman"/>
+                          <a:ea typeface="Times New Roman"/>
+                          <a:cs typeface="Times New Roman"/>
+                          <a:sym typeface="Times New Roman"/>
+                        </a:rPr>
+                        <a:t>Country</a:t>
+                      </a:r>
+                      <a:endParaRPr b="1" sz="2000">
+                        <a:solidFill>
+                          <a:schemeClr val="lt1"/>
+                        </a:solidFill>
+                        <a:latin typeface="Times New Roman"/>
+                        <a:ea typeface="Times New Roman"/>
+                        <a:cs typeface="Times New Roman"/>
+                        <a:sym typeface="Times New Roman"/>
+                      </a:endParaRPr>
+                    </a:p>
+                  </a:txBody>
+                  <a:tcPr marT="91425" marB="91425" marR="91425" marL="91425">
+                    <a:lnL cap="flat" cmpd="sng" w="9525">
+                      <a:solidFill>
+                        <a:srgbClr val="9E9E9E"/>
+                      </a:solidFill>
+                      <a:prstDash val="solid"/>
+                      <a:round/>
+                      <a:headEnd len="sm" w="sm" type="none"/>
+                      <a:tailEnd len="sm" w="sm" type="none"/>
+                    </a:lnL>
+                    <a:lnR cap="flat" cmpd="sng" w="9525">
+                      <a:solidFill>
+                        <a:srgbClr val="9E9E9E"/>
+                      </a:solidFill>
+                      <a:prstDash val="solid"/>
+                      <a:round/>
+                      <a:headEnd len="sm" w="sm" type="none"/>
+                      <a:tailEnd len="sm" w="sm" type="none"/>
+                    </a:lnR>
+                    <a:lnT cap="flat" cmpd="sng" w="9525">
+                      <a:solidFill>
+                        <a:srgbClr val="9E9E9E"/>
+                      </a:solidFill>
+                      <a:prstDash val="solid"/>
+                      <a:round/>
+                      <a:headEnd len="sm" w="sm" type="none"/>
+                      <a:tailEnd len="sm" w="sm" type="none"/>
+                    </a:lnT>
+                    <a:lnB cap="flat" cmpd="sng" w="9525">
+                      <a:solidFill>
+                        <a:srgbClr val="9E9E9E"/>
+                      </a:solidFill>
+                      <a:prstDash val="solid"/>
+                      <a:round/>
+                      <a:headEnd len="sm" w="sm" type="none"/>
+                      <a:tailEnd len="sm" w="sm" type="none"/>
+                    </a:lnB>
+                    <a:solidFill>
+                      <a:srgbClr val="1C7293"/>
+                    </a:solidFill>
+                  </a:tcPr>
+                </a:tc>
+                <a:tc>
+                  <a:txBody>
+                    <a:bodyPr/>
+                    <a:lstStyle/>
+                    <a:p>
+                      <a:pPr indent="0" lvl="0" marL="0" rtl="0" algn="ctr">
+                        <a:lnSpc>
+                          <a:spcPct val="115000"/>
+                        </a:lnSpc>
+                        <a:spcBef>
+                          <a:spcPts val="0"/>
+                        </a:spcBef>
+                        <a:spcAft>
+                          <a:spcPts val="0"/>
+                        </a:spcAft>
+                        <a:buNone/>
+                      </a:pPr>
+                      <a:r>
+                        <a:rPr b="1" lang="en-US" sz="2000">
+                          <a:solidFill>
+                            <a:schemeClr val="lt1"/>
+                          </a:solidFill>
+                          <a:latin typeface="Times New Roman"/>
+                          <a:ea typeface="Times New Roman"/>
+                          <a:cs typeface="Times New Roman"/>
+                          <a:sym typeface="Times New Roman"/>
+                        </a:rPr>
+                        <a:t>Physicians / 10,000</a:t>
+                      </a:r>
+                      <a:endParaRPr b="1" sz="2000">
+                        <a:solidFill>
+                          <a:schemeClr val="lt1"/>
+                        </a:solidFill>
+                        <a:latin typeface="Times New Roman"/>
+                        <a:ea typeface="Times New Roman"/>
+                        <a:cs typeface="Times New Roman"/>
+                        <a:sym typeface="Times New Roman"/>
+                      </a:endParaRPr>
+                    </a:p>
+                  </a:txBody>
+                  <a:tcPr marT="91425" marB="91425" marR="91425" marL="91425">
+                    <a:lnL cap="flat" cmpd="sng" w="9525">
+                      <a:solidFill>
+                        <a:srgbClr val="9E9E9E"/>
+                      </a:solidFill>
+                      <a:prstDash val="solid"/>
+                      <a:round/>
+                      <a:headEnd len="sm" w="sm" type="none"/>
+                      <a:tailEnd len="sm" w="sm" type="none"/>
+                    </a:lnL>
+                    <a:lnR cap="flat" cmpd="sng" w="9525">
+                      <a:solidFill>
+                        <a:srgbClr val="9E9E9E"/>
+                      </a:solidFill>
+                      <a:prstDash val="solid"/>
+                      <a:round/>
+                      <a:headEnd len="sm" w="sm" type="none"/>
+                      <a:tailEnd len="sm" w="sm" type="none"/>
+                    </a:lnR>
+                    <a:lnT cap="flat" cmpd="sng" w="9525">
+                      <a:solidFill>
+                        <a:srgbClr val="9E9E9E"/>
+                      </a:solidFill>
+                      <a:prstDash val="solid"/>
+                      <a:round/>
+                      <a:headEnd len="sm" w="sm" type="none"/>
+                      <a:tailEnd len="sm" w="sm" type="none"/>
+                    </a:lnT>
+                    <a:lnB cap="flat" cmpd="sng" w="9525">
+                      <a:solidFill>
+                        <a:srgbClr val="9E9E9E"/>
+                      </a:solidFill>
+                      <a:prstDash val="solid"/>
+                      <a:round/>
+                      <a:headEnd len="sm" w="sm" type="none"/>
+                      <a:tailEnd len="sm" w="sm" type="none"/>
+                    </a:lnB>
+                    <a:solidFill>
+                      <a:srgbClr val="1C7293"/>
+                    </a:solidFill>
+                  </a:tcPr>
+                </a:tc>
+                <a:tc>
+                  <a:txBody>
+                    <a:bodyPr/>
+                    <a:lstStyle/>
+                    <a:p>
+                      <a:pPr indent="0" lvl="0" marL="0" rtl="0" algn="ctr">
+                        <a:lnSpc>
+                          <a:spcPct val="115000"/>
+                        </a:lnSpc>
+                        <a:spcBef>
+                          <a:spcPts val="0"/>
+                        </a:spcBef>
+                        <a:spcAft>
+                          <a:spcPts val="0"/>
+                        </a:spcAft>
+                        <a:buNone/>
+                      </a:pPr>
+                      <a:r>
+                        <a:rPr b="1" lang="en-US" sz="2000">
+                          <a:solidFill>
+                            <a:schemeClr val="lt1"/>
+                          </a:solidFill>
+                          <a:latin typeface="Times New Roman"/>
+                          <a:ea typeface="Times New Roman"/>
+                          <a:cs typeface="Times New Roman"/>
+                          <a:sym typeface="Times New Roman"/>
+                        </a:rPr>
+                        <a:t>People / Physician</a:t>
+                      </a:r>
+                      <a:endParaRPr b="1" sz="2000">
+                        <a:solidFill>
+                          <a:schemeClr val="lt1"/>
+                        </a:solidFill>
+                        <a:latin typeface="Times New Roman"/>
+                        <a:ea typeface="Times New Roman"/>
+                        <a:cs typeface="Times New Roman"/>
+                        <a:sym typeface="Times New Roman"/>
+                      </a:endParaRPr>
+                    </a:p>
+                  </a:txBody>
+                  <a:tcPr marT="91425" marB="91425" marR="91425" marL="91425">
+                    <a:lnL cap="flat" cmpd="sng" w="9525">
+                      <a:solidFill>
+                        <a:srgbClr val="9E9E9E"/>
+                      </a:solidFill>
+                      <a:prstDash val="solid"/>
+                      <a:round/>
+                      <a:headEnd len="sm" w="sm" type="none"/>
+                      <a:tailEnd len="sm" w="sm" type="none"/>
+                    </a:lnL>
+                    <a:lnR cap="flat" cmpd="sng" w="9525">
+                      <a:solidFill>
+                        <a:srgbClr val="9E9E9E"/>
+                      </a:solidFill>
+                      <a:prstDash val="solid"/>
+                      <a:round/>
+                      <a:headEnd len="sm" w="sm" type="none"/>
+                      <a:tailEnd len="sm" w="sm" type="none"/>
+                    </a:lnR>
+                    <a:lnT cap="flat" cmpd="sng" w="9525">
+                      <a:solidFill>
+                        <a:srgbClr val="9E9E9E"/>
+                      </a:solidFill>
+                      <a:prstDash val="solid"/>
+                      <a:round/>
+                      <a:headEnd len="sm" w="sm" type="none"/>
+                      <a:tailEnd len="sm" w="sm" type="none"/>
+                    </a:lnT>
+                    <a:lnB cap="flat" cmpd="sng" w="9525">
+                      <a:solidFill>
+                        <a:srgbClr val="9E9E9E"/>
+                      </a:solidFill>
+                      <a:prstDash val="solid"/>
+                      <a:round/>
+                      <a:headEnd len="sm" w="sm" type="none"/>
+                      <a:tailEnd len="sm" w="sm" type="none"/>
+                    </a:lnB>
+                    <a:solidFill>
+                      <a:srgbClr val="1C7293"/>
+                    </a:solidFill>
+                  </a:tcPr>
+                </a:tc>
+              </a:tr>
+              <a:tr h="539350">
+                <a:tc>
+                  <a:txBody>
+                    <a:bodyPr/>
+                    <a:lstStyle/>
+                    <a:p>
+                      <a:pPr indent="0" lvl="0" marL="0" rtl="0" algn="l">
+                        <a:spcBef>
+                          <a:spcPts val="0"/>
+                        </a:spcBef>
+                        <a:spcAft>
+                          <a:spcPts val="0"/>
+                        </a:spcAft>
+                        <a:buNone/>
+                      </a:pPr>
+                      <a:r>
+                        <a:rPr lang="en-US" sz="2000">
+                          <a:solidFill>
+                            <a:schemeClr val="dk1"/>
+                          </a:solidFill>
+                          <a:latin typeface="Times New Roman"/>
+                          <a:ea typeface="Times New Roman"/>
+                          <a:cs typeface="Times New Roman"/>
+                          <a:sym typeface="Times New Roman"/>
+                        </a:rPr>
+                        <a:t>Germany</a:t>
+                      </a:r>
+                      <a:endParaRPr sz="2000">
+                        <a:latin typeface="Times New Roman"/>
+                        <a:ea typeface="Times New Roman"/>
+                        <a:cs typeface="Times New Roman"/>
+                        <a:sym typeface="Times New Roman"/>
+                      </a:endParaRPr>
+                    </a:p>
+                  </a:txBody>
+                  <a:tcPr marT="91425" marB="91425" marR="91425" marL="91425">
+                    <a:lnL cap="flat" cmpd="sng" w="9525">
+                      <a:solidFill>
+                        <a:srgbClr val="9E9E9E"/>
+                      </a:solidFill>
+                      <a:prstDash val="solid"/>
+                      <a:round/>
+                      <a:headEnd len="sm" w="sm" type="none"/>
+                      <a:tailEnd len="sm" w="sm" type="none"/>
+                    </a:lnL>
+                    <a:lnR cap="flat" cmpd="sng" w="9525">
+                      <a:solidFill>
+                        <a:srgbClr val="9E9E9E"/>
+                      </a:solidFill>
+                      <a:prstDash val="solid"/>
+                      <a:round/>
+                      <a:headEnd len="sm" w="sm" type="none"/>
+                      <a:tailEnd len="sm" w="sm" type="none"/>
+                    </a:lnR>
+                    <a:lnT cap="flat" cmpd="sng" w="9525">
+                      <a:solidFill>
+                        <a:srgbClr val="9E9E9E"/>
+                      </a:solidFill>
+                      <a:prstDash val="solid"/>
+                      <a:round/>
+                      <a:headEnd len="sm" w="sm" type="none"/>
+                      <a:tailEnd len="sm" w="sm" type="none"/>
+                    </a:lnT>
+                    <a:lnB cap="flat" cmpd="sng" w="9525">
+                      <a:solidFill>
+                        <a:srgbClr val="9E9E9E"/>
+                      </a:solidFill>
+                      <a:prstDash val="solid"/>
+                      <a:round/>
+                      <a:headEnd len="sm" w="sm" type="none"/>
+                      <a:tailEnd len="sm" w="sm" type="none"/>
+                    </a:lnB>
+                  </a:tcPr>
+                </a:tc>
+                <a:tc>
+                  <a:txBody>
+                    <a:bodyPr/>
+                    <a:lstStyle/>
+                    <a:p>
+                      <a:pPr indent="0" lvl="0" marL="0" rtl="0" algn="r">
+                        <a:lnSpc>
+                          <a:spcPct val="115000"/>
+                        </a:lnSpc>
+                        <a:spcBef>
+                          <a:spcPts val="0"/>
+                        </a:spcBef>
+                        <a:spcAft>
+                          <a:spcPts val="0"/>
+                        </a:spcAft>
+                        <a:buNone/>
+                      </a:pPr>
+                      <a:r>
+                        <a:rPr lang="en-US" sz="2000">
+                          <a:solidFill>
+                            <a:schemeClr val="dk1"/>
+                          </a:solidFill>
+                          <a:latin typeface="Times New Roman"/>
+                          <a:ea typeface="Times New Roman"/>
+                          <a:cs typeface="Times New Roman"/>
+                          <a:sym typeface="Times New Roman"/>
+                        </a:rPr>
+                        <a:t>45.9</a:t>
+                      </a:r>
+                      <a:endParaRPr sz="2000">
+                        <a:latin typeface="Times New Roman"/>
+                        <a:ea typeface="Times New Roman"/>
+                        <a:cs typeface="Times New Roman"/>
+                        <a:sym typeface="Times New Roman"/>
+                      </a:endParaRPr>
+                    </a:p>
+                  </a:txBody>
+                  <a:tcPr marT="91425" marB="91425" marR="91425" marL="91425">
+                    <a:lnL cap="flat" cmpd="sng" w="9525">
+                      <a:solidFill>
+                        <a:srgbClr val="9E9E9E"/>
+                      </a:solidFill>
+                      <a:prstDash val="solid"/>
+                      <a:round/>
+                      <a:headEnd len="sm" w="sm" type="none"/>
+                      <a:tailEnd len="sm" w="sm" type="none"/>
+                    </a:lnL>
+                    <a:lnR cap="flat" cmpd="sng" w="9525">
+                      <a:solidFill>
+                        <a:srgbClr val="9E9E9E"/>
+                      </a:solidFill>
+                      <a:prstDash val="solid"/>
+                      <a:round/>
+                      <a:headEnd len="sm" w="sm" type="none"/>
+                      <a:tailEnd len="sm" w="sm" type="none"/>
+                    </a:lnR>
+                    <a:lnT cap="flat" cmpd="sng" w="9525">
+                      <a:solidFill>
+                        <a:srgbClr val="9E9E9E"/>
+                      </a:solidFill>
+                      <a:prstDash val="solid"/>
+                      <a:round/>
+                      <a:headEnd len="sm" w="sm" type="none"/>
+                      <a:tailEnd len="sm" w="sm" type="none"/>
+                    </a:lnT>
+                    <a:lnB cap="flat" cmpd="sng" w="9525">
+                      <a:solidFill>
+                        <a:srgbClr val="9E9E9E"/>
+                      </a:solidFill>
+                      <a:prstDash val="solid"/>
+                      <a:round/>
+                      <a:headEnd len="sm" w="sm" type="none"/>
+                      <a:tailEnd len="sm" w="sm" type="none"/>
+                    </a:lnB>
+                  </a:tcPr>
+                </a:tc>
+                <a:tc>
+                  <a:txBody>
+                    <a:bodyPr/>
+                    <a:lstStyle/>
+                    <a:p>
+                      <a:pPr indent="0" lvl="0" marL="0" rtl="0" algn="r">
+                        <a:lnSpc>
+                          <a:spcPct val="115000"/>
+                        </a:lnSpc>
+                        <a:spcBef>
+                          <a:spcPts val="0"/>
+                        </a:spcBef>
+                        <a:spcAft>
+                          <a:spcPts val="0"/>
+                        </a:spcAft>
+                        <a:buNone/>
+                      </a:pPr>
+                      <a:r>
+                        <a:rPr lang="en-US" sz="2000">
+                          <a:latin typeface="Times New Roman"/>
+                          <a:ea typeface="Times New Roman"/>
+                          <a:cs typeface="Times New Roman"/>
+                          <a:sym typeface="Times New Roman"/>
+                        </a:rPr>
+                        <a:t>217</a:t>
+                      </a:r>
+                      <a:endParaRPr sz="2000">
+                        <a:latin typeface="Times New Roman"/>
+                        <a:ea typeface="Times New Roman"/>
+                        <a:cs typeface="Times New Roman"/>
+                        <a:sym typeface="Times New Roman"/>
+                      </a:endParaRPr>
+                    </a:p>
+                  </a:txBody>
+                  <a:tcPr marT="91425" marB="91425" marR="91425" marL="91425">
+                    <a:lnL cap="flat" cmpd="sng" w="9525">
+                      <a:solidFill>
+                        <a:srgbClr val="9E9E9E"/>
+                      </a:solidFill>
+                      <a:prstDash val="solid"/>
+                      <a:round/>
+                      <a:headEnd len="sm" w="sm" type="none"/>
+                      <a:tailEnd len="sm" w="sm" type="none"/>
+                    </a:lnL>
+                    <a:lnR cap="flat" cmpd="sng" w="9525">
+                      <a:solidFill>
+                        <a:srgbClr val="9E9E9E"/>
+                      </a:solidFill>
+                      <a:prstDash val="solid"/>
+                      <a:round/>
+                      <a:headEnd len="sm" w="sm" type="none"/>
+                      <a:tailEnd len="sm" w="sm" type="none"/>
+                    </a:lnR>
+                    <a:lnT cap="flat" cmpd="sng" w="9525">
+                      <a:solidFill>
+                        <a:srgbClr val="9E9E9E"/>
+                      </a:solidFill>
+                      <a:prstDash val="solid"/>
+                      <a:round/>
+                      <a:headEnd len="sm" w="sm" type="none"/>
+                      <a:tailEnd len="sm" w="sm" type="none"/>
+                    </a:lnT>
+                    <a:lnB cap="flat" cmpd="sng" w="9525">
+                      <a:solidFill>
+                        <a:srgbClr val="9E9E9E"/>
+                      </a:solidFill>
+                      <a:prstDash val="solid"/>
+                      <a:round/>
+                      <a:headEnd len="sm" w="sm" type="none"/>
+                      <a:tailEnd len="sm" w="sm" type="none"/>
+                    </a:lnB>
+                  </a:tcPr>
+                </a:tc>
+              </a:tr>
+              <a:tr h="539350">
+                <a:tc>
+                  <a:txBody>
+                    <a:bodyPr/>
+                    <a:lstStyle/>
+                    <a:p>
+                      <a:pPr indent="0" lvl="0" marL="0" rtl="0" algn="l">
+                        <a:spcBef>
+                          <a:spcPts val="0"/>
+                        </a:spcBef>
+                        <a:spcAft>
+                          <a:spcPts val="0"/>
+                        </a:spcAft>
+                        <a:buNone/>
+                      </a:pPr>
+                      <a:r>
+                        <a:rPr lang="en-US" sz="2000">
+                          <a:latin typeface="Times New Roman"/>
+                          <a:ea typeface="Times New Roman"/>
+                          <a:cs typeface="Times New Roman"/>
+                          <a:sym typeface="Times New Roman"/>
+                        </a:rPr>
+                        <a:t>Austria</a:t>
+                      </a:r>
+                      <a:endParaRPr sz="2000">
+                        <a:latin typeface="Times New Roman"/>
+                        <a:ea typeface="Times New Roman"/>
+                        <a:cs typeface="Times New Roman"/>
+                        <a:sym typeface="Times New Roman"/>
+                      </a:endParaRPr>
+                    </a:p>
+                  </a:txBody>
+                  <a:tcPr marT="91425" marB="91425" marR="91425" marL="91425">
+                    <a:lnL cap="flat" cmpd="sng" w="9525">
+                      <a:solidFill>
+                        <a:srgbClr val="9E9E9E"/>
+                      </a:solidFill>
+                      <a:prstDash val="solid"/>
+                      <a:round/>
+                      <a:headEnd len="sm" w="sm" type="none"/>
+                      <a:tailEnd len="sm" w="sm" type="none"/>
+                    </a:lnL>
+                    <a:lnR cap="flat" cmpd="sng" w="9525">
+                      <a:solidFill>
+                        <a:srgbClr val="9E9E9E"/>
+                      </a:solidFill>
+                      <a:prstDash val="solid"/>
+                      <a:round/>
+                      <a:headEnd len="sm" w="sm" type="none"/>
+                      <a:tailEnd len="sm" w="sm" type="none"/>
+                    </a:lnR>
+                    <a:lnT cap="flat" cmpd="sng" w="9525">
+                      <a:solidFill>
+                        <a:srgbClr val="9E9E9E"/>
+                      </a:solidFill>
+                      <a:prstDash val="solid"/>
+                      <a:round/>
+                      <a:headEnd len="sm" w="sm" type="none"/>
+                      <a:tailEnd len="sm" w="sm" type="none"/>
+                    </a:lnT>
+                    <a:lnB cap="flat" cmpd="sng" w="9525">
+                      <a:solidFill>
+                        <a:srgbClr val="9E9E9E"/>
+                      </a:solidFill>
+                      <a:prstDash val="solid"/>
+                      <a:round/>
+                      <a:headEnd len="sm" w="sm" type="none"/>
+                      <a:tailEnd len="sm" w="sm" type="none"/>
+                    </a:lnB>
+                    <a:solidFill>
+                      <a:srgbClr val="E1E9EA"/>
+                    </a:solidFill>
+                  </a:tcPr>
+                </a:tc>
+                <a:tc>
+                  <a:txBody>
+                    <a:bodyPr/>
+                    <a:lstStyle/>
+                    <a:p>
+                      <a:pPr indent="0" lvl="0" marL="0" rtl="0" algn="r">
+                        <a:lnSpc>
+                          <a:spcPct val="115000"/>
+                        </a:lnSpc>
+                        <a:spcBef>
+                          <a:spcPts val="0"/>
+                        </a:spcBef>
+                        <a:spcAft>
+                          <a:spcPts val="0"/>
+                        </a:spcAft>
+                        <a:buNone/>
+                      </a:pPr>
+                      <a:r>
+                        <a:rPr lang="en-US" sz="2000">
+                          <a:latin typeface="Times New Roman"/>
+                          <a:ea typeface="Times New Roman"/>
+                          <a:cs typeface="Times New Roman"/>
+                          <a:sym typeface="Times New Roman"/>
+                        </a:rPr>
+                        <a:t>5</a:t>
+                      </a:r>
+                      <a:r>
+                        <a:rPr lang="en-US" sz="2000">
+                          <a:latin typeface="Times New Roman"/>
+                          <a:ea typeface="Times New Roman"/>
+                          <a:cs typeface="Times New Roman"/>
+                          <a:sym typeface="Times New Roman"/>
+                        </a:rPr>
+                        <a:t>6.7</a:t>
+                      </a:r>
+                      <a:endParaRPr sz="2000">
+                        <a:latin typeface="Times New Roman"/>
+                        <a:ea typeface="Times New Roman"/>
+                        <a:cs typeface="Times New Roman"/>
+                        <a:sym typeface="Times New Roman"/>
+                      </a:endParaRPr>
+                    </a:p>
+                  </a:txBody>
+                  <a:tcPr marT="91425" marB="91425" marR="91425" marL="91425">
+                    <a:lnL cap="flat" cmpd="sng" w="9525">
+                      <a:solidFill>
+                        <a:srgbClr val="9E9E9E"/>
+                      </a:solidFill>
+                      <a:prstDash val="solid"/>
+                      <a:round/>
+                      <a:headEnd len="sm" w="sm" type="none"/>
+                      <a:tailEnd len="sm" w="sm" type="none"/>
+                    </a:lnL>
+                    <a:lnR cap="flat" cmpd="sng" w="9525">
+                      <a:solidFill>
+                        <a:srgbClr val="9E9E9E"/>
+                      </a:solidFill>
+                      <a:prstDash val="solid"/>
+                      <a:round/>
+                      <a:headEnd len="sm" w="sm" type="none"/>
+                      <a:tailEnd len="sm" w="sm" type="none"/>
+                    </a:lnR>
+                    <a:lnT cap="flat" cmpd="sng" w="9525">
+                      <a:solidFill>
+                        <a:srgbClr val="9E9E9E"/>
+                      </a:solidFill>
+                      <a:prstDash val="solid"/>
+                      <a:round/>
+                      <a:headEnd len="sm" w="sm" type="none"/>
+                      <a:tailEnd len="sm" w="sm" type="none"/>
+                    </a:lnT>
+                    <a:lnB cap="flat" cmpd="sng" w="9525">
+                      <a:solidFill>
+                        <a:srgbClr val="9E9E9E"/>
+                      </a:solidFill>
+                      <a:prstDash val="solid"/>
+                      <a:round/>
+                      <a:headEnd len="sm" w="sm" type="none"/>
+                      <a:tailEnd len="sm" w="sm" type="none"/>
+                    </a:lnB>
+                    <a:solidFill>
+                      <a:srgbClr val="E1E9EA"/>
+                    </a:solidFill>
+                  </a:tcPr>
+                </a:tc>
+                <a:tc>
+                  <a:txBody>
+                    <a:bodyPr/>
+                    <a:lstStyle/>
+                    <a:p>
+                      <a:pPr indent="0" lvl="0" marL="0" rtl="0" algn="r">
+                        <a:lnSpc>
+                          <a:spcPct val="115000"/>
+                        </a:lnSpc>
+                        <a:spcBef>
+                          <a:spcPts val="0"/>
+                        </a:spcBef>
+                        <a:spcAft>
+                          <a:spcPts val="0"/>
+                        </a:spcAft>
+                        <a:buNone/>
+                      </a:pPr>
+                      <a:r>
+                        <a:rPr lang="en-US" sz="2000">
+                          <a:latin typeface="Times New Roman"/>
+                          <a:ea typeface="Times New Roman"/>
+                          <a:cs typeface="Times New Roman"/>
+                          <a:sym typeface="Times New Roman"/>
+                        </a:rPr>
+                        <a:t>176</a:t>
+                      </a:r>
+                      <a:endParaRPr sz="2000">
+                        <a:latin typeface="Times New Roman"/>
+                        <a:ea typeface="Times New Roman"/>
+                        <a:cs typeface="Times New Roman"/>
+                        <a:sym typeface="Times New Roman"/>
+                      </a:endParaRPr>
+                    </a:p>
+                  </a:txBody>
+                  <a:tcPr marT="91425" marB="91425" marR="91425" marL="91425">
+                    <a:lnL cap="flat" cmpd="sng" w="9525">
+                      <a:solidFill>
+                        <a:srgbClr val="9E9E9E"/>
+                      </a:solidFill>
+                      <a:prstDash val="solid"/>
+                      <a:round/>
+                      <a:headEnd len="sm" w="sm" type="none"/>
+                      <a:tailEnd len="sm" w="sm" type="none"/>
+                    </a:lnL>
+                    <a:lnR cap="flat" cmpd="sng" w="9525">
+                      <a:solidFill>
+                        <a:srgbClr val="9E9E9E"/>
+                      </a:solidFill>
+                      <a:prstDash val="solid"/>
+                      <a:round/>
+                      <a:headEnd len="sm" w="sm" type="none"/>
+                      <a:tailEnd len="sm" w="sm" type="none"/>
+                    </a:lnR>
+                    <a:lnT cap="flat" cmpd="sng" w="9525">
+                      <a:solidFill>
+                        <a:srgbClr val="9E9E9E"/>
+                      </a:solidFill>
+                      <a:prstDash val="solid"/>
+                      <a:round/>
+                      <a:headEnd len="sm" w="sm" type="none"/>
+                      <a:tailEnd len="sm" w="sm" type="none"/>
+                    </a:lnT>
+                    <a:lnB cap="flat" cmpd="sng" w="9525">
+                      <a:solidFill>
+                        <a:srgbClr val="9E9E9E"/>
+                      </a:solidFill>
+                      <a:prstDash val="solid"/>
+                      <a:round/>
+                      <a:headEnd len="sm" w="sm" type="none"/>
+                      <a:tailEnd len="sm" w="sm" type="none"/>
+                    </a:lnB>
+                    <a:solidFill>
+                      <a:srgbClr val="E1E9EA"/>
+                    </a:solidFill>
+                  </a:tcPr>
+                </a:tc>
+              </a:tr>
+              <a:tr h="539350">
+                <a:tc>
+                  <a:txBody>
+                    <a:bodyPr/>
+                    <a:lstStyle/>
+                    <a:p>
+                      <a:pPr indent="0" lvl="0" marL="0" rtl="0" algn="l">
+                        <a:spcBef>
+                          <a:spcPts val="0"/>
+                        </a:spcBef>
+                        <a:spcAft>
+                          <a:spcPts val="0"/>
+                        </a:spcAft>
+                        <a:buNone/>
+                      </a:pPr>
+                      <a:r>
+                        <a:rPr lang="en-US" sz="2000">
+                          <a:latin typeface="Times New Roman"/>
+                          <a:ea typeface="Times New Roman"/>
+                          <a:cs typeface="Times New Roman"/>
+                          <a:sym typeface="Times New Roman"/>
+                        </a:rPr>
+                        <a:t>United Kingdom</a:t>
+                      </a:r>
+                      <a:endParaRPr sz="2000">
+                        <a:latin typeface="Times New Roman"/>
+                        <a:ea typeface="Times New Roman"/>
+                        <a:cs typeface="Times New Roman"/>
+                        <a:sym typeface="Times New Roman"/>
+                      </a:endParaRPr>
+                    </a:p>
+                  </a:txBody>
+                  <a:tcPr marT="91425" marB="91425" marR="91425" marL="91425">
+                    <a:lnL cap="flat" cmpd="sng" w="9525">
+                      <a:solidFill>
+                        <a:srgbClr val="9E9E9E"/>
+                      </a:solidFill>
+                      <a:prstDash val="solid"/>
+                      <a:round/>
+                      <a:headEnd len="sm" w="sm" type="none"/>
+                      <a:tailEnd len="sm" w="sm" type="none"/>
+                    </a:lnL>
+                    <a:lnR cap="flat" cmpd="sng" w="9525">
+                      <a:solidFill>
+                        <a:srgbClr val="9E9E9E"/>
+                      </a:solidFill>
+                      <a:prstDash val="solid"/>
+                      <a:round/>
+                      <a:headEnd len="sm" w="sm" type="none"/>
+                      <a:tailEnd len="sm" w="sm" type="none"/>
+                    </a:lnR>
+                    <a:lnT cap="flat" cmpd="sng" w="9525">
+                      <a:solidFill>
+                        <a:srgbClr val="9E9E9E"/>
+                      </a:solidFill>
+                      <a:prstDash val="solid"/>
+                      <a:round/>
+                      <a:headEnd len="sm" w="sm" type="none"/>
+                      <a:tailEnd len="sm" w="sm" type="none"/>
+                    </a:lnT>
+                    <a:lnB cap="flat" cmpd="sng" w="9525">
+                      <a:solidFill>
+                        <a:srgbClr val="9E9E9E"/>
+                      </a:solidFill>
+                      <a:prstDash val="solid"/>
+                      <a:round/>
+                      <a:headEnd len="sm" w="sm" type="none"/>
+                      <a:tailEnd len="sm" w="sm" type="none"/>
+                    </a:lnB>
+                    <a:solidFill>
+                      <a:schemeClr val="lt1"/>
+                    </a:solidFill>
+                  </a:tcPr>
+                </a:tc>
+                <a:tc>
+                  <a:txBody>
+                    <a:bodyPr/>
+                    <a:lstStyle/>
+                    <a:p>
+                      <a:pPr indent="0" lvl="0" marL="0" rtl="0" algn="r">
+                        <a:lnSpc>
+                          <a:spcPct val="115000"/>
+                        </a:lnSpc>
+                        <a:spcBef>
+                          <a:spcPts val="0"/>
+                        </a:spcBef>
+                        <a:spcAft>
+                          <a:spcPts val="0"/>
+                        </a:spcAft>
+                        <a:buNone/>
+                      </a:pPr>
+                      <a:r>
+                        <a:rPr lang="en-US" sz="2000">
+                          <a:latin typeface="Times New Roman"/>
+                          <a:ea typeface="Times New Roman"/>
+                          <a:cs typeface="Times New Roman"/>
+                          <a:sym typeface="Times New Roman"/>
+                        </a:rPr>
+                        <a:t>33.5</a:t>
+                      </a:r>
+                      <a:endParaRPr sz="2000">
+                        <a:latin typeface="Times New Roman"/>
+                        <a:ea typeface="Times New Roman"/>
+                        <a:cs typeface="Times New Roman"/>
+                        <a:sym typeface="Times New Roman"/>
+                      </a:endParaRPr>
+                    </a:p>
+                  </a:txBody>
+                  <a:tcPr marT="91425" marB="91425" marR="91425" marL="91425">
+                    <a:lnL cap="flat" cmpd="sng" w="9525">
+                      <a:solidFill>
+                        <a:srgbClr val="9E9E9E"/>
+                      </a:solidFill>
+                      <a:prstDash val="solid"/>
+                      <a:round/>
+                      <a:headEnd len="sm" w="sm" type="none"/>
+                      <a:tailEnd len="sm" w="sm" type="none"/>
+                    </a:lnL>
+                    <a:lnR cap="flat" cmpd="sng" w="9525">
+                      <a:solidFill>
+                        <a:srgbClr val="9E9E9E"/>
+                      </a:solidFill>
+                      <a:prstDash val="solid"/>
+                      <a:round/>
+                      <a:headEnd len="sm" w="sm" type="none"/>
+                      <a:tailEnd len="sm" w="sm" type="none"/>
+                    </a:lnR>
+                    <a:lnT cap="flat" cmpd="sng" w="9525">
+                      <a:solidFill>
+                        <a:srgbClr val="9E9E9E"/>
+                      </a:solidFill>
+                      <a:prstDash val="solid"/>
+                      <a:round/>
+                      <a:headEnd len="sm" w="sm" type="none"/>
+                      <a:tailEnd len="sm" w="sm" type="none"/>
+                    </a:lnT>
+                    <a:lnB cap="flat" cmpd="sng" w="9525">
+                      <a:solidFill>
+                        <a:srgbClr val="9E9E9E"/>
+                      </a:solidFill>
+                      <a:prstDash val="solid"/>
+                      <a:round/>
+                      <a:headEnd len="sm" w="sm" type="none"/>
+                      <a:tailEnd len="sm" w="sm" type="none"/>
+                    </a:lnB>
+                    <a:solidFill>
+                      <a:schemeClr val="lt1"/>
+                    </a:solidFill>
+                  </a:tcPr>
+                </a:tc>
+                <a:tc>
+                  <a:txBody>
+                    <a:bodyPr/>
+                    <a:lstStyle/>
+                    <a:p>
+                      <a:pPr indent="0" lvl="0" marL="0" rtl="0" algn="r">
+                        <a:lnSpc>
+                          <a:spcPct val="115000"/>
+                        </a:lnSpc>
+                        <a:spcBef>
+                          <a:spcPts val="0"/>
+                        </a:spcBef>
+                        <a:spcAft>
+                          <a:spcPts val="0"/>
+                        </a:spcAft>
+                        <a:buNone/>
+                      </a:pPr>
+                      <a:r>
+                        <a:rPr lang="en-US" sz="2000">
+                          <a:latin typeface="Times New Roman"/>
+                          <a:ea typeface="Times New Roman"/>
+                          <a:cs typeface="Times New Roman"/>
+                          <a:sym typeface="Times New Roman"/>
+                        </a:rPr>
+                        <a:t>299</a:t>
+                      </a:r>
+                      <a:endParaRPr sz="2000">
+                        <a:latin typeface="Times New Roman"/>
+                        <a:ea typeface="Times New Roman"/>
+                        <a:cs typeface="Times New Roman"/>
+                        <a:sym typeface="Times New Roman"/>
+                      </a:endParaRPr>
+                    </a:p>
+                  </a:txBody>
+                  <a:tcPr marT="91425" marB="91425" marR="91425" marL="91425">
+                    <a:lnL cap="flat" cmpd="sng" w="9525">
+                      <a:solidFill>
+                        <a:srgbClr val="9E9E9E"/>
+                      </a:solidFill>
+                      <a:prstDash val="solid"/>
+                      <a:round/>
+                      <a:headEnd len="sm" w="sm" type="none"/>
+                      <a:tailEnd len="sm" w="sm" type="none"/>
+                    </a:lnL>
+                    <a:lnR cap="flat" cmpd="sng" w="9525">
+                      <a:solidFill>
+                        <a:srgbClr val="9E9E9E"/>
+                      </a:solidFill>
+                      <a:prstDash val="solid"/>
+                      <a:round/>
+                      <a:headEnd len="sm" w="sm" type="none"/>
+                      <a:tailEnd len="sm" w="sm" type="none"/>
+                    </a:lnR>
+                    <a:lnT cap="flat" cmpd="sng" w="9525">
+                      <a:solidFill>
+                        <a:srgbClr val="9E9E9E"/>
+                      </a:solidFill>
+                      <a:prstDash val="solid"/>
+                      <a:round/>
+                      <a:headEnd len="sm" w="sm" type="none"/>
+                      <a:tailEnd len="sm" w="sm" type="none"/>
+                    </a:lnT>
+                    <a:lnB cap="flat" cmpd="sng" w="9525">
+                      <a:solidFill>
+                        <a:srgbClr val="9E9E9E"/>
+                      </a:solidFill>
+                      <a:prstDash val="solid"/>
+                      <a:round/>
+                      <a:headEnd len="sm" w="sm" type="none"/>
+                      <a:tailEnd len="sm" w="sm" type="none"/>
+                    </a:lnB>
+                    <a:solidFill>
+                      <a:schemeClr val="lt1"/>
+                    </a:solidFill>
+                  </a:tcPr>
+                </a:tc>
+              </a:tr>
+              <a:tr h="539350">
+                <a:tc>
+                  <a:txBody>
+                    <a:bodyPr/>
+                    <a:lstStyle/>
+                    <a:p>
+                      <a:pPr indent="0" lvl="0" marL="0" rtl="0" algn="l">
+                        <a:spcBef>
+                          <a:spcPts val="0"/>
+                        </a:spcBef>
+                        <a:spcAft>
+                          <a:spcPts val="0"/>
+                        </a:spcAft>
+                        <a:buNone/>
+                      </a:pPr>
+                      <a:r>
+                        <a:rPr lang="en-US" sz="2000">
+                          <a:latin typeface="Times New Roman"/>
+                          <a:ea typeface="Times New Roman"/>
+                          <a:cs typeface="Times New Roman"/>
+                          <a:sym typeface="Times New Roman"/>
+                        </a:rPr>
+                        <a:t>Norway</a:t>
+                      </a:r>
+                      <a:endParaRPr sz="2000">
+                        <a:latin typeface="Times New Roman"/>
+                        <a:ea typeface="Times New Roman"/>
+                        <a:cs typeface="Times New Roman"/>
+                        <a:sym typeface="Times New Roman"/>
+                      </a:endParaRPr>
+                    </a:p>
+                  </a:txBody>
+                  <a:tcPr marT="91425" marB="91425" marR="91425" marL="91425">
+                    <a:lnL cap="flat" cmpd="sng" w="9525">
+                      <a:solidFill>
+                        <a:srgbClr val="9E9E9E"/>
+                      </a:solidFill>
+                      <a:prstDash val="solid"/>
+                      <a:round/>
+                      <a:headEnd len="sm" w="sm" type="none"/>
+                      <a:tailEnd len="sm" w="sm" type="none"/>
+                    </a:lnL>
+                    <a:lnR cap="flat" cmpd="sng" w="9525">
+                      <a:solidFill>
+                        <a:srgbClr val="9E9E9E"/>
+                      </a:solidFill>
+                      <a:prstDash val="solid"/>
+                      <a:round/>
+                      <a:headEnd len="sm" w="sm" type="none"/>
+                      <a:tailEnd len="sm" w="sm" type="none"/>
+                    </a:lnR>
+                    <a:lnT cap="flat" cmpd="sng" w="9525">
+                      <a:solidFill>
+                        <a:srgbClr val="9E9E9E"/>
+                      </a:solidFill>
+                      <a:prstDash val="solid"/>
+                      <a:round/>
+                      <a:headEnd len="sm" w="sm" type="none"/>
+                      <a:tailEnd len="sm" w="sm" type="none"/>
+                    </a:lnT>
+                    <a:lnB cap="flat" cmpd="sng" w="9525">
+                      <a:solidFill>
+                        <a:srgbClr val="9E9E9E"/>
+                      </a:solidFill>
+                      <a:prstDash val="solid"/>
+                      <a:round/>
+                      <a:headEnd len="sm" w="sm" type="none"/>
+                      <a:tailEnd len="sm" w="sm" type="none"/>
+                    </a:lnB>
+                    <a:solidFill>
+                      <a:srgbClr val="E1E9EA"/>
+                    </a:solidFill>
+                  </a:tcPr>
+                </a:tc>
+                <a:tc>
+                  <a:txBody>
+                    <a:bodyPr/>
+                    <a:lstStyle/>
+                    <a:p>
+                      <a:pPr indent="0" lvl="0" marL="0" rtl="0" algn="r">
+                        <a:lnSpc>
+                          <a:spcPct val="115000"/>
+                        </a:lnSpc>
+                        <a:spcBef>
+                          <a:spcPts val="0"/>
+                        </a:spcBef>
+                        <a:spcAft>
+                          <a:spcPts val="0"/>
+                        </a:spcAft>
+                        <a:buNone/>
+                      </a:pPr>
+                      <a:r>
+                        <a:rPr lang="en-US" sz="2000">
+                          <a:latin typeface="Times New Roman"/>
+                          <a:ea typeface="Times New Roman"/>
+                          <a:cs typeface="Times New Roman"/>
+                          <a:sym typeface="Times New Roman"/>
+                        </a:rPr>
+                        <a:t>49.8</a:t>
+                      </a:r>
+                      <a:endParaRPr sz="2000">
+                        <a:latin typeface="Times New Roman"/>
+                        <a:ea typeface="Times New Roman"/>
+                        <a:cs typeface="Times New Roman"/>
+                        <a:sym typeface="Times New Roman"/>
+                      </a:endParaRPr>
+                    </a:p>
+                  </a:txBody>
+                  <a:tcPr marT="91425" marB="91425" marR="91425" marL="91425">
+                    <a:lnL cap="flat" cmpd="sng" w="9525">
+                      <a:solidFill>
+                        <a:srgbClr val="9E9E9E"/>
+                      </a:solidFill>
+                      <a:prstDash val="solid"/>
+                      <a:round/>
+                      <a:headEnd len="sm" w="sm" type="none"/>
+                      <a:tailEnd len="sm" w="sm" type="none"/>
+                    </a:lnL>
+                    <a:lnR cap="flat" cmpd="sng" w="9525">
+                      <a:solidFill>
+                        <a:srgbClr val="9E9E9E"/>
+                      </a:solidFill>
+                      <a:prstDash val="solid"/>
+                      <a:round/>
+                      <a:headEnd len="sm" w="sm" type="none"/>
+                      <a:tailEnd len="sm" w="sm" type="none"/>
+                    </a:lnR>
+                    <a:lnT cap="flat" cmpd="sng" w="9525">
+                      <a:solidFill>
+                        <a:srgbClr val="9E9E9E"/>
+                      </a:solidFill>
+                      <a:prstDash val="solid"/>
+                      <a:round/>
+                      <a:headEnd len="sm" w="sm" type="none"/>
+                      <a:tailEnd len="sm" w="sm" type="none"/>
+                    </a:lnT>
+                    <a:lnB cap="flat" cmpd="sng" w="9525">
+                      <a:solidFill>
+                        <a:srgbClr val="9E9E9E"/>
+                      </a:solidFill>
+                      <a:prstDash val="solid"/>
+                      <a:round/>
+                      <a:headEnd len="sm" w="sm" type="none"/>
+                      <a:tailEnd len="sm" w="sm" type="none"/>
+                    </a:lnB>
+                    <a:solidFill>
+                      <a:srgbClr val="E1E9EA"/>
+                    </a:solidFill>
+                  </a:tcPr>
+                </a:tc>
+                <a:tc>
+                  <a:txBody>
+                    <a:bodyPr/>
+                    <a:lstStyle/>
+                    <a:p>
+                      <a:pPr indent="0" lvl="0" marL="0" rtl="0" algn="r">
+                        <a:lnSpc>
+                          <a:spcPct val="115000"/>
+                        </a:lnSpc>
+                        <a:spcBef>
+                          <a:spcPts val="0"/>
+                        </a:spcBef>
+                        <a:spcAft>
+                          <a:spcPts val="0"/>
+                        </a:spcAft>
+                        <a:buNone/>
+                      </a:pPr>
+                      <a:r>
+                        <a:rPr lang="en-US" sz="2000">
+                          <a:latin typeface="Times New Roman"/>
+                          <a:ea typeface="Times New Roman"/>
+                          <a:cs typeface="Times New Roman"/>
+                          <a:sym typeface="Times New Roman"/>
+                        </a:rPr>
+                        <a:t>201</a:t>
+                      </a:r>
+                      <a:endParaRPr sz="2000">
+                        <a:latin typeface="Times New Roman"/>
+                        <a:ea typeface="Times New Roman"/>
+                        <a:cs typeface="Times New Roman"/>
+                        <a:sym typeface="Times New Roman"/>
+                      </a:endParaRPr>
+                    </a:p>
+                  </a:txBody>
+                  <a:tcPr marT="91425" marB="91425" marR="91425" marL="91425">
+                    <a:lnL cap="flat" cmpd="sng" w="9525">
+                      <a:solidFill>
+                        <a:srgbClr val="9E9E9E"/>
+                      </a:solidFill>
+                      <a:prstDash val="solid"/>
+                      <a:round/>
+                      <a:headEnd len="sm" w="sm" type="none"/>
+                      <a:tailEnd len="sm" w="sm" type="none"/>
+                    </a:lnL>
+                    <a:lnR cap="flat" cmpd="sng" w="9525">
+                      <a:solidFill>
+                        <a:srgbClr val="9E9E9E"/>
+                      </a:solidFill>
+                      <a:prstDash val="solid"/>
+                      <a:round/>
+                      <a:headEnd len="sm" w="sm" type="none"/>
+                      <a:tailEnd len="sm" w="sm" type="none"/>
+                    </a:lnR>
+                    <a:lnT cap="flat" cmpd="sng" w="9525">
+                      <a:solidFill>
+                        <a:srgbClr val="9E9E9E"/>
+                      </a:solidFill>
+                      <a:prstDash val="solid"/>
+                      <a:round/>
+                      <a:headEnd len="sm" w="sm" type="none"/>
+                      <a:tailEnd len="sm" w="sm" type="none"/>
+                    </a:lnT>
+                    <a:lnB cap="flat" cmpd="sng" w="9525">
+                      <a:solidFill>
+                        <a:srgbClr val="9E9E9E"/>
+                      </a:solidFill>
+                      <a:prstDash val="solid"/>
+                      <a:round/>
+                      <a:headEnd len="sm" w="sm" type="none"/>
+                      <a:tailEnd len="sm" w="sm" type="none"/>
+                    </a:lnB>
+                    <a:solidFill>
+                      <a:srgbClr val="E1E9EA"/>
+                    </a:solidFill>
+                  </a:tcPr>
+                </a:tc>
+              </a:tr>
+              <a:tr h="539350">
+                <a:tc>
+                  <a:txBody>
+                    <a:bodyPr/>
+                    <a:lstStyle/>
+                    <a:p>
+                      <a:pPr indent="0" lvl="0" marL="0" rtl="0" algn="l">
+                        <a:spcBef>
+                          <a:spcPts val="0"/>
+                        </a:spcBef>
+                        <a:spcAft>
+                          <a:spcPts val="0"/>
+                        </a:spcAft>
+                        <a:buNone/>
+                      </a:pPr>
+                      <a:r>
+                        <a:rPr lang="en-US" sz="2000">
+                          <a:latin typeface="Times New Roman"/>
+                          <a:ea typeface="Times New Roman"/>
+                          <a:cs typeface="Times New Roman"/>
+                          <a:sym typeface="Times New Roman"/>
+                        </a:rPr>
+                        <a:t>Russia</a:t>
+                      </a:r>
+                      <a:endParaRPr sz="2000">
+                        <a:latin typeface="Times New Roman"/>
+                        <a:ea typeface="Times New Roman"/>
+                        <a:cs typeface="Times New Roman"/>
+                        <a:sym typeface="Times New Roman"/>
+                      </a:endParaRPr>
+                    </a:p>
+                  </a:txBody>
+                  <a:tcPr marT="91425" marB="91425" marR="91425" marL="91425">
+                    <a:lnL cap="flat" cmpd="sng" w="9525">
+                      <a:solidFill>
+                        <a:srgbClr val="9E9E9E"/>
+                      </a:solidFill>
+                      <a:prstDash val="solid"/>
+                      <a:round/>
+                      <a:headEnd len="sm" w="sm" type="none"/>
+                      <a:tailEnd len="sm" w="sm" type="none"/>
+                    </a:lnL>
+                    <a:lnR cap="flat" cmpd="sng" w="9525">
+                      <a:solidFill>
+                        <a:srgbClr val="9E9E9E"/>
+                      </a:solidFill>
+                      <a:prstDash val="solid"/>
+                      <a:round/>
+                      <a:headEnd len="sm" w="sm" type="none"/>
+                      <a:tailEnd len="sm" w="sm" type="none"/>
+                    </a:lnR>
+                    <a:lnT cap="flat" cmpd="sng" w="9525">
+                      <a:solidFill>
+                        <a:srgbClr val="9E9E9E"/>
+                      </a:solidFill>
+                      <a:prstDash val="solid"/>
+                      <a:round/>
+                      <a:headEnd len="sm" w="sm" type="none"/>
+                      <a:tailEnd len="sm" w="sm" type="none"/>
+                    </a:lnT>
+                    <a:lnB cap="flat" cmpd="sng" w="9525">
+                      <a:solidFill>
+                        <a:srgbClr val="9E9E9E"/>
+                      </a:solidFill>
+                      <a:prstDash val="solid"/>
+                      <a:round/>
+                      <a:headEnd len="sm" w="sm" type="none"/>
+                      <a:tailEnd len="sm" w="sm" type="none"/>
+                    </a:lnB>
+                  </a:tcPr>
+                </a:tc>
+                <a:tc>
+                  <a:txBody>
+                    <a:bodyPr/>
+                    <a:lstStyle/>
+                    <a:p>
+                      <a:pPr indent="0" lvl="0" marL="0" rtl="0" algn="r">
+                        <a:lnSpc>
+                          <a:spcPct val="115000"/>
+                        </a:lnSpc>
+                        <a:spcBef>
+                          <a:spcPts val="0"/>
+                        </a:spcBef>
+                        <a:spcAft>
+                          <a:spcPts val="0"/>
+                        </a:spcAft>
+                        <a:buNone/>
+                      </a:pPr>
+                      <a:r>
+                        <a:rPr lang="en-US" sz="2000">
+                          <a:latin typeface="Times New Roman"/>
+                          <a:ea typeface="Times New Roman"/>
+                          <a:cs typeface="Times New Roman"/>
+                          <a:sym typeface="Times New Roman"/>
+                        </a:rPr>
+                        <a:t>51.1</a:t>
+                      </a:r>
+                      <a:endParaRPr sz="2000">
+                        <a:latin typeface="Times New Roman"/>
+                        <a:ea typeface="Times New Roman"/>
+                        <a:cs typeface="Times New Roman"/>
+                        <a:sym typeface="Times New Roman"/>
+                      </a:endParaRPr>
+                    </a:p>
+                  </a:txBody>
+                  <a:tcPr marT="91425" marB="91425" marR="91425" marL="91425">
+                    <a:lnL cap="flat" cmpd="sng" w="9525">
+                      <a:solidFill>
+                        <a:srgbClr val="9E9E9E"/>
+                      </a:solidFill>
+                      <a:prstDash val="solid"/>
+                      <a:round/>
+                      <a:headEnd len="sm" w="sm" type="none"/>
+                      <a:tailEnd len="sm" w="sm" type="none"/>
+                    </a:lnL>
+                    <a:lnR cap="flat" cmpd="sng" w="9525">
+                      <a:solidFill>
+                        <a:srgbClr val="9E9E9E"/>
+                      </a:solidFill>
+                      <a:prstDash val="solid"/>
+                      <a:round/>
+                      <a:headEnd len="sm" w="sm" type="none"/>
+                      <a:tailEnd len="sm" w="sm" type="none"/>
+                    </a:lnR>
+                    <a:lnT cap="flat" cmpd="sng" w="9525">
+                      <a:solidFill>
+                        <a:srgbClr val="9E9E9E"/>
+                      </a:solidFill>
+                      <a:prstDash val="solid"/>
+                      <a:round/>
+                      <a:headEnd len="sm" w="sm" type="none"/>
+                      <a:tailEnd len="sm" w="sm" type="none"/>
+                    </a:lnT>
+                    <a:lnB cap="flat" cmpd="sng" w="9525">
+                      <a:solidFill>
+                        <a:srgbClr val="9E9E9E"/>
+                      </a:solidFill>
+                      <a:prstDash val="solid"/>
+                      <a:round/>
+                      <a:headEnd len="sm" w="sm" type="none"/>
+                      <a:tailEnd len="sm" w="sm" type="none"/>
+                    </a:lnB>
+                  </a:tcPr>
+                </a:tc>
+                <a:tc>
+                  <a:txBody>
+                    <a:bodyPr/>
+                    <a:lstStyle/>
+                    <a:p>
+                      <a:pPr indent="0" lvl="0" marL="0" rtl="0" algn="r">
+                        <a:lnSpc>
+                          <a:spcPct val="115000"/>
+                        </a:lnSpc>
+                        <a:spcBef>
+                          <a:spcPts val="0"/>
+                        </a:spcBef>
+                        <a:spcAft>
+                          <a:spcPts val="0"/>
+                        </a:spcAft>
+                        <a:buNone/>
+                      </a:pPr>
+                      <a:r>
+                        <a:rPr lang="en-US" sz="2000">
+                          <a:latin typeface="Times New Roman"/>
+                          <a:ea typeface="Times New Roman"/>
+                          <a:cs typeface="Times New Roman"/>
+                          <a:sym typeface="Times New Roman"/>
+                        </a:rPr>
+                        <a:t>196</a:t>
+                      </a:r>
+                      <a:endParaRPr sz="2000">
+                        <a:latin typeface="Times New Roman"/>
+                        <a:ea typeface="Times New Roman"/>
+                        <a:cs typeface="Times New Roman"/>
+                        <a:sym typeface="Times New Roman"/>
+                      </a:endParaRPr>
+                    </a:p>
+                  </a:txBody>
+                  <a:tcPr marT="91425" marB="91425" marR="91425" marL="91425">
+                    <a:lnL cap="flat" cmpd="sng" w="9525">
+                      <a:solidFill>
+                        <a:srgbClr val="9E9E9E"/>
+                      </a:solidFill>
+                      <a:prstDash val="solid"/>
+                      <a:round/>
+                      <a:headEnd len="sm" w="sm" type="none"/>
+                      <a:tailEnd len="sm" w="sm" type="none"/>
+                    </a:lnL>
+                    <a:lnR cap="flat" cmpd="sng" w="9525">
+                      <a:solidFill>
+                        <a:srgbClr val="9E9E9E"/>
+                      </a:solidFill>
+                      <a:prstDash val="solid"/>
+                      <a:round/>
+                      <a:headEnd len="sm" w="sm" type="none"/>
+                      <a:tailEnd len="sm" w="sm" type="none"/>
+                    </a:lnR>
+                    <a:lnT cap="flat" cmpd="sng" w="9525">
+                      <a:solidFill>
+                        <a:srgbClr val="9E9E9E"/>
+                      </a:solidFill>
+                      <a:prstDash val="solid"/>
+                      <a:round/>
+                      <a:headEnd len="sm" w="sm" type="none"/>
+                      <a:tailEnd len="sm" w="sm" type="none"/>
+                    </a:lnT>
+                    <a:lnB cap="flat" cmpd="sng" w="9525">
+                      <a:solidFill>
+                        <a:srgbClr val="9E9E9E"/>
+                      </a:solidFill>
+                      <a:prstDash val="solid"/>
+                      <a:round/>
+                      <a:headEnd len="sm" w="sm" type="none"/>
+                      <a:tailEnd len="sm" w="sm" type="none"/>
+                    </a:lnB>
+                  </a:tcPr>
+                </a:tc>
+              </a:tr>
+              <a:tr h="539350">
+                <a:tc>
+                  <a:txBody>
+                    <a:bodyPr/>
+                    <a:lstStyle/>
+                    <a:p>
+                      <a:pPr indent="0" lvl="0" marL="0" rtl="0" algn="l">
+                        <a:spcBef>
+                          <a:spcPts val="0"/>
+                        </a:spcBef>
+                        <a:spcAft>
+                          <a:spcPts val="0"/>
+                        </a:spcAft>
+                        <a:buNone/>
+                      </a:pPr>
+                      <a:r>
+                        <a:rPr b="1" lang="en-US" sz="2000">
+                          <a:latin typeface="Times New Roman"/>
+                          <a:ea typeface="Times New Roman"/>
+                          <a:cs typeface="Times New Roman"/>
+                          <a:sym typeface="Times New Roman"/>
+                        </a:rPr>
+                        <a:t>Pakistan</a:t>
+                      </a:r>
+                      <a:endParaRPr b="1" sz="2000">
+                        <a:latin typeface="Times New Roman"/>
+                        <a:ea typeface="Times New Roman"/>
+                        <a:cs typeface="Times New Roman"/>
+                        <a:sym typeface="Times New Roman"/>
+                      </a:endParaRPr>
+                    </a:p>
+                  </a:txBody>
+                  <a:tcPr marT="91425" marB="91425" marR="91425" marL="91425">
+                    <a:lnL cap="flat" cmpd="sng" w="9525">
+                      <a:solidFill>
+                        <a:srgbClr val="9E9E9E"/>
+                      </a:solidFill>
+                      <a:prstDash val="solid"/>
+                      <a:round/>
+                      <a:headEnd len="sm" w="sm" type="none"/>
+                      <a:tailEnd len="sm" w="sm" type="none"/>
+                    </a:lnL>
+                    <a:lnR cap="flat" cmpd="sng" w="9525">
+                      <a:solidFill>
+                        <a:srgbClr val="9E9E9E"/>
+                      </a:solidFill>
+                      <a:prstDash val="solid"/>
+                      <a:round/>
+                      <a:headEnd len="sm" w="sm" type="none"/>
+                      <a:tailEnd len="sm" w="sm" type="none"/>
+                    </a:lnR>
+                    <a:lnT cap="flat" cmpd="sng" w="9525">
+                      <a:solidFill>
+                        <a:srgbClr val="9E9E9E"/>
+                      </a:solidFill>
+                      <a:prstDash val="solid"/>
+                      <a:round/>
+                      <a:headEnd len="sm" w="sm" type="none"/>
+                      <a:tailEnd len="sm" w="sm" type="none"/>
+                    </a:lnT>
+                    <a:lnB cap="flat" cmpd="sng" w="9525">
+                      <a:solidFill>
+                        <a:srgbClr val="9E9E9E"/>
+                      </a:solidFill>
+                      <a:prstDash val="solid"/>
+                      <a:round/>
+                      <a:headEnd len="sm" w="sm" type="none"/>
+                      <a:tailEnd len="sm" w="sm" type="none"/>
+                    </a:lnB>
+                    <a:solidFill>
+                      <a:srgbClr val="E6B8AF"/>
+                    </a:solidFill>
+                  </a:tcPr>
+                </a:tc>
+                <a:tc>
+                  <a:txBody>
+                    <a:bodyPr/>
+                    <a:lstStyle/>
+                    <a:p>
+                      <a:pPr indent="0" lvl="0" marL="0" rtl="0" algn="r">
+                        <a:lnSpc>
+                          <a:spcPct val="115000"/>
+                        </a:lnSpc>
+                        <a:spcBef>
+                          <a:spcPts val="0"/>
+                        </a:spcBef>
+                        <a:spcAft>
+                          <a:spcPts val="0"/>
+                        </a:spcAft>
+                        <a:buNone/>
+                      </a:pPr>
+                      <a:r>
+                        <a:rPr b="1" lang="en-US" sz="2000">
+                          <a:latin typeface="Times New Roman"/>
+                          <a:ea typeface="Times New Roman"/>
+                          <a:cs typeface="Times New Roman"/>
+                          <a:sym typeface="Times New Roman"/>
+                        </a:rPr>
+                        <a:t>12.8</a:t>
+                      </a:r>
+                      <a:endParaRPr b="1" sz="2000">
+                        <a:latin typeface="Times New Roman"/>
+                        <a:ea typeface="Times New Roman"/>
+                        <a:cs typeface="Times New Roman"/>
+                        <a:sym typeface="Times New Roman"/>
+                      </a:endParaRPr>
+                    </a:p>
+                  </a:txBody>
+                  <a:tcPr marT="91425" marB="91425" marR="91425" marL="91425">
+                    <a:lnL cap="flat" cmpd="sng" w="9525">
+                      <a:solidFill>
+                        <a:srgbClr val="9E9E9E"/>
+                      </a:solidFill>
+                      <a:prstDash val="solid"/>
+                      <a:round/>
+                      <a:headEnd len="sm" w="sm" type="none"/>
+                      <a:tailEnd len="sm" w="sm" type="none"/>
+                    </a:lnL>
+                    <a:lnR cap="flat" cmpd="sng" w="9525">
+                      <a:solidFill>
+                        <a:srgbClr val="9E9E9E"/>
+                      </a:solidFill>
+                      <a:prstDash val="solid"/>
+                      <a:round/>
+                      <a:headEnd len="sm" w="sm" type="none"/>
+                      <a:tailEnd len="sm" w="sm" type="none"/>
+                    </a:lnR>
+                    <a:lnT cap="flat" cmpd="sng" w="9525">
+                      <a:solidFill>
+                        <a:srgbClr val="9E9E9E"/>
+                      </a:solidFill>
+                      <a:prstDash val="solid"/>
+                      <a:round/>
+                      <a:headEnd len="sm" w="sm" type="none"/>
+                      <a:tailEnd len="sm" w="sm" type="none"/>
+                    </a:lnT>
+                    <a:lnB cap="flat" cmpd="sng" w="9525">
+                      <a:solidFill>
+                        <a:srgbClr val="9E9E9E"/>
+                      </a:solidFill>
+                      <a:prstDash val="solid"/>
+                      <a:round/>
+                      <a:headEnd len="sm" w="sm" type="none"/>
+                      <a:tailEnd len="sm" w="sm" type="none"/>
+                    </a:lnB>
+                    <a:solidFill>
+                      <a:srgbClr val="E6B8AF"/>
+                    </a:solidFill>
+                  </a:tcPr>
+                </a:tc>
+                <a:tc>
+                  <a:txBody>
+                    <a:bodyPr/>
+                    <a:lstStyle/>
+                    <a:p>
+                      <a:pPr indent="0" lvl="0" marL="0" rtl="0" algn="r">
+                        <a:lnSpc>
+                          <a:spcPct val="115000"/>
+                        </a:lnSpc>
+                        <a:spcBef>
+                          <a:spcPts val="0"/>
+                        </a:spcBef>
+                        <a:spcAft>
+                          <a:spcPts val="0"/>
+                        </a:spcAft>
+                        <a:buNone/>
+                      </a:pPr>
+                      <a:r>
+                        <a:rPr b="1" lang="en-US" sz="2000">
+                          <a:latin typeface="Times New Roman"/>
+                          <a:ea typeface="Times New Roman"/>
+                          <a:cs typeface="Times New Roman"/>
+                          <a:sym typeface="Times New Roman"/>
+                        </a:rPr>
+                        <a:t>781</a:t>
+                      </a:r>
+                      <a:endParaRPr b="1" sz="2000">
+                        <a:latin typeface="Times New Roman"/>
+                        <a:ea typeface="Times New Roman"/>
+                        <a:cs typeface="Times New Roman"/>
+                        <a:sym typeface="Times New Roman"/>
+                      </a:endParaRPr>
+                    </a:p>
+                  </a:txBody>
+                  <a:tcPr marT="91425" marB="91425" marR="91425" marL="91425">
+                    <a:lnL cap="flat" cmpd="sng" w="9525">
+                      <a:solidFill>
+                        <a:srgbClr val="9E9E9E"/>
+                      </a:solidFill>
+                      <a:prstDash val="solid"/>
+                      <a:round/>
+                      <a:headEnd len="sm" w="sm" type="none"/>
+                      <a:tailEnd len="sm" w="sm" type="none"/>
+                    </a:lnL>
+                    <a:lnR cap="flat" cmpd="sng" w="9525">
+                      <a:solidFill>
+                        <a:srgbClr val="9E9E9E"/>
+                      </a:solidFill>
+                      <a:prstDash val="solid"/>
+                      <a:round/>
+                      <a:headEnd len="sm" w="sm" type="none"/>
+                      <a:tailEnd len="sm" w="sm" type="none"/>
+                    </a:lnR>
+                    <a:lnT cap="flat" cmpd="sng" w="9525">
+                      <a:solidFill>
+                        <a:srgbClr val="9E9E9E"/>
+                      </a:solidFill>
+                      <a:prstDash val="solid"/>
+                      <a:round/>
+                      <a:headEnd len="sm" w="sm" type="none"/>
+                      <a:tailEnd len="sm" w="sm" type="none"/>
+                    </a:lnT>
+                    <a:lnB cap="flat" cmpd="sng" w="9525">
+                      <a:solidFill>
+                        <a:srgbClr val="9E9E9E"/>
+                      </a:solidFill>
+                      <a:prstDash val="solid"/>
+                      <a:round/>
+                      <a:headEnd len="sm" w="sm" type="none"/>
+                      <a:tailEnd len="sm" w="sm" type="none"/>
+                    </a:lnB>
+                    <a:solidFill>
+                      <a:srgbClr val="E6B8AF"/>
+                    </a:solidFill>
+                  </a:tcPr>
+                </a:tc>
+              </a:tr>
+            </a:tbl>
+          </a:graphicData>
+        </a:graphic>
+      </p:graphicFrame>
+      <p:sp>
+        <p:nvSpPr>
+          <p:cNvPr id="111" name="Google Shape;111;p17"/>
+          <p:cNvSpPr txBox="1"/>
+          <p:nvPr/>
+        </p:nvSpPr>
+        <p:spPr>
+          <a:xfrm>
+            <a:off x="475325" y="5396525"/>
+            <a:ext cx="8229600" cy="520200"/>
+          </a:xfrm>
+          <a:prstGeom prst="rect">
+            <a:avLst/>
+          </a:prstGeom>
+          <a:noFill/>
+          <a:ln>
+            <a:noFill/>
+          </a:ln>
+        </p:spPr>
+        <p:txBody>
+          <a:bodyPr anchorCtr="0" anchor="t" bIns="91425" lIns="91425" spcFirstLastPara="1" rIns="91425" wrap="square" tIns="91425">
+            <a:noAutofit/>
+          </a:bodyPr>
+          <a:lstStyle/>
+          <a:p>
+            <a:pPr indent="0" lvl="0" marL="0" rtl="0" algn="ctr">
+              <a:spcBef>
+                <a:spcPts val="0"/>
+              </a:spcBef>
+              <a:spcAft>
+                <a:spcPts val="0"/>
+              </a:spcAft>
+              <a:buNone/>
+            </a:pPr>
+            <a:r>
+              <a:rPr b="1" lang="en-US" sz="1800">
+                <a:solidFill>
+                  <a:srgbClr val="0B3D59"/>
+                </a:solidFill>
+                <a:latin typeface="Times New Roman"/>
+                <a:ea typeface="Times New Roman"/>
+                <a:cs typeface="Times New Roman"/>
+                <a:sym typeface="Times New Roman"/>
+              </a:rPr>
+              <a:t>* WHO threshold = 44.5 doctors + nurses + midwives per 10,000 population</a:t>
+            </a:r>
+            <a:endParaRPr b="1" sz="1800">
+              <a:solidFill>
+                <a:srgbClr val="0B3D59"/>
+              </a:solidFill>
+              <a:latin typeface="Times New Roman"/>
+              <a:ea typeface="Times New Roman"/>
+              <a:cs typeface="Times New Roman"/>
+              <a:sym typeface="Times New Roman"/>
+            </a:endParaRPr>
+          </a:p>
+        </p:txBody>
+      </p:sp>
+      <p:sp>
+        <p:nvSpPr>
+          <p:cNvPr id="112" name="Google Shape;112;p17"/>
+          <p:cNvSpPr txBox="1"/>
+          <p:nvPr/>
+        </p:nvSpPr>
+        <p:spPr>
+          <a:xfrm>
+            <a:off x="474011" y="902039"/>
+            <a:ext cx="8229600" cy="520200"/>
+          </a:xfrm>
+          <a:prstGeom prst="rect">
+            <a:avLst/>
+          </a:prstGeom>
+          <a:noFill/>
+          <a:ln>
+            <a:noFill/>
+          </a:ln>
+        </p:spPr>
+        <p:txBody>
+          <a:bodyPr anchorCtr="0" anchor="t" bIns="91425" lIns="91425" spcFirstLastPara="1" rIns="91425" wrap="square" tIns="91425">
+            <a:noAutofit/>
+          </a:bodyPr>
+          <a:lstStyle/>
+          <a:p>
+            <a:pPr indent="0" lvl="0" marL="0" rtl="0" algn="ctr">
+              <a:spcBef>
+                <a:spcPts val="0"/>
+              </a:spcBef>
+              <a:spcAft>
+                <a:spcPts val="0"/>
+              </a:spcAft>
+              <a:buNone/>
+            </a:pPr>
+            <a:r>
+              <a:rPr b="1" lang="en-US" sz="1800">
+                <a:solidFill>
+                  <a:srgbClr val="0B3D59"/>
+                </a:solidFill>
+                <a:latin typeface="Times New Roman"/>
+                <a:ea typeface="Times New Roman"/>
+                <a:cs typeface="Times New Roman"/>
+                <a:sym typeface="Times New Roman"/>
+              </a:rPr>
+              <a:t>Pakistan vs. Developed Countries</a:t>
+            </a:r>
+            <a:endParaRPr b="1" sz="1800">
+              <a:solidFill>
+                <a:srgbClr val="0B3D59"/>
+              </a:solidFill>
+              <a:latin typeface="Times New Roman"/>
+              <a:ea typeface="Times New Roman"/>
+              <a:cs typeface="Times New Roman"/>
+              <a:sym typeface="Times New Roman"/>
+            </a:endParaRPr>
+          </a:p>
+        </p:txBody>
+      </p:sp>
+    </p:spTree>
+  </p:cSld>
+  <p:clrMapOvr>
+    <a:masterClrMapping/>
+  </p:clrMapOvr>
+</p:sld>
+</file>
+
+<file path=ppt/slides/slide6.xml><?xml version="1.0" encoding="utf-8"?>
+<p:sld xmlns:a="http://schemas.openxmlformats.org/drawingml/2006/main" xmlns:r="http://schemas.openxmlformats.org/officeDocument/2006/relationships" xmlns:mc="http://schemas.openxmlformats.org/markup-compatibility/2006" xmlns:mv="urn:schemas-microsoft-com:mac:vml" xmlns:p="http://schemas.openxmlformats.org/presentationml/2006/main" xmlns:c="http://schemas.openxmlformats.org/drawingml/2006/chart" xmlns:dgm="http://schemas.openxmlformats.org/drawingml/2006/diagram" xmlns:o="urn:schemas-microsoft-com:office:office" xmlns:v="urn:schemas-microsoft-com:vml" xmlns:pvml="urn:schemas-microsoft-com:office:powerpoint" xmlns:com="http://schemas.openxmlformats.org/drawingml/2006/compatibility" xmlns:p14="http://schemas.microsoft.com/office/powerpoint/2010/main" xmlns:p15="http://schemas.microsoft.com/office/powerpoint/2012/main" xmlns:ahyp="http://schemas.microsoft.com/office/drawing/2018/hyperlinkcolor">
+  <p:cSld>
+    <p:spTree>
+      <p:nvGrpSpPr>
+        <p:cNvPr id="116" name="Shape 116"/>
+        <p:cNvGrpSpPr/>
+        <p:nvPr/>
+      </p:nvGrpSpPr>
+      <p:grpSpPr>
+        <a:xfrm>
+          <a:off x="0" y="0"/>
+          <a:ext cx="0" cy="0"/>
+          <a:chOff x="0" y="0"/>
+          <a:chExt cx="0" cy="0"/>
+        </a:xfrm>
+      </p:grpSpPr>
+      <p:sp>
+        <p:nvSpPr>
+          <p:cNvPr id="117" name="Google Shape;117;p18"/>
+          <p:cNvSpPr txBox="1"/>
+          <p:nvPr>
+            <p:ph type="title"/>
+          </p:nvPr>
+        </p:nvSpPr>
+        <p:spPr>
+          <a:xfrm>
             <a:off x="457200" y="274638"/>
             <a:ext cx="8229600" cy="1143000"/>
           </a:xfrm>
@@ -24919,7 +27232,7 @@
       </p:sp>
       <p:sp>
         <p:nvSpPr>
-          <p:cNvPr id="110" name="Google Shape;110;p17"/>
+          <p:cNvPr id="118" name="Google Shape;118;p18"/>
           <p:cNvSpPr/>
           <p:nvPr/>
         </p:nvSpPr>
@@ -24970,7 +27283,7 @@
       </p:sp>
       <p:sp>
         <p:nvSpPr>
-          <p:cNvPr id="111" name="Google Shape;111;p17"/>
+          <p:cNvPr id="119" name="Google Shape;119;p18"/>
           <p:cNvSpPr/>
           <p:nvPr/>
         </p:nvSpPr>
@@ -25033,7 +27346,7 @@
       </p:sp>
       <p:sp>
         <p:nvSpPr>
-          <p:cNvPr id="112" name="Google Shape;112;p17"/>
+          <p:cNvPr id="120" name="Google Shape;120;p18"/>
           <p:cNvSpPr/>
           <p:nvPr/>
         </p:nvSpPr>
@@ -25147,7 +27460,7 @@
       </p:sp>
       <p:sp>
         <p:nvSpPr>
-          <p:cNvPr id="113" name="Google Shape;113;p17"/>
+          <p:cNvPr id="121" name="Google Shape;121;p18"/>
           <p:cNvSpPr/>
           <p:nvPr/>
         </p:nvSpPr>
@@ -25198,7 +27511,7 @@
       </p:sp>
       <p:sp>
         <p:nvSpPr>
-          <p:cNvPr id="114" name="Google Shape;114;p17"/>
+          <p:cNvPr id="122" name="Google Shape;122;p18"/>
           <p:cNvSpPr/>
           <p:nvPr/>
         </p:nvSpPr>
@@ -25261,7 +27574,7 @@
       </p:sp>
       <p:sp>
         <p:nvSpPr>
-          <p:cNvPr id="115" name="Google Shape;115;p17"/>
+          <p:cNvPr id="123" name="Google Shape;123;p18"/>
           <p:cNvSpPr/>
           <p:nvPr/>
         </p:nvSpPr>
@@ -25327,7 +27640,7 @@
       </p:sp>
       <p:sp>
         <p:nvSpPr>
-          <p:cNvPr id="116" name="Google Shape;116;p17"/>
+          <p:cNvPr id="124" name="Google Shape;124;p18"/>
           <p:cNvSpPr/>
           <p:nvPr/>
         </p:nvSpPr>
@@ -25378,7 +27691,7 @@
       </p:sp>
       <p:sp>
         <p:nvSpPr>
-          <p:cNvPr id="117" name="Google Shape;117;p17"/>
+          <p:cNvPr id="125" name="Google Shape;125;p18"/>
           <p:cNvSpPr/>
           <p:nvPr/>
         </p:nvSpPr>
@@ -25441,7 +27754,7 @@
       </p:sp>
       <p:sp>
         <p:nvSpPr>
-          <p:cNvPr id="118" name="Google Shape;118;p17"/>
+          <p:cNvPr id="126" name="Google Shape;126;p18"/>
           <p:cNvSpPr/>
           <p:nvPr/>
         </p:nvSpPr>
@@ -25544,7 +27857,7 @@
                                           </p:stCondLst>
                                         </p:cTn>
                                         <p:tgtEl>
-                                          <p:spTgt spid="110"/>
+                                          <p:spTgt spid="118"/>
                                         </p:tgtEl>
                                         <p:attrNameLst>
                                           <p:attrName>style.visibility</p:attrName>
@@ -25558,7 +27871,7 @@
                                       <p:cBhvr>
                                         <p:cTn dur="1000"/>
                                         <p:tgtEl>
-                                          <p:spTgt spid="110"/>
+                                          <p:spTgt spid="118"/>
                                         </p:tgtEl>
                                       </p:cBhvr>
                                     </p:animEffect>
@@ -25579,7 +27892,7 @@
                                           </p:stCondLst>
                                         </p:cTn>
                                         <p:tgtEl>
-                                          <p:spTgt spid="111"/>
+                                          <p:spTgt spid="119"/>
                                         </p:tgtEl>
                                         <p:attrNameLst>
                                           <p:attrName>style.visibility</p:attrName>
@@ -25593,7 +27906,7 @@
                                       <p:cBhvr>
                                         <p:cTn dur="1000"/>
                                         <p:tgtEl>
-                                          <p:spTgt spid="111"/>
+                                          <p:spTgt spid="119"/>
                                         </p:tgtEl>
                                       </p:cBhvr>
                                     </p:animEffect>
@@ -25614,7 +27927,7 @@
                                           </p:stCondLst>
                                         </p:cTn>
                                         <p:tgtEl>
-                                          <p:spTgt spid="112"/>
+                                          <p:spTgt spid="120"/>
                                         </p:tgtEl>
                                         <p:attrNameLst>
                                           <p:attrName>style.visibility</p:attrName>
@@ -25628,7 +27941,7 @@
                                       <p:cBhvr>
                                         <p:cTn dur="1000"/>
                                         <p:tgtEl>
-                                          <p:spTgt spid="112"/>
+                                          <p:spTgt spid="120"/>
                                         </p:tgtEl>
                                       </p:cBhvr>
                                     </p:animEffect>
@@ -25667,7 +27980,7 @@
                                           </p:stCondLst>
                                         </p:cTn>
                                         <p:tgtEl>
-                                          <p:spTgt spid="113"/>
+                                          <p:spTgt spid="121"/>
                                         </p:tgtEl>
                                         <p:attrNameLst>
                                           <p:attrName>style.visibility</p:attrName>
@@ -25681,7 +27994,7 @@
                                       <p:cBhvr>
                                         <p:cTn dur="1000"/>
                                         <p:tgtEl>
-                                          <p:spTgt spid="113"/>
+                                          <p:spTgt spid="121"/>
                                         </p:tgtEl>
                                       </p:cBhvr>
                                     </p:animEffect>
@@ -25702,7 +28015,7 @@
                                           </p:stCondLst>
                                         </p:cTn>
                                         <p:tgtEl>
-                                          <p:spTgt spid="114"/>
+                                          <p:spTgt spid="122"/>
                                         </p:tgtEl>
                                         <p:attrNameLst>
                                           <p:attrName>style.visibility</p:attrName>
@@ -25716,7 +28029,7 @@
                                       <p:cBhvr>
                                         <p:cTn dur="1000"/>
                                         <p:tgtEl>
-                                          <p:spTgt spid="114"/>
+                                          <p:spTgt spid="122"/>
                                         </p:tgtEl>
                                       </p:cBhvr>
                                     </p:animEffect>
@@ -25737,7 +28050,7 @@
                                           </p:stCondLst>
                                         </p:cTn>
                                         <p:tgtEl>
-                                          <p:spTgt spid="115"/>
+                                          <p:spTgt spid="123"/>
                                         </p:tgtEl>
                                         <p:attrNameLst>
                                           <p:attrName>style.visibility</p:attrName>
@@ -25751,7 +28064,7 @@
                                       <p:cBhvr>
                                         <p:cTn dur="1000"/>
                                         <p:tgtEl>
-                                          <p:spTgt spid="115"/>
+                                          <p:spTgt spid="123"/>
                                         </p:tgtEl>
                                       </p:cBhvr>
                                     </p:animEffect>
@@ -25790,7 +28103,7 @@
                                           </p:stCondLst>
                                         </p:cTn>
                                         <p:tgtEl>
-                                          <p:spTgt spid="116"/>
+                                          <p:spTgt spid="124"/>
                                         </p:tgtEl>
                                         <p:attrNameLst>
                                           <p:attrName>style.visibility</p:attrName>
@@ -25804,7 +28117,7 @@
                                       <p:cBhvr>
                                         <p:cTn dur="1000"/>
                                         <p:tgtEl>
-                                          <p:spTgt spid="116"/>
+                                          <p:spTgt spid="124"/>
                                         </p:tgtEl>
                                       </p:cBhvr>
                                     </p:animEffect>
@@ -25825,7 +28138,7 @@
                                           </p:stCondLst>
                                         </p:cTn>
                                         <p:tgtEl>
-                                          <p:spTgt spid="117"/>
+                                          <p:spTgt spid="125"/>
                                         </p:tgtEl>
                                         <p:attrNameLst>
                                           <p:attrName>style.visibility</p:attrName>
@@ -25839,7 +28152,7 @@
                                       <p:cBhvr>
                                         <p:cTn dur="1000"/>
                                         <p:tgtEl>
-                                          <p:spTgt spid="117"/>
+                                          <p:spTgt spid="125"/>
                                         </p:tgtEl>
                                       </p:cBhvr>
                                     </p:animEffect>
@@ -25860,7 +28173,7 @@
                                           </p:stCondLst>
                                         </p:cTn>
                                         <p:tgtEl>
-                                          <p:spTgt spid="118"/>
+                                          <p:spTgt spid="126"/>
                                         </p:tgtEl>
                                         <p:attrNameLst>
                                           <p:attrName>style.visibility</p:attrName>
@@ -25874,7 +28187,7 @@
                                       <p:cBhvr>
                                         <p:cTn dur="1000"/>
                                         <p:tgtEl>
-                                          <p:spTgt spid="118"/>
+                                          <p:spTgt spid="126"/>
                                         </p:tgtEl>
                                       </p:cBhvr>
                                     </p:animEffect>
@@ -25912,12 +28225,12 @@
 </p:sld>
 </file>
 
-<file path=ppt/slides/slide6.xml><?xml version="1.0" encoding="utf-8"?>
+<file path=ppt/slides/slide7.xml><?xml version="1.0" encoding="utf-8"?>
 <p:sld xmlns:a="http://schemas.openxmlformats.org/drawingml/2006/main" xmlns:r="http://schemas.openxmlformats.org/officeDocument/2006/relationships" xmlns:mc="http://schemas.openxmlformats.org/markup-compatibility/2006" xmlns:mv="urn:schemas-microsoft-com:mac:vml" xmlns:p="http://schemas.openxmlformats.org/presentationml/2006/main" xmlns:c="http://schemas.openxmlformats.org/drawingml/2006/chart" xmlns:dgm="http://schemas.openxmlformats.org/drawingml/2006/diagram" xmlns:o="urn:schemas-microsoft-com:office:office" xmlns:v="urn:schemas-microsoft-com:vml" xmlns:pvml="urn:schemas-microsoft-com:office:powerpoint" xmlns:com="http://schemas.openxmlformats.org/drawingml/2006/compatibility" xmlns:p14="http://schemas.microsoft.com/office/powerpoint/2010/main" xmlns:p15="http://schemas.microsoft.com/office/powerpoint/2012/main" xmlns:ahyp="http://schemas.microsoft.com/office/drawing/2018/hyperlinkcolor">
   <p:cSld>
     <p:spTree>
       <p:nvGrpSpPr>
-        <p:cNvPr id="122" name="Shape 122"/>
+        <p:cNvPr id="130" name="Shape 130"/>
         <p:cNvGrpSpPr/>
         <p:nvPr/>
       </p:nvGrpSpPr>
@@ -25931,7 +28244,7 @@
       </p:grpSpPr>
       <p:sp>
         <p:nvSpPr>
-          <p:cNvPr id="123" name="Google Shape;123;p18"/>
+          <p:cNvPr id="131" name="Google Shape;131;p19"/>
           <p:cNvSpPr txBox="1"/>
           <p:nvPr>
             <p:ph type="title"/>
@@ -25987,7 +28300,7 @@
       </p:sp>
       <p:sp>
         <p:nvSpPr>
-          <p:cNvPr id="124" name="Google Shape;124;p18"/>
+          <p:cNvPr id="132" name="Google Shape;132;p19"/>
           <p:cNvSpPr txBox="1"/>
           <p:nvPr>
             <p:ph idx="1" type="body"/>
@@ -26044,12 +28357,12 @@
 </p:sld>
 </file>
 
-<file path=ppt/slides/slide7.xml><?xml version="1.0" encoding="utf-8"?>
+<file path=ppt/slides/slide8.xml><?xml version="1.0" encoding="utf-8"?>
 <p:sld xmlns:a="http://schemas.openxmlformats.org/drawingml/2006/main" xmlns:r="http://schemas.openxmlformats.org/officeDocument/2006/relationships" xmlns:mc="http://schemas.openxmlformats.org/markup-compatibility/2006" xmlns:mv="urn:schemas-microsoft-com:mac:vml" xmlns:p="http://schemas.openxmlformats.org/presentationml/2006/main" xmlns:c="http://schemas.openxmlformats.org/drawingml/2006/chart" xmlns:dgm="http://schemas.openxmlformats.org/drawingml/2006/diagram" xmlns:o="urn:schemas-microsoft-com:office:office" xmlns:v="urn:schemas-microsoft-com:vml" xmlns:pvml="urn:schemas-microsoft-com:office:powerpoint" xmlns:com="http://schemas.openxmlformats.org/drawingml/2006/compatibility" xmlns:p14="http://schemas.microsoft.com/office/powerpoint/2010/main" xmlns:p15="http://schemas.microsoft.com/office/powerpoint/2012/main" xmlns:ahyp="http://schemas.microsoft.com/office/drawing/2018/hyperlinkcolor">
   <p:cSld>
     <p:spTree>
       <p:nvGrpSpPr>
-        <p:cNvPr id="128" name="Shape 128"/>
+        <p:cNvPr id="136" name="Shape 136"/>
         <p:cNvGrpSpPr/>
         <p:nvPr/>
       </p:nvGrpSpPr>
@@ -26063,7 +28376,7 @@
       </p:grpSpPr>
       <p:sp>
         <p:nvSpPr>
-          <p:cNvPr id="129" name="Google Shape;129;p19"/>
+          <p:cNvPr id="137" name="Google Shape;137;p20"/>
           <p:cNvSpPr txBox="1"/>
           <p:nvPr>
             <p:ph type="title"/>
@@ -26108,7 +28421,7 @@
       </p:sp>
       <p:graphicFrame>
         <p:nvGraphicFramePr>
-          <p:cNvPr id="130" name="Google Shape;130;p19"/>
+          <p:cNvPr id="138" name="Google Shape;138;p20"/>
           <p:cNvGraphicFramePr/>
           <p:nvPr/>
         </p:nvGraphicFramePr>
@@ -26121,7 +28434,7 @@
             <a:tbl>
               <a:tblPr>
                 <a:noFill/>
-                <a:tableStyleId>{6DCBE433-D38A-414C-8CE7-A03D4E96D332}</a:tableStyleId>
+                <a:tableStyleId>{B72C5A8D-5030-47FC-9FBE-639BE6E02443}</a:tableStyleId>
               </a:tblPr>
               <a:tblGrid>
                 <a:gridCol w="2057400"/>
@@ -26129,7 +28442,7 @@
                 <a:gridCol w="2057400"/>
                 <a:gridCol w="2057400"/>
               </a:tblGrid>
-              <a:tr h="562475">
+              <a:tr h="527000">
                 <a:tc>
                   <a:txBody>
                     <a:bodyPr/>
@@ -26402,44 +28715,7 @@
                           <a:cs typeface="Calibri"/>
                           <a:sym typeface="Calibri"/>
                         </a:rPr>
-                        <a:t>Swin</a:t>
-                      </a:r>
-                      <a:endParaRPr sz="2000">
-                        <a:solidFill>
-                          <a:schemeClr val="dk1"/>
-                        </a:solidFill>
-                        <a:latin typeface="Calibri"/>
-                        <a:ea typeface="Calibri"/>
-                        <a:cs typeface="Calibri"/>
-                        <a:sym typeface="Calibri"/>
-                      </a:endParaRPr>
-                    </a:p>
-                    <a:p>
-                      <a:pPr indent="0" lvl="0" marL="0" rtl="0" algn="l">
-                        <a:spcBef>
-                          <a:spcPts val="0"/>
-                        </a:spcBef>
-                        <a:spcAft>
-                          <a:spcPts val="0"/>
-                        </a:spcAft>
-                        <a:buClr>
-                          <a:schemeClr val="dk1"/>
-                        </a:buClr>
-                        <a:buSzPts val="1100"/>
-                        <a:buFont typeface="Arial"/>
-                        <a:buNone/>
-                      </a:pPr>
-                      <a:r>
-                        <a:rPr lang="en-US" sz="2000">
-                          <a:solidFill>
-                            <a:schemeClr val="dk1"/>
-                          </a:solidFill>
-                          <a:latin typeface="Calibri"/>
-                          <a:ea typeface="Calibri"/>
-                          <a:cs typeface="Calibri"/>
-                          <a:sym typeface="Calibri"/>
-                        </a:rPr>
-                        <a:t>Transformer, Grad-CAM</a:t>
+                        <a:t>Swin Transformer, Grad-CAM</a:t>
                       </a:r>
                       <a:endParaRPr sz="2000">
                         <a:latin typeface="Calibri"/>
@@ -26605,8 +28881,33 @@
                           <a:cs typeface="Calibri"/>
                           <a:sym typeface="Calibri"/>
                         </a:rPr>
-                        <a:t>T</a:t>
+                        <a:t>CNN (ResNet18), OCNN (ResNet50)</a:t>
                       </a:r>
+                      <a:endParaRPr sz="2000">
+                        <a:solidFill>
+                          <a:schemeClr val="dk1"/>
+                        </a:solidFill>
+                        <a:latin typeface="Calibri"/>
+                        <a:ea typeface="Calibri"/>
+                        <a:cs typeface="Calibri"/>
+                        <a:sym typeface="Calibri"/>
+                      </a:endParaRPr>
+                    </a:p>
+                    <a:p>
+                      <a:pPr indent="0" lvl="0" marL="0" rtl="0" algn="l">
+                        <a:spcBef>
+                          <a:spcPts val="0"/>
+                        </a:spcBef>
+                        <a:spcAft>
+                          <a:spcPts val="0"/>
+                        </a:spcAft>
+                        <a:buClr>
+                          <a:schemeClr val="dk1"/>
+                        </a:buClr>
+                        <a:buSzPts val="1100"/>
+                        <a:buFont typeface="Arial"/>
+                        <a:buNone/>
+                      </a:pPr>
                       <a:r>
                         <a:rPr lang="en-US" sz="2000">
                           <a:solidFill>
@@ -26617,9 +28918,12 @@
                           <a:cs typeface="Calibri"/>
                           <a:sym typeface="Calibri"/>
                         </a:rPr>
-                        <a:t>ransfer-learning classifier</a:t>
+                        <a:t>Grad-CAM</a:t>
                       </a:r>
                       <a:endParaRPr sz="2000">
+                        <a:solidFill>
+                          <a:schemeClr val="dk1"/>
+                        </a:solidFill>
                         <a:latin typeface="Calibri"/>
                         <a:ea typeface="Calibri"/>
                         <a:cs typeface="Calibri"/>
@@ -26669,7 +28973,7 @@
                           <a:cs typeface="Calibri"/>
                           <a:sym typeface="Calibri"/>
                         </a:rPr>
-                        <a:t>lass imbalance, limited external validation</a:t>
+                        <a:t>lass imbalance</a:t>
                       </a:r>
                       <a:endParaRPr sz="2000">
                         <a:latin typeface="Calibri"/>
@@ -26922,7 +29226,7 @@
                                           </p:stCondLst>
                                         </p:cTn>
                                         <p:tgtEl>
-                                          <p:spTgt spid="130"/>
+                                          <p:spTgt spid="138"/>
                                         </p:tgtEl>
                                         <p:attrNameLst>
                                           <p:attrName>style.visibility</p:attrName>
@@ -26966,12 +29270,12 @@
 </p:sld>
 </file>
 
-<file path=ppt/slides/slide8.xml><?xml version="1.0" encoding="utf-8"?>
+<file path=ppt/slides/slide9.xml><?xml version="1.0" encoding="utf-8"?>
 <p:sld xmlns:a="http://schemas.openxmlformats.org/drawingml/2006/main" xmlns:r="http://schemas.openxmlformats.org/officeDocument/2006/relationships" xmlns:mc="http://schemas.openxmlformats.org/markup-compatibility/2006" xmlns:mv="urn:schemas-microsoft-com:mac:vml" xmlns:p="http://schemas.openxmlformats.org/presentationml/2006/main" xmlns:c="http://schemas.openxmlformats.org/drawingml/2006/chart" xmlns:dgm="http://schemas.openxmlformats.org/drawingml/2006/diagram" xmlns:o="urn:schemas-microsoft-com:office:office" xmlns:v="urn:schemas-microsoft-com:vml" xmlns:pvml="urn:schemas-microsoft-com:office:powerpoint" xmlns:com="http://schemas.openxmlformats.org/drawingml/2006/compatibility" xmlns:p14="http://schemas.microsoft.com/office/powerpoint/2010/main" xmlns:p15="http://schemas.microsoft.com/office/powerpoint/2012/main" xmlns:ahyp="http://schemas.microsoft.com/office/drawing/2018/hyperlinkcolor">
   <p:cSld>
     <p:spTree>
       <p:nvGrpSpPr>
-        <p:cNvPr id="134" name="Shape 134"/>
+        <p:cNvPr id="142" name="Shape 142"/>
         <p:cNvGrpSpPr/>
         <p:nvPr/>
       </p:nvGrpSpPr>
@@ -26985,7 +29289,7 @@
       </p:grpSpPr>
       <p:sp>
         <p:nvSpPr>
-          <p:cNvPr id="135" name="Google Shape;135;p20"/>
+          <p:cNvPr id="143" name="Google Shape;143;p21"/>
           <p:cNvSpPr txBox="1"/>
           <p:nvPr>
             <p:ph type="title"/>
@@ -27038,7 +29342,7 @@
       </p:sp>
       <p:graphicFrame>
         <p:nvGraphicFramePr>
-          <p:cNvPr id="136" name="Google Shape;136;p20"/>
+          <p:cNvPr id="144" name="Google Shape;144;p21"/>
           <p:cNvGraphicFramePr/>
           <p:nvPr/>
         </p:nvGraphicFramePr>
@@ -27051,7 +29355,7 @@
             <a:tbl>
               <a:tblPr>
                 <a:noFill/>
-                <a:tableStyleId>{6DCBE433-D38A-414C-8CE7-A03D4E96D332}</a:tableStyleId>
+                <a:tableStyleId>{B72C5A8D-5030-47FC-9FBE-639BE6E02443}</a:tableStyleId>
               </a:tblPr>
               <a:tblGrid>
                 <a:gridCol w="2057400"/>
@@ -27713,139 +30017,286 @@
 </p:sld>
 </file>
 
-<file path=ppt/slides/slide9.xml><?xml version="1.0" encoding="utf-8"?>
-<p:sld xmlns:a="http://schemas.openxmlformats.org/drawingml/2006/main" xmlns:r="http://schemas.openxmlformats.org/officeDocument/2006/relationships" xmlns:mc="http://schemas.openxmlformats.org/markup-compatibility/2006" xmlns:mv="urn:schemas-microsoft-com:mac:vml" xmlns:p="http://schemas.openxmlformats.org/presentationml/2006/main" xmlns:c="http://schemas.openxmlformats.org/drawingml/2006/chart" xmlns:dgm="http://schemas.openxmlformats.org/drawingml/2006/diagram" xmlns:o="urn:schemas-microsoft-com:office:office" xmlns:v="urn:schemas-microsoft-com:vml" xmlns:pvml="urn:schemas-microsoft-com:office:powerpoint" xmlns:com="http://schemas.openxmlformats.org/drawingml/2006/compatibility" xmlns:p14="http://schemas.microsoft.com/office/powerpoint/2010/main" xmlns:p15="http://schemas.microsoft.com/office/powerpoint/2012/main" xmlns:ahyp="http://schemas.microsoft.com/office/drawing/2018/hyperlinkcolor">
-  <p:cSld>
-    <p:spTree>
-      <p:nvGrpSpPr>
-        <p:cNvPr id="140" name="Shape 140"/>
-        <p:cNvGrpSpPr/>
-        <p:nvPr/>
-      </p:nvGrpSpPr>
-      <p:grpSpPr>
-        <a:xfrm>
-          <a:off x="0" y="0"/>
-          <a:ext cx="0" cy="0"/>
-          <a:chOff x="0" y="0"/>
-          <a:chExt cx="0" cy="0"/>
-        </a:xfrm>
-      </p:grpSpPr>
-      <p:sp>
-        <p:nvSpPr>
-          <p:cNvPr id="141" name="Google Shape;141;p21"/>
-          <p:cNvSpPr txBox="1"/>
-          <p:nvPr>
-            <p:ph type="title"/>
-          </p:nvPr>
-        </p:nvSpPr>
-        <p:spPr>
-          <a:xfrm>
-            <a:off x="722313" y="4406900"/>
-            <a:ext cx="7772400" cy="1362000"/>
-          </a:xfrm>
-          <a:prstGeom prst="rect">
-            <a:avLst/>
-          </a:prstGeom>
-          <a:noFill/>
-          <a:ln>
-            <a:noFill/>
-          </a:ln>
-        </p:spPr>
-        <p:txBody>
-          <a:bodyPr anchorCtr="0" anchor="t" bIns="45700" lIns="91425" spcFirstLastPara="1" rIns="91425" wrap="square" tIns="45700">
-            <a:normAutofit/>
-          </a:bodyPr>
-          <a:lstStyle/>
-          <a:p>
-            <a:pPr indent="0" lvl="0" marL="0" rtl="0" algn="l">
-              <a:lnSpc>
-                <a:spcPct val="100000"/>
-              </a:lnSpc>
-              <a:spcBef>
-                <a:spcPts val="0"/>
-              </a:spcBef>
-              <a:spcAft>
-                <a:spcPts val="0"/>
-              </a:spcAft>
-              <a:buSzPts val="1400"/>
-              <a:buNone/>
-            </a:pPr>
-            <a:r>
-              <a:rPr lang="en-US">
-                <a:solidFill>
-                  <a:srgbClr val="0B3D59"/>
-                </a:solidFill>
-              </a:rPr>
-              <a:t>Gap Analysis</a:t>
-            </a:r>
-            <a:endParaRPr>
-              <a:solidFill>
-                <a:srgbClr val="0B3D59"/>
-              </a:solidFill>
-            </a:endParaRPr>
-          </a:p>
-        </p:txBody>
-      </p:sp>
-      <p:sp>
-        <p:nvSpPr>
-          <p:cNvPr id="142" name="Google Shape;142;p21"/>
-          <p:cNvSpPr txBox="1"/>
-          <p:nvPr>
-            <p:ph idx="1" type="body"/>
-          </p:nvPr>
-        </p:nvSpPr>
-        <p:spPr>
-          <a:xfrm>
-            <a:off x="722313" y="2906713"/>
-            <a:ext cx="7772400" cy="1500300"/>
-          </a:xfrm>
-          <a:prstGeom prst="rect">
-            <a:avLst/>
-          </a:prstGeom>
-          <a:noFill/>
-          <a:ln>
-            <a:noFill/>
-          </a:ln>
-        </p:spPr>
-        <p:txBody>
-          <a:bodyPr anchorCtr="0" anchor="b" bIns="45700" lIns="91425" spcFirstLastPara="1" rIns="91425" wrap="square" tIns="45700">
-            <a:normAutofit/>
-          </a:bodyPr>
-          <a:lstStyle/>
-          <a:p>
-            <a:pPr indent="0" lvl="0" marL="44450" rtl="0" algn="l">
-              <a:lnSpc>
-                <a:spcPct val="100000"/>
-              </a:lnSpc>
-              <a:spcBef>
-                <a:spcPts val="0"/>
-              </a:spcBef>
-              <a:spcAft>
-                <a:spcPts val="0"/>
-              </a:spcAft>
-              <a:buClr>
-                <a:srgbClr val="888888"/>
-              </a:buClr>
-              <a:buSzPts val="2000"/>
-              <a:buFont typeface="Arial"/>
-              <a:buNone/>
-            </a:pPr>
-            <a:r>
-              <a:t/>
-            </a:r>
-            <a:endParaRPr/>
-          </a:p>
-        </p:txBody>
-      </p:sp>
-    </p:spTree>
-  </p:cSld>
-  <p:clrMapOvr>
-    <a:masterClrMapping/>
-  </p:clrMapOvr>
-</p:sld>
+<file path=ppt/theme/theme1.xml><?xml version="1.0" encoding="utf-8"?>
+<a:theme xmlns:a="http://schemas.openxmlformats.org/drawingml/2006/main" xmlns:r="http://schemas.openxmlformats.org/officeDocument/2006/relationships" name="Office Theme">
+  <a:themeElements>
+    <a:clrScheme name="Office">
+      <a:dk1>
+        <a:srgbClr val="000000"/>
+      </a:dk1>
+      <a:lt1>
+        <a:srgbClr val="FFFFFF"/>
+      </a:lt1>
+      <a:dk2>
+        <a:srgbClr val="1F497D"/>
+      </a:dk2>
+      <a:lt2>
+        <a:srgbClr val="EEECE1"/>
+      </a:lt2>
+      <a:accent1>
+        <a:srgbClr val="4F81BD"/>
+      </a:accent1>
+      <a:accent2>
+        <a:srgbClr val="C0504D"/>
+      </a:accent2>
+      <a:accent3>
+        <a:srgbClr val="9BBB59"/>
+      </a:accent3>
+      <a:accent4>
+        <a:srgbClr val="8064A2"/>
+      </a:accent4>
+      <a:accent5>
+        <a:srgbClr val="4BACC6"/>
+      </a:accent5>
+      <a:accent6>
+        <a:srgbClr val="F79646"/>
+      </a:accent6>
+      <a:hlink>
+        <a:srgbClr val="0000FF"/>
+      </a:hlink>
+      <a:folHlink>
+        <a:srgbClr val="800080"/>
+      </a:folHlink>
+    </a:clrScheme>
+    <a:fontScheme name="Office">
+      <a:majorFont>
+        <a:latin typeface="Arial"/>
+        <a:ea typeface=""/>
+        <a:cs typeface=""/>
+        <a:font script="Jpan" typeface="ＭＳ Ｐゴシック"/>
+        <a:font script="Hang" typeface="맑은 고딕"/>
+        <a:font script="Hans" typeface="宋体"/>
+        <a:font script="Hant" typeface="新細明體"/>
+        <a:font script="Arab" typeface="Times New Roman"/>
+        <a:font script="Hebr" typeface="Times New Roman"/>
+        <a:font script="Thai" typeface="Angsana New"/>
+        <a:font script="Ethi" typeface="Nyala"/>
+        <a:font script="Beng" typeface="Vrinda"/>
+        <a:font script="Gujr" typeface="Shruti"/>
+        <a:font script="Khmr" typeface="MoolBoran"/>
+        <a:font script="Knda" typeface="Tunga"/>
+        <a:font script="Guru" typeface="Raavi"/>
+        <a:font script="Cans" typeface="Euphemia"/>
+        <a:font script="Cher" typeface="Plantagenet Cherokee"/>
+        <a:font script="Yiii" typeface="Microsoft Yi Baiti"/>
+        <a:font script="Tibt" typeface="Microsoft Himalaya"/>
+        <a:font script="Thaa" typeface="MV Boli"/>
+        <a:font script="Deva" typeface="Mangal"/>
+        <a:font script="Telu" typeface="Gautami"/>
+        <a:font script="Taml" typeface="Latha"/>
+        <a:font script="Syrc" typeface="Estrangelo Edessa"/>
+        <a:font script="Orya" typeface="Kalinga"/>
+        <a:font script="Mlym" typeface="Kartika"/>
+        <a:font script="Laoo" typeface="DokChampa"/>
+        <a:font script="Sinh" typeface="Iskoola Pota"/>
+        <a:font script="Mong" typeface="Mongolian Baiti"/>
+        <a:font script="Viet" typeface="Times New Roman"/>
+        <a:font script="Uigh" typeface="Microsoft Uighur"/>
+        <a:font script="Geor" typeface="Sylfaen"/>
+      </a:majorFont>
+      <a:minorFont>
+        <a:latin typeface="Arial"/>
+        <a:ea typeface=""/>
+        <a:cs typeface=""/>
+        <a:font script="Jpan" typeface="ＭＳ Ｐゴシック"/>
+        <a:font script="Hang" typeface="맑은 고딕"/>
+        <a:font script="Hans" typeface="宋体"/>
+        <a:font script="Hant" typeface="新細明體"/>
+        <a:font script="Arab" typeface="Arial"/>
+        <a:font script="Hebr" typeface="Arial"/>
+        <a:font script="Thai" typeface="Cordia New"/>
+        <a:font script="Ethi" typeface="Nyala"/>
+        <a:font script="Beng" typeface="Vrinda"/>
+        <a:font script="Gujr" typeface="Shruti"/>
+        <a:font script="Khmr" typeface="DaunPenh"/>
+        <a:font script="Knda" typeface="Tunga"/>
+        <a:font script="Guru" typeface="Raavi"/>
+        <a:font script="Cans" typeface="Euphemia"/>
+        <a:font script="Cher" typeface="Plantagenet Cherokee"/>
+        <a:font script="Yiii" typeface="Microsoft Yi Baiti"/>
+        <a:font script="Tibt" typeface="Microsoft Himalaya"/>
+        <a:font script="Thaa" typeface="MV Boli"/>
+        <a:font script="Deva" typeface="Mangal"/>
+        <a:font script="Telu" typeface="Gautami"/>
+        <a:font script="Taml" typeface="Latha"/>
+        <a:font script="Syrc" typeface="Estrangelo Edessa"/>
+        <a:font script="Orya" typeface="Kalinga"/>
+        <a:font script="Mlym" typeface="Kartika"/>
+        <a:font script="Laoo" typeface="DokChampa"/>
+        <a:font script="Sinh" typeface="Iskoola Pota"/>
+        <a:font script="Mong" typeface="Mongolian Baiti"/>
+        <a:font script="Viet" typeface="Arial"/>
+        <a:font script="Uigh" typeface="Microsoft Uighur"/>
+        <a:font script="Geor" typeface="Sylfaen"/>
+      </a:minorFont>
+    </a:fontScheme>
+    <a:fmtScheme name="Office">
+      <a:fillStyleLst>
+        <a:solidFill>
+          <a:schemeClr val="phClr"/>
+        </a:solidFill>
+        <a:gradFill rotWithShape="1">
+          <a:gsLst>
+            <a:gs pos="0">
+              <a:schemeClr val="phClr">
+                <a:tint val="50000"/>
+                <a:satMod val="300000"/>
+              </a:schemeClr>
+            </a:gs>
+            <a:gs pos="35000">
+              <a:schemeClr val="phClr">
+                <a:tint val="37000"/>
+                <a:satMod val="300000"/>
+              </a:schemeClr>
+            </a:gs>
+            <a:gs pos="100000">
+              <a:schemeClr val="phClr">
+                <a:tint val="15000"/>
+                <a:satMod val="350000"/>
+              </a:schemeClr>
+            </a:gs>
+          </a:gsLst>
+          <a:lin ang="16200000" scaled="1"/>
+        </a:gradFill>
+        <a:gradFill rotWithShape="1">
+          <a:gsLst>
+            <a:gs pos="0">
+              <a:schemeClr val="phClr">
+                <a:tint val="100000"/>
+                <a:shade val="100000"/>
+                <a:satMod val="130000"/>
+              </a:schemeClr>
+            </a:gs>
+            <a:gs pos="100000">
+              <a:schemeClr val="phClr">
+                <a:tint val="50000"/>
+                <a:shade val="100000"/>
+                <a:satMod val="350000"/>
+              </a:schemeClr>
+            </a:gs>
+          </a:gsLst>
+          <a:lin ang="16200000" scaled="0"/>
+        </a:gradFill>
+      </a:fillStyleLst>
+      <a:lnStyleLst>
+        <a:ln w="9525" cap="flat" cmpd="sng" algn="ctr">
+          <a:solidFill>
+            <a:schemeClr val="phClr">
+              <a:shade val="95000"/>
+              <a:satMod val="105000"/>
+            </a:schemeClr>
+          </a:solidFill>
+          <a:prstDash val="solid"/>
+        </a:ln>
+        <a:ln w="25400" cap="flat" cmpd="sng" algn="ctr">
+          <a:solidFill>
+            <a:schemeClr val="phClr"/>
+          </a:solidFill>
+          <a:prstDash val="solid"/>
+        </a:ln>
+        <a:ln w="38100" cap="flat" cmpd="sng" algn="ctr">
+          <a:solidFill>
+            <a:schemeClr val="phClr"/>
+          </a:solidFill>
+          <a:prstDash val="solid"/>
+        </a:ln>
+      </a:lnStyleLst>
+      <a:effectStyleLst>
+        <a:effectStyle>
+          <a:effectLst>
+            <a:outerShdw blurRad="40000" dist="20000" dir="5400000" rotWithShape="0">
+              <a:srgbClr val="000000">
+                <a:alpha val="38000"/>
+              </a:srgbClr>
+            </a:outerShdw>
+          </a:effectLst>
+        </a:effectStyle>
+        <a:effectStyle>
+          <a:effectLst>
+            <a:outerShdw blurRad="40000" dist="23000" dir="5400000" rotWithShape="0">
+              <a:srgbClr val="000000">
+                <a:alpha val="35000"/>
+              </a:srgbClr>
+            </a:outerShdw>
+          </a:effectLst>
+        </a:effectStyle>
+        <a:effectStyle>
+          <a:effectLst>
+            <a:outerShdw blurRad="40000" dist="23000" dir="5400000" rotWithShape="0">
+              <a:srgbClr val="000000">
+                <a:alpha val="35000"/>
+              </a:srgbClr>
+            </a:outerShdw>
+          </a:effectLst>
+          <a:scene3d>
+            <a:camera prst="orthographicFront">
+              <a:rot lat="0" lon="0" rev="0"/>
+            </a:camera>
+            <a:lightRig rig="threePt" dir="t">
+              <a:rot lat="0" lon="0" rev="1200000"/>
+            </a:lightRig>
+          </a:scene3d>
+          <a:sp3d>
+            <a:bevelT w="63500" h="25400"/>
+          </a:sp3d>
+        </a:effectStyle>
+      </a:effectStyleLst>
+      <a:bgFillStyleLst>
+        <a:solidFill>
+          <a:schemeClr val="phClr"/>
+        </a:solidFill>
+        <a:gradFill rotWithShape="1">
+          <a:gsLst>
+            <a:gs pos="0">
+              <a:schemeClr val="phClr">
+                <a:tint val="40000"/>
+                <a:satMod val="350000"/>
+              </a:schemeClr>
+            </a:gs>
+            <a:gs pos="40000">
+              <a:schemeClr val="phClr">
+                <a:tint val="45000"/>
+                <a:shade val="99000"/>
+                <a:satMod val="350000"/>
+              </a:schemeClr>
+            </a:gs>
+            <a:gs pos="100000">
+              <a:schemeClr val="phClr">
+                <a:shade val="20000"/>
+                <a:satMod val="255000"/>
+              </a:schemeClr>
+            </a:gs>
+          </a:gsLst>
+          <a:path path="circle">
+            <a:fillToRect l="50000" t="-80000" r="50000" b="180000"/>
+          </a:path>
+        </a:gradFill>
+        <a:gradFill rotWithShape="1">
+          <a:gsLst>
+            <a:gs pos="0">
+              <a:schemeClr val="phClr">
+                <a:tint val="80000"/>
+                <a:satMod val="300000"/>
+              </a:schemeClr>
+            </a:gs>
+            <a:gs pos="100000">
+              <a:schemeClr val="phClr">
+                <a:shade val="30000"/>
+                <a:satMod val="200000"/>
+              </a:schemeClr>
+            </a:gs>
+          </a:gsLst>
+          <a:path path="circle">
+            <a:fillToRect l="50000" t="50000" r="50000" b="50000"/>
+          </a:path>
+        </a:gradFill>
+      </a:bgFillStyleLst>
+    </a:fmtScheme>
+  </a:themeElements>
+</a:theme>
 </file>
 
-<file path=ppt/theme/theme1.xml><?xml version="1.0" encoding="utf-8"?>
+<file path=ppt/theme/theme2.xml><?xml version="1.0" encoding="utf-8"?>
 <a:theme xmlns:a="http://schemas.openxmlformats.org/drawingml/2006/main" xmlns:r="http://schemas.openxmlformats.org/officeDocument/2006/relationships">
   <a:themeElements>
     <a:clrScheme name="Default">
@@ -28122,283 +30573,4 @@
     </a:fmtScheme>
   </a:themeElements>
 </a:theme>
-</file>
-
-<file path=ppt/theme/theme2.xml><?xml version="1.0" encoding="utf-8"?>
-<a:theme xmlns:a="http://schemas.openxmlformats.org/drawingml/2006/main" xmlns:r="http://schemas.openxmlformats.org/officeDocument/2006/relationships" name="Office Theme">
-  <a:themeElements>
-    <a:clrScheme name="Office">
-      <a:dk1>
-        <a:srgbClr val="000000"/>
-      </a:dk1>
-      <a:lt1>
-        <a:srgbClr val="FFFFFF"/>
-      </a:lt1>
-      <a:dk2>
-        <a:srgbClr val="1F497D"/>
-      </a:dk2>
-      <a:lt2>
-        <a:srgbClr val="EEECE1"/>
-      </a:lt2>
-      <a:accent1>
-        <a:srgbClr val="4F81BD"/>
-      </a:accent1>
-      <a:accent2>
-        <a:srgbClr val="C0504D"/>
-      </a:accent2>
-      <a:accent3>
-        <a:srgbClr val="9BBB59"/>
-      </a:accent3>
-      <a:accent4>
-        <a:srgbClr val="8064A2"/>
-      </a:accent4>
-      <a:accent5>
-        <a:srgbClr val="4BACC6"/>
-      </a:accent5>
-      <a:accent6>
-        <a:srgbClr val="F79646"/>
-      </a:accent6>
-      <a:hlink>
-        <a:srgbClr val="0000FF"/>
-      </a:hlink>
-      <a:folHlink>
-        <a:srgbClr val="800080"/>
-      </a:folHlink>
-    </a:clrScheme>
-    <a:fontScheme name="Office">
-      <a:majorFont>
-        <a:latin typeface="Arial"/>
-        <a:ea typeface=""/>
-        <a:cs typeface=""/>
-        <a:font script="Jpan" typeface="ＭＳ Ｐゴシック"/>
-        <a:font script="Hang" typeface="맑은 고딕"/>
-        <a:font script="Hans" typeface="宋体"/>
-        <a:font script="Hant" typeface="新細明體"/>
-        <a:font script="Arab" typeface="Times New Roman"/>
-        <a:font script="Hebr" typeface="Times New Roman"/>
-        <a:font script="Thai" typeface="Angsana New"/>
-        <a:font script="Ethi" typeface="Nyala"/>
-        <a:font script="Beng" typeface="Vrinda"/>
-        <a:font script="Gujr" typeface="Shruti"/>
-        <a:font script="Khmr" typeface="MoolBoran"/>
-        <a:font script="Knda" typeface="Tunga"/>
-        <a:font script="Guru" typeface="Raavi"/>
-        <a:font script="Cans" typeface="Euphemia"/>
-        <a:font script="Cher" typeface="Plantagenet Cherokee"/>
-        <a:font script="Yiii" typeface="Microsoft Yi Baiti"/>
-        <a:font script="Tibt" typeface="Microsoft Himalaya"/>
-        <a:font script="Thaa" typeface="MV Boli"/>
-        <a:font script="Deva" typeface="Mangal"/>
-        <a:font script="Telu" typeface="Gautami"/>
-        <a:font script="Taml" typeface="Latha"/>
-        <a:font script="Syrc" typeface="Estrangelo Edessa"/>
-        <a:font script="Orya" typeface="Kalinga"/>
-        <a:font script="Mlym" typeface="Kartika"/>
-        <a:font script="Laoo" typeface="DokChampa"/>
-        <a:font script="Sinh" typeface="Iskoola Pota"/>
-        <a:font script="Mong" typeface="Mongolian Baiti"/>
-        <a:font script="Viet" typeface="Times New Roman"/>
-        <a:font script="Uigh" typeface="Microsoft Uighur"/>
-        <a:font script="Geor" typeface="Sylfaen"/>
-      </a:majorFont>
-      <a:minorFont>
-        <a:latin typeface="Arial"/>
-        <a:ea typeface=""/>
-        <a:cs typeface=""/>
-        <a:font script="Jpan" typeface="ＭＳ Ｐゴシック"/>
-        <a:font script="Hang" typeface="맑은 고딕"/>
-        <a:font script="Hans" typeface="宋体"/>
-        <a:font script="Hant" typeface="新細明體"/>
-        <a:font script="Arab" typeface="Arial"/>
-        <a:font script="Hebr" typeface="Arial"/>
-        <a:font script="Thai" typeface="Cordia New"/>
-        <a:font script="Ethi" typeface="Nyala"/>
-        <a:font script="Beng" typeface="Vrinda"/>
-        <a:font script="Gujr" typeface="Shruti"/>
-        <a:font script="Khmr" typeface="DaunPenh"/>
-        <a:font script="Knda" typeface="Tunga"/>
-        <a:font script="Guru" typeface="Raavi"/>
-        <a:font script="Cans" typeface="Euphemia"/>
-        <a:font script="Cher" typeface="Plantagenet Cherokee"/>
-        <a:font script="Yiii" typeface="Microsoft Yi Baiti"/>
-        <a:font script="Tibt" typeface="Microsoft Himalaya"/>
-        <a:font script="Thaa" typeface="MV Boli"/>
-        <a:font script="Deva" typeface="Mangal"/>
-        <a:font script="Telu" typeface="Gautami"/>
-        <a:font script="Taml" typeface="Latha"/>
-        <a:font script="Syrc" typeface="Estrangelo Edessa"/>
-        <a:font script="Orya" typeface="Kalinga"/>
-        <a:font script="Mlym" typeface="Kartika"/>
-        <a:font script="Laoo" typeface="DokChampa"/>
-        <a:font script="Sinh" typeface="Iskoola Pota"/>
-        <a:font script="Mong" typeface="Mongolian Baiti"/>
-        <a:font script="Viet" typeface="Arial"/>
-        <a:font script="Uigh" typeface="Microsoft Uighur"/>
-        <a:font script="Geor" typeface="Sylfaen"/>
-      </a:minorFont>
-    </a:fontScheme>
-    <a:fmtScheme name="Office">
-      <a:fillStyleLst>
-        <a:solidFill>
-          <a:schemeClr val="phClr"/>
-        </a:solidFill>
-        <a:gradFill rotWithShape="1">
-          <a:gsLst>
-            <a:gs pos="0">
-              <a:schemeClr val="phClr">
-                <a:tint val="50000"/>
-                <a:satMod val="300000"/>
-              </a:schemeClr>
-            </a:gs>
-            <a:gs pos="35000">
-              <a:schemeClr val="phClr">
-                <a:tint val="37000"/>
-                <a:satMod val="300000"/>
-              </a:schemeClr>
-            </a:gs>
-            <a:gs pos="100000">
-              <a:schemeClr val="phClr">
-                <a:tint val="15000"/>
-                <a:satMod val="350000"/>
-              </a:schemeClr>
-            </a:gs>
-          </a:gsLst>
-          <a:lin ang="16200000" scaled="1"/>
-        </a:gradFill>
-        <a:gradFill rotWithShape="1">
-          <a:gsLst>
-            <a:gs pos="0">
-              <a:schemeClr val="phClr">
-                <a:tint val="100000"/>
-                <a:shade val="100000"/>
-                <a:satMod val="130000"/>
-              </a:schemeClr>
-            </a:gs>
-            <a:gs pos="100000">
-              <a:schemeClr val="phClr">
-                <a:tint val="50000"/>
-                <a:shade val="100000"/>
-                <a:satMod val="350000"/>
-              </a:schemeClr>
-            </a:gs>
-          </a:gsLst>
-          <a:lin ang="16200000" scaled="0"/>
-        </a:gradFill>
-      </a:fillStyleLst>
-      <a:lnStyleLst>
-        <a:ln w="9525" cap="flat" cmpd="sng" algn="ctr">
-          <a:solidFill>
-            <a:schemeClr val="phClr">
-              <a:shade val="95000"/>
-              <a:satMod val="105000"/>
-            </a:schemeClr>
-          </a:solidFill>
-          <a:prstDash val="solid"/>
-        </a:ln>
-        <a:ln w="25400" cap="flat" cmpd="sng" algn="ctr">
-          <a:solidFill>
-            <a:schemeClr val="phClr"/>
-          </a:solidFill>
-          <a:prstDash val="solid"/>
-        </a:ln>
-        <a:ln w="38100" cap="flat" cmpd="sng" algn="ctr">
-          <a:solidFill>
-            <a:schemeClr val="phClr"/>
-          </a:solidFill>
-          <a:prstDash val="solid"/>
-        </a:ln>
-      </a:lnStyleLst>
-      <a:effectStyleLst>
-        <a:effectStyle>
-          <a:effectLst>
-            <a:outerShdw blurRad="40000" dist="20000" dir="5400000" rotWithShape="0">
-              <a:srgbClr val="000000">
-                <a:alpha val="38000"/>
-              </a:srgbClr>
-            </a:outerShdw>
-          </a:effectLst>
-        </a:effectStyle>
-        <a:effectStyle>
-          <a:effectLst>
-            <a:outerShdw blurRad="40000" dist="23000" dir="5400000" rotWithShape="0">
-              <a:srgbClr val="000000">
-                <a:alpha val="35000"/>
-              </a:srgbClr>
-            </a:outerShdw>
-          </a:effectLst>
-        </a:effectStyle>
-        <a:effectStyle>
-          <a:effectLst>
-            <a:outerShdw blurRad="40000" dist="23000" dir="5400000" rotWithShape="0">
-              <a:srgbClr val="000000">
-                <a:alpha val="35000"/>
-              </a:srgbClr>
-            </a:outerShdw>
-          </a:effectLst>
-          <a:scene3d>
-            <a:camera prst="orthographicFront">
-              <a:rot lat="0" lon="0" rev="0"/>
-            </a:camera>
-            <a:lightRig rig="threePt" dir="t">
-              <a:rot lat="0" lon="0" rev="1200000"/>
-            </a:lightRig>
-          </a:scene3d>
-          <a:sp3d>
-            <a:bevelT w="63500" h="25400"/>
-          </a:sp3d>
-        </a:effectStyle>
-      </a:effectStyleLst>
-      <a:bgFillStyleLst>
-        <a:solidFill>
-          <a:schemeClr val="phClr"/>
-        </a:solidFill>
-        <a:gradFill rotWithShape="1">
-          <a:gsLst>
-            <a:gs pos="0">
-              <a:schemeClr val="phClr">
-                <a:tint val="40000"/>
-                <a:satMod val="350000"/>
-              </a:schemeClr>
-            </a:gs>
-            <a:gs pos="40000">
-              <a:schemeClr val="phClr">
-                <a:tint val="45000"/>
-                <a:shade val="99000"/>
-                <a:satMod val="350000"/>
-              </a:schemeClr>
-            </a:gs>
-            <a:gs pos="100000">
-              <a:schemeClr val="phClr">
-                <a:shade val="20000"/>
-                <a:satMod val="255000"/>
-              </a:schemeClr>
-            </a:gs>
-          </a:gsLst>
-          <a:path path="circle">
-            <a:fillToRect l="50000" t="-80000" r="50000" b="180000"/>
-          </a:path>
-        </a:gradFill>
-        <a:gradFill rotWithShape="1">
-          <a:gsLst>
-            <a:gs pos="0">
-              <a:schemeClr val="phClr">
-                <a:tint val="80000"/>
-                <a:satMod val="300000"/>
-              </a:schemeClr>
-            </a:gs>
-            <a:gs pos="100000">
-              <a:schemeClr val="phClr">
-                <a:shade val="30000"/>
-                <a:satMod val="200000"/>
-              </a:schemeClr>
-            </a:gs>
-          </a:gsLst>
-          <a:path path="circle">
-            <a:fillToRect l="50000" t="50000" r="50000" b="50000"/>
-          </a:path>
-        </a:gradFill>
-      </a:bgFillStyleLst>
-    </a:fmtScheme>
-  </a:themeElements>
-</a:theme>
 </file>
--- a/docs/proposal/slides.pptx
+++ b/docs/proposal/slides.pptx
@@ -1,6 +1,6 @@
 
 <file path=ppt/presentation.xml><?xml version="1.0" encoding="utf-8"?>
-<p:presentation xmlns:a="http://schemas.openxmlformats.org/drawingml/2006/main" xmlns:r="http://schemas.openxmlformats.org/officeDocument/2006/relationships" xmlns:mc="http://schemas.openxmlformats.org/markup-compatibility/2006" xmlns:mv="urn:schemas-microsoft-com:mac:vml" xmlns:p="http://schemas.openxmlformats.org/presentationml/2006/main" xmlns:c="http://schemas.openxmlformats.org/drawingml/2006/chart" xmlns:dgm="http://schemas.openxmlformats.org/drawingml/2006/diagram" xmlns:o="urn:schemas-microsoft-com:office:office" xmlns:v="urn:schemas-microsoft-com:vml" xmlns:pvml="urn:schemas-microsoft-com:office:powerpoint" xmlns:com="http://schemas.openxmlformats.org/drawingml/2006/compatibility" xmlns:p14="http://schemas.microsoft.com/office/powerpoint/2010/main" xmlns:p15="http://schemas.microsoft.com/office/powerpoint/2012/main" xmlns:ahyp="http://schemas.microsoft.com/office/drawing/2018/hyperlinkcolor" autoCompressPictures="0" strictFirstAndLastChars="0" saveSubsetFonts="1">
+<p:presentation xmlns:a="http://schemas.openxmlformats.org/drawingml/2006/main" xmlns:r="http://schemas.openxmlformats.org/officeDocument/2006/relationships" xmlns:mc="http://schemas.openxmlformats.org/markup-compatibility/2006" xmlns:mv="urn:schemas-microsoft-com:mac:vml" xmlns:p="http://schemas.openxmlformats.org/presentationml/2006/main" xmlns:c="http://schemas.openxmlformats.org/drawingml/2006/chart" xmlns:dgm="http://schemas.openxmlformats.org/drawingml/2006/diagram" xmlns:o="urn:schemas-microsoft-com:office:office" xmlns:v="urn:schemas-microsoft-com:vml" xmlns:pvml="urn:schemas-microsoft-com:office:powerpoint" xmlns:com="http://schemas.openxmlformats.org/drawingml/2006/compatibility" xmlns:p14="http://schemas.microsoft.com/office/powerpoint/2010/main" xmlns:p15="http://schemas.microsoft.com/office/powerpoint/2012/main" xmlns:ahyp="http://schemas.microsoft.com/office/drawing/2018/hyperlinkcolor" autoCompressPictures="0" strictFirstAndLastChars="0" saveSubsetFonts="1" showSpecialPlsOnTitleSld="0">
   <p:sldMasterIdLst>
     <p:sldMasterId id="2147483659" r:id="rId5"/>
   </p:sldMasterIdLst>
@@ -35,6 +35,10 @@
     <p:sldId id="280" r:id="rId31"/>
     <p:sldId id="281" r:id="rId32"/>
     <p:sldId id="282" r:id="rId33"/>
+    <p:sldId id="283" r:id="rId34"/>
+    <p:sldId id="284" r:id="rId35"/>
+    <p:sldId id="285" r:id="rId36"/>
+    <p:sldId id="286" r:id="rId37"/>
   </p:sldIdLst>
   <p:sldSz cy="6858000" cx="9144000"/>
   <p:notesSz cx="7315200" cy="9601200"/>
@@ -976,7 +980,7 @@
   <p:cSld>
     <p:spTree>
       <p:nvGrpSpPr>
-        <p:cNvPr id="145" name="Shape 145"/>
+        <p:cNvPr id="153" name="Shape 153"/>
         <p:cNvGrpSpPr/>
         <p:nvPr/>
       </p:nvGrpSpPr>
@@ -990,7 +994,7 @@
       </p:grpSpPr>
       <p:sp>
         <p:nvSpPr>
-          <p:cNvPr id="146" name="Google Shape;146;p8:notes"/>
+          <p:cNvPr id="154" name="Google Shape;154;p8:notes"/>
           <p:cNvSpPr txBox="1"/>
           <p:nvPr>
             <p:ph idx="1" type="body"/>
@@ -1037,7 +1041,7 @@
       </p:sp>
       <p:sp>
         <p:nvSpPr>
-          <p:cNvPr id="147" name="Google Shape;147;p8:notes"/>
+          <p:cNvPr id="155" name="Google Shape;155;p8:notes"/>
           <p:cNvSpPr/>
           <p:nvPr>
             <p:ph idx="2" type="sldImg"/>
@@ -1093,7 +1097,7 @@
   <p:cSld>
     <p:spTree>
       <p:nvGrpSpPr>
-        <p:cNvPr id="151" name="Shape 151"/>
+        <p:cNvPr id="160" name="Shape 160"/>
         <p:cNvGrpSpPr/>
         <p:nvPr/>
       </p:nvGrpSpPr>
@@ -1107,7 +1111,7 @@
       </p:grpSpPr>
       <p:sp>
         <p:nvSpPr>
-          <p:cNvPr id="152" name="Google Shape;152;p9:notes"/>
+          <p:cNvPr id="161" name="Google Shape;161;p9:notes"/>
           <p:cNvSpPr txBox="1"/>
           <p:nvPr>
             <p:ph idx="1" type="body"/>
@@ -1154,7 +1158,7 @@
       </p:sp>
       <p:sp>
         <p:nvSpPr>
-          <p:cNvPr id="153" name="Google Shape;153;p9:notes"/>
+          <p:cNvPr id="162" name="Google Shape;162;p9:notes"/>
           <p:cNvSpPr/>
           <p:nvPr>
             <p:ph idx="2" type="sldImg"/>
@@ -1210,7 +1214,7 @@
   <p:cSld>
     <p:spTree>
       <p:nvGrpSpPr>
-        <p:cNvPr id="159" name="Shape 159"/>
+        <p:cNvPr id="169" name="Shape 169"/>
         <p:cNvGrpSpPr/>
         <p:nvPr/>
       </p:nvGrpSpPr>
@@ -1224,7 +1228,7 @@
       </p:grpSpPr>
       <p:sp>
         <p:nvSpPr>
-          <p:cNvPr id="160" name="Google Shape;160;g3fa1e6576f6_0_190:notes"/>
+          <p:cNvPr id="170" name="Google Shape;170;g3fa1e6576f6_0_190:notes"/>
           <p:cNvSpPr txBox="1"/>
           <p:nvPr>
             <p:ph idx="1" type="body"/>
@@ -1271,7 +1275,7 @@
       </p:sp>
       <p:sp>
         <p:nvSpPr>
-          <p:cNvPr id="161" name="Google Shape;161;g3fa1e6576f6_0_190:notes"/>
+          <p:cNvPr id="171" name="Google Shape;171;g3fa1e6576f6_0_190:notes"/>
           <p:cNvSpPr/>
           <p:nvPr>
             <p:ph idx="2" type="sldImg"/>
@@ -1327,7 +1331,7 @@
   <p:cSld>
     <p:spTree>
       <p:nvGrpSpPr>
-        <p:cNvPr id="167" name="Shape 167"/>
+        <p:cNvPr id="178" name="Shape 178"/>
         <p:cNvGrpSpPr/>
         <p:nvPr/>
       </p:nvGrpSpPr>
@@ -1341,7 +1345,7 @@
       </p:grpSpPr>
       <p:sp>
         <p:nvSpPr>
-          <p:cNvPr id="168" name="Google Shape;168;p10:notes"/>
+          <p:cNvPr id="179" name="Google Shape;179;p10:notes"/>
           <p:cNvSpPr txBox="1"/>
           <p:nvPr>
             <p:ph idx="1" type="body"/>
@@ -1388,7 +1392,7 @@
       </p:sp>
       <p:sp>
         <p:nvSpPr>
-          <p:cNvPr id="169" name="Google Shape;169;p10:notes"/>
+          <p:cNvPr id="180" name="Google Shape;180;p10:notes"/>
           <p:cNvSpPr/>
           <p:nvPr>
             <p:ph idx="2" type="sldImg"/>
@@ -1444,7 +1448,7 @@
   <p:cSld>
     <p:spTree>
       <p:nvGrpSpPr>
-        <p:cNvPr id="173" name="Shape 173"/>
+        <p:cNvPr id="185" name="Shape 185"/>
         <p:cNvGrpSpPr/>
         <p:nvPr/>
       </p:nvGrpSpPr>
@@ -1458,7 +1462,7 @@
       </p:grpSpPr>
       <p:sp>
         <p:nvSpPr>
-          <p:cNvPr id="174" name="Google Shape;174;p11:notes"/>
+          <p:cNvPr id="186" name="Google Shape;186;p11:notes"/>
           <p:cNvSpPr txBox="1"/>
           <p:nvPr>
             <p:ph idx="1" type="body"/>
@@ -1505,7 +1509,7 @@
       </p:sp>
       <p:sp>
         <p:nvSpPr>
-          <p:cNvPr id="175" name="Google Shape;175;p11:notes"/>
+          <p:cNvPr id="187" name="Google Shape;187;p11:notes"/>
           <p:cNvSpPr/>
           <p:nvPr>
             <p:ph idx="2" type="sldImg"/>
@@ -1561,7 +1565,7 @@
   <p:cSld>
     <p:spTree>
       <p:nvGrpSpPr>
-        <p:cNvPr id="179" name="Shape 179"/>
+        <p:cNvPr id="192" name="Shape 192"/>
         <p:cNvGrpSpPr/>
         <p:nvPr/>
       </p:nvGrpSpPr>
@@ -1575,7 +1579,7 @@
       </p:grpSpPr>
       <p:sp>
         <p:nvSpPr>
-          <p:cNvPr id="180" name="Google Shape;180;p12:notes"/>
+          <p:cNvPr id="193" name="Google Shape;193;p12:notes"/>
           <p:cNvSpPr txBox="1"/>
           <p:nvPr>
             <p:ph idx="1" type="body"/>
@@ -1622,7 +1626,7 @@
       </p:sp>
       <p:sp>
         <p:nvSpPr>
-          <p:cNvPr id="181" name="Google Shape;181;p12:notes"/>
+          <p:cNvPr id="194" name="Google Shape;194;p12:notes"/>
           <p:cNvSpPr/>
           <p:nvPr>
             <p:ph idx="2" type="sldImg"/>
@@ -1678,7 +1682,7 @@
   <p:cSld>
     <p:spTree>
       <p:nvGrpSpPr>
-        <p:cNvPr id="185" name="Shape 185"/>
+        <p:cNvPr id="199" name="Shape 199"/>
         <p:cNvGrpSpPr/>
         <p:nvPr/>
       </p:nvGrpSpPr>
@@ -1692,7 +1696,7 @@
       </p:grpSpPr>
       <p:sp>
         <p:nvSpPr>
-          <p:cNvPr id="186" name="Google Shape;186;p15:notes"/>
+          <p:cNvPr id="200" name="Google Shape;200;p15:notes"/>
           <p:cNvSpPr txBox="1"/>
           <p:nvPr>
             <p:ph idx="1" type="body"/>
@@ -1739,7 +1743,7 @@
       </p:sp>
       <p:sp>
         <p:nvSpPr>
-          <p:cNvPr id="187" name="Google Shape;187;p15:notes"/>
+          <p:cNvPr id="201" name="Google Shape;201;p15:notes"/>
           <p:cNvSpPr/>
           <p:nvPr>
             <p:ph idx="2" type="sldImg"/>
@@ -1795,7 +1799,7 @@
   <p:cSld>
     <p:spTree>
       <p:nvGrpSpPr>
-        <p:cNvPr id="194" name="Shape 194"/>
+        <p:cNvPr id="209" name="Shape 209"/>
         <p:cNvGrpSpPr/>
         <p:nvPr/>
       </p:nvGrpSpPr>
@@ -1809,7 +1813,7 @@
       </p:grpSpPr>
       <p:sp>
         <p:nvSpPr>
-          <p:cNvPr id="195" name="Google Shape;195;p13:notes"/>
+          <p:cNvPr id="210" name="Google Shape;210;p13:notes"/>
           <p:cNvSpPr txBox="1"/>
           <p:nvPr>
             <p:ph idx="1" type="body"/>
@@ -1856,7 +1860,7 @@
       </p:sp>
       <p:sp>
         <p:nvSpPr>
-          <p:cNvPr id="196" name="Google Shape;196;p13:notes"/>
+          <p:cNvPr id="211" name="Google Shape;211;p13:notes"/>
           <p:cNvSpPr/>
           <p:nvPr>
             <p:ph idx="2" type="sldImg"/>
@@ -1912,7 +1916,7 @@
   <p:cSld>
     <p:spTree>
       <p:nvGrpSpPr>
-        <p:cNvPr id="245" name="Shape 245"/>
+        <p:cNvPr id="261" name="Shape 261"/>
         <p:cNvGrpSpPr/>
         <p:nvPr/>
       </p:nvGrpSpPr>
@@ -1926,7 +1930,7 @@
       </p:grpSpPr>
       <p:sp>
         <p:nvSpPr>
-          <p:cNvPr id="246" name="Google Shape;246;p14:notes"/>
+          <p:cNvPr id="262" name="Google Shape;262;p14:notes"/>
           <p:cNvSpPr txBox="1"/>
           <p:nvPr>
             <p:ph idx="1" type="body"/>
@@ -1973,7 +1977,7 @@
       </p:sp>
       <p:sp>
         <p:nvSpPr>
-          <p:cNvPr id="247" name="Google Shape;247;p14:notes"/>
+          <p:cNvPr id="263" name="Google Shape;263;p14:notes"/>
           <p:cNvSpPr/>
           <p:nvPr>
             <p:ph idx="2" type="sldImg"/>
@@ -2029,7 +2033,7 @@
   <p:cSld>
     <p:spTree>
       <p:nvGrpSpPr>
-        <p:cNvPr id="251" name="Shape 251"/>
+        <p:cNvPr id="268" name="Shape 268"/>
         <p:cNvGrpSpPr/>
         <p:nvPr/>
       </p:nvGrpSpPr>
@@ -2043,7 +2047,7 @@
       </p:grpSpPr>
       <p:sp>
         <p:nvSpPr>
-          <p:cNvPr id="252" name="Google Shape;252;g3fa1e6576f6_0_95:notes"/>
+          <p:cNvPr id="269" name="Google Shape;269;g3fa1e6576f6_0_95:notes"/>
           <p:cNvSpPr txBox="1"/>
           <p:nvPr>
             <p:ph idx="1" type="body"/>
@@ -2090,7 +2094,7 @@
       </p:sp>
       <p:sp>
         <p:nvSpPr>
-          <p:cNvPr id="253" name="Google Shape;253;g3fa1e6576f6_0_95:notes"/>
+          <p:cNvPr id="270" name="Google Shape;270;g3fa1e6576f6_0_95:notes"/>
           <p:cNvSpPr/>
           <p:nvPr>
             <p:ph idx="2" type="sldImg"/>
@@ -2263,7 +2267,7 @@
   <p:cSld>
     <p:spTree>
       <p:nvGrpSpPr>
-        <p:cNvPr id="257" name="Shape 257"/>
+        <p:cNvPr id="275" name="Shape 275"/>
         <p:cNvGrpSpPr/>
         <p:nvPr/>
       </p:nvGrpSpPr>
@@ -2277,7 +2281,7 @@
       </p:grpSpPr>
       <p:sp>
         <p:nvSpPr>
-          <p:cNvPr id="258" name="Google Shape;258;g3fa1e6576f6_0_156:notes"/>
+          <p:cNvPr id="276" name="Google Shape;276;g3fa1e6576f6_0_156:notes"/>
           <p:cNvSpPr txBox="1"/>
           <p:nvPr>
             <p:ph idx="1" type="body"/>
@@ -2324,7 +2328,7 @@
       </p:sp>
       <p:sp>
         <p:nvSpPr>
-          <p:cNvPr id="259" name="Google Shape;259;g3fa1e6576f6_0_156:notes"/>
+          <p:cNvPr id="277" name="Google Shape;277;g3fa1e6576f6_0_156:notes"/>
           <p:cNvSpPr/>
           <p:nvPr>
             <p:ph idx="2" type="sldImg"/>
@@ -2380,7 +2384,7 @@
   <p:cSld>
     <p:spTree>
       <p:nvGrpSpPr>
-        <p:cNvPr id="263" name="Shape 263"/>
+        <p:cNvPr id="282" name="Shape 282"/>
         <p:cNvGrpSpPr/>
         <p:nvPr/>
       </p:nvGrpSpPr>
@@ -2394,7 +2398,7 @@
       </p:grpSpPr>
       <p:sp>
         <p:nvSpPr>
-          <p:cNvPr id="264" name="Google Shape;264;p17:notes"/>
+          <p:cNvPr id="283" name="Google Shape;283;p17:notes"/>
           <p:cNvSpPr txBox="1"/>
           <p:nvPr>
             <p:ph idx="1" type="body"/>
@@ -2441,7 +2445,7 @@
       </p:sp>
       <p:sp>
         <p:nvSpPr>
-          <p:cNvPr id="265" name="Google Shape;265;p17:notes"/>
+          <p:cNvPr id="284" name="Google Shape;284;p17:notes"/>
           <p:cNvSpPr/>
           <p:nvPr>
             <p:ph idx="2" type="sldImg"/>
@@ -2497,7 +2501,7 @@
   <p:cSld>
     <p:spTree>
       <p:nvGrpSpPr>
-        <p:cNvPr id="269" name="Shape 269"/>
+        <p:cNvPr id="289" name="Shape 289"/>
         <p:cNvGrpSpPr/>
         <p:nvPr/>
       </p:nvGrpSpPr>
@@ -2511,7 +2515,7 @@
       </p:grpSpPr>
       <p:sp>
         <p:nvSpPr>
-          <p:cNvPr id="270" name="Google Shape;270;g3fa40b541af_0_3:notes"/>
+          <p:cNvPr id="290" name="Google Shape;290;g3fb84749b6b_0_32:notes"/>
           <p:cNvSpPr txBox="1"/>
           <p:nvPr>
             <p:ph idx="1" type="body"/>
@@ -2558,7 +2562,7 @@
       </p:sp>
       <p:sp>
         <p:nvSpPr>
-          <p:cNvPr id="271" name="Google Shape;271;g3fa40b541af_0_3:notes"/>
+          <p:cNvPr id="291" name="Google Shape;291;g3fb84749b6b_0_32:notes"/>
           <p:cNvSpPr/>
           <p:nvPr>
             <p:ph idx="2" type="sldImg"/>
@@ -2614,7 +2618,7 @@
   <p:cSld>
     <p:spTree>
       <p:nvGrpSpPr>
-        <p:cNvPr id="275" name="Shape 275"/>
+        <p:cNvPr id="296" name="Shape 296"/>
         <p:cNvGrpSpPr/>
         <p:nvPr/>
       </p:nvGrpSpPr>
@@ -2628,7 +2632,7 @@
       </p:grpSpPr>
       <p:sp>
         <p:nvSpPr>
-          <p:cNvPr id="276" name="Google Shape;276;g3fa40b541af_0_8:notes"/>
+          <p:cNvPr id="297" name="Google Shape;297;g3fa40b541af_0_3:notes"/>
           <p:cNvSpPr txBox="1"/>
           <p:nvPr>
             <p:ph idx="1" type="body"/>
@@ -2675,7 +2679,7 @@
       </p:sp>
       <p:sp>
         <p:nvSpPr>
-          <p:cNvPr id="277" name="Google Shape;277;g3fa40b541af_0_8:notes"/>
+          <p:cNvPr id="298" name="Google Shape;298;g3fa40b541af_0_3:notes"/>
           <p:cNvSpPr/>
           <p:nvPr>
             <p:ph idx="2" type="sldImg"/>
@@ -2731,7 +2735,7 @@
   <p:cSld>
     <p:spTree>
       <p:nvGrpSpPr>
-        <p:cNvPr id="281" name="Shape 281"/>
+        <p:cNvPr id="303" name="Shape 303"/>
         <p:cNvGrpSpPr/>
         <p:nvPr/>
       </p:nvGrpSpPr>
@@ -2745,7 +2749,7 @@
       </p:grpSpPr>
       <p:sp>
         <p:nvSpPr>
-          <p:cNvPr id="282" name="Google Shape;282;g3fa1e6576f6_0_163:notes"/>
+          <p:cNvPr id="304" name="Google Shape;304;g3fa40b541af_0_8:notes"/>
           <p:cNvSpPr txBox="1"/>
           <p:nvPr>
             <p:ph idx="1" type="body"/>
@@ -2792,7 +2796,7 @@
       </p:sp>
       <p:sp>
         <p:nvSpPr>
-          <p:cNvPr id="283" name="Google Shape;283;g3fa1e6576f6_0_163:notes"/>
+          <p:cNvPr id="305" name="Google Shape;305;g3fa40b541af_0_8:notes"/>
           <p:cNvSpPr/>
           <p:nvPr>
             <p:ph idx="2" type="sldImg"/>
@@ -2848,7 +2852,7 @@
   <p:cSld>
     <p:spTree>
       <p:nvGrpSpPr>
-        <p:cNvPr id="287" name="Shape 287"/>
+        <p:cNvPr id="310" name="Shape 310"/>
         <p:cNvGrpSpPr/>
         <p:nvPr/>
       </p:nvGrpSpPr>
@@ -2862,7 +2866,124 @@
       </p:grpSpPr>
       <p:sp>
         <p:nvSpPr>
-          <p:cNvPr id="288" name="Google Shape;288;p16:notes"/>
+          <p:cNvPr id="311" name="Google Shape;311;g3fa1e6576f6_0_163:notes"/>
+          <p:cNvSpPr txBox="1"/>
+          <p:nvPr>
+            <p:ph idx="1" type="body"/>
+          </p:nvPr>
+        </p:nvSpPr>
+        <p:spPr>
+          <a:xfrm>
+            <a:off x="731500" y="4560550"/>
+            <a:ext cx="5852100" cy="4320600"/>
+          </a:xfrm>
+          <a:prstGeom prst="rect">
+            <a:avLst/>
+          </a:prstGeom>
+          <a:noFill/>
+          <a:ln>
+            <a:noFill/>
+          </a:ln>
+        </p:spPr>
+        <p:txBody>
+          <a:bodyPr anchorCtr="0" anchor="t" bIns="91425" lIns="91425" spcFirstLastPara="1" rIns="91425" wrap="square" tIns="91425">
+            <a:noAutofit/>
+          </a:bodyPr>
+          <a:lstStyle/>
+          <a:p>
+            <a:pPr indent="0" lvl="0" marL="0" rtl="0" algn="l">
+              <a:lnSpc>
+                <a:spcPct val="100000"/>
+              </a:lnSpc>
+              <a:spcBef>
+                <a:spcPts val="0"/>
+              </a:spcBef>
+              <a:spcAft>
+                <a:spcPts val="0"/>
+              </a:spcAft>
+              <a:buSzPts val="1100"/>
+              <a:buNone/>
+            </a:pPr>
+            <a:r>
+              <a:t/>
+            </a:r>
+            <a:endParaRPr/>
+          </a:p>
+        </p:txBody>
+      </p:sp>
+      <p:sp>
+        <p:nvSpPr>
+          <p:cNvPr id="312" name="Google Shape;312;g3fa1e6576f6_0_163:notes"/>
+          <p:cNvSpPr/>
+          <p:nvPr>
+            <p:ph idx="2" type="sldImg"/>
+          </p:nvPr>
+        </p:nvSpPr>
+        <p:spPr>
+          <a:xfrm>
+            <a:off x="1257300" y="720725"/>
+            <a:ext cx="4800600" cy="3600600"/>
+          </a:xfrm>
+          <a:custGeom>
+            <a:rect b="b" l="l" r="r" t="t"/>
+            <a:pathLst>
+              <a:path extrusionOk="0" h="120000" w="120000">
+                <a:moveTo>
+                  <a:pt x="0" y="0"/>
+                </a:moveTo>
+                <a:lnTo>
+                  <a:pt x="120000" y="0"/>
+                </a:lnTo>
+                <a:lnTo>
+                  <a:pt x="120000" y="120000"/>
+                </a:lnTo>
+                <a:lnTo>
+                  <a:pt x="0" y="120000"/>
+                </a:lnTo>
+                <a:close/>
+              </a:path>
+            </a:pathLst>
+          </a:custGeom>
+          <a:noFill/>
+          <a:ln cap="flat" cmpd="sng" w="9525">
+            <a:solidFill>
+              <a:srgbClr val="000000"/>
+            </a:solidFill>
+            <a:prstDash val="solid"/>
+            <a:round/>
+            <a:headEnd len="sm" w="sm" type="none"/>
+            <a:tailEnd len="sm" w="sm" type="none"/>
+          </a:ln>
+        </p:spPr>
+      </p:sp>
+    </p:spTree>
+  </p:cSld>
+  <p:clrMapOvr>
+    <a:masterClrMapping/>
+  </p:clrMapOvr>
+</p:notes>
+</file>
+
+<file path=ppt/notesSlides/notesSlide26.xml><?xml version="1.0" encoding="utf-8"?>
+<p:notes xmlns:a="http://schemas.openxmlformats.org/drawingml/2006/main" xmlns:r="http://schemas.openxmlformats.org/officeDocument/2006/relationships" xmlns:mc="http://schemas.openxmlformats.org/markup-compatibility/2006" xmlns:mv="urn:schemas-microsoft-com:mac:vml" xmlns:p="http://schemas.openxmlformats.org/presentationml/2006/main" xmlns:c="http://schemas.openxmlformats.org/drawingml/2006/chart" xmlns:dgm="http://schemas.openxmlformats.org/drawingml/2006/diagram" xmlns:o="urn:schemas-microsoft-com:office:office" xmlns:v="urn:schemas-microsoft-com:vml" xmlns:pvml="urn:schemas-microsoft-com:office:powerpoint" xmlns:com="http://schemas.openxmlformats.org/drawingml/2006/compatibility" xmlns:p14="http://schemas.microsoft.com/office/powerpoint/2010/main" xmlns:p15="http://schemas.microsoft.com/office/powerpoint/2012/main" xmlns:ahyp="http://schemas.microsoft.com/office/drawing/2018/hyperlinkcolor" showMasterPhAnim="0" showMasterSp="0">
+  <p:cSld>
+    <p:spTree>
+      <p:nvGrpSpPr>
+        <p:cNvPr id="317" name="Shape 317"/>
+        <p:cNvGrpSpPr/>
+        <p:nvPr/>
+      </p:nvGrpSpPr>
+      <p:grpSpPr>
+        <a:xfrm>
+          <a:off x="0" y="0"/>
+          <a:ext cx="0" cy="0"/>
+          <a:chOff x="0" y="0"/>
+          <a:chExt cx="0" cy="0"/>
+        </a:xfrm>
+      </p:grpSpPr>
+      <p:sp>
+        <p:nvSpPr>
+          <p:cNvPr id="318" name="Google Shape;318;p16:notes"/>
           <p:cNvSpPr txBox="1"/>
           <p:nvPr>
             <p:ph idx="1" type="body"/>
@@ -2909,7 +3030,7 @@
       </p:sp>
       <p:sp>
         <p:nvSpPr>
-          <p:cNvPr id="289" name="Google Shape;289;p16:notes"/>
+          <p:cNvPr id="319" name="Google Shape;319;p16:notes"/>
           <p:cNvSpPr/>
           <p:nvPr>
             <p:ph idx="2" type="sldImg"/>
@@ -2960,12 +3081,12 @@
 </p:notes>
 </file>
 
-<file path=ppt/notesSlides/notesSlide26.xml><?xml version="1.0" encoding="utf-8"?>
+<file path=ppt/notesSlides/notesSlide27.xml><?xml version="1.0" encoding="utf-8"?>
 <p:notes xmlns:a="http://schemas.openxmlformats.org/drawingml/2006/main" xmlns:r="http://schemas.openxmlformats.org/officeDocument/2006/relationships" xmlns:mc="http://schemas.openxmlformats.org/markup-compatibility/2006" xmlns:mv="urn:schemas-microsoft-com:mac:vml" xmlns:p="http://schemas.openxmlformats.org/presentationml/2006/main" xmlns:c="http://schemas.openxmlformats.org/drawingml/2006/chart" xmlns:dgm="http://schemas.openxmlformats.org/drawingml/2006/diagram" xmlns:o="urn:schemas-microsoft-com:office:office" xmlns:v="urn:schemas-microsoft-com:vml" xmlns:pvml="urn:schemas-microsoft-com:office:powerpoint" xmlns:com="http://schemas.openxmlformats.org/drawingml/2006/compatibility" xmlns:p14="http://schemas.microsoft.com/office/powerpoint/2010/main" xmlns:p15="http://schemas.microsoft.com/office/powerpoint/2012/main" xmlns:ahyp="http://schemas.microsoft.com/office/drawing/2018/hyperlinkcolor" showMasterPhAnim="0" showMasterSp="0">
   <p:cSld>
     <p:spTree>
       <p:nvGrpSpPr>
-        <p:cNvPr id="293" name="Shape 293"/>
+        <p:cNvPr id="324" name="Shape 324"/>
         <p:cNvGrpSpPr/>
         <p:nvPr/>
       </p:nvGrpSpPr>
@@ -2979,7 +3100,7 @@
       </p:grpSpPr>
       <p:sp>
         <p:nvSpPr>
-          <p:cNvPr id="294" name="Google Shape;294;g3fa1e6576f6_0_107:notes"/>
+          <p:cNvPr id="325" name="Google Shape;325;g3fa1e6576f6_0_107:notes"/>
           <p:cNvSpPr txBox="1"/>
           <p:nvPr>
             <p:ph idx="1" type="body"/>
@@ -3026,7 +3147,7 @@
       </p:sp>
       <p:sp>
         <p:nvSpPr>
-          <p:cNvPr id="295" name="Google Shape;295;g3fa1e6576f6_0_107:notes"/>
+          <p:cNvPr id="326" name="Google Shape;326;g3fa1e6576f6_0_107:notes"/>
           <p:cNvSpPr/>
           <p:nvPr>
             <p:ph idx="2" type="sldImg"/>
@@ -3077,12 +3198,12 @@
 </p:notes>
 </file>
 
-<file path=ppt/notesSlides/notesSlide27.xml><?xml version="1.0" encoding="utf-8"?>
+<file path=ppt/notesSlides/notesSlide28.xml><?xml version="1.0" encoding="utf-8"?>
 <p:notes xmlns:a="http://schemas.openxmlformats.org/drawingml/2006/main" xmlns:r="http://schemas.openxmlformats.org/officeDocument/2006/relationships" xmlns:mc="http://schemas.openxmlformats.org/markup-compatibility/2006" xmlns:mv="urn:schemas-microsoft-com:mac:vml" xmlns:p="http://schemas.openxmlformats.org/presentationml/2006/main" xmlns:c="http://schemas.openxmlformats.org/drawingml/2006/chart" xmlns:dgm="http://schemas.openxmlformats.org/drawingml/2006/diagram" xmlns:o="urn:schemas-microsoft-com:office:office" xmlns:v="urn:schemas-microsoft-com:vml" xmlns:pvml="urn:schemas-microsoft-com:office:powerpoint" xmlns:com="http://schemas.openxmlformats.org/drawingml/2006/compatibility" xmlns:p14="http://schemas.microsoft.com/office/powerpoint/2010/main" xmlns:p15="http://schemas.microsoft.com/office/powerpoint/2012/main" xmlns:ahyp="http://schemas.microsoft.com/office/drawing/2018/hyperlinkcolor" showMasterPhAnim="0" showMasterSp="0">
   <p:cSld>
     <p:spTree>
       <p:nvGrpSpPr>
-        <p:cNvPr id="299" name="Shape 299"/>
+        <p:cNvPr id="331" name="Shape 331"/>
         <p:cNvGrpSpPr/>
         <p:nvPr/>
       </p:nvGrpSpPr>
@@ -3096,7 +3217,7 @@
       </p:grpSpPr>
       <p:sp>
         <p:nvSpPr>
-          <p:cNvPr id="300" name="Google Shape;300;g3fa40b541af_0_19:notes"/>
+          <p:cNvPr id="332" name="Google Shape;332;g3fa40b541af_0_19:notes"/>
           <p:cNvSpPr txBox="1"/>
           <p:nvPr>
             <p:ph idx="1" type="body"/>
@@ -3143,7 +3264,124 @@
       </p:sp>
       <p:sp>
         <p:nvSpPr>
-          <p:cNvPr id="301" name="Google Shape;301;g3fa40b541af_0_19:notes"/>
+          <p:cNvPr id="333" name="Google Shape;333;g3fa40b541af_0_19:notes"/>
+          <p:cNvSpPr/>
+          <p:nvPr>
+            <p:ph idx="2" type="sldImg"/>
+          </p:nvPr>
+        </p:nvSpPr>
+        <p:spPr>
+          <a:xfrm>
+            <a:off x="1257300" y="720725"/>
+            <a:ext cx="4800600" cy="3600600"/>
+          </a:xfrm>
+          <a:custGeom>
+            <a:rect b="b" l="l" r="r" t="t"/>
+            <a:pathLst>
+              <a:path extrusionOk="0" h="120000" w="120000">
+                <a:moveTo>
+                  <a:pt x="0" y="0"/>
+                </a:moveTo>
+                <a:lnTo>
+                  <a:pt x="120000" y="0"/>
+                </a:lnTo>
+                <a:lnTo>
+                  <a:pt x="120000" y="120000"/>
+                </a:lnTo>
+                <a:lnTo>
+                  <a:pt x="0" y="120000"/>
+                </a:lnTo>
+                <a:close/>
+              </a:path>
+            </a:pathLst>
+          </a:custGeom>
+          <a:noFill/>
+          <a:ln cap="flat" cmpd="sng" w="9525">
+            <a:solidFill>
+              <a:srgbClr val="000000"/>
+            </a:solidFill>
+            <a:prstDash val="solid"/>
+            <a:round/>
+            <a:headEnd len="sm" w="sm" type="none"/>
+            <a:tailEnd len="sm" w="sm" type="none"/>
+          </a:ln>
+        </p:spPr>
+      </p:sp>
+    </p:spTree>
+  </p:cSld>
+  <p:clrMapOvr>
+    <a:masterClrMapping/>
+  </p:clrMapOvr>
+</p:notes>
+</file>
+
+<file path=ppt/notesSlides/notesSlide29.xml><?xml version="1.0" encoding="utf-8"?>
+<p:notes xmlns:a="http://schemas.openxmlformats.org/drawingml/2006/main" xmlns:r="http://schemas.openxmlformats.org/officeDocument/2006/relationships" xmlns:mc="http://schemas.openxmlformats.org/markup-compatibility/2006" xmlns:mv="urn:schemas-microsoft-com:mac:vml" xmlns:p="http://schemas.openxmlformats.org/presentationml/2006/main" xmlns:c="http://schemas.openxmlformats.org/drawingml/2006/chart" xmlns:dgm="http://schemas.openxmlformats.org/drawingml/2006/diagram" xmlns:o="urn:schemas-microsoft-com:office:office" xmlns:v="urn:schemas-microsoft-com:vml" xmlns:pvml="urn:schemas-microsoft-com:office:powerpoint" xmlns:com="http://schemas.openxmlformats.org/drawingml/2006/compatibility" xmlns:p14="http://schemas.microsoft.com/office/powerpoint/2010/main" xmlns:p15="http://schemas.microsoft.com/office/powerpoint/2012/main" xmlns:ahyp="http://schemas.microsoft.com/office/drawing/2018/hyperlinkcolor" showMasterPhAnim="0" showMasterSp="0">
+  <p:cSld>
+    <p:spTree>
+      <p:nvGrpSpPr>
+        <p:cNvPr id="338" name="Shape 338"/>
+        <p:cNvGrpSpPr/>
+        <p:nvPr/>
+      </p:nvGrpSpPr>
+      <p:grpSpPr>
+        <a:xfrm>
+          <a:off x="0" y="0"/>
+          <a:ext cx="0" cy="0"/>
+          <a:chOff x="0" y="0"/>
+          <a:chExt cx="0" cy="0"/>
+        </a:xfrm>
+      </p:grpSpPr>
+      <p:sp>
+        <p:nvSpPr>
+          <p:cNvPr id="339" name="Google Shape;339;g3fb84749b6b_0_38:notes"/>
+          <p:cNvSpPr txBox="1"/>
+          <p:nvPr>
+            <p:ph idx="1" type="body"/>
+          </p:nvPr>
+        </p:nvSpPr>
+        <p:spPr>
+          <a:xfrm>
+            <a:off x="731500" y="4560550"/>
+            <a:ext cx="5852100" cy="4320600"/>
+          </a:xfrm>
+          <a:prstGeom prst="rect">
+            <a:avLst/>
+          </a:prstGeom>
+          <a:noFill/>
+          <a:ln>
+            <a:noFill/>
+          </a:ln>
+        </p:spPr>
+        <p:txBody>
+          <a:bodyPr anchorCtr="0" anchor="t" bIns="91425" lIns="91425" spcFirstLastPara="1" rIns="91425" wrap="square" tIns="91425">
+            <a:noAutofit/>
+          </a:bodyPr>
+          <a:lstStyle/>
+          <a:p>
+            <a:pPr indent="0" lvl="0" marL="0" rtl="0" algn="l">
+              <a:lnSpc>
+                <a:spcPct val="100000"/>
+              </a:lnSpc>
+              <a:spcBef>
+                <a:spcPts val="0"/>
+              </a:spcBef>
+              <a:spcAft>
+                <a:spcPts val="0"/>
+              </a:spcAft>
+              <a:buSzPts val="1100"/>
+              <a:buNone/>
+            </a:pPr>
+            <a:r>
+              <a:t/>
+            </a:r>
+            <a:endParaRPr/>
+          </a:p>
+        </p:txBody>
+      </p:sp>
+      <p:sp>
+        <p:nvSpPr>
+          <p:cNvPr id="340" name="Google Shape;340;g3fb84749b6b_0_38:notes"/>
           <p:cNvSpPr/>
           <p:nvPr>
             <p:ph idx="2" type="sldImg"/>
@@ -3199,7 +3437,7 @@
   <p:cSld>
     <p:spTree>
       <p:nvGrpSpPr>
-        <p:cNvPr id="93" name="Shape 93"/>
+        <p:cNvPr id="94" name="Shape 94"/>
         <p:cNvGrpSpPr/>
         <p:nvPr/>
       </p:nvGrpSpPr>
@@ -3213,7 +3451,7 @@
       </p:grpSpPr>
       <p:sp>
         <p:nvSpPr>
-          <p:cNvPr id="94" name="Google Shape;94;p3:notes"/>
+          <p:cNvPr id="95" name="Google Shape;95;p3:notes"/>
           <p:cNvSpPr txBox="1"/>
           <p:nvPr>
             <p:ph idx="1" type="body"/>
@@ -3260,7 +3498,7 @@
       </p:sp>
       <p:sp>
         <p:nvSpPr>
-          <p:cNvPr id="95" name="Google Shape;95;p3:notes"/>
+          <p:cNvPr id="96" name="Google Shape;96;p3:notes"/>
           <p:cNvSpPr/>
           <p:nvPr>
             <p:ph idx="2" type="sldImg"/>
@@ -3311,12 +3549,12 @@
 </p:notes>
 </file>
 
-<file path=ppt/notesSlides/notesSlide4.xml><?xml version="1.0" encoding="utf-8"?>
+<file path=ppt/notesSlides/notesSlide30.xml><?xml version="1.0" encoding="utf-8"?>
 <p:notes xmlns:a="http://schemas.openxmlformats.org/drawingml/2006/main" xmlns:r="http://schemas.openxmlformats.org/officeDocument/2006/relationships" xmlns:mc="http://schemas.openxmlformats.org/markup-compatibility/2006" xmlns:mv="urn:schemas-microsoft-com:mac:vml" xmlns:p="http://schemas.openxmlformats.org/presentationml/2006/main" xmlns:c="http://schemas.openxmlformats.org/drawingml/2006/chart" xmlns:dgm="http://schemas.openxmlformats.org/drawingml/2006/diagram" xmlns:o="urn:schemas-microsoft-com:office:office" xmlns:v="urn:schemas-microsoft-com:vml" xmlns:pvml="urn:schemas-microsoft-com:office:powerpoint" xmlns:com="http://schemas.openxmlformats.org/drawingml/2006/compatibility" xmlns:p14="http://schemas.microsoft.com/office/powerpoint/2010/main" xmlns:p15="http://schemas.microsoft.com/office/powerpoint/2012/main" xmlns:ahyp="http://schemas.microsoft.com/office/drawing/2018/hyperlinkcolor" showMasterPhAnim="0" showMasterSp="0">
   <p:cSld>
     <p:spTree>
       <p:nvGrpSpPr>
-        <p:cNvPr id="99" name="Shape 99"/>
+        <p:cNvPr id="345" name="Shape 345"/>
         <p:cNvGrpSpPr/>
         <p:nvPr/>
       </p:nvGrpSpPr>
@@ -3330,7 +3568,241 @@
       </p:grpSpPr>
       <p:sp>
         <p:nvSpPr>
-          <p:cNvPr id="100" name="Google Shape;100;p4:notes"/>
+          <p:cNvPr id="346" name="Google Shape;346;g3fb84749b6b_0_44:notes"/>
+          <p:cNvSpPr txBox="1"/>
+          <p:nvPr>
+            <p:ph idx="1" type="body"/>
+          </p:nvPr>
+        </p:nvSpPr>
+        <p:spPr>
+          <a:xfrm>
+            <a:off x="731500" y="4560550"/>
+            <a:ext cx="5852100" cy="4320600"/>
+          </a:xfrm>
+          <a:prstGeom prst="rect">
+            <a:avLst/>
+          </a:prstGeom>
+          <a:noFill/>
+          <a:ln>
+            <a:noFill/>
+          </a:ln>
+        </p:spPr>
+        <p:txBody>
+          <a:bodyPr anchorCtr="0" anchor="t" bIns="91425" lIns="91425" spcFirstLastPara="1" rIns="91425" wrap="square" tIns="91425">
+            <a:noAutofit/>
+          </a:bodyPr>
+          <a:lstStyle/>
+          <a:p>
+            <a:pPr indent="0" lvl="0" marL="0" rtl="0" algn="l">
+              <a:lnSpc>
+                <a:spcPct val="100000"/>
+              </a:lnSpc>
+              <a:spcBef>
+                <a:spcPts val="0"/>
+              </a:spcBef>
+              <a:spcAft>
+                <a:spcPts val="0"/>
+              </a:spcAft>
+              <a:buSzPts val="1100"/>
+              <a:buNone/>
+            </a:pPr>
+            <a:r>
+              <a:t/>
+            </a:r>
+            <a:endParaRPr/>
+          </a:p>
+        </p:txBody>
+      </p:sp>
+      <p:sp>
+        <p:nvSpPr>
+          <p:cNvPr id="347" name="Google Shape;347;g3fb84749b6b_0_44:notes"/>
+          <p:cNvSpPr/>
+          <p:nvPr>
+            <p:ph idx="2" type="sldImg"/>
+          </p:nvPr>
+        </p:nvSpPr>
+        <p:spPr>
+          <a:xfrm>
+            <a:off x="1257300" y="720725"/>
+            <a:ext cx="4800600" cy="3600600"/>
+          </a:xfrm>
+          <a:custGeom>
+            <a:rect b="b" l="l" r="r" t="t"/>
+            <a:pathLst>
+              <a:path extrusionOk="0" h="120000" w="120000">
+                <a:moveTo>
+                  <a:pt x="0" y="0"/>
+                </a:moveTo>
+                <a:lnTo>
+                  <a:pt x="120000" y="0"/>
+                </a:lnTo>
+                <a:lnTo>
+                  <a:pt x="120000" y="120000"/>
+                </a:lnTo>
+                <a:lnTo>
+                  <a:pt x="0" y="120000"/>
+                </a:lnTo>
+                <a:close/>
+              </a:path>
+            </a:pathLst>
+          </a:custGeom>
+          <a:noFill/>
+          <a:ln cap="flat" cmpd="sng" w="9525">
+            <a:solidFill>
+              <a:srgbClr val="000000"/>
+            </a:solidFill>
+            <a:prstDash val="solid"/>
+            <a:round/>
+            <a:headEnd len="sm" w="sm" type="none"/>
+            <a:tailEnd len="sm" w="sm" type="none"/>
+          </a:ln>
+        </p:spPr>
+      </p:sp>
+    </p:spTree>
+  </p:cSld>
+  <p:clrMapOvr>
+    <a:masterClrMapping/>
+  </p:clrMapOvr>
+</p:notes>
+</file>
+
+<file path=ppt/notesSlides/notesSlide31.xml><?xml version="1.0" encoding="utf-8"?>
+<p:notes xmlns:a="http://schemas.openxmlformats.org/drawingml/2006/main" xmlns:r="http://schemas.openxmlformats.org/officeDocument/2006/relationships" xmlns:mc="http://schemas.openxmlformats.org/markup-compatibility/2006" xmlns:mv="urn:schemas-microsoft-com:mac:vml" xmlns:p="http://schemas.openxmlformats.org/presentationml/2006/main" xmlns:c="http://schemas.openxmlformats.org/drawingml/2006/chart" xmlns:dgm="http://schemas.openxmlformats.org/drawingml/2006/diagram" xmlns:o="urn:schemas-microsoft-com:office:office" xmlns:v="urn:schemas-microsoft-com:vml" xmlns:pvml="urn:schemas-microsoft-com:office:powerpoint" xmlns:com="http://schemas.openxmlformats.org/drawingml/2006/compatibility" xmlns:p14="http://schemas.microsoft.com/office/powerpoint/2010/main" xmlns:p15="http://schemas.microsoft.com/office/powerpoint/2012/main" xmlns:ahyp="http://schemas.microsoft.com/office/drawing/2018/hyperlinkcolor" showMasterPhAnim="0" showMasterSp="0">
+  <p:cSld>
+    <p:spTree>
+      <p:nvGrpSpPr>
+        <p:cNvPr id="352" name="Shape 352"/>
+        <p:cNvGrpSpPr/>
+        <p:nvPr/>
+      </p:nvGrpSpPr>
+      <p:grpSpPr>
+        <a:xfrm>
+          <a:off x="0" y="0"/>
+          <a:ext cx="0" cy="0"/>
+          <a:chOff x="0" y="0"/>
+          <a:chExt cx="0" cy="0"/>
+        </a:xfrm>
+      </p:grpSpPr>
+      <p:sp>
+        <p:nvSpPr>
+          <p:cNvPr id="353" name="Google Shape;353;g3fb84749b6b_0_51:notes"/>
+          <p:cNvSpPr txBox="1"/>
+          <p:nvPr>
+            <p:ph idx="1" type="body"/>
+          </p:nvPr>
+        </p:nvSpPr>
+        <p:spPr>
+          <a:xfrm>
+            <a:off x="731500" y="4560550"/>
+            <a:ext cx="5852100" cy="4320600"/>
+          </a:xfrm>
+          <a:prstGeom prst="rect">
+            <a:avLst/>
+          </a:prstGeom>
+          <a:noFill/>
+          <a:ln>
+            <a:noFill/>
+          </a:ln>
+        </p:spPr>
+        <p:txBody>
+          <a:bodyPr anchorCtr="0" anchor="t" bIns="91425" lIns="91425" spcFirstLastPara="1" rIns="91425" wrap="square" tIns="91425">
+            <a:noAutofit/>
+          </a:bodyPr>
+          <a:lstStyle/>
+          <a:p>
+            <a:pPr indent="0" lvl="0" marL="0" rtl="0" algn="l">
+              <a:lnSpc>
+                <a:spcPct val="100000"/>
+              </a:lnSpc>
+              <a:spcBef>
+                <a:spcPts val="0"/>
+              </a:spcBef>
+              <a:spcAft>
+                <a:spcPts val="0"/>
+              </a:spcAft>
+              <a:buSzPts val="1100"/>
+              <a:buNone/>
+            </a:pPr>
+            <a:r>
+              <a:t/>
+            </a:r>
+            <a:endParaRPr/>
+          </a:p>
+        </p:txBody>
+      </p:sp>
+      <p:sp>
+        <p:nvSpPr>
+          <p:cNvPr id="354" name="Google Shape;354;g3fb84749b6b_0_51:notes"/>
+          <p:cNvSpPr/>
+          <p:nvPr>
+            <p:ph idx="2" type="sldImg"/>
+          </p:nvPr>
+        </p:nvSpPr>
+        <p:spPr>
+          <a:xfrm>
+            <a:off x="1257300" y="720725"/>
+            <a:ext cx="4800600" cy="3600600"/>
+          </a:xfrm>
+          <a:custGeom>
+            <a:rect b="b" l="l" r="r" t="t"/>
+            <a:pathLst>
+              <a:path extrusionOk="0" h="120000" w="120000">
+                <a:moveTo>
+                  <a:pt x="0" y="0"/>
+                </a:moveTo>
+                <a:lnTo>
+                  <a:pt x="120000" y="0"/>
+                </a:lnTo>
+                <a:lnTo>
+                  <a:pt x="120000" y="120000"/>
+                </a:lnTo>
+                <a:lnTo>
+                  <a:pt x="0" y="120000"/>
+                </a:lnTo>
+                <a:close/>
+              </a:path>
+            </a:pathLst>
+          </a:custGeom>
+          <a:noFill/>
+          <a:ln cap="flat" cmpd="sng" w="9525">
+            <a:solidFill>
+              <a:srgbClr val="000000"/>
+            </a:solidFill>
+            <a:prstDash val="solid"/>
+            <a:round/>
+            <a:headEnd len="sm" w="sm" type="none"/>
+            <a:tailEnd len="sm" w="sm" type="none"/>
+          </a:ln>
+        </p:spPr>
+      </p:sp>
+    </p:spTree>
+  </p:cSld>
+  <p:clrMapOvr>
+    <a:masterClrMapping/>
+  </p:clrMapOvr>
+</p:notes>
+</file>
+
+<file path=ppt/notesSlides/notesSlide4.xml><?xml version="1.0" encoding="utf-8"?>
+<p:notes xmlns:a="http://schemas.openxmlformats.org/drawingml/2006/main" xmlns:r="http://schemas.openxmlformats.org/officeDocument/2006/relationships" xmlns:mc="http://schemas.openxmlformats.org/markup-compatibility/2006" xmlns:mv="urn:schemas-microsoft-com:mac:vml" xmlns:p="http://schemas.openxmlformats.org/presentationml/2006/main" xmlns:c="http://schemas.openxmlformats.org/drawingml/2006/chart" xmlns:dgm="http://schemas.openxmlformats.org/drawingml/2006/diagram" xmlns:o="urn:schemas-microsoft-com:office:office" xmlns:v="urn:schemas-microsoft-com:vml" xmlns:pvml="urn:schemas-microsoft-com:office:powerpoint" xmlns:com="http://schemas.openxmlformats.org/drawingml/2006/compatibility" xmlns:p14="http://schemas.microsoft.com/office/powerpoint/2010/main" xmlns:p15="http://schemas.microsoft.com/office/powerpoint/2012/main" xmlns:ahyp="http://schemas.microsoft.com/office/drawing/2018/hyperlinkcolor" showMasterPhAnim="0" showMasterSp="0">
+  <p:cSld>
+    <p:spTree>
+      <p:nvGrpSpPr>
+        <p:cNvPr id="101" name="Shape 101"/>
+        <p:cNvGrpSpPr/>
+        <p:nvPr/>
+      </p:nvGrpSpPr>
+      <p:grpSpPr>
+        <a:xfrm>
+          <a:off x="0" y="0"/>
+          <a:ext cx="0" cy="0"/>
+          <a:chOff x="0" y="0"/>
+          <a:chExt cx="0" cy="0"/>
+        </a:xfrm>
+      </p:grpSpPr>
+      <p:sp>
+        <p:nvSpPr>
+          <p:cNvPr id="102" name="Google Shape;102;p4:notes"/>
           <p:cNvSpPr txBox="1"/>
           <p:nvPr>
             <p:ph idx="1" type="body"/>
@@ -3377,7 +3849,7 @@
       </p:sp>
       <p:sp>
         <p:nvSpPr>
-          <p:cNvPr id="101" name="Google Shape;101;p4:notes"/>
+          <p:cNvPr id="103" name="Google Shape;103;p4:notes"/>
           <p:cNvSpPr/>
           <p:nvPr>
             <p:ph idx="2" type="sldImg"/>
@@ -3433,7 +3905,7 @@
   <p:cSld>
     <p:spTree>
       <p:nvGrpSpPr>
-        <p:cNvPr id="105" name="Shape 105"/>
+        <p:cNvPr id="108" name="Shape 108"/>
         <p:cNvGrpSpPr/>
         <p:nvPr/>
       </p:nvGrpSpPr>
@@ -3447,7 +3919,7 @@
       </p:grpSpPr>
       <p:sp>
         <p:nvSpPr>
-          <p:cNvPr id="106" name="Google Shape;106;g3fb4a8ef356_0_22:notes"/>
+          <p:cNvPr id="109" name="Google Shape;109;g3fb4a8ef356_0_22:notes"/>
           <p:cNvSpPr txBox="1"/>
           <p:nvPr>
             <p:ph idx="1" type="body"/>
@@ -3494,7 +3966,7 @@
       </p:sp>
       <p:sp>
         <p:nvSpPr>
-          <p:cNvPr id="107" name="Google Shape;107;g3fb4a8ef356_0_22:notes"/>
+          <p:cNvPr id="110" name="Google Shape;110;g3fb4a8ef356_0_22:notes"/>
           <p:cNvSpPr/>
           <p:nvPr>
             <p:ph idx="2" type="sldImg"/>
@@ -3550,7 +4022,7 @@
   <p:cSld>
     <p:spTree>
       <p:nvGrpSpPr>
-        <p:cNvPr id="113" name="Shape 113"/>
+        <p:cNvPr id="117" name="Shape 117"/>
         <p:cNvGrpSpPr/>
         <p:nvPr/>
       </p:nvGrpSpPr>
@@ -3564,7 +4036,7 @@
       </p:grpSpPr>
       <p:sp>
         <p:nvSpPr>
-          <p:cNvPr id="114" name="Google Shape;114;g3fb4a8ef356_0_5:notes"/>
+          <p:cNvPr id="118" name="Google Shape;118;g3fb4a8ef356_0_5:notes"/>
           <p:cNvSpPr txBox="1"/>
           <p:nvPr>
             <p:ph idx="1" type="body"/>
@@ -3611,7 +4083,7 @@
       </p:sp>
       <p:sp>
         <p:nvSpPr>
-          <p:cNvPr id="115" name="Google Shape;115;g3fb4a8ef356_0_5:notes"/>
+          <p:cNvPr id="119" name="Google Shape;119;g3fb4a8ef356_0_5:notes"/>
           <p:cNvSpPr/>
           <p:nvPr>
             <p:ph idx="2" type="sldImg"/>
@@ -3667,7 +4139,7 @@
   <p:cSld>
     <p:spTree>
       <p:nvGrpSpPr>
-        <p:cNvPr id="127" name="Shape 127"/>
+        <p:cNvPr id="132" name="Shape 132"/>
         <p:cNvGrpSpPr/>
         <p:nvPr/>
       </p:nvGrpSpPr>
@@ -3681,7 +4153,7 @@
       </p:grpSpPr>
       <p:sp>
         <p:nvSpPr>
-          <p:cNvPr id="128" name="Google Shape;128;p6:notes"/>
+          <p:cNvPr id="133" name="Google Shape;133;p6:notes"/>
           <p:cNvSpPr txBox="1"/>
           <p:nvPr>
             <p:ph idx="1" type="body"/>
@@ -3728,7 +4200,7 @@
       </p:sp>
       <p:sp>
         <p:nvSpPr>
-          <p:cNvPr id="129" name="Google Shape;129;p6:notes"/>
+          <p:cNvPr id="134" name="Google Shape;134;p6:notes"/>
           <p:cNvSpPr/>
           <p:nvPr>
             <p:ph idx="2" type="sldImg"/>
@@ -3784,7 +4256,7 @@
   <p:cSld>
     <p:spTree>
       <p:nvGrpSpPr>
-        <p:cNvPr id="133" name="Shape 133"/>
+        <p:cNvPr id="139" name="Shape 139"/>
         <p:cNvGrpSpPr/>
         <p:nvPr/>
       </p:nvGrpSpPr>
@@ -3798,7 +4270,7 @@
       </p:grpSpPr>
       <p:sp>
         <p:nvSpPr>
-          <p:cNvPr id="134" name="Google Shape;134;p7:notes"/>
+          <p:cNvPr id="140" name="Google Shape;140;p7:notes"/>
           <p:cNvSpPr txBox="1"/>
           <p:nvPr>
             <p:ph idx="1" type="body"/>
@@ -3845,7 +4317,7 @@
       </p:sp>
       <p:sp>
         <p:nvSpPr>
-          <p:cNvPr id="135" name="Google Shape;135;p7:notes"/>
+          <p:cNvPr id="141" name="Google Shape;141;p7:notes"/>
           <p:cNvSpPr/>
           <p:nvPr>
             <p:ph idx="2" type="sldImg"/>
@@ -3901,7 +4373,7 @@
   <p:cSld>
     <p:spTree>
       <p:nvGrpSpPr>
-        <p:cNvPr id="139" name="Shape 139"/>
+        <p:cNvPr id="146" name="Shape 146"/>
         <p:cNvGrpSpPr/>
         <p:nvPr/>
       </p:nvGrpSpPr>
@@ -3915,7 +4387,7 @@
       </p:grpSpPr>
       <p:sp>
         <p:nvSpPr>
-          <p:cNvPr id="140" name="Google Shape;140;g3f9fbfbdbe5_5_69:notes"/>
+          <p:cNvPr id="147" name="Google Shape;147;g3f9fbfbdbe5_5_69:notes"/>
           <p:cNvSpPr txBox="1"/>
           <p:nvPr>
             <p:ph idx="1" type="body"/>
@@ -3962,7 +4434,7 @@
       </p:sp>
       <p:sp>
         <p:nvSpPr>
-          <p:cNvPr id="141" name="Google Shape;141;g3f9fbfbdbe5_5_69:notes"/>
+          <p:cNvPr id="148" name="Google Shape;148;g3f9fbfbdbe5_5_69:notes"/>
           <p:cNvSpPr/>
           <p:nvPr>
             <p:ph idx="2" type="sldImg"/>
@@ -16388,7 +16860,7 @@
   <p:transition spd="med">
     <p:fade/>
   </p:transition>
-  <p:hf dt="0" ftr="0" hdr="0" sldNum="0"/>
+  <p:hf dt="0" ftr="0" hdr="0"/>
   <p:txStyles>
     <p:titleStyle>
       <a:defPPr lvl="0" marR="0" rtl="0" algn="l">
@@ -17286,7 +17758,7 @@
   <p:cSld>
     <p:spTree>
       <p:nvGrpSpPr>
-        <p:cNvPr id="148" name="Shape 148"/>
+        <p:cNvPr id="156" name="Shape 156"/>
         <p:cNvGrpSpPr/>
         <p:nvPr/>
       </p:nvGrpSpPr>
@@ -17300,7 +17772,7 @@
       </p:grpSpPr>
       <p:sp>
         <p:nvSpPr>
-          <p:cNvPr id="149" name="Google Shape;149;p22"/>
+          <p:cNvPr id="157" name="Google Shape;157;p22"/>
           <p:cNvSpPr txBox="1"/>
           <p:nvPr>
             <p:ph type="title"/>
@@ -17356,7 +17828,7 @@
       </p:sp>
       <p:sp>
         <p:nvSpPr>
-          <p:cNvPr id="150" name="Google Shape;150;p22"/>
+          <p:cNvPr id="158" name="Google Shape;158;p22"/>
           <p:cNvSpPr txBox="1"/>
           <p:nvPr>
             <p:ph idx="1" type="body"/>
@@ -17405,6 +17877,51 @@
           </a:p>
         </p:txBody>
       </p:sp>
+      <p:sp>
+        <p:nvSpPr>
+          <p:cNvPr id="159" name="Google Shape;159;p22"/>
+          <p:cNvSpPr txBox="1"/>
+          <p:nvPr>
+            <p:ph idx="12" type="sldNum"/>
+          </p:nvPr>
+        </p:nvSpPr>
+        <p:spPr>
+          <a:xfrm>
+            <a:off x="6553200" y="6356350"/>
+            <a:ext cx="2133600" cy="365100"/>
+          </a:xfrm>
+          <a:prstGeom prst="rect">
+            <a:avLst/>
+          </a:prstGeom>
+        </p:spPr>
+        <p:txBody>
+          <a:bodyPr anchorCtr="0" anchor="ctr" bIns="45700" lIns="91425" spcFirstLastPara="1" rIns="91425" wrap="square" tIns="45700">
+            <a:noAutofit/>
+          </a:bodyPr>
+          <a:lstStyle/>
+          <a:p>
+            <a:pPr indent="0" lvl="0" marL="0" rtl="0" algn="r">
+              <a:spcBef>
+                <a:spcPts val="0"/>
+              </a:spcBef>
+              <a:spcAft>
+                <a:spcPts val="0"/>
+              </a:spcAft>
+              <a:buClr>
+                <a:srgbClr val="000000"/>
+              </a:buClr>
+              <a:buSzPts val="1200"/>
+              <a:buFont typeface="Arial"/>
+              <a:buNone/>
+            </a:pPr>
+            <a:fld id="{00000000-1234-1234-1234-123412341234}" type="slidenum">
+              <a:rPr lang="en-US"/>
+              <a:t>‹#›</a:t>
+            </a:fld>
+            <a:endParaRPr/>
+          </a:p>
+        </p:txBody>
+      </p:sp>
     </p:spTree>
   </p:cSld>
   <p:clrMapOvr>
@@ -17418,7 +17935,7 @@
   <p:cSld>
     <p:spTree>
       <p:nvGrpSpPr>
-        <p:cNvPr id="154" name="Shape 154"/>
+        <p:cNvPr id="163" name="Shape 163"/>
         <p:cNvGrpSpPr/>
         <p:nvPr/>
       </p:nvGrpSpPr>
@@ -17432,7 +17949,7 @@
       </p:grpSpPr>
       <p:sp>
         <p:nvSpPr>
-          <p:cNvPr id="155" name="Google Shape;155;p23"/>
+          <p:cNvPr id="164" name="Google Shape;164;p23"/>
           <p:cNvSpPr txBox="1"/>
           <p:nvPr>
             <p:ph type="title"/>
@@ -17485,7 +18002,7 @@
       </p:sp>
       <p:sp>
         <p:nvSpPr>
-          <p:cNvPr id="156" name="Google Shape;156;p23"/>
+          <p:cNvPr id="165" name="Google Shape;165;p23"/>
           <p:cNvSpPr txBox="1"/>
           <p:nvPr>
             <p:ph idx="1" type="body"/>
@@ -17567,7 +18084,7 @@
       </p:sp>
       <p:sp>
         <p:nvSpPr>
-          <p:cNvPr id="157" name="Google Shape;157;p23"/>
+          <p:cNvPr id="166" name="Google Shape;166;p23"/>
           <p:cNvSpPr txBox="1"/>
           <p:nvPr/>
         </p:nvSpPr>
@@ -17645,7 +18162,7 @@
       </p:sp>
       <p:sp>
         <p:nvSpPr>
-          <p:cNvPr id="158" name="Google Shape;158;p23"/>
+          <p:cNvPr id="167" name="Google Shape;167;p23"/>
           <p:cNvSpPr txBox="1"/>
           <p:nvPr/>
         </p:nvSpPr>
@@ -17721,240 +18238,22 @@
           </a:p>
         </p:txBody>
       </p:sp>
-    </p:spTree>
-  </p:cSld>
-  <p:clrMapOvr>
-    <a:masterClrMapping/>
-  </p:clrMapOvr>
-  <p:timing>
-    <p:tnLst>
-      <p:par>
-        <p:cTn dur="indefinite" nodeType="tmRoot" restart="never">
-          <p:childTnLst>
-            <p:seq concurrent="1" nextAc="seek">
-              <p:cTn dur="indefinite" id="2" nodeType="mainSeq">
-                <p:childTnLst>
-                  <p:par>
-                    <p:cTn fill="hold">
-                      <p:stCondLst>
-                        <p:cond delay="indefinite"/>
-                      </p:stCondLst>
-                      <p:childTnLst>
-                        <p:par>
-                          <p:cTn fill="hold">
-                            <p:stCondLst>
-                              <p:cond delay="0"/>
-                            </p:stCondLst>
-                            <p:childTnLst>
-                              <p:par>
-                                <p:cTn fill="hold" nodeType="clickEffect" presetClass="entr" presetID="10" presetSubtype="0">
-                                  <p:stCondLst>
-                                    <p:cond delay="0"/>
-                                  </p:stCondLst>
-                                  <p:childTnLst>
-                                    <p:set>
-                                      <p:cBhvr>
-                                        <p:cTn dur="1" fill="hold">
-                                          <p:stCondLst>
-                                            <p:cond delay="0"/>
-                                          </p:stCondLst>
-                                        </p:cTn>
-                                        <p:tgtEl>
-                                          <p:spTgt spid="156"/>
-                                        </p:tgtEl>
-                                        <p:attrNameLst>
-                                          <p:attrName>style.visibility</p:attrName>
-                                        </p:attrNameLst>
-                                      </p:cBhvr>
-                                      <p:to>
-                                        <p:strVal val="visible"/>
-                                      </p:to>
-                                    </p:set>
-                                    <p:animEffect filter="fade" transition="in">
-                                      <p:cBhvr>
-                                        <p:cTn dur="1000"/>
-                                        <p:tgtEl>
-                                          <p:spTgt spid="156"/>
-                                        </p:tgtEl>
-                                      </p:cBhvr>
-                                    </p:animEffect>
-                                  </p:childTnLst>
-                                </p:cTn>
-                              </p:par>
-                            </p:childTnLst>
-                          </p:cTn>
-                        </p:par>
-                      </p:childTnLst>
-                    </p:cTn>
-                  </p:par>
-                  <p:par>
-                    <p:cTn fill="hold">
-                      <p:stCondLst>
-                        <p:cond delay="indefinite"/>
-                      </p:stCondLst>
-                      <p:childTnLst>
-                        <p:par>
-                          <p:cTn fill="hold">
-                            <p:stCondLst>
-                              <p:cond delay="0"/>
-                            </p:stCondLst>
-                            <p:childTnLst>
-                              <p:par>
-                                <p:cTn fill="hold" nodeType="clickEffect" presetClass="entr" presetID="10" presetSubtype="0">
-                                  <p:stCondLst>
-                                    <p:cond delay="0"/>
-                                  </p:stCondLst>
-                                  <p:childTnLst>
-                                    <p:set>
-                                      <p:cBhvr>
-                                        <p:cTn dur="1" fill="hold">
-                                          <p:stCondLst>
-                                            <p:cond delay="0"/>
-                                          </p:stCondLst>
-                                        </p:cTn>
-                                        <p:tgtEl>
-                                          <p:spTgt spid="157"/>
-                                        </p:tgtEl>
-                                        <p:attrNameLst>
-                                          <p:attrName>style.visibility</p:attrName>
-                                        </p:attrNameLst>
-                                      </p:cBhvr>
-                                      <p:to>
-                                        <p:strVal val="visible"/>
-                                      </p:to>
-                                    </p:set>
-                                    <p:animEffect filter="fade" transition="in">
-                                      <p:cBhvr>
-                                        <p:cTn dur="1000"/>
-                                        <p:tgtEl>
-                                          <p:spTgt spid="157"/>
-                                        </p:tgtEl>
-                                      </p:cBhvr>
-                                    </p:animEffect>
-                                  </p:childTnLst>
-                                </p:cTn>
-                              </p:par>
-                            </p:childTnLst>
-                          </p:cTn>
-                        </p:par>
-                      </p:childTnLst>
-                    </p:cTn>
-                  </p:par>
-                  <p:par>
-                    <p:cTn fill="hold">
-                      <p:stCondLst>
-                        <p:cond delay="indefinite"/>
-                      </p:stCondLst>
-                      <p:childTnLst>
-                        <p:par>
-                          <p:cTn fill="hold">
-                            <p:stCondLst>
-                              <p:cond delay="0"/>
-                            </p:stCondLst>
-                            <p:childTnLst>
-                              <p:par>
-                                <p:cTn fill="hold" nodeType="clickEffect" presetClass="entr" presetID="10" presetSubtype="0">
-                                  <p:stCondLst>
-                                    <p:cond delay="0"/>
-                                  </p:stCondLst>
-                                  <p:childTnLst>
-                                    <p:set>
-                                      <p:cBhvr>
-                                        <p:cTn dur="1" fill="hold">
-                                          <p:stCondLst>
-                                            <p:cond delay="0"/>
-                                          </p:stCondLst>
-                                        </p:cTn>
-                                        <p:tgtEl>
-                                          <p:spTgt spid="158"/>
-                                        </p:tgtEl>
-                                        <p:attrNameLst>
-                                          <p:attrName>style.visibility</p:attrName>
-                                        </p:attrNameLst>
-                                      </p:cBhvr>
-                                      <p:to>
-                                        <p:strVal val="visible"/>
-                                      </p:to>
-                                    </p:set>
-                                    <p:animEffect filter="fade" transition="in">
-                                      <p:cBhvr>
-                                        <p:cTn dur="1000"/>
-                                        <p:tgtEl>
-                                          <p:spTgt spid="158"/>
-                                        </p:tgtEl>
-                                      </p:cBhvr>
-                                    </p:animEffect>
-                                  </p:childTnLst>
-                                </p:cTn>
-                              </p:par>
-                            </p:childTnLst>
-                          </p:cTn>
-                        </p:par>
-                      </p:childTnLst>
-                    </p:cTn>
-                  </p:par>
-                </p:childTnLst>
-              </p:cTn>
-              <p:prevCondLst>
-                <p:cond evt="onPrev">
-                  <p:tgtEl>
-                    <p:sldTgt/>
-                  </p:tgtEl>
-                </p:cond>
-              </p:prevCondLst>
-              <p:nextCondLst>
-                <p:cond evt="onNext">
-                  <p:tgtEl>
-                    <p:sldTgt/>
-                  </p:tgtEl>
-                </p:cond>
-              </p:nextCondLst>
-            </p:seq>
-          </p:childTnLst>
-        </p:cTn>
-      </p:par>
-    </p:tnLst>
-  </p:timing>
-</p:sld>
-</file>
-
-<file path=ppt/slides/slide12.xml><?xml version="1.0" encoding="utf-8"?>
-<p:sld xmlns:a="http://schemas.openxmlformats.org/drawingml/2006/main" xmlns:r="http://schemas.openxmlformats.org/officeDocument/2006/relationships" xmlns:mc="http://schemas.openxmlformats.org/markup-compatibility/2006" xmlns:mv="urn:schemas-microsoft-com:mac:vml" xmlns:p="http://schemas.openxmlformats.org/presentationml/2006/main" xmlns:c="http://schemas.openxmlformats.org/drawingml/2006/chart" xmlns:dgm="http://schemas.openxmlformats.org/drawingml/2006/diagram" xmlns:o="urn:schemas-microsoft-com:office:office" xmlns:v="urn:schemas-microsoft-com:vml" xmlns:pvml="urn:schemas-microsoft-com:office:powerpoint" xmlns:com="http://schemas.openxmlformats.org/drawingml/2006/compatibility" xmlns:p14="http://schemas.microsoft.com/office/powerpoint/2010/main" xmlns:p15="http://schemas.microsoft.com/office/powerpoint/2012/main" xmlns:ahyp="http://schemas.microsoft.com/office/drawing/2018/hyperlinkcolor">
-  <p:cSld>
-    <p:spTree>
-      <p:nvGrpSpPr>
-        <p:cNvPr id="162" name="Shape 162"/>
-        <p:cNvGrpSpPr/>
-        <p:nvPr/>
-      </p:nvGrpSpPr>
-      <p:grpSpPr>
-        <a:xfrm>
-          <a:off x="0" y="0"/>
-          <a:ext cx="0" cy="0"/>
-          <a:chOff x="0" y="0"/>
-          <a:chExt cx="0" cy="0"/>
-        </a:xfrm>
-      </p:grpSpPr>
       <p:sp>
         <p:nvSpPr>
-          <p:cNvPr id="163" name="Google Shape;163;p24"/>
+          <p:cNvPr id="168" name="Google Shape;168;p23"/>
           <p:cNvSpPr txBox="1"/>
           <p:nvPr>
-            <p:ph type="title"/>
+            <p:ph idx="12" type="sldNum"/>
           </p:nvPr>
         </p:nvSpPr>
         <p:spPr>
           <a:xfrm>
-            <a:off x="457200" y="274638"/>
-            <a:ext cx="8229600" cy="1143000"/>
+            <a:off x="6553200" y="6356350"/>
+            <a:ext cx="2133600" cy="365100"/>
           </a:xfrm>
           <a:prstGeom prst="rect">
             <a:avLst/>
           </a:prstGeom>
-          <a:noFill/>
-          <a:ln>
-            <a:noFill/>
-          </a:ln>
         </p:spPr>
         <p:txBody>
           <a:bodyPr anchorCtr="0" anchor="ctr" bIns="45700" lIns="91425" spcFirstLastPara="1" rIns="91425" wrap="square" tIns="45700">
@@ -17962,312 +18261,25 @@
           </a:bodyPr>
           <a:lstStyle/>
           <a:p>
-            <a:pPr indent="0" lvl="0" marL="0" rtl="0" algn="ctr">
-              <a:lnSpc>
-                <a:spcPct val="150000"/>
-              </a:lnSpc>
-              <a:spcBef>
-                <a:spcPts val="0"/>
-              </a:spcBef>
-              <a:spcAft>
-                <a:spcPts val="0"/>
-              </a:spcAft>
-              <a:buSzPts val="1400"/>
+            <a:pPr indent="0" lvl="0" marL="0" rtl="0" algn="r">
+              <a:spcBef>
+                <a:spcPts val="0"/>
+              </a:spcBef>
+              <a:spcAft>
+                <a:spcPts val="0"/>
+              </a:spcAft>
+              <a:buClr>
+                <a:srgbClr val="000000"/>
+              </a:buClr>
+              <a:buSzPts val="1200"/>
+              <a:buFont typeface="Arial"/>
               <a:buNone/>
             </a:pPr>
-            <a:r>
-              <a:rPr b="1" lang="en-US" sz="4000">
-                <a:solidFill>
-                  <a:srgbClr val="0B3D59"/>
-                </a:solidFill>
-              </a:rPr>
-              <a:t>Gap Analysis</a:t>
-            </a:r>
-            <a:endParaRPr b="1" sz="4000">
-              <a:solidFill>
-                <a:srgbClr val="0B3D59"/>
-              </a:solidFill>
-            </a:endParaRPr>
-          </a:p>
-        </p:txBody>
-      </p:sp>
-      <p:sp>
-        <p:nvSpPr>
-          <p:cNvPr id="164" name="Google Shape;164;p24"/>
-          <p:cNvSpPr txBox="1"/>
-          <p:nvPr>
-            <p:ph idx="1" type="body"/>
-          </p:nvPr>
-        </p:nvSpPr>
-        <p:spPr>
-          <a:xfrm>
-            <a:off x="457200" y="1470527"/>
-            <a:ext cx="8229600" cy="890400"/>
-          </a:xfrm>
-          <a:prstGeom prst="rect">
-            <a:avLst/>
-          </a:prstGeom>
-          <a:noFill/>
-          <a:ln>
-            <a:noFill/>
-          </a:ln>
-        </p:spPr>
-        <p:txBody>
-          <a:bodyPr anchorCtr="0" anchor="t" bIns="45700" lIns="91425" spcFirstLastPara="1" rIns="91425" wrap="square" tIns="45700">
-            <a:noAutofit/>
-          </a:bodyPr>
-          <a:lstStyle/>
-          <a:p>
-            <a:pPr indent="0" lvl="0" marL="0" rtl="0" algn="just">
-              <a:lnSpc>
-                <a:spcPct val="150000"/>
-              </a:lnSpc>
-              <a:spcBef>
-                <a:spcPts val="1200"/>
-              </a:spcBef>
-              <a:spcAft>
-                <a:spcPts val="0"/>
-              </a:spcAft>
-              <a:buClr>
-                <a:schemeClr val="dk1"/>
-              </a:buClr>
-              <a:buSzPts val="1100"/>
-              <a:buNone/>
-            </a:pPr>
-            <a:r>
-              <a:rPr b="1" lang="en-US" sz="2000"/>
-              <a:t>4. No uncertainty output.</a:t>
-            </a:r>
-            <a:r>
-              <a:rPr lang="en-US" sz="2000"/>
-              <a:t> iMES's CCA-based fusion and Asare et al.'s classifiers all return a bare label or SHAP heatmap, never a confidence score.</a:t>
-            </a:r>
-            <a:endParaRPr b="1" sz="2100"/>
-          </a:p>
-          <a:p>
-            <a:pPr indent="-139700" lvl="0" marL="342900" rtl="0" algn="l">
-              <a:lnSpc>
-                <a:spcPct val="150000"/>
-              </a:lnSpc>
-              <a:spcBef>
-                <a:spcPts val="1200"/>
-              </a:spcBef>
-              <a:spcAft>
-                <a:spcPts val="0"/>
-              </a:spcAft>
-              <a:buClr>
-                <a:schemeClr val="dk1"/>
-              </a:buClr>
-              <a:buSzPts val="3200"/>
-              <a:buNone/>
-            </a:pPr>
-            <a:r>
-              <a:t/>
-            </a:r>
-            <a:endParaRPr sz="1200">
-              <a:latin typeface="Arial"/>
-              <a:ea typeface="Arial"/>
-              <a:cs typeface="Arial"/>
-              <a:sym typeface="Arial"/>
-            </a:endParaRPr>
-          </a:p>
-        </p:txBody>
-      </p:sp>
-      <p:sp>
-        <p:nvSpPr>
-          <p:cNvPr id="165" name="Google Shape;165;p24"/>
-          <p:cNvSpPr txBox="1"/>
-          <p:nvPr/>
-        </p:nvSpPr>
-        <p:spPr>
-          <a:xfrm>
-            <a:off x="478325" y="2471664"/>
-            <a:ext cx="8208600" cy="1383000"/>
-          </a:xfrm>
-          <a:prstGeom prst="rect">
-            <a:avLst/>
-          </a:prstGeom>
-          <a:noFill/>
-          <a:ln>
-            <a:noFill/>
-          </a:ln>
-        </p:spPr>
-        <p:txBody>
-          <a:bodyPr anchorCtr="0" anchor="t" bIns="91425" lIns="91425" spcFirstLastPara="1" rIns="91425" wrap="square" tIns="91425">
-            <a:noAutofit/>
-          </a:bodyPr>
-          <a:lstStyle/>
-          <a:p>
-            <a:pPr indent="0" lvl="0" marL="0" rtl="0" algn="just">
-              <a:lnSpc>
-                <a:spcPct val="150000"/>
-              </a:lnSpc>
-              <a:spcBef>
-                <a:spcPts val="1200"/>
-              </a:spcBef>
-              <a:spcAft>
-                <a:spcPts val="0"/>
-              </a:spcAft>
-              <a:buNone/>
-            </a:pPr>
-            <a:r>
-              <a:rPr b="1" lang="en-US" sz="2000">
-                <a:solidFill>
-                  <a:schemeClr val="dk1"/>
-                </a:solidFill>
-                <a:latin typeface="Calibri"/>
-                <a:ea typeface="Calibri"/>
-                <a:cs typeface="Calibri"/>
-                <a:sym typeface="Calibri"/>
-              </a:rPr>
-              <a:t>5. Severe class imbalance, unaddressed.</a:t>
-            </a:r>
-            <a:r>
-              <a:rPr lang="en-US" sz="2000">
-                <a:solidFill>
-                  <a:schemeClr val="dk1"/>
-                </a:solidFill>
-                <a:latin typeface="Calibri"/>
-                <a:ea typeface="Calibri"/>
-                <a:cs typeface="Calibri"/>
-                <a:sym typeface="Calibri"/>
-              </a:rPr>
-              <a:t> Rabinovici-Cohen et al. (2024) report OSCC accuracy on datasets where positive samples (540) are dwarfed by negatives (1,500), with no stated imbalance strategy.</a:t>
-            </a:r>
-            <a:endParaRPr sz="2000">
-              <a:solidFill>
-                <a:schemeClr val="dk1"/>
-              </a:solidFill>
-              <a:latin typeface="Calibri"/>
-              <a:ea typeface="Calibri"/>
-              <a:cs typeface="Calibri"/>
-              <a:sym typeface="Calibri"/>
-            </a:endParaRPr>
-          </a:p>
-          <a:p>
-            <a:pPr indent="0" lvl="0" marL="0" rtl="0" algn="l">
-              <a:lnSpc>
-                <a:spcPct val="150000"/>
-              </a:lnSpc>
-              <a:spcBef>
-                <a:spcPts val="1200"/>
-              </a:spcBef>
-              <a:spcAft>
-                <a:spcPts val="1200"/>
-              </a:spcAft>
-              <a:buNone/>
-            </a:pPr>
-            <a:r>
-              <a:t/>
-            </a:r>
-            <a:endParaRPr b="1" sz="2100">
-              <a:solidFill>
-                <a:schemeClr val="dk1"/>
-              </a:solidFill>
-              <a:latin typeface="Calibri"/>
-              <a:ea typeface="Calibri"/>
-              <a:cs typeface="Calibri"/>
-              <a:sym typeface="Calibri"/>
-            </a:endParaRPr>
-          </a:p>
-        </p:txBody>
-      </p:sp>
-      <p:sp>
-        <p:nvSpPr>
-          <p:cNvPr id="166" name="Google Shape;166;p24"/>
-          <p:cNvSpPr txBox="1"/>
-          <p:nvPr/>
-        </p:nvSpPr>
-        <p:spPr>
-          <a:xfrm>
-            <a:off x="479662" y="3944266"/>
-            <a:ext cx="8229600" cy="1311000"/>
-          </a:xfrm>
-          <a:prstGeom prst="rect">
-            <a:avLst/>
-          </a:prstGeom>
-          <a:noFill/>
-          <a:ln>
-            <a:noFill/>
-          </a:ln>
-        </p:spPr>
-        <p:txBody>
-          <a:bodyPr anchorCtr="0" anchor="t" bIns="91425" lIns="91425" spcFirstLastPara="1" rIns="91425" wrap="square" tIns="91425">
-            <a:noAutofit/>
-          </a:bodyPr>
-          <a:lstStyle/>
-          <a:p>
-            <a:pPr indent="0" lvl="0" marL="0" rtl="0" algn="just">
-              <a:lnSpc>
-                <a:spcPct val="150000"/>
-              </a:lnSpc>
-              <a:spcBef>
-                <a:spcPts val="1200"/>
-              </a:spcBef>
-              <a:spcAft>
-                <a:spcPts val="0"/>
-              </a:spcAft>
-              <a:buNone/>
-            </a:pPr>
-            <a:r>
-              <a:rPr b="1" lang="en-US" sz="2000">
-                <a:solidFill>
-                  <a:schemeClr val="dk1"/>
-                </a:solidFill>
-                <a:latin typeface="Calibri"/>
-                <a:ea typeface="Calibri"/>
-                <a:cs typeface="Calibri"/>
-                <a:sym typeface="Calibri"/>
-              </a:rPr>
-              <a:t>6. No missing-modality robustness.</a:t>
-            </a:r>
-            <a:r>
-              <a:rPr lang="en-US" sz="2000">
-                <a:solidFill>
-                  <a:schemeClr val="dk1"/>
-                </a:solidFill>
-                <a:latin typeface="Calibri"/>
-                <a:ea typeface="Calibri"/>
-                <a:cs typeface="Calibri"/>
-                <a:sym typeface="Calibri"/>
-              </a:rPr>
-              <a:t> Every reviewed system (Asare et al., iMES, single-surface classifiers) assumes all inputs are always present and well-captured.</a:t>
-            </a:r>
-            <a:endParaRPr sz="2000">
-              <a:solidFill>
-                <a:schemeClr val="dk1"/>
-              </a:solidFill>
-              <a:latin typeface="Calibri"/>
-              <a:ea typeface="Calibri"/>
-              <a:cs typeface="Calibri"/>
-              <a:sym typeface="Calibri"/>
-            </a:endParaRPr>
-          </a:p>
-          <a:p>
-            <a:pPr indent="0" lvl="0" marL="0" rtl="0" algn="l">
-              <a:lnSpc>
-                <a:spcPct val="150000"/>
-              </a:lnSpc>
-              <a:spcBef>
-                <a:spcPts val="1200"/>
-              </a:spcBef>
-              <a:spcAft>
-                <a:spcPts val="1200"/>
-              </a:spcAft>
-              <a:buNone/>
-            </a:pPr>
-            <a:r>
-              <a:t/>
-            </a:r>
-            <a:endParaRPr b="1" sz="2100">
-              <a:solidFill>
-                <a:schemeClr val="dk1"/>
-              </a:solidFill>
-              <a:latin typeface="Calibri"/>
-              <a:ea typeface="Calibri"/>
-              <a:cs typeface="Calibri"/>
-              <a:sym typeface="Calibri"/>
-            </a:endParaRPr>
+            <a:fld id="{00000000-1234-1234-1234-123412341234}" type="slidenum">
+              <a:rPr lang="en-US"/>
+              <a:t>‹#›</a:t>
+            </a:fld>
+            <a:endParaRPr/>
           </a:p>
         </p:txBody>
       </p:sp>
@@ -18284,59 +18296,6 @@
             <p:seq concurrent="1" nextAc="seek">
               <p:cTn dur="indefinite" id="2" nodeType="mainSeq">
                 <p:childTnLst>
-                  <p:par>
-                    <p:cTn fill="hold">
-                      <p:stCondLst>
-                        <p:cond delay="indefinite"/>
-                      </p:stCondLst>
-                      <p:childTnLst>
-                        <p:par>
-                          <p:cTn fill="hold">
-                            <p:stCondLst>
-                              <p:cond delay="0"/>
-                            </p:stCondLst>
-                            <p:childTnLst>
-                              <p:par>
-                                <p:cTn fill="hold" nodeType="clickEffect" presetClass="entr" presetID="10" presetSubtype="0">
-                                  <p:stCondLst>
-                                    <p:cond delay="0"/>
-                                  </p:stCondLst>
-                                  <p:childTnLst>
-                                    <p:set>
-                                      <p:cBhvr>
-                                        <p:cTn dur="1" fill="hold">
-                                          <p:stCondLst>
-                                            <p:cond delay="0"/>
-                                          </p:stCondLst>
-                                        </p:cTn>
-                                        <p:tgtEl>
-                                          <p:spTgt spid="164"/>
-                                        </p:tgtEl>
-                                        <p:attrNameLst>
-                                          <p:attrName>style.visibility</p:attrName>
-                                        </p:attrNameLst>
-                                      </p:cBhvr>
-                                      <p:to>
-                                        <p:strVal val="visible"/>
-                                      </p:to>
-                                    </p:set>
-                                    <p:animEffect filter="fade" transition="in">
-                                      <p:cBhvr>
-                                        <p:cTn dur="1000"/>
-                                        <p:tgtEl>
-                                          <p:spTgt spid="164"/>
-                                        </p:tgtEl>
-                                      </p:cBhvr>
-                                    </p:animEffect>
-                                  </p:childTnLst>
-                                </p:cTn>
-                              </p:par>
-                            </p:childTnLst>
-                          </p:cTn>
-                        </p:par>
-                      </p:childTnLst>
-                    </p:cTn>
-                  </p:par>
                   <p:par>
                     <p:cTn fill="hold">
                       <p:stCondLst>
@@ -18443,6 +18402,654 @@
                       </p:childTnLst>
                     </p:cTn>
                   </p:par>
+                  <p:par>
+                    <p:cTn fill="hold">
+                      <p:stCondLst>
+                        <p:cond delay="indefinite"/>
+                      </p:stCondLst>
+                      <p:childTnLst>
+                        <p:par>
+                          <p:cTn fill="hold">
+                            <p:stCondLst>
+                              <p:cond delay="0"/>
+                            </p:stCondLst>
+                            <p:childTnLst>
+                              <p:par>
+                                <p:cTn fill="hold" nodeType="clickEffect" presetClass="entr" presetID="10" presetSubtype="0">
+                                  <p:stCondLst>
+                                    <p:cond delay="0"/>
+                                  </p:stCondLst>
+                                  <p:childTnLst>
+                                    <p:set>
+                                      <p:cBhvr>
+                                        <p:cTn dur="1" fill="hold">
+                                          <p:stCondLst>
+                                            <p:cond delay="0"/>
+                                          </p:stCondLst>
+                                        </p:cTn>
+                                        <p:tgtEl>
+                                          <p:spTgt spid="167"/>
+                                        </p:tgtEl>
+                                        <p:attrNameLst>
+                                          <p:attrName>style.visibility</p:attrName>
+                                        </p:attrNameLst>
+                                      </p:cBhvr>
+                                      <p:to>
+                                        <p:strVal val="visible"/>
+                                      </p:to>
+                                    </p:set>
+                                    <p:animEffect filter="fade" transition="in">
+                                      <p:cBhvr>
+                                        <p:cTn dur="1000"/>
+                                        <p:tgtEl>
+                                          <p:spTgt spid="167"/>
+                                        </p:tgtEl>
+                                      </p:cBhvr>
+                                    </p:animEffect>
+                                  </p:childTnLst>
+                                </p:cTn>
+                              </p:par>
+                            </p:childTnLst>
+                          </p:cTn>
+                        </p:par>
+                      </p:childTnLst>
+                    </p:cTn>
+                  </p:par>
+                </p:childTnLst>
+              </p:cTn>
+              <p:prevCondLst>
+                <p:cond evt="onPrev">
+                  <p:tgtEl>
+                    <p:sldTgt/>
+                  </p:tgtEl>
+                </p:cond>
+              </p:prevCondLst>
+              <p:nextCondLst>
+                <p:cond evt="onNext">
+                  <p:tgtEl>
+                    <p:sldTgt/>
+                  </p:tgtEl>
+                </p:cond>
+              </p:nextCondLst>
+            </p:seq>
+          </p:childTnLst>
+        </p:cTn>
+      </p:par>
+    </p:tnLst>
+  </p:timing>
+</p:sld>
+</file>
+
+<file path=ppt/slides/slide12.xml><?xml version="1.0" encoding="utf-8"?>
+<p:sld xmlns:a="http://schemas.openxmlformats.org/drawingml/2006/main" xmlns:r="http://schemas.openxmlformats.org/officeDocument/2006/relationships" xmlns:mc="http://schemas.openxmlformats.org/markup-compatibility/2006" xmlns:mv="urn:schemas-microsoft-com:mac:vml" xmlns:p="http://schemas.openxmlformats.org/presentationml/2006/main" xmlns:c="http://schemas.openxmlformats.org/drawingml/2006/chart" xmlns:dgm="http://schemas.openxmlformats.org/drawingml/2006/diagram" xmlns:o="urn:schemas-microsoft-com:office:office" xmlns:v="urn:schemas-microsoft-com:vml" xmlns:pvml="urn:schemas-microsoft-com:office:powerpoint" xmlns:com="http://schemas.openxmlformats.org/drawingml/2006/compatibility" xmlns:p14="http://schemas.microsoft.com/office/powerpoint/2010/main" xmlns:p15="http://schemas.microsoft.com/office/powerpoint/2012/main" xmlns:ahyp="http://schemas.microsoft.com/office/drawing/2018/hyperlinkcolor">
+  <p:cSld>
+    <p:spTree>
+      <p:nvGrpSpPr>
+        <p:cNvPr id="172" name="Shape 172"/>
+        <p:cNvGrpSpPr/>
+        <p:nvPr/>
+      </p:nvGrpSpPr>
+      <p:grpSpPr>
+        <a:xfrm>
+          <a:off x="0" y="0"/>
+          <a:ext cx="0" cy="0"/>
+          <a:chOff x="0" y="0"/>
+          <a:chExt cx="0" cy="0"/>
+        </a:xfrm>
+      </p:grpSpPr>
+      <p:sp>
+        <p:nvSpPr>
+          <p:cNvPr id="173" name="Google Shape;173;p24"/>
+          <p:cNvSpPr txBox="1"/>
+          <p:nvPr>
+            <p:ph type="title"/>
+          </p:nvPr>
+        </p:nvSpPr>
+        <p:spPr>
+          <a:xfrm>
+            <a:off x="457200" y="274638"/>
+            <a:ext cx="8229600" cy="1143000"/>
+          </a:xfrm>
+          <a:prstGeom prst="rect">
+            <a:avLst/>
+          </a:prstGeom>
+          <a:noFill/>
+          <a:ln>
+            <a:noFill/>
+          </a:ln>
+        </p:spPr>
+        <p:txBody>
+          <a:bodyPr anchorCtr="0" anchor="ctr" bIns="45700" lIns="91425" spcFirstLastPara="1" rIns="91425" wrap="square" tIns="45700">
+            <a:noAutofit/>
+          </a:bodyPr>
+          <a:lstStyle/>
+          <a:p>
+            <a:pPr indent="0" lvl="0" marL="0" rtl="0" algn="ctr">
+              <a:lnSpc>
+                <a:spcPct val="150000"/>
+              </a:lnSpc>
+              <a:spcBef>
+                <a:spcPts val="0"/>
+              </a:spcBef>
+              <a:spcAft>
+                <a:spcPts val="0"/>
+              </a:spcAft>
+              <a:buSzPts val="1400"/>
+              <a:buNone/>
+            </a:pPr>
+            <a:r>
+              <a:rPr b="1" lang="en-US" sz="4000">
+                <a:solidFill>
+                  <a:srgbClr val="0B3D59"/>
+                </a:solidFill>
+              </a:rPr>
+              <a:t>Gap Analysis</a:t>
+            </a:r>
+            <a:endParaRPr b="1" sz="4000">
+              <a:solidFill>
+                <a:srgbClr val="0B3D59"/>
+              </a:solidFill>
+            </a:endParaRPr>
+          </a:p>
+        </p:txBody>
+      </p:sp>
+      <p:sp>
+        <p:nvSpPr>
+          <p:cNvPr id="174" name="Google Shape;174;p24"/>
+          <p:cNvSpPr txBox="1"/>
+          <p:nvPr>
+            <p:ph idx="1" type="body"/>
+          </p:nvPr>
+        </p:nvSpPr>
+        <p:spPr>
+          <a:xfrm>
+            <a:off x="457200" y="1470527"/>
+            <a:ext cx="8229600" cy="890400"/>
+          </a:xfrm>
+          <a:prstGeom prst="rect">
+            <a:avLst/>
+          </a:prstGeom>
+          <a:noFill/>
+          <a:ln>
+            <a:noFill/>
+          </a:ln>
+        </p:spPr>
+        <p:txBody>
+          <a:bodyPr anchorCtr="0" anchor="t" bIns="45700" lIns="91425" spcFirstLastPara="1" rIns="91425" wrap="square" tIns="45700">
+            <a:noAutofit/>
+          </a:bodyPr>
+          <a:lstStyle/>
+          <a:p>
+            <a:pPr indent="0" lvl="0" marL="0" rtl="0" algn="just">
+              <a:lnSpc>
+                <a:spcPct val="150000"/>
+              </a:lnSpc>
+              <a:spcBef>
+                <a:spcPts val="1200"/>
+              </a:spcBef>
+              <a:spcAft>
+                <a:spcPts val="0"/>
+              </a:spcAft>
+              <a:buClr>
+                <a:schemeClr val="dk1"/>
+              </a:buClr>
+              <a:buSzPts val="1100"/>
+              <a:buNone/>
+            </a:pPr>
+            <a:r>
+              <a:rPr b="1" lang="en-US" sz="2000"/>
+              <a:t>4. No uncertainty output.</a:t>
+            </a:r>
+            <a:r>
+              <a:rPr lang="en-US" sz="2000"/>
+              <a:t> iMES's CCA-based fusion and Asare et al.'s classifiers all return a bare label or SHAP heatmap, never a confidence score.</a:t>
+            </a:r>
+            <a:endParaRPr b="1" sz="2100"/>
+          </a:p>
+          <a:p>
+            <a:pPr indent="-139700" lvl="0" marL="342900" rtl="0" algn="l">
+              <a:lnSpc>
+                <a:spcPct val="150000"/>
+              </a:lnSpc>
+              <a:spcBef>
+                <a:spcPts val="1200"/>
+              </a:spcBef>
+              <a:spcAft>
+                <a:spcPts val="0"/>
+              </a:spcAft>
+              <a:buClr>
+                <a:schemeClr val="dk1"/>
+              </a:buClr>
+              <a:buSzPts val="3200"/>
+              <a:buNone/>
+            </a:pPr>
+            <a:r>
+              <a:t/>
+            </a:r>
+            <a:endParaRPr sz="1200">
+              <a:latin typeface="Arial"/>
+              <a:ea typeface="Arial"/>
+              <a:cs typeface="Arial"/>
+              <a:sym typeface="Arial"/>
+            </a:endParaRPr>
+          </a:p>
+        </p:txBody>
+      </p:sp>
+      <p:sp>
+        <p:nvSpPr>
+          <p:cNvPr id="175" name="Google Shape;175;p24"/>
+          <p:cNvSpPr txBox="1"/>
+          <p:nvPr/>
+        </p:nvSpPr>
+        <p:spPr>
+          <a:xfrm>
+            <a:off x="478325" y="2471664"/>
+            <a:ext cx="8208600" cy="1383000"/>
+          </a:xfrm>
+          <a:prstGeom prst="rect">
+            <a:avLst/>
+          </a:prstGeom>
+          <a:noFill/>
+          <a:ln>
+            <a:noFill/>
+          </a:ln>
+        </p:spPr>
+        <p:txBody>
+          <a:bodyPr anchorCtr="0" anchor="t" bIns="91425" lIns="91425" spcFirstLastPara="1" rIns="91425" wrap="square" tIns="91425">
+            <a:noAutofit/>
+          </a:bodyPr>
+          <a:lstStyle/>
+          <a:p>
+            <a:pPr indent="0" lvl="0" marL="0" rtl="0" algn="just">
+              <a:lnSpc>
+                <a:spcPct val="150000"/>
+              </a:lnSpc>
+              <a:spcBef>
+                <a:spcPts val="1200"/>
+              </a:spcBef>
+              <a:spcAft>
+                <a:spcPts val="0"/>
+              </a:spcAft>
+              <a:buNone/>
+            </a:pPr>
+            <a:r>
+              <a:rPr b="1" lang="en-US" sz="2000">
+                <a:solidFill>
+                  <a:schemeClr val="dk1"/>
+                </a:solidFill>
+                <a:latin typeface="Calibri"/>
+                <a:ea typeface="Calibri"/>
+                <a:cs typeface="Calibri"/>
+                <a:sym typeface="Calibri"/>
+              </a:rPr>
+              <a:t>5. Severe class imbalance, unaddressed.</a:t>
+            </a:r>
+            <a:r>
+              <a:rPr lang="en-US" sz="2000">
+                <a:solidFill>
+                  <a:schemeClr val="dk1"/>
+                </a:solidFill>
+                <a:latin typeface="Calibri"/>
+                <a:ea typeface="Calibri"/>
+                <a:cs typeface="Calibri"/>
+                <a:sym typeface="Calibri"/>
+              </a:rPr>
+              <a:t> Rabinovici-Cohen et al. (2024) report OSCC accuracy on datasets where positive samples (540) are dwarfed by negatives (1,500), with no stated imbalance strategy.</a:t>
+            </a:r>
+            <a:endParaRPr sz="2000">
+              <a:solidFill>
+                <a:schemeClr val="dk1"/>
+              </a:solidFill>
+              <a:latin typeface="Calibri"/>
+              <a:ea typeface="Calibri"/>
+              <a:cs typeface="Calibri"/>
+              <a:sym typeface="Calibri"/>
+            </a:endParaRPr>
+          </a:p>
+          <a:p>
+            <a:pPr indent="0" lvl="0" marL="0" rtl="0" algn="l">
+              <a:lnSpc>
+                <a:spcPct val="150000"/>
+              </a:lnSpc>
+              <a:spcBef>
+                <a:spcPts val="1200"/>
+              </a:spcBef>
+              <a:spcAft>
+                <a:spcPts val="1200"/>
+              </a:spcAft>
+              <a:buNone/>
+            </a:pPr>
+            <a:r>
+              <a:t/>
+            </a:r>
+            <a:endParaRPr b="1" sz="2100">
+              <a:solidFill>
+                <a:schemeClr val="dk1"/>
+              </a:solidFill>
+              <a:latin typeface="Calibri"/>
+              <a:ea typeface="Calibri"/>
+              <a:cs typeface="Calibri"/>
+              <a:sym typeface="Calibri"/>
+            </a:endParaRPr>
+          </a:p>
+        </p:txBody>
+      </p:sp>
+      <p:sp>
+        <p:nvSpPr>
+          <p:cNvPr id="176" name="Google Shape;176;p24"/>
+          <p:cNvSpPr txBox="1"/>
+          <p:nvPr/>
+        </p:nvSpPr>
+        <p:spPr>
+          <a:xfrm>
+            <a:off x="479662" y="3944266"/>
+            <a:ext cx="8229600" cy="1311000"/>
+          </a:xfrm>
+          <a:prstGeom prst="rect">
+            <a:avLst/>
+          </a:prstGeom>
+          <a:noFill/>
+          <a:ln>
+            <a:noFill/>
+          </a:ln>
+        </p:spPr>
+        <p:txBody>
+          <a:bodyPr anchorCtr="0" anchor="t" bIns="91425" lIns="91425" spcFirstLastPara="1" rIns="91425" wrap="square" tIns="91425">
+            <a:noAutofit/>
+          </a:bodyPr>
+          <a:lstStyle/>
+          <a:p>
+            <a:pPr indent="0" lvl="0" marL="0" rtl="0" algn="just">
+              <a:lnSpc>
+                <a:spcPct val="150000"/>
+              </a:lnSpc>
+              <a:spcBef>
+                <a:spcPts val="1200"/>
+              </a:spcBef>
+              <a:spcAft>
+                <a:spcPts val="0"/>
+              </a:spcAft>
+              <a:buNone/>
+            </a:pPr>
+            <a:r>
+              <a:rPr b="1" lang="en-US" sz="2000">
+                <a:solidFill>
+                  <a:schemeClr val="dk1"/>
+                </a:solidFill>
+                <a:latin typeface="Calibri"/>
+                <a:ea typeface="Calibri"/>
+                <a:cs typeface="Calibri"/>
+                <a:sym typeface="Calibri"/>
+              </a:rPr>
+              <a:t>6. No missing-modality robustness.</a:t>
+            </a:r>
+            <a:r>
+              <a:rPr lang="en-US" sz="2000">
+                <a:solidFill>
+                  <a:schemeClr val="dk1"/>
+                </a:solidFill>
+                <a:latin typeface="Calibri"/>
+                <a:ea typeface="Calibri"/>
+                <a:cs typeface="Calibri"/>
+                <a:sym typeface="Calibri"/>
+              </a:rPr>
+              <a:t> Every reviewed system (Asare et al., iMES, single-surface classifiers) assumes all inputs are always present and well-captured.</a:t>
+            </a:r>
+            <a:endParaRPr sz="2000">
+              <a:solidFill>
+                <a:schemeClr val="dk1"/>
+              </a:solidFill>
+              <a:latin typeface="Calibri"/>
+              <a:ea typeface="Calibri"/>
+              <a:cs typeface="Calibri"/>
+              <a:sym typeface="Calibri"/>
+            </a:endParaRPr>
+          </a:p>
+          <a:p>
+            <a:pPr indent="0" lvl="0" marL="0" rtl="0" algn="l">
+              <a:lnSpc>
+                <a:spcPct val="150000"/>
+              </a:lnSpc>
+              <a:spcBef>
+                <a:spcPts val="1200"/>
+              </a:spcBef>
+              <a:spcAft>
+                <a:spcPts val="1200"/>
+              </a:spcAft>
+              <a:buNone/>
+            </a:pPr>
+            <a:r>
+              <a:t/>
+            </a:r>
+            <a:endParaRPr b="1" sz="2100">
+              <a:solidFill>
+                <a:schemeClr val="dk1"/>
+              </a:solidFill>
+              <a:latin typeface="Calibri"/>
+              <a:ea typeface="Calibri"/>
+              <a:cs typeface="Calibri"/>
+              <a:sym typeface="Calibri"/>
+            </a:endParaRPr>
+          </a:p>
+        </p:txBody>
+      </p:sp>
+      <p:sp>
+        <p:nvSpPr>
+          <p:cNvPr id="177" name="Google Shape;177;p24"/>
+          <p:cNvSpPr txBox="1"/>
+          <p:nvPr>
+            <p:ph idx="12" type="sldNum"/>
+          </p:nvPr>
+        </p:nvSpPr>
+        <p:spPr>
+          <a:xfrm>
+            <a:off x="6553200" y="6356350"/>
+            <a:ext cx="2133600" cy="365100"/>
+          </a:xfrm>
+          <a:prstGeom prst="rect">
+            <a:avLst/>
+          </a:prstGeom>
+        </p:spPr>
+        <p:txBody>
+          <a:bodyPr anchorCtr="0" anchor="ctr" bIns="45700" lIns="91425" spcFirstLastPara="1" rIns="91425" wrap="square" tIns="45700">
+            <a:noAutofit/>
+          </a:bodyPr>
+          <a:lstStyle/>
+          <a:p>
+            <a:pPr indent="0" lvl="0" marL="0" rtl="0" algn="r">
+              <a:spcBef>
+                <a:spcPts val="0"/>
+              </a:spcBef>
+              <a:spcAft>
+                <a:spcPts val="0"/>
+              </a:spcAft>
+              <a:buClr>
+                <a:srgbClr val="000000"/>
+              </a:buClr>
+              <a:buSzPts val="1200"/>
+              <a:buFont typeface="Arial"/>
+              <a:buNone/>
+            </a:pPr>
+            <a:fld id="{00000000-1234-1234-1234-123412341234}" type="slidenum">
+              <a:rPr lang="en-US"/>
+              <a:t>‹#›</a:t>
+            </a:fld>
+            <a:endParaRPr/>
+          </a:p>
+        </p:txBody>
+      </p:sp>
+    </p:spTree>
+  </p:cSld>
+  <p:clrMapOvr>
+    <a:masterClrMapping/>
+  </p:clrMapOvr>
+  <p:timing>
+    <p:tnLst>
+      <p:par>
+        <p:cTn dur="indefinite" nodeType="tmRoot" restart="never">
+          <p:childTnLst>
+            <p:seq concurrent="1" nextAc="seek">
+              <p:cTn dur="indefinite" id="2" nodeType="mainSeq">
+                <p:childTnLst>
+                  <p:par>
+                    <p:cTn fill="hold">
+                      <p:stCondLst>
+                        <p:cond delay="indefinite"/>
+                      </p:stCondLst>
+                      <p:childTnLst>
+                        <p:par>
+                          <p:cTn fill="hold">
+                            <p:stCondLst>
+                              <p:cond delay="0"/>
+                            </p:stCondLst>
+                            <p:childTnLst>
+                              <p:par>
+                                <p:cTn fill="hold" nodeType="clickEffect" presetClass="entr" presetID="10" presetSubtype="0">
+                                  <p:stCondLst>
+                                    <p:cond delay="0"/>
+                                  </p:stCondLst>
+                                  <p:childTnLst>
+                                    <p:set>
+                                      <p:cBhvr>
+                                        <p:cTn dur="1" fill="hold">
+                                          <p:stCondLst>
+                                            <p:cond delay="0"/>
+                                          </p:stCondLst>
+                                        </p:cTn>
+                                        <p:tgtEl>
+                                          <p:spTgt spid="174"/>
+                                        </p:tgtEl>
+                                        <p:attrNameLst>
+                                          <p:attrName>style.visibility</p:attrName>
+                                        </p:attrNameLst>
+                                      </p:cBhvr>
+                                      <p:to>
+                                        <p:strVal val="visible"/>
+                                      </p:to>
+                                    </p:set>
+                                    <p:animEffect filter="fade" transition="in">
+                                      <p:cBhvr>
+                                        <p:cTn dur="1000"/>
+                                        <p:tgtEl>
+                                          <p:spTgt spid="174"/>
+                                        </p:tgtEl>
+                                      </p:cBhvr>
+                                    </p:animEffect>
+                                  </p:childTnLst>
+                                </p:cTn>
+                              </p:par>
+                            </p:childTnLst>
+                          </p:cTn>
+                        </p:par>
+                      </p:childTnLst>
+                    </p:cTn>
+                  </p:par>
+                  <p:par>
+                    <p:cTn fill="hold">
+                      <p:stCondLst>
+                        <p:cond delay="indefinite"/>
+                      </p:stCondLst>
+                      <p:childTnLst>
+                        <p:par>
+                          <p:cTn fill="hold">
+                            <p:stCondLst>
+                              <p:cond delay="0"/>
+                            </p:stCondLst>
+                            <p:childTnLst>
+                              <p:par>
+                                <p:cTn fill="hold" nodeType="clickEffect" presetClass="entr" presetID="10" presetSubtype="0">
+                                  <p:stCondLst>
+                                    <p:cond delay="0"/>
+                                  </p:stCondLst>
+                                  <p:childTnLst>
+                                    <p:set>
+                                      <p:cBhvr>
+                                        <p:cTn dur="1" fill="hold">
+                                          <p:stCondLst>
+                                            <p:cond delay="0"/>
+                                          </p:stCondLst>
+                                        </p:cTn>
+                                        <p:tgtEl>
+                                          <p:spTgt spid="175"/>
+                                        </p:tgtEl>
+                                        <p:attrNameLst>
+                                          <p:attrName>style.visibility</p:attrName>
+                                        </p:attrNameLst>
+                                      </p:cBhvr>
+                                      <p:to>
+                                        <p:strVal val="visible"/>
+                                      </p:to>
+                                    </p:set>
+                                    <p:animEffect filter="fade" transition="in">
+                                      <p:cBhvr>
+                                        <p:cTn dur="1000"/>
+                                        <p:tgtEl>
+                                          <p:spTgt spid="175"/>
+                                        </p:tgtEl>
+                                      </p:cBhvr>
+                                    </p:animEffect>
+                                  </p:childTnLst>
+                                </p:cTn>
+                              </p:par>
+                            </p:childTnLst>
+                          </p:cTn>
+                        </p:par>
+                      </p:childTnLst>
+                    </p:cTn>
+                  </p:par>
+                  <p:par>
+                    <p:cTn fill="hold">
+                      <p:stCondLst>
+                        <p:cond delay="indefinite"/>
+                      </p:stCondLst>
+                      <p:childTnLst>
+                        <p:par>
+                          <p:cTn fill="hold">
+                            <p:stCondLst>
+                              <p:cond delay="0"/>
+                            </p:stCondLst>
+                            <p:childTnLst>
+                              <p:par>
+                                <p:cTn fill="hold" nodeType="clickEffect" presetClass="entr" presetID="10" presetSubtype="0">
+                                  <p:stCondLst>
+                                    <p:cond delay="0"/>
+                                  </p:stCondLst>
+                                  <p:childTnLst>
+                                    <p:set>
+                                      <p:cBhvr>
+                                        <p:cTn dur="1" fill="hold">
+                                          <p:stCondLst>
+                                            <p:cond delay="0"/>
+                                          </p:stCondLst>
+                                        </p:cTn>
+                                        <p:tgtEl>
+                                          <p:spTgt spid="176"/>
+                                        </p:tgtEl>
+                                        <p:attrNameLst>
+                                          <p:attrName>style.visibility</p:attrName>
+                                        </p:attrNameLst>
+                                      </p:cBhvr>
+                                      <p:to>
+                                        <p:strVal val="visible"/>
+                                      </p:to>
+                                    </p:set>
+                                    <p:animEffect filter="fade" transition="in">
+                                      <p:cBhvr>
+                                        <p:cTn dur="1000"/>
+                                        <p:tgtEl>
+                                          <p:spTgt spid="176"/>
+                                        </p:tgtEl>
+                                      </p:cBhvr>
+                                    </p:animEffect>
+                                  </p:childTnLst>
+                                </p:cTn>
+                              </p:par>
+                            </p:childTnLst>
+                          </p:cTn>
+                        </p:par>
+                      </p:childTnLst>
+                    </p:cTn>
+                  </p:par>
                 </p:childTnLst>
               </p:cTn>
               <p:prevCondLst>
@@ -18473,7 +19080,7 @@
   <p:cSld>
     <p:spTree>
       <p:nvGrpSpPr>
-        <p:cNvPr id="170" name="Shape 170"/>
+        <p:cNvPr id="181" name="Shape 181"/>
         <p:cNvGrpSpPr/>
         <p:nvPr/>
       </p:nvGrpSpPr>
@@ -18487,7 +19094,7 @@
       </p:grpSpPr>
       <p:sp>
         <p:nvSpPr>
-          <p:cNvPr id="171" name="Google Shape;171;p25"/>
+          <p:cNvPr id="182" name="Google Shape;182;p25"/>
           <p:cNvSpPr txBox="1"/>
           <p:nvPr>
             <p:ph type="title"/>
@@ -18543,7 +19150,7 @@
       </p:sp>
       <p:sp>
         <p:nvSpPr>
-          <p:cNvPr id="172" name="Google Shape;172;p25"/>
+          <p:cNvPr id="183" name="Google Shape;183;p25"/>
           <p:cNvSpPr txBox="1"/>
           <p:nvPr>
             <p:ph idx="1" type="body"/>
@@ -18592,6 +19199,51 @@
           </a:p>
         </p:txBody>
       </p:sp>
+      <p:sp>
+        <p:nvSpPr>
+          <p:cNvPr id="184" name="Google Shape;184;p25"/>
+          <p:cNvSpPr txBox="1"/>
+          <p:nvPr>
+            <p:ph idx="12" type="sldNum"/>
+          </p:nvPr>
+        </p:nvSpPr>
+        <p:spPr>
+          <a:xfrm>
+            <a:off x="6553200" y="6356350"/>
+            <a:ext cx="2133600" cy="365100"/>
+          </a:xfrm>
+          <a:prstGeom prst="rect">
+            <a:avLst/>
+          </a:prstGeom>
+        </p:spPr>
+        <p:txBody>
+          <a:bodyPr anchorCtr="0" anchor="ctr" bIns="45700" lIns="91425" spcFirstLastPara="1" rIns="91425" wrap="square" tIns="45700">
+            <a:noAutofit/>
+          </a:bodyPr>
+          <a:lstStyle/>
+          <a:p>
+            <a:pPr indent="0" lvl="0" marL="0" rtl="0" algn="r">
+              <a:spcBef>
+                <a:spcPts val="0"/>
+              </a:spcBef>
+              <a:spcAft>
+                <a:spcPts val="0"/>
+              </a:spcAft>
+              <a:buClr>
+                <a:srgbClr val="000000"/>
+              </a:buClr>
+              <a:buSzPts val="1200"/>
+              <a:buFont typeface="Arial"/>
+              <a:buNone/>
+            </a:pPr>
+            <a:fld id="{00000000-1234-1234-1234-123412341234}" type="slidenum">
+              <a:rPr lang="en-US"/>
+              <a:t>‹#›</a:t>
+            </a:fld>
+            <a:endParaRPr/>
+          </a:p>
+        </p:txBody>
+      </p:sp>
     </p:spTree>
   </p:cSld>
   <p:clrMapOvr>
@@ -18605,7 +19257,7 @@
   <p:cSld>
     <p:spTree>
       <p:nvGrpSpPr>
-        <p:cNvPr id="176" name="Shape 176"/>
+        <p:cNvPr id="188" name="Shape 188"/>
         <p:cNvGrpSpPr/>
         <p:nvPr/>
       </p:nvGrpSpPr>
@@ -18619,7 +19271,7 @@
       </p:grpSpPr>
       <p:sp>
         <p:nvSpPr>
-          <p:cNvPr id="177" name="Google Shape;177;p26"/>
+          <p:cNvPr id="189" name="Google Shape;189;p26"/>
           <p:cNvSpPr txBox="1"/>
           <p:nvPr>
             <p:ph type="title"/>
@@ -18672,7 +19324,7 @@
       </p:sp>
       <p:sp>
         <p:nvSpPr>
-          <p:cNvPr id="178" name="Google Shape;178;p26"/>
+          <p:cNvPr id="190" name="Google Shape;190;p26"/>
           <p:cNvSpPr txBox="1"/>
           <p:nvPr/>
         </p:nvSpPr>
@@ -18705,7 +19357,7 @@
               <a:buNone/>
             </a:pPr>
             <a:r>
-              <a:rPr lang="en-US" sz="2400">
+              <a:rPr lang="en-US" sz="2500">
                 <a:solidFill>
                   <a:schemeClr val="dk1"/>
                 </a:solidFill>
@@ -18714,9 +19366,57 @@
                 <a:cs typeface="Calibri"/>
                 <a:sym typeface="Calibri"/>
               </a:rPr>
-              <a:t> Systemic diseases often show early visible signs on body surfaces such as the oral cavity, nails, eyes, tongue, and palms, but no existing tool screens for them together. Current approaches work on a single surface at a time, require dedicated capture hardware, or return a result with no confidence score and no explanation. As a result, patients without easy access to a clinician have no reliable way to self-screen using only a device they already own.</a:t>
+              <a:t> Systemic diseases often show </a:t>
             </a:r>
-            <a:endParaRPr sz="3200">
+            <a:r>
+              <a:rPr b="1" lang="en-US" sz="2500">
+                <a:solidFill>
+                  <a:schemeClr val="dk1"/>
+                </a:solidFill>
+                <a:latin typeface="Calibri"/>
+                <a:ea typeface="Calibri"/>
+                <a:cs typeface="Calibri"/>
+                <a:sym typeface="Calibri"/>
+              </a:rPr>
+              <a:t>early visible signs</a:t>
+            </a:r>
+            <a:r>
+              <a:rPr lang="en-US" sz="2500">
+                <a:solidFill>
+                  <a:schemeClr val="dk1"/>
+                </a:solidFill>
+                <a:latin typeface="Calibri"/>
+                <a:ea typeface="Calibri"/>
+                <a:cs typeface="Calibri"/>
+                <a:sym typeface="Calibri"/>
+              </a:rPr>
+              <a:t> on body surfaces like oral cavity, nails, eyes, tongue, and palms, but no existing tool screens for them together. Current approaches work on a single surface at a time, require dedicated capture hardware, or return a result with no confidence score and no explanation. A clinician has little reason to trust or act on this result. In a setting with 781 people per physician, clinicians have no </a:t>
+            </a:r>
+            <a:r>
+              <a:rPr b="1" lang="en-US" sz="2500">
+                <a:solidFill>
+                  <a:schemeClr val="dk1"/>
+                </a:solidFill>
+                <a:latin typeface="Calibri"/>
+                <a:ea typeface="Calibri"/>
+                <a:cs typeface="Calibri"/>
+                <a:sym typeface="Calibri"/>
+              </a:rPr>
+              <a:t>fast, evidence-backed</a:t>
+            </a:r>
+            <a:r>
+              <a:rPr lang="en-US" sz="2500">
+                <a:solidFill>
+                  <a:schemeClr val="dk1"/>
+                </a:solidFill>
+                <a:latin typeface="Calibri"/>
+                <a:ea typeface="Calibri"/>
+                <a:cs typeface="Calibri"/>
+                <a:sym typeface="Calibri"/>
+              </a:rPr>
+              <a:t> way to decide which patients should be referred or sent for laboratory confirmation first.</a:t>
+            </a:r>
+            <a:endParaRPr sz="2500">
               <a:solidFill>
                 <a:schemeClr val="dk1"/>
               </a:solidFill>
@@ -18725,6 +19425,51 @@
               <a:cs typeface="Calibri"/>
               <a:sym typeface="Calibri"/>
             </a:endParaRPr>
+          </a:p>
+        </p:txBody>
+      </p:sp>
+      <p:sp>
+        <p:nvSpPr>
+          <p:cNvPr id="191" name="Google Shape;191;p26"/>
+          <p:cNvSpPr txBox="1"/>
+          <p:nvPr>
+            <p:ph idx="12" type="sldNum"/>
+          </p:nvPr>
+        </p:nvSpPr>
+        <p:spPr>
+          <a:xfrm>
+            <a:off x="6553200" y="6356350"/>
+            <a:ext cx="2133600" cy="365100"/>
+          </a:xfrm>
+          <a:prstGeom prst="rect">
+            <a:avLst/>
+          </a:prstGeom>
+        </p:spPr>
+        <p:txBody>
+          <a:bodyPr anchorCtr="0" anchor="ctr" bIns="45700" lIns="91425" spcFirstLastPara="1" rIns="91425" wrap="square" tIns="45700">
+            <a:noAutofit/>
+          </a:bodyPr>
+          <a:lstStyle/>
+          <a:p>
+            <a:pPr indent="0" lvl="0" marL="0" rtl="0" algn="r">
+              <a:spcBef>
+                <a:spcPts val="0"/>
+              </a:spcBef>
+              <a:spcAft>
+                <a:spcPts val="0"/>
+              </a:spcAft>
+              <a:buClr>
+                <a:srgbClr val="000000"/>
+              </a:buClr>
+              <a:buSzPts val="1200"/>
+              <a:buFont typeface="Arial"/>
+              <a:buNone/>
+            </a:pPr>
+            <a:fld id="{00000000-1234-1234-1234-123412341234}" type="slidenum">
+              <a:rPr lang="en-US"/>
+              <a:t>‹#›</a:t>
+            </a:fld>
+            <a:endParaRPr/>
           </a:p>
         </p:txBody>
       </p:sp>
@@ -18741,7 +19486,7 @@
   <p:cSld>
     <p:spTree>
       <p:nvGrpSpPr>
-        <p:cNvPr id="182" name="Shape 182"/>
+        <p:cNvPr id="195" name="Shape 195"/>
         <p:cNvGrpSpPr/>
         <p:nvPr/>
       </p:nvGrpSpPr>
@@ -18755,7 +19500,7 @@
       </p:grpSpPr>
       <p:sp>
         <p:nvSpPr>
-          <p:cNvPr id="183" name="Google Shape;183;p27"/>
+          <p:cNvPr id="196" name="Google Shape;196;p27"/>
           <p:cNvSpPr txBox="1"/>
           <p:nvPr>
             <p:ph type="title"/>
@@ -18764,7 +19509,7 @@
         <p:spPr>
           <a:xfrm>
             <a:off x="722313" y="4406900"/>
-            <a:ext cx="7772400" cy="1362075"/>
+            <a:ext cx="7772400" cy="1362000"/>
           </a:xfrm>
           <a:prstGeom prst="rect">
             <a:avLst/>
@@ -18799,7 +19544,23 @@
                   <a:srgbClr val="0B3D59"/>
                 </a:solidFill>
               </a:rPr>
-              <a:t>PROPOSED SOLUTION AND METHODOLOGY</a:t>
+              <a:t>PROPOSED SOLUTION AND</a:t>
+            </a:r>
+            <a:r>
+              <a:rPr lang="en-US">
+                <a:solidFill>
+                  <a:srgbClr val="0B3D59"/>
+                </a:solidFill>
+              </a:rPr>
+              <a:t> </a:t>
+            </a:r>
+            <a:r>
+              <a:rPr lang="en-US">
+                <a:solidFill>
+                  <a:srgbClr val="0B3D59"/>
+                </a:solidFill>
+              </a:rPr>
+              <a:t>METHODOLOGY</a:t>
             </a:r>
             <a:endParaRPr>
               <a:solidFill>
@@ -18811,7 +19572,7 @@
       </p:sp>
       <p:sp>
         <p:nvSpPr>
-          <p:cNvPr id="184" name="Google Shape;184;p27"/>
+          <p:cNvPr id="197" name="Google Shape;197;p27"/>
           <p:cNvSpPr txBox="1"/>
           <p:nvPr>
             <p:ph idx="1" type="body"/>
@@ -18860,6 +19621,51 @@
           </a:p>
         </p:txBody>
       </p:sp>
+      <p:sp>
+        <p:nvSpPr>
+          <p:cNvPr id="198" name="Google Shape;198;p27"/>
+          <p:cNvSpPr txBox="1"/>
+          <p:nvPr>
+            <p:ph idx="12" type="sldNum"/>
+          </p:nvPr>
+        </p:nvSpPr>
+        <p:spPr>
+          <a:xfrm>
+            <a:off x="6553200" y="6356350"/>
+            <a:ext cx="2133600" cy="365100"/>
+          </a:xfrm>
+          <a:prstGeom prst="rect">
+            <a:avLst/>
+          </a:prstGeom>
+        </p:spPr>
+        <p:txBody>
+          <a:bodyPr anchorCtr="0" anchor="ctr" bIns="45700" lIns="91425" spcFirstLastPara="1" rIns="91425" wrap="square" tIns="45700">
+            <a:noAutofit/>
+          </a:bodyPr>
+          <a:lstStyle/>
+          <a:p>
+            <a:pPr indent="0" lvl="0" marL="0" rtl="0" algn="r">
+              <a:spcBef>
+                <a:spcPts val="0"/>
+              </a:spcBef>
+              <a:spcAft>
+                <a:spcPts val="0"/>
+              </a:spcAft>
+              <a:buClr>
+                <a:srgbClr val="000000"/>
+              </a:buClr>
+              <a:buSzPts val="1200"/>
+              <a:buFont typeface="Arial"/>
+              <a:buNone/>
+            </a:pPr>
+            <a:fld id="{00000000-1234-1234-1234-123412341234}" type="slidenum">
+              <a:rPr lang="en-US"/>
+              <a:t>‹#›</a:t>
+            </a:fld>
+            <a:endParaRPr/>
+          </a:p>
+        </p:txBody>
+      </p:sp>
     </p:spTree>
   </p:cSld>
   <p:clrMapOvr>
@@ -18873,7 +19679,7 @@
   <p:cSld>
     <p:spTree>
       <p:nvGrpSpPr>
-        <p:cNvPr id="188" name="Shape 188"/>
+        <p:cNvPr id="202" name="Shape 202"/>
         <p:cNvGrpSpPr/>
         <p:nvPr/>
       </p:nvGrpSpPr>
@@ -18887,7 +19693,7 @@
       </p:grpSpPr>
       <p:sp>
         <p:nvSpPr>
-          <p:cNvPr id="189" name="Google Shape;189;p28"/>
+          <p:cNvPr id="203" name="Google Shape;203;p28"/>
           <p:cNvSpPr txBox="1"/>
           <p:nvPr>
             <p:ph type="title"/>
@@ -18944,7 +19750,7 @@
       </p:sp>
       <p:sp>
         <p:nvSpPr>
-          <p:cNvPr id="190" name="Google Shape;190;p28"/>
+          <p:cNvPr id="204" name="Google Shape;204;p28"/>
           <p:cNvSpPr txBox="1"/>
           <p:nvPr>
             <p:ph idx="1" type="body"/>
@@ -18952,7 +19758,7 @@
         </p:nvSpPr>
         <p:spPr>
           <a:xfrm>
-            <a:off x="457200" y="1600200"/>
+            <a:off x="457200" y="1461304"/>
             <a:ext cx="8229600" cy="768300"/>
           </a:xfrm>
           <a:prstGeom prst="rect">
@@ -18984,7 +19790,7 @@
             </a:pPr>
             <a:r>
               <a:rPr lang="en-US" sz="2000"/>
-              <a:t>GLANCE captures </a:t>
+              <a:t>GLANCE is a clinical decision support system. A clinician captures </a:t>
             </a:r>
             <a:r>
               <a:rPr b="1" lang="en-US" sz="2000"/>
@@ -19000,13 +19806,13 @@
       </p:sp>
       <p:sp>
         <p:nvSpPr>
-          <p:cNvPr id="191" name="Google Shape;191;p28"/>
+          <p:cNvPr id="205" name="Google Shape;205;p28"/>
           <p:cNvSpPr txBox="1"/>
           <p:nvPr/>
         </p:nvSpPr>
         <p:spPr>
           <a:xfrm>
-            <a:off x="449525" y="2351150"/>
+            <a:off x="419789" y="2569093"/>
             <a:ext cx="8229600" cy="1143000"/>
           </a:xfrm>
           <a:prstGeom prst="rect">
@@ -19136,13 +19942,13 @@
       </p:sp>
       <p:sp>
         <p:nvSpPr>
-          <p:cNvPr id="192" name="Google Shape;192;p28"/>
+          <p:cNvPr id="206" name="Google Shape;206;p28"/>
           <p:cNvSpPr txBox="1"/>
           <p:nvPr/>
         </p:nvSpPr>
         <p:spPr>
           <a:xfrm>
-            <a:off x="435100" y="3460550"/>
+            <a:off x="405363" y="3723098"/>
             <a:ext cx="8229600" cy="1143000"/>
           </a:xfrm>
           <a:prstGeom prst="rect">
@@ -19185,7 +19991,7 @@
                 <a:cs typeface="Calibri"/>
                 <a:sym typeface="Calibri"/>
               </a:rPr>
-              <a:t>The system adds three things current approaches lack: a </a:t>
+              <a:t>The system adds three things: a </a:t>
             </a:r>
             <a:r>
               <a:rPr b="1" lang="en-US" sz="2000">
@@ -19273,13 +20079,13 @@
       </p:sp>
       <p:sp>
         <p:nvSpPr>
-          <p:cNvPr id="193" name="Google Shape;193;p28"/>
+          <p:cNvPr id="207" name="Google Shape;207;p28"/>
           <p:cNvSpPr txBox="1"/>
           <p:nvPr/>
         </p:nvSpPr>
         <p:spPr>
           <a:xfrm>
-            <a:off x="435100" y="4944525"/>
+            <a:off x="435100" y="4939443"/>
             <a:ext cx="8229600" cy="768300"/>
           </a:xfrm>
           <a:prstGeom prst="rect">
@@ -19334,7 +20140,7 @@
                 <a:cs typeface="Calibri"/>
                 <a:sym typeface="Calibri"/>
               </a:rPr>
-              <a:t>risk score</a:t>
+              <a:t>referral-support report</a:t>
             </a:r>
             <a:r>
               <a:rPr lang="en-US" sz="2000">
@@ -19346,55 +20152,7 @@
                 <a:cs typeface="Calibri"/>
                 <a:sym typeface="Calibri"/>
               </a:rPr>
-              <a:t> with its </a:t>
-            </a:r>
-            <a:r>
-              <a:rPr b="1" lang="en-US" sz="2000">
-                <a:solidFill>
-                  <a:schemeClr val="dk1"/>
-                </a:solidFill>
-                <a:latin typeface="Calibri"/>
-                <a:ea typeface="Calibri"/>
-                <a:cs typeface="Calibri"/>
-                <a:sym typeface="Calibri"/>
-              </a:rPr>
-              <a:t>confidence</a:t>
-            </a:r>
-            <a:r>
-              <a:rPr lang="en-US" sz="2000">
-                <a:solidFill>
-                  <a:schemeClr val="dk1"/>
-                </a:solidFill>
-                <a:latin typeface="Calibri"/>
-                <a:ea typeface="Calibri"/>
-                <a:cs typeface="Calibri"/>
-                <a:sym typeface="Calibri"/>
-              </a:rPr>
-              <a:t> and </a:t>
-            </a:r>
-            <a:r>
-              <a:rPr b="1" lang="en-US" sz="2000">
-                <a:solidFill>
-                  <a:schemeClr val="dk1"/>
-                </a:solidFill>
-                <a:latin typeface="Calibri"/>
-                <a:ea typeface="Calibri"/>
-                <a:cs typeface="Calibri"/>
-                <a:sym typeface="Calibri"/>
-              </a:rPr>
-              <a:t>explanation</a:t>
-            </a:r>
-            <a:r>
-              <a:rPr lang="en-US" sz="2000">
-                <a:solidFill>
-                  <a:schemeClr val="dk1"/>
-                </a:solidFill>
-                <a:latin typeface="Calibri"/>
-                <a:ea typeface="Calibri"/>
-                <a:cs typeface="Calibri"/>
-                <a:sym typeface="Calibri"/>
-              </a:rPr>
-              <a:t>.</a:t>
+              <a:t>: risk indication, confidence and explanation; which is reviewed and acted upon by the clinician.</a:t>
             </a:r>
             <a:endParaRPr sz="3200">
               <a:solidFill>
@@ -19405,6 +20163,51 @@
               <a:cs typeface="Calibri"/>
               <a:sym typeface="Calibri"/>
             </a:endParaRPr>
+          </a:p>
+        </p:txBody>
+      </p:sp>
+      <p:sp>
+        <p:nvSpPr>
+          <p:cNvPr id="208" name="Google Shape;208;p28"/>
+          <p:cNvSpPr txBox="1"/>
+          <p:nvPr>
+            <p:ph idx="12" type="sldNum"/>
+          </p:nvPr>
+        </p:nvSpPr>
+        <p:spPr>
+          <a:xfrm>
+            <a:off x="6553200" y="6356350"/>
+            <a:ext cx="2133600" cy="365100"/>
+          </a:xfrm>
+          <a:prstGeom prst="rect">
+            <a:avLst/>
+          </a:prstGeom>
+        </p:spPr>
+        <p:txBody>
+          <a:bodyPr anchorCtr="0" anchor="ctr" bIns="45700" lIns="91425" spcFirstLastPara="1" rIns="91425" wrap="square" tIns="45700">
+            <a:noAutofit/>
+          </a:bodyPr>
+          <a:lstStyle/>
+          <a:p>
+            <a:pPr indent="0" lvl="0" marL="0" rtl="0" algn="r">
+              <a:spcBef>
+                <a:spcPts val="0"/>
+              </a:spcBef>
+              <a:spcAft>
+                <a:spcPts val="0"/>
+              </a:spcAft>
+              <a:buClr>
+                <a:srgbClr val="000000"/>
+              </a:buClr>
+              <a:buSzPts val="1200"/>
+              <a:buFont typeface="Arial"/>
+              <a:buNone/>
+            </a:pPr>
+            <a:fld id="{00000000-1234-1234-1234-123412341234}" type="slidenum">
+              <a:rPr lang="en-US"/>
+              <a:t>‹#›</a:t>
+            </a:fld>
+            <a:endParaRPr/>
           </a:p>
         </p:txBody>
       </p:sp>
@@ -19421,7 +20224,7 @@
   <p:cSld>
     <p:spTree>
       <p:nvGrpSpPr>
-        <p:cNvPr id="197" name="Shape 197"/>
+        <p:cNvPr id="212" name="Shape 212"/>
         <p:cNvGrpSpPr/>
         <p:nvPr/>
       </p:nvGrpSpPr>
@@ -19435,7 +20238,7 @@
       </p:grpSpPr>
       <p:sp>
         <p:nvSpPr>
-          <p:cNvPr id="198" name="Google Shape;198;p29"/>
+          <p:cNvPr id="213" name="Google Shape;213;p29"/>
           <p:cNvSpPr txBox="1"/>
           <p:nvPr>
             <p:ph type="title"/>
@@ -19492,7 +20295,7 @@
       </p:sp>
       <p:sp>
         <p:nvSpPr>
-          <p:cNvPr id="199" name="Google Shape;199;p29"/>
+          <p:cNvPr id="214" name="Google Shape;214;p29"/>
           <p:cNvSpPr/>
           <p:nvPr/>
         </p:nvSpPr>
@@ -19543,7 +20346,7 @@
       </p:sp>
       <p:sp>
         <p:nvSpPr>
-          <p:cNvPr id="200" name="Google Shape;200;p29"/>
+          <p:cNvPr id="215" name="Google Shape;215;p29"/>
           <p:cNvSpPr/>
           <p:nvPr/>
         </p:nvSpPr>
@@ -19606,7 +20409,7 @@
       </p:sp>
       <p:cxnSp>
         <p:nvCxnSpPr>
-          <p:cNvPr id="201" name="Google Shape;201;p29"/>
+          <p:cNvPr id="216" name="Google Shape;216;p29"/>
           <p:cNvCxnSpPr/>
           <p:nvPr/>
         </p:nvCxnSpPr>
@@ -19632,7 +20435,7 @@
       </p:cxnSp>
       <p:sp>
         <p:nvSpPr>
-          <p:cNvPr id="202" name="Google Shape;202;p29"/>
+          <p:cNvPr id="217" name="Google Shape;217;p29"/>
           <p:cNvSpPr/>
           <p:nvPr/>
         </p:nvSpPr>
@@ -19683,7 +20486,7 @@
       </p:sp>
       <p:sp>
         <p:nvSpPr>
-          <p:cNvPr id="203" name="Google Shape;203;p29"/>
+          <p:cNvPr id="218" name="Google Shape;218;p29"/>
           <p:cNvSpPr/>
           <p:nvPr/>
         </p:nvSpPr>
@@ -19746,7 +20549,7 @@
       </p:sp>
       <p:cxnSp>
         <p:nvCxnSpPr>
-          <p:cNvPr id="204" name="Google Shape;204;p29"/>
+          <p:cNvPr id="219" name="Google Shape;219;p29"/>
           <p:cNvCxnSpPr/>
           <p:nvPr/>
         </p:nvCxnSpPr>
@@ -19772,7 +20575,7 @@
       </p:cxnSp>
       <p:sp>
         <p:nvSpPr>
-          <p:cNvPr id="205" name="Google Shape;205;p29"/>
+          <p:cNvPr id="220" name="Google Shape;220;p29"/>
           <p:cNvSpPr/>
           <p:nvPr/>
         </p:nvSpPr>
@@ -19823,7 +20626,7 @@
       </p:sp>
       <p:sp>
         <p:nvSpPr>
-          <p:cNvPr id="206" name="Google Shape;206;p29"/>
+          <p:cNvPr id="221" name="Google Shape;221;p29"/>
           <p:cNvSpPr/>
           <p:nvPr/>
         </p:nvSpPr>
@@ -19886,7 +20689,7 @@
       </p:sp>
       <p:cxnSp>
         <p:nvCxnSpPr>
-          <p:cNvPr id="207" name="Google Shape;207;p29"/>
+          <p:cNvPr id="222" name="Google Shape;222;p29"/>
           <p:cNvCxnSpPr/>
           <p:nvPr/>
         </p:nvCxnSpPr>
@@ -19912,7 +20715,7 @@
       </p:cxnSp>
       <p:sp>
         <p:nvSpPr>
-          <p:cNvPr id="208" name="Google Shape;208;p29"/>
+          <p:cNvPr id="223" name="Google Shape;223;p29"/>
           <p:cNvSpPr/>
           <p:nvPr/>
         </p:nvSpPr>
@@ -19963,7 +20766,7 @@
       </p:sp>
       <p:sp>
         <p:nvSpPr>
-          <p:cNvPr id="209" name="Google Shape;209;p29"/>
+          <p:cNvPr id="224" name="Google Shape;224;p29"/>
           <p:cNvSpPr/>
           <p:nvPr/>
         </p:nvSpPr>
@@ -20026,7 +20829,7 @@
       </p:sp>
       <p:cxnSp>
         <p:nvCxnSpPr>
-          <p:cNvPr id="210" name="Google Shape;210;p29"/>
+          <p:cNvPr id="225" name="Google Shape;225;p29"/>
           <p:cNvCxnSpPr/>
           <p:nvPr/>
         </p:nvCxnSpPr>
@@ -20052,7 +20855,7 @@
       </p:cxnSp>
       <p:sp>
         <p:nvSpPr>
-          <p:cNvPr id="211" name="Google Shape;211;p29"/>
+          <p:cNvPr id="226" name="Google Shape;226;p29"/>
           <p:cNvSpPr/>
           <p:nvPr/>
         </p:nvSpPr>
@@ -20103,7 +20906,7 @@
       </p:sp>
       <p:sp>
         <p:nvSpPr>
-          <p:cNvPr id="212" name="Google Shape;212;p29"/>
+          <p:cNvPr id="227" name="Google Shape;227;p29"/>
           <p:cNvSpPr/>
           <p:nvPr/>
         </p:nvSpPr>
@@ -20166,7 +20969,7 @@
       </p:sp>
       <p:cxnSp>
         <p:nvCxnSpPr>
-          <p:cNvPr id="213" name="Google Shape;213;p29"/>
+          <p:cNvPr id="228" name="Google Shape;228;p29"/>
           <p:cNvCxnSpPr/>
           <p:nvPr/>
         </p:nvCxnSpPr>
@@ -20192,7 +20995,7 @@
       </p:cxnSp>
       <p:sp>
         <p:nvSpPr>
-          <p:cNvPr id="214" name="Google Shape;214;p29"/>
+          <p:cNvPr id="229" name="Google Shape;229;p29"/>
           <p:cNvSpPr/>
           <p:nvPr/>
         </p:nvSpPr>
@@ -20237,7 +21040,7 @@
       </p:sp>
       <p:sp>
         <p:nvSpPr>
-          <p:cNvPr id="215" name="Google Shape;215;p29"/>
+          <p:cNvPr id="230" name="Google Shape;230;p29"/>
           <p:cNvSpPr/>
           <p:nvPr/>
         </p:nvSpPr>
@@ -20300,7 +21103,7 @@
       </p:sp>
       <p:cxnSp>
         <p:nvCxnSpPr>
-          <p:cNvPr id="216" name="Google Shape;216;p29"/>
+          <p:cNvPr id="231" name="Google Shape;231;p29"/>
           <p:cNvCxnSpPr/>
           <p:nvPr/>
         </p:nvCxnSpPr>
@@ -20326,7 +21129,7 @@
       </p:cxnSp>
       <p:sp>
         <p:nvSpPr>
-          <p:cNvPr id="217" name="Google Shape;217;p29"/>
+          <p:cNvPr id="232" name="Google Shape;232;p29"/>
           <p:cNvSpPr/>
           <p:nvPr/>
         </p:nvSpPr>
@@ -20371,7 +21174,7 @@
       </p:sp>
       <p:sp>
         <p:nvSpPr>
-          <p:cNvPr id="218" name="Google Shape;218;p29"/>
+          <p:cNvPr id="233" name="Google Shape;233;p29"/>
           <p:cNvSpPr/>
           <p:nvPr/>
         </p:nvSpPr>
@@ -20434,7 +21237,7 @@
       </p:sp>
       <p:cxnSp>
         <p:nvCxnSpPr>
-          <p:cNvPr id="219" name="Google Shape;219;p29"/>
+          <p:cNvPr id="234" name="Google Shape;234;p29"/>
           <p:cNvCxnSpPr/>
           <p:nvPr/>
         </p:nvCxnSpPr>
@@ -20460,7 +21263,7 @@
       </p:cxnSp>
       <p:sp>
         <p:nvSpPr>
-          <p:cNvPr id="220" name="Google Shape;220;p29"/>
+          <p:cNvPr id="235" name="Google Shape;235;p29"/>
           <p:cNvSpPr/>
           <p:nvPr/>
         </p:nvSpPr>
@@ -20505,7 +21308,7 @@
       </p:sp>
       <p:sp>
         <p:nvSpPr>
-          <p:cNvPr id="221" name="Google Shape;221;p29"/>
+          <p:cNvPr id="236" name="Google Shape;236;p29"/>
           <p:cNvSpPr/>
           <p:nvPr/>
         </p:nvSpPr>
@@ -20568,7 +21371,7 @@
       </p:sp>
       <p:cxnSp>
         <p:nvCxnSpPr>
-          <p:cNvPr id="222" name="Google Shape;222;p29"/>
+          <p:cNvPr id="237" name="Google Shape;237;p29"/>
           <p:cNvCxnSpPr/>
           <p:nvPr/>
         </p:nvCxnSpPr>
@@ -20594,7 +21397,7 @@
       </p:cxnSp>
       <p:sp>
         <p:nvSpPr>
-          <p:cNvPr id="223" name="Google Shape;223;p29"/>
+          <p:cNvPr id="238" name="Google Shape;238;p29"/>
           <p:cNvSpPr/>
           <p:nvPr/>
         </p:nvSpPr>
@@ -20639,7 +21442,7 @@
       </p:sp>
       <p:sp>
         <p:nvSpPr>
-          <p:cNvPr id="224" name="Google Shape;224;p29"/>
+          <p:cNvPr id="239" name="Google Shape;239;p29"/>
           <p:cNvSpPr/>
           <p:nvPr/>
         </p:nvSpPr>
@@ -20702,7 +21505,7 @@
       </p:sp>
       <p:cxnSp>
         <p:nvCxnSpPr>
-          <p:cNvPr id="225" name="Google Shape;225;p29"/>
+          <p:cNvPr id="240" name="Google Shape;240;p29"/>
           <p:cNvCxnSpPr/>
           <p:nvPr/>
         </p:nvCxnSpPr>
@@ -20728,7 +21531,7 @@
       </p:cxnSp>
       <p:sp>
         <p:nvSpPr>
-          <p:cNvPr id="226" name="Google Shape;226;p29"/>
+          <p:cNvPr id="241" name="Google Shape;241;p29"/>
           <p:cNvSpPr/>
           <p:nvPr/>
         </p:nvSpPr>
@@ -20773,7 +21576,7 @@
       </p:sp>
       <p:sp>
         <p:nvSpPr>
-          <p:cNvPr id="227" name="Google Shape;227;p29"/>
+          <p:cNvPr id="242" name="Google Shape;242;p29"/>
           <p:cNvSpPr/>
           <p:nvPr/>
         </p:nvSpPr>
@@ -20836,7 +21639,7 @@
       </p:sp>
       <p:cxnSp>
         <p:nvCxnSpPr>
-          <p:cNvPr id="228" name="Google Shape;228;p29"/>
+          <p:cNvPr id="243" name="Google Shape;243;p29"/>
           <p:cNvCxnSpPr/>
           <p:nvPr/>
         </p:nvCxnSpPr>
@@ -20862,7 +21665,7 @@
       </p:cxnSp>
       <p:cxnSp>
         <p:nvCxnSpPr>
-          <p:cNvPr id="229" name="Google Shape;229;p29"/>
+          <p:cNvPr id="244" name="Google Shape;244;p29"/>
           <p:cNvCxnSpPr/>
           <p:nvPr/>
         </p:nvCxnSpPr>
@@ -20888,7 +21691,7 @@
       </p:cxnSp>
       <p:cxnSp>
         <p:nvCxnSpPr>
-          <p:cNvPr id="230" name="Google Shape;230;p29"/>
+          <p:cNvPr id="245" name="Google Shape;245;p29"/>
           <p:cNvCxnSpPr/>
           <p:nvPr/>
         </p:nvCxnSpPr>
@@ -20914,7 +21717,7 @@
       </p:cxnSp>
       <p:cxnSp>
         <p:nvCxnSpPr>
-          <p:cNvPr id="231" name="Google Shape;231;p29"/>
+          <p:cNvPr id="246" name="Google Shape;246;p29"/>
           <p:cNvCxnSpPr/>
           <p:nvPr/>
         </p:nvCxnSpPr>
@@ -20940,7 +21743,7 @@
       </p:cxnSp>
       <p:cxnSp>
         <p:nvCxnSpPr>
-          <p:cNvPr id="232" name="Google Shape;232;p29"/>
+          <p:cNvPr id="247" name="Google Shape;247;p29"/>
           <p:cNvCxnSpPr/>
           <p:nvPr/>
         </p:nvCxnSpPr>
@@ -20966,7 +21769,7 @@
       </p:cxnSp>
       <p:cxnSp>
         <p:nvCxnSpPr>
-          <p:cNvPr id="233" name="Google Shape;233;p29"/>
+          <p:cNvPr id="248" name="Google Shape;248;p29"/>
           <p:cNvCxnSpPr/>
           <p:nvPr/>
         </p:nvCxnSpPr>
@@ -20992,7 +21795,7 @@
       </p:cxnSp>
       <p:sp>
         <p:nvSpPr>
-          <p:cNvPr id="234" name="Google Shape;234;p29"/>
+          <p:cNvPr id="249" name="Google Shape;249;p29"/>
           <p:cNvSpPr/>
           <p:nvPr/>
         </p:nvSpPr>
@@ -21044,7 +21847,7 @@
       </p:sp>
       <p:sp>
         <p:nvSpPr>
-          <p:cNvPr id="235" name="Google Shape;235;p29"/>
+          <p:cNvPr id="250" name="Google Shape;250;p29"/>
           <p:cNvSpPr/>
           <p:nvPr/>
         </p:nvSpPr>
@@ -21230,7 +22033,7 @@
       </p:sp>
       <p:cxnSp>
         <p:nvCxnSpPr>
-          <p:cNvPr id="236" name="Google Shape;236;p29"/>
+          <p:cNvPr id="251" name="Google Shape;251;p29"/>
           <p:cNvCxnSpPr/>
           <p:nvPr/>
         </p:nvCxnSpPr>
@@ -21256,7 +22059,7 @@
       </p:cxnSp>
       <p:sp>
         <p:nvSpPr>
-          <p:cNvPr id="237" name="Google Shape;237;p29"/>
+          <p:cNvPr id="252" name="Google Shape;252;p29"/>
           <p:cNvSpPr/>
           <p:nvPr/>
         </p:nvSpPr>
@@ -21307,7 +22110,7 @@
       </p:sp>
       <p:sp>
         <p:nvSpPr>
-          <p:cNvPr id="238" name="Google Shape;238;p29"/>
+          <p:cNvPr id="253" name="Google Shape;253;p29"/>
           <p:cNvSpPr/>
           <p:nvPr/>
         </p:nvSpPr>
@@ -21373,7 +22176,7 @@
       </p:sp>
       <p:sp>
         <p:nvSpPr>
-          <p:cNvPr id="239" name="Google Shape;239;p29"/>
+          <p:cNvPr id="254" name="Google Shape;254;p29"/>
           <p:cNvSpPr/>
           <p:nvPr/>
         </p:nvSpPr>
@@ -21424,7 +22227,7 @@
       </p:sp>
       <p:sp>
         <p:nvSpPr>
-          <p:cNvPr id="240" name="Google Shape;240;p29"/>
+          <p:cNvPr id="255" name="Google Shape;255;p29"/>
           <p:cNvSpPr/>
           <p:nvPr/>
         </p:nvSpPr>
@@ -21530,7 +22333,7 @@
       </p:sp>
       <p:sp>
         <p:nvSpPr>
-          <p:cNvPr id="241" name="Google Shape;241;p29"/>
+          <p:cNvPr id="256" name="Google Shape;256;p29"/>
           <p:cNvSpPr/>
           <p:nvPr/>
         </p:nvSpPr>
@@ -21581,7 +22384,7 @@
       </p:sp>
       <p:sp>
         <p:nvSpPr>
-          <p:cNvPr id="242" name="Google Shape;242;p29"/>
+          <p:cNvPr id="257" name="Google Shape;257;p29"/>
           <p:cNvSpPr/>
           <p:nvPr/>
         </p:nvSpPr>
@@ -21647,7 +22450,7 @@
       </p:sp>
       <p:sp>
         <p:nvSpPr>
-          <p:cNvPr id="243" name="Google Shape;243;p29"/>
+          <p:cNvPr id="258" name="Google Shape;258;p29"/>
           <p:cNvSpPr/>
           <p:nvPr/>
         </p:nvSpPr>
@@ -21698,7 +22501,7 @@
       </p:sp>
       <p:sp>
         <p:nvSpPr>
-          <p:cNvPr id="244" name="Google Shape;244;p29"/>
+          <p:cNvPr id="259" name="Google Shape;259;p29"/>
           <p:cNvSpPr/>
           <p:nvPr/>
         </p:nvSpPr>
@@ -21762,6 +22565,51 @@
           </a:p>
         </p:txBody>
       </p:sp>
+      <p:sp>
+        <p:nvSpPr>
+          <p:cNvPr id="260" name="Google Shape;260;p29"/>
+          <p:cNvSpPr txBox="1"/>
+          <p:nvPr>
+            <p:ph idx="12" type="sldNum"/>
+          </p:nvPr>
+        </p:nvSpPr>
+        <p:spPr>
+          <a:xfrm>
+            <a:off x="6553200" y="6356350"/>
+            <a:ext cx="2133600" cy="365100"/>
+          </a:xfrm>
+          <a:prstGeom prst="rect">
+            <a:avLst/>
+          </a:prstGeom>
+        </p:spPr>
+        <p:txBody>
+          <a:bodyPr anchorCtr="0" anchor="ctr" bIns="45700" lIns="91425" spcFirstLastPara="1" rIns="91425" wrap="square" tIns="45700">
+            <a:noAutofit/>
+          </a:bodyPr>
+          <a:lstStyle/>
+          <a:p>
+            <a:pPr indent="0" lvl="0" marL="0" rtl="0" algn="r">
+              <a:spcBef>
+                <a:spcPts val="0"/>
+              </a:spcBef>
+              <a:spcAft>
+                <a:spcPts val="0"/>
+              </a:spcAft>
+              <a:buClr>
+                <a:srgbClr val="000000"/>
+              </a:buClr>
+              <a:buSzPts val="1200"/>
+              <a:buFont typeface="Arial"/>
+              <a:buNone/>
+            </a:pPr>
+            <a:fld id="{00000000-1234-1234-1234-123412341234}" type="slidenum">
+              <a:rPr lang="en-US"/>
+              <a:t>‹#›</a:t>
+            </a:fld>
+            <a:endParaRPr/>
+          </a:p>
+        </p:txBody>
+      </p:sp>
     </p:spTree>
   </p:cSld>
   <p:clrMapOvr>
@@ -21775,7 +22623,7 @@
   <p:cSld>
     <p:spTree>
       <p:nvGrpSpPr>
-        <p:cNvPr id="248" name="Shape 248"/>
+        <p:cNvPr id="264" name="Shape 264"/>
         <p:cNvGrpSpPr/>
         <p:nvPr/>
       </p:nvGrpSpPr>
@@ -21789,7 +22637,7 @@
       </p:grpSpPr>
       <p:sp>
         <p:nvSpPr>
-          <p:cNvPr id="249" name="Google Shape;249;p30"/>
+          <p:cNvPr id="265" name="Google Shape;265;p30"/>
           <p:cNvSpPr txBox="1"/>
           <p:nvPr>
             <p:ph type="title"/>
@@ -21845,7 +22693,7 @@
       </p:sp>
       <p:sp>
         <p:nvSpPr>
-          <p:cNvPr id="250" name="Google Shape;250;p30"/>
+          <p:cNvPr id="266" name="Google Shape;266;p30"/>
           <p:cNvSpPr txBox="1"/>
           <p:nvPr>
             <p:ph idx="1" type="body"/>
@@ -21894,6 +22742,51 @@
           </a:p>
         </p:txBody>
       </p:sp>
+      <p:sp>
+        <p:nvSpPr>
+          <p:cNvPr id="267" name="Google Shape;267;p30"/>
+          <p:cNvSpPr txBox="1"/>
+          <p:nvPr>
+            <p:ph idx="12" type="sldNum"/>
+          </p:nvPr>
+        </p:nvSpPr>
+        <p:spPr>
+          <a:xfrm>
+            <a:off x="6553200" y="6356350"/>
+            <a:ext cx="2133600" cy="365100"/>
+          </a:xfrm>
+          <a:prstGeom prst="rect">
+            <a:avLst/>
+          </a:prstGeom>
+        </p:spPr>
+        <p:txBody>
+          <a:bodyPr anchorCtr="0" anchor="ctr" bIns="45700" lIns="91425" spcFirstLastPara="1" rIns="91425" wrap="square" tIns="45700">
+            <a:noAutofit/>
+          </a:bodyPr>
+          <a:lstStyle/>
+          <a:p>
+            <a:pPr indent="0" lvl="0" marL="0" rtl="0" algn="r">
+              <a:spcBef>
+                <a:spcPts val="0"/>
+              </a:spcBef>
+              <a:spcAft>
+                <a:spcPts val="0"/>
+              </a:spcAft>
+              <a:buClr>
+                <a:srgbClr val="000000"/>
+              </a:buClr>
+              <a:buSzPts val="1200"/>
+              <a:buFont typeface="Arial"/>
+              <a:buNone/>
+            </a:pPr>
+            <a:fld id="{00000000-1234-1234-1234-123412341234}" type="slidenum">
+              <a:rPr lang="en-US"/>
+              <a:t>‹#›</a:t>
+            </a:fld>
+            <a:endParaRPr/>
+          </a:p>
+        </p:txBody>
+      </p:sp>
     </p:spTree>
   </p:cSld>
   <p:clrMapOvr>
@@ -21907,7 +22800,7 @@
   <p:cSld>
     <p:spTree>
       <p:nvGrpSpPr>
-        <p:cNvPr id="254" name="Shape 254"/>
+        <p:cNvPr id="271" name="Shape 271"/>
         <p:cNvGrpSpPr/>
         <p:nvPr/>
       </p:nvGrpSpPr>
@@ -21921,7 +22814,7 @@
       </p:grpSpPr>
       <p:sp>
         <p:nvSpPr>
-          <p:cNvPr id="255" name="Google Shape;255;p31"/>
+          <p:cNvPr id="272" name="Google Shape;272;p31"/>
           <p:cNvSpPr txBox="1"/>
           <p:nvPr>
             <p:ph type="title"/>
@@ -21946,7 +22839,7 @@
           </a:bodyPr>
           <a:lstStyle/>
           <a:p>
-            <a:pPr indent="0" lvl="0" marL="0" rtl="0" algn="just">
+            <a:pPr indent="0" lvl="0" marL="0" rtl="0" algn="ctr">
               <a:spcBef>
                 <a:spcPts val="0"/>
               </a:spcBef>
@@ -21970,7 +22863,7 @@
       </p:sp>
       <p:sp>
         <p:nvSpPr>
-          <p:cNvPr id="256" name="Google Shape;256;p31"/>
+          <p:cNvPr id="273" name="Google Shape;273;p31"/>
           <p:cNvSpPr txBox="1"/>
           <p:nvPr>
             <p:ph idx="1" type="body"/>
@@ -22010,11 +22903,15 @@
             </a:pPr>
             <a:r>
               <a:rPr b="1" lang="en-US" sz="2000"/>
-              <a:t>Cross-platform mobile application</a:t>
+              <a:t>Clinician</a:t>
+            </a:r>
+            <a:r>
+              <a:rPr b="1" lang="en-US" sz="2000"/>
+              <a:t> facing cross-platform mobile application</a:t>
             </a:r>
             <a:r>
               <a:rPr lang="en-US" sz="2000"/>
-              <a:t> for capturing and submitting body-surface images, and viewing results</a:t>
+              <a:t> for capturing and body-surface images, and reviewing decision support output.</a:t>
             </a:r>
             <a:endParaRPr sz="2000"/>
           </a:p>
@@ -22149,6 +23046,51 @@
               <a:t> handling</a:t>
             </a:r>
             <a:endParaRPr sz="2000"/>
+          </a:p>
+        </p:txBody>
+      </p:sp>
+      <p:sp>
+        <p:nvSpPr>
+          <p:cNvPr id="274" name="Google Shape;274;p31"/>
+          <p:cNvSpPr txBox="1"/>
+          <p:nvPr>
+            <p:ph idx="12" type="sldNum"/>
+          </p:nvPr>
+        </p:nvSpPr>
+        <p:spPr>
+          <a:xfrm>
+            <a:off x="6553200" y="6356350"/>
+            <a:ext cx="2133600" cy="365100"/>
+          </a:xfrm>
+          <a:prstGeom prst="rect">
+            <a:avLst/>
+          </a:prstGeom>
+        </p:spPr>
+        <p:txBody>
+          <a:bodyPr anchorCtr="0" anchor="ctr" bIns="45700" lIns="91425" spcFirstLastPara="1" rIns="91425" wrap="square" tIns="45700">
+            <a:noAutofit/>
+          </a:bodyPr>
+          <a:lstStyle/>
+          <a:p>
+            <a:pPr indent="0" lvl="0" marL="0" rtl="0" algn="r">
+              <a:spcBef>
+                <a:spcPts val="0"/>
+              </a:spcBef>
+              <a:spcAft>
+                <a:spcPts val="0"/>
+              </a:spcAft>
+              <a:buClr>
+                <a:srgbClr val="000000"/>
+              </a:buClr>
+              <a:buSzPts val="1200"/>
+              <a:buFont typeface="Arial"/>
+              <a:buNone/>
+            </a:pPr>
+            <a:fld id="{00000000-1234-1234-1234-123412341234}" type="slidenum">
+              <a:rPr lang="en-US"/>
+              <a:t>‹#›</a:t>
+            </a:fld>
+            <a:endParaRPr/>
           </a:p>
         </p:txBody>
       </p:sp>
@@ -22380,6 +23322,51 @@
           </a:p>
         </p:txBody>
       </p:sp>
+      <p:sp>
+        <p:nvSpPr>
+          <p:cNvPr id="93" name="Google Shape;93;p14"/>
+          <p:cNvSpPr txBox="1"/>
+          <p:nvPr>
+            <p:ph idx="12" type="sldNum"/>
+          </p:nvPr>
+        </p:nvSpPr>
+        <p:spPr>
+          <a:xfrm>
+            <a:off x="6553200" y="6356350"/>
+            <a:ext cx="2133600" cy="365100"/>
+          </a:xfrm>
+          <a:prstGeom prst="rect">
+            <a:avLst/>
+          </a:prstGeom>
+        </p:spPr>
+        <p:txBody>
+          <a:bodyPr anchorCtr="0" anchor="ctr" bIns="45700" lIns="91425" spcFirstLastPara="1" rIns="91425" wrap="square" tIns="45700">
+            <a:noAutofit/>
+          </a:bodyPr>
+          <a:lstStyle/>
+          <a:p>
+            <a:pPr indent="0" lvl="0" marL="0" rtl="0" algn="r">
+              <a:spcBef>
+                <a:spcPts val="0"/>
+              </a:spcBef>
+              <a:spcAft>
+                <a:spcPts val="0"/>
+              </a:spcAft>
+              <a:buClr>
+                <a:srgbClr val="000000"/>
+              </a:buClr>
+              <a:buSzPts val="1200"/>
+              <a:buFont typeface="Arial"/>
+              <a:buNone/>
+            </a:pPr>
+            <a:fld id="{00000000-1234-1234-1234-123412341234}" type="slidenum">
+              <a:rPr lang="en-US"/>
+              <a:t>‹#›</a:t>
+            </a:fld>
+            <a:endParaRPr/>
+          </a:p>
+        </p:txBody>
+      </p:sp>
     </p:spTree>
   </p:cSld>
   <p:clrMapOvr>
@@ -22393,7 +23380,7 @@
   <p:cSld>
     <p:spTree>
       <p:nvGrpSpPr>
-        <p:cNvPr id="260" name="Shape 260"/>
+        <p:cNvPr id="278" name="Shape 278"/>
         <p:cNvGrpSpPr/>
         <p:nvPr/>
       </p:nvGrpSpPr>
@@ -22407,7 +23394,7 @@
       </p:grpSpPr>
       <p:sp>
         <p:nvSpPr>
-          <p:cNvPr id="261" name="Google Shape;261;p32"/>
+          <p:cNvPr id="279" name="Google Shape;279;p32"/>
           <p:cNvSpPr txBox="1"/>
           <p:nvPr>
             <p:ph type="title"/>
@@ -22451,7 +23438,7 @@
                   <a:srgbClr val="0B3D59"/>
                 </a:solidFill>
               </a:rPr>
-              <a:t>Major Challenges</a:t>
+              <a:t>Challenges and Risk Mitigation</a:t>
             </a:r>
             <a:endParaRPr>
               <a:solidFill>
@@ -22463,7 +23450,7 @@
       </p:sp>
       <p:sp>
         <p:nvSpPr>
-          <p:cNvPr id="262" name="Google Shape;262;p32"/>
+          <p:cNvPr id="280" name="Google Shape;280;p32"/>
           <p:cNvSpPr txBox="1"/>
           <p:nvPr>
             <p:ph idx="1" type="body"/>
@@ -22512,6 +23499,51 @@
           </a:p>
         </p:txBody>
       </p:sp>
+      <p:sp>
+        <p:nvSpPr>
+          <p:cNvPr id="281" name="Google Shape;281;p32"/>
+          <p:cNvSpPr txBox="1"/>
+          <p:nvPr>
+            <p:ph idx="12" type="sldNum"/>
+          </p:nvPr>
+        </p:nvSpPr>
+        <p:spPr>
+          <a:xfrm>
+            <a:off x="6553200" y="6356350"/>
+            <a:ext cx="2133600" cy="365100"/>
+          </a:xfrm>
+          <a:prstGeom prst="rect">
+            <a:avLst/>
+          </a:prstGeom>
+        </p:spPr>
+        <p:txBody>
+          <a:bodyPr anchorCtr="0" anchor="ctr" bIns="45700" lIns="91425" spcFirstLastPara="1" rIns="91425" wrap="square" tIns="45700">
+            <a:noAutofit/>
+          </a:bodyPr>
+          <a:lstStyle/>
+          <a:p>
+            <a:pPr indent="0" lvl="0" marL="0" rtl="0" algn="r">
+              <a:spcBef>
+                <a:spcPts val="0"/>
+              </a:spcBef>
+              <a:spcAft>
+                <a:spcPts val="0"/>
+              </a:spcAft>
+              <a:buClr>
+                <a:srgbClr val="000000"/>
+              </a:buClr>
+              <a:buSzPts val="1200"/>
+              <a:buFont typeface="Arial"/>
+              <a:buNone/>
+            </a:pPr>
+            <a:fld id="{00000000-1234-1234-1234-123412341234}" type="slidenum">
+              <a:rPr lang="en-US"/>
+              <a:t>‹#›</a:t>
+            </a:fld>
+            <a:endParaRPr/>
+          </a:p>
+        </p:txBody>
+      </p:sp>
     </p:spTree>
   </p:cSld>
   <p:clrMapOvr>
@@ -22525,7 +23557,7 @@
   <p:cSld>
     <p:spTree>
       <p:nvGrpSpPr>
-        <p:cNvPr id="266" name="Shape 266"/>
+        <p:cNvPr id="285" name="Shape 285"/>
         <p:cNvGrpSpPr/>
         <p:nvPr/>
       </p:nvGrpSpPr>
@@ -22539,7 +23571,7 @@
       </p:grpSpPr>
       <p:sp>
         <p:nvSpPr>
-          <p:cNvPr id="267" name="Google Shape;267;p33"/>
+          <p:cNvPr id="286" name="Google Shape;286;p33"/>
           <p:cNvSpPr txBox="1"/>
           <p:nvPr>
             <p:ph type="title"/>
@@ -22592,7 +23624,7 @@
       </p:sp>
       <p:sp>
         <p:nvSpPr>
-          <p:cNvPr id="268" name="Google Shape;268;p33"/>
+          <p:cNvPr id="287" name="Google Shape;287;p33"/>
           <p:cNvSpPr txBox="1"/>
           <p:nvPr/>
         </p:nvSpPr>
@@ -22843,6 +23875,51 @@
           </a:p>
         </p:txBody>
       </p:sp>
+      <p:sp>
+        <p:nvSpPr>
+          <p:cNvPr id="288" name="Google Shape;288;p33"/>
+          <p:cNvSpPr txBox="1"/>
+          <p:nvPr>
+            <p:ph idx="12" type="sldNum"/>
+          </p:nvPr>
+        </p:nvSpPr>
+        <p:spPr>
+          <a:xfrm>
+            <a:off x="6553200" y="6356350"/>
+            <a:ext cx="2133600" cy="365100"/>
+          </a:xfrm>
+          <a:prstGeom prst="rect">
+            <a:avLst/>
+          </a:prstGeom>
+        </p:spPr>
+        <p:txBody>
+          <a:bodyPr anchorCtr="0" anchor="ctr" bIns="45700" lIns="91425" spcFirstLastPara="1" rIns="91425" wrap="square" tIns="45700">
+            <a:noAutofit/>
+          </a:bodyPr>
+          <a:lstStyle/>
+          <a:p>
+            <a:pPr indent="0" lvl="0" marL="0" rtl="0" algn="r">
+              <a:spcBef>
+                <a:spcPts val="0"/>
+              </a:spcBef>
+              <a:spcAft>
+                <a:spcPts val="0"/>
+              </a:spcAft>
+              <a:buClr>
+                <a:srgbClr val="000000"/>
+              </a:buClr>
+              <a:buSzPts val="1200"/>
+              <a:buFont typeface="Arial"/>
+              <a:buNone/>
+            </a:pPr>
+            <a:fld id="{00000000-1234-1234-1234-123412341234}" type="slidenum">
+              <a:rPr lang="en-US"/>
+              <a:t>‹#›</a:t>
+            </a:fld>
+            <a:endParaRPr/>
+          </a:p>
+        </p:txBody>
+      </p:sp>
     </p:spTree>
   </p:cSld>
   <p:clrMapOvr>
@@ -22856,7 +23933,7 @@
   <p:cSld>
     <p:spTree>
       <p:nvGrpSpPr>
-        <p:cNvPr id="272" name="Shape 272"/>
+        <p:cNvPr id="292" name="Shape 292"/>
         <p:cNvGrpSpPr/>
         <p:nvPr/>
       </p:nvGrpSpPr>
@@ -22870,7 +23947,363 @@
       </p:grpSpPr>
       <p:sp>
         <p:nvSpPr>
-          <p:cNvPr id="273" name="Google Shape;273;p34"/>
+          <p:cNvPr id="293" name="Google Shape;293;p34"/>
+          <p:cNvSpPr txBox="1"/>
+          <p:nvPr>
+            <p:ph type="title"/>
+          </p:nvPr>
+        </p:nvSpPr>
+        <p:spPr>
+          <a:xfrm>
+            <a:off x="457200" y="274638"/>
+            <a:ext cx="8229600" cy="1143000"/>
+          </a:xfrm>
+          <a:prstGeom prst="rect">
+            <a:avLst/>
+          </a:prstGeom>
+          <a:noFill/>
+          <a:ln>
+            <a:noFill/>
+          </a:ln>
+        </p:spPr>
+        <p:txBody>
+          <a:bodyPr anchorCtr="0" anchor="ctr" bIns="45700" lIns="91425" spcFirstLastPara="1" rIns="91425" wrap="square" tIns="45700">
+            <a:noAutofit/>
+          </a:bodyPr>
+          <a:lstStyle/>
+          <a:p>
+            <a:pPr indent="0" lvl="0" marL="0" rtl="0" algn="ctr">
+              <a:spcBef>
+                <a:spcPts val="0"/>
+              </a:spcBef>
+              <a:spcAft>
+                <a:spcPts val="0"/>
+              </a:spcAft>
+              <a:buClr>
+                <a:schemeClr val="dk1"/>
+              </a:buClr>
+              <a:buSzPts val="1400"/>
+              <a:buFont typeface="Arial"/>
+              <a:buNone/>
+            </a:pPr>
+            <a:r>
+              <a:rPr b="1" lang="en-US" sz="4000">
+                <a:solidFill>
+                  <a:srgbClr val="0B3D59"/>
+                </a:solidFill>
+              </a:rPr>
+              <a:t>Risk Mitigation</a:t>
+            </a:r>
+            <a:endParaRPr b="1" sz="4000">
+              <a:solidFill>
+                <a:srgbClr val="0B3D59"/>
+              </a:solidFill>
+            </a:endParaRPr>
+          </a:p>
+        </p:txBody>
+      </p:sp>
+      <p:sp>
+        <p:nvSpPr>
+          <p:cNvPr id="294" name="Google Shape;294;p34"/>
+          <p:cNvSpPr txBox="1"/>
+          <p:nvPr/>
+        </p:nvSpPr>
+        <p:spPr>
+          <a:xfrm>
+            <a:off x="342900" y="1314647"/>
+            <a:ext cx="8343900" cy="4292700"/>
+          </a:xfrm>
+          <a:prstGeom prst="rect">
+            <a:avLst/>
+          </a:prstGeom>
+          <a:noFill/>
+          <a:ln>
+            <a:noFill/>
+          </a:ln>
+        </p:spPr>
+        <p:txBody>
+          <a:bodyPr anchorCtr="0" anchor="t" bIns="91425" lIns="91425" spcFirstLastPara="1" rIns="91425" wrap="square" tIns="91425">
+            <a:noAutofit/>
+          </a:bodyPr>
+          <a:lstStyle/>
+          <a:p>
+            <a:pPr indent="-393700" lvl="0" marL="457200" rtl="0" algn="just">
+              <a:lnSpc>
+                <a:spcPct val="150000"/>
+              </a:lnSpc>
+              <a:spcBef>
+                <a:spcPts val="600"/>
+              </a:spcBef>
+              <a:spcAft>
+                <a:spcPts val="0"/>
+              </a:spcAft>
+              <a:buClr>
+                <a:schemeClr val="dk1"/>
+              </a:buClr>
+              <a:buSzPts val="2000"/>
+              <a:buFont typeface="Calibri"/>
+              <a:buChar char="○"/>
+            </a:pPr>
+            <a:r>
+              <a:rPr b="1" lang="en-US" sz="2000">
+                <a:solidFill>
+                  <a:schemeClr val="dk1"/>
+                </a:solidFill>
+                <a:latin typeface="Calibri"/>
+                <a:ea typeface="Calibri"/>
+                <a:cs typeface="Calibri"/>
+                <a:sym typeface="Calibri"/>
+              </a:rPr>
+              <a:t>Fusion underperforms: </a:t>
+            </a:r>
+            <a:r>
+              <a:rPr lang="en-US" sz="2000">
+                <a:solidFill>
+                  <a:schemeClr val="dk1"/>
+                </a:solidFill>
+                <a:latin typeface="Calibri"/>
+                <a:ea typeface="Calibri"/>
+                <a:cs typeface="Calibri"/>
+                <a:sym typeface="Calibri"/>
+              </a:rPr>
+              <a:t>fall back to a concatenation + MLP fusion head as lower-complexity backup architecture which requires less data.</a:t>
+            </a:r>
+            <a:endParaRPr sz="2000">
+              <a:solidFill>
+                <a:schemeClr val="dk1"/>
+              </a:solidFill>
+              <a:latin typeface="Calibri"/>
+              <a:ea typeface="Calibri"/>
+              <a:cs typeface="Calibri"/>
+              <a:sym typeface="Calibri"/>
+            </a:endParaRPr>
+          </a:p>
+          <a:p>
+            <a:pPr indent="-393700" lvl="0" marL="457200" rtl="0" algn="just">
+              <a:lnSpc>
+                <a:spcPct val="150000"/>
+              </a:lnSpc>
+              <a:spcBef>
+                <a:spcPts val="600"/>
+              </a:spcBef>
+              <a:spcAft>
+                <a:spcPts val="0"/>
+              </a:spcAft>
+              <a:buClr>
+                <a:schemeClr val="dk1"/>
+              </a:buClr>
+              <a:buSzPts val="2000"/>
+              <a:buFont typeface="Calibri"/>
+              <a:buChar char="○"/>
+            </a:pPr>
+            <a:r>
+              <a:rPr b="1" lang="en-US" sz="2000">
+                <a:solidFill>
+                  <a:schemeClr val="dk1"/>
+                </a:solidFill>
+                <a:latin typeface="Calibri"/>
+                <a:ea typeface="Calibri"/>
+                <a:cs typeface="Calibri"/>
+                <a:sym typeface="Calibri"/>
+              </a:rPr>
+              <a:t>Class imbalance: </a:t>
+            </a:r>
+            <a:r>
+              <a:rPr lang="en-US" sz="2000">
+                <a:solidFill>
+                  <a:schemeClr val="dk1"/>
+                </a:solidFill>
+                <a:latin typeface="Calibri"/>
+                <a:ea typeface="Calibri"/>
+                <a:cs typeface="Calibri"/>
+                <a:sym typeface="Calibri"/>
+              </a:rPr>
+              <a:t>per-modality class weighting and targeted augmentation, plus additional datasets (Berlin OSCC, IBM Research Israel) sought for the OSCC class specifically.</a:t>
+            </a:r>
+            <a:endParaRPr sz="2000">
+              <a:solidFill>
+                <a:schemeClr val="dk1"/>
+              </a:solidFill>
+              <a:latin typeface="Calibri"/>
+              <a:ea typeface="Calibri"/>
+              <a:cs typeface="Calibri"/>
+              <a:sym typeface="Calibri"/>
+            </a:endParaRPr>
+          </a:p>
+          <a:p>
+            <a:pPr indent="-393700" lvl="0" marL="457200" rtl="0" algn="just">
+              <a:lnSpc>
+                <a:spcPct val="150000"/>
+              </a:lnSpc>
+              <a:spcBef>
+                <a:spcPts val="600"/>
+              </a:spcBef>
+              <a:spcAft>
+                <a:spcPts val="0"/>
+              </a:spcAft>
+              <a:buClr>
+                <a:schemeClr val="dk1"/>
+              </a:buClr>
+              <a:buSzPts val="2000"/>
+              <a:buFont typeface="Calibri"/>
+              <a:buChar char="○"/>
+            </a:pPr>
+            <a:r>
+              <a:rPr b="1" lang="en-US" sz="2000">
+                <a:solidFill>
+                  <a:schemeClr val="dk1"/>
+                </a:solidFill>
+                <a:latin typeface="Calibri"/>
+                <a:ea typeface="Calibri"/>
+                <a:cs typeface="Calibri"/>
+                <a:sym typeface="Calibri"/>
+              </a:rPr>
+              <a:t>ViT explainability: </a:t>
+            </a:r>
+            <a:r>
+              <a:rPr lang="en-US" sz="2000">
+                <a:solidFill>
+                  <a:schemeClr val="dk1"/>
+                </a:solidFill>
+                <a:latin typeface="Calibri"/>
+                <a:ea typeface="Calibri"/>
+                <a:cs typeface="Calibri"/>
+                <a:sym typeface="Calibri"/>
+              </a:rPr>
+              <a:t>attention rollout and transformer-adapted attribution, validated against annotated lesion regions.</a:t>
+            </a:r>
+            <a:endParaRPr sz="2000">
+              <a:solidFill>
+                <a:schemeClr val="dk1"/>
+              </a:solidFill>
+              <a:latin typeface="Calibri"/>
+              <a:ea typeface="Calibri"/>
+              <a:cs typeface="Calibri"/>
+              <a:sym typeface="Calibri"/>
+            </a:endParaRPr>
+          </a:p>
+          <a:p>
+            <a:pPr indent="-393700" lvl="0" marL="457200" rtl="0" algn="just">
+              <a:lnSpc>
+                <a:spcPct val="150000"/>
+              </a:lnSpc>
+              <a:spcBef>
+                <a:spcPts val="600"/>
+              </a:spcBef>
+              <a:spcAft>
+                <a:spcPts val="0"/>
+              </a:spcAft>
+              <a:buClr>
+                <a:schemeClr val="dk1"/>
+              </a:buClr>
+              <a:buSzPts val="2000"/>
+              <a:buFont typeface="Calibri"/>
+              <a:buChar char="○"/>
+            </a:pPr>
+            <a:r>
+              <a:rPr b="1" lang="en-US" sz="2000">
+                <a:solidFill>
+                  <a:schemeClr val="dk1"/>
+                </a:solidFill>
+                <a:latin typeface="Calibri"/>
+                <a:ea typeface="Calibri"/>
+                <a:cs typeface="Calibri"/>
+                <a:sym typeface="Calibri"/>
+              </a:rPr>
+              <a:t>Domain shift: </a:t>
+            </a:r>
+            <a:r>
+              <a:rPr lang="en-US" sz="2000">
+                <a:solidFill>
+                  <a:schemeClr val="dk1"/>
+                </a:solidFill>
+                <a:latin typeface="Calibri"/>
+                <a:ea typeface="Calibri"/>
+                <a:cs typeface="Calibri"/>
+                <a:sym typeface="Calibri"/>
+              </a:rPr>
+              <a:t>photometric augmentation, plus capture-time quality checks that reject blurred or poorly lit images before inference.</a:t>
+            </a:r>
+            <a:endParaRPr b="1" sz="2000">
+              <a:solidFill>
+                <a:schemeClr val="dk1"/>
+              </a:solidFill>
+              <a:latin typeface="Calibri"/>
+              <a:ea typeface="Calibri"/>
+              <a:cs typeface="Calibri"/>
+              <a:sym typeface="Calibri"/>
+            </a:endParaRPr>
+          </a:p>
+        </p:txBody>
+      </p:sp>
+      <p:sp>
+        <p:nvSpPr>
+          <p:cNvPr id="295" name="Google Shape;295;p34"/>
+          <p:cNvSpPr txBox="1"/>
+          <p:nvPr>
+            <p:ph idx="12" type="sldNum"/>
+          </p:nvPr>
+        </p:nvSpPr>
+        <p:spPr>
+          <a:xfrm>
+            <a:off x="6553200" y="6356350"/>
+            <a:ext cx="2133600" cy="365100"/>
+          </a:xfrm>
+          <a:prstGeom prst="rect">
+            <a:avLst/>
+          </a:prstGeom>
+        </p:spPr>
+        <p:txBody>
+          <a:bodyPr anchorCtr="0" anchor="ctr" bIns="45700" lIns="91425" spcFirstLastPara="1" rIns="91425" wrap="square" tIns="45700">
+            <a:noAutofit/>
+          </a:bodyPr>
+          <a:lstStyle/>
+          <a:p>
+            <a:pPr indent="0" lvl="0" marL="0" rtl="0" algn="r">
+              <a:spcBef>
+                <a:spcPts val="0"/>
+              </a:spcBef>
+              <a:spcAft>
+                <a:spcPts val="0"/>
+              </a:spcAft>
+              <a:buNone/>
+            </a:pPr>
+            <a:fld id="{00000000-1234-1234-1234-123412341234}" type="slidenum">
+              <a:rPr lang="en-US"/>
+              <a:t>‹#›</a:t>
+            </a:fld>
+            <a:endParaRPr/>
+          </a:p>
+        </p:txBody>
+      </p:sp>
+    </p:spTree>
+  </p:cSld>
+  <p:clrMapOvr>
+    <a:masterClrMapping/>
+  </p:clrMapOvr>
+</p:sld>
+</file>
+
+<file path=ppt/slides/slide23.xml><?xml version="1.0" encoding="utf-8"?>
+<p:sld xmlns:a="http://schemas.openxmlformats.org/drawingml/2006/main" xmlns:r="http://schemas.openxmlformats.org/officeDocument/2006/relationships" xmlns:mc="http://schemas.openxmlformats.org/markup-compatibility/2006" xmlns:mv="urn:schemas-microsoft-com:mac:vml" xmlns:p="http://schemas.openxmlformats.org/presentationml/2006/main" xmlns:c="http://schemas.openxmlformats.org/drawingml/2006/chart" xmlns:dgm="http://schemas.openxmlformats.org/drawingml/2006/diagram" xmlns:o="urn:schemas-microsoft-com:office:office" xmlns:v="urn:schemas-microsoft-com:vml" xmlns:pvml="urn:schemas-microsoft-com:office:powerpoint" xmlns:com="http://schemas.openxmlformats.org/drawingml/2006/compatibility" xmlns:p14="http://schemas.microsoft.com/office/powerpoint/2010/main" xmlns:p15="http://schemas.microsoft.com/office/powerpoint/2012/main" xmlns:ahyp="http://schemas.microsoft.com/office/drawing/2018/hyperlinkcolor">
+  <p:cSld>
+    <p:spTree>
+      <p:nvGrpSpPr>
+        <p:cNvPr id="299" name="Shape 299"/>
+        <p:cNvGrpSpPr/>
+        <p:nvPr/>
+      </p:nvGrpSpPr>
+      <p:grpSpPr>
+        <a:xfrm>
+          <a:off x="0" y="0"/>
+          <a:ext cx="0" cy="0"/>
+          <a:chOff x="0" y="0"/>
+          <a:chExt cx="0" cy="0"/>
+        </a:xfrm>
+      </p:grpSpPr>
+      <p:sp>
+        <p:nvSpPr>
+          <p:cNvPr id="300" name="Google Shape;300;p35"/>
           <p:cNvSpPr txBox="1"/>
           <p:nvPr>
             <p:ph type="title"/>
@@ -22926,7 +24359,7 @@
       </p:sp>
       <p:sp>
         <p:nvSpPr>
-          <p:cNvPr id="274" name="Google Shape;274;p34"/>
+          <p:cNvPr id="301" name="Google Shape;301;p35"/>
           <p:cNvSpPr txBox="1"/>
           <p:nvPr>
             <p:ph idx="1" type="body"/>
@@ -22975,6 +24408,51 @@
           </a:p>
         </p:txBody>
       </p:sp>
+      <p:sp>
+        <p:nvSpPr>
+          <p:cNvPr id="302" name="Google Shape;302;p35"/>
+          <p:cNvSpPr txBox="1"/>
+          <p:nvPr>
+            <p:ph idx="12" type="sldNum"/>
+          </p:nvPr>
+        </p:nvSpPr>
+        <p:spPr>
+          <a:xfrm>
+            <a:off x="6553200" y="6356350"/>
+            <a:ext cx="2133600" cy="365100"/>
+          </a:xfrm>
+          <a:prstGeom prst="rect">
+            <a:avLst/>
+          </a:prstGeom>
+        </p:spPr>
+        <p:txBody>
+          <a:bodyPr anchorCtr="0" anchor="ctr" bIns="45700" lIns="91425" spcFirstLastPara="1" rIns="91425" wrap="square" tIns="45700">
+            <a:noAutofit/>
+          </a:bodyPr>
+          <a:lstStyle/>
+          <a:p>
+            <a:pPr indent="0" lvl="0" marL="0" rtl="0" algn="r">
+              <a:spcBef>
+                <a:spcPts val="0"/>
+              </a:spcBef>
+              <a:spcAft>
+                <a:spcPts val="0"/>
+              </a:spcAft>
+              <a:buClr>
+                <a:srgbClr val="000000"/>
+              </a:buClr>
+              <a:buSzPts val="1200"/>
+              <a:buFont typeface="Arial"/>
+              <a:buNone/>
+            </a:pPr>
+            <a:fld id="{00000000-1234-1234-1234-123412341234}" type="slidenum">
+              <a:rPr lang="en-US"/>
+              <a:t>‹#›</a:t>
+            </a:fld>
+            <a:endParaRPr/>
+          </a:p>
+        </p:txBody>
+      </p:sp>
     </p:spTree>
   </p:cSld>
   <p:clrMapOvr>
@@ -22983,12 +24461,12 @@
 </p:sld>
 </file>
 
-<file path=ppt/slides/slide23.xml><?xml version="1.0" encoding="utf-8"?>
+<file path=ppt/slides/slide24.xml><?xml version="1.0" encoding="utf-8"?>
 <p:sld xmlns:a="http://schemas.openxmlformats.org/drawingml/2006/main" xmlns:r="http://schemas.openxmlformats.org/officeDocument/2006/relationships" xmlns:mc="http://schemas.openxmlformats.org/markup-compatibility/2006" xmlns:mv="urn:schemas-microsoft-com:mac:vml" xmlns:p="http://schemas.openxmlformats.org/presentationml/2006/main" xmlns:c="http://schemas.openxmlformats.org/drawingml/2006/chart" xmlns:dgm="http://schemas.openxmlformats.org/drawingml/2006/diagram" xmlns:o="urn:schemas-microsoft-com:office:office" xmlns:v="urn:schemas-microsoft-com:vml" xmlns:pvml="urn:schemas-microsoft-com:office:powerpoint" xmlns:com="http://schemas.openxmlformats.org/drawingml/2006/compatibility" xmlns:p14="http://schemas.microsoft.com/office/powerpoint/2010/main" xmlns:p15="http://schemas.microsoft.com/office/powerpoint/2012/main" xmlns:ahyp="http://schemas.microsoft.com/office/drawing/2018/hyperlinkcolor">
   <p:cSld>
     <p:spTree>
       <p:nvGrpSpPr>
-        <p:cNvPr id="278" name="Shape 278"/>
+        <p:cNvPr id="306" name="Shape 306"/>
         <p:cNvGrpSpPr/>
         <p:nvPr/>
       </p:nvGrpSpPr>
@@ -23002,7 +24480,875 @@
       </p:grpSpPr>
       <p:sp>
         <p:nvSpPr>
-          <p:cNvPr id="279" name="Google Shape;279;p35"/>
+          <p:cNvPr id="307" name="Google Shape;307;p36"/>
+          <p:cNvSpPr txBox="1"/>
+          <p:nvPr>
+            <p:ph type="title"/>
+          </p:nvPr>
+        </p:nvSpPr>
+        <p:spPr>
+          <a:xfrm>
+            <a:off x="457200" y="101747"/>
+            <a:ext cx="8229600" cy="1143000"/>
+          </a:xfrm>
+          <a:prstGeom prst="rect">
+            <a:avLst/>
+          </a:prstGeom>
+          <a:noFill/>
+          <a:ln>
+            <a:noFill/>
+          </a:ln>
+        </p:spPr>
+        <p:txBody>
+          <a:bodyPr anchorCtr="0" anchor="ctr" bIns="45700" lIns="91425" spcFirstLastPara="1" rIns="91425" wrap="square" tIns="45700">
+            <a:noAutofit/>
+          </a:bodyPr>
+          <a:lstStyle/>
+          <a:p>
+            <a:pPr indent="0" lvl="0" marL="0" rtl="0" algn="ctr">
+              <a:spcBef>
+                <a:spcPts val="0"/>
+              </a:spcBef>
+              <a:spcAft>
+                <a:spcPts val="0"/>
+              </a:spcAft>
+              <a:buClr>
+                <a:schemeClr val="dk1"/>
+              </a:buClr>
+              <a:buSzPts val="1400"/>
+              <a:buFont typeface="Arial"/>
+              <a:buNone/>
+            </a:pPr>
+            <a:r>
+              <a:rPr b="1" lang="en-US" sz="4000">
+                <a:solidFill>
+                  <a:srgbClr val="0B3D59"/>
+                </a:solidFill>
+              </a:rPr>
+              <a:t>Work Breakdown</a:t>
+            </a:r>
+            <a:endParaRPr/>
+          </a:p>
+        </p:txBody>
+      </p:sp>
+      <p:sp>
+        <p:nvSpPr>
+          <p:cNvPr id="308" name="Google Shape;308;p36"/>
+          <p:cNvSpPr txBox="1"/>
+          <p:nvPr/>
+        </p:nvSpPr>
+        <p:spPr>
+          <a:xfrm>
+            <a:off x="342900" y="1101759"/>
+            <a:ext cx="8343900" cy="4292700"/>
+          </a:xfrm>
+          <a:prstGeom prst="rect">
+            <a:avLst/>
+          </a:prstGeom>
+          <a:noFill/>
+          <a:ln>
+            <a:noFill/>
+          </a:ln>
+        </p:spPr>
+        <p:txBody>
+          <a:bodyPr anchorCtr="0" anchor="t" bIns="91425" lIns="91425" spcFirstLastPara="1" rIns="91425" wrap="square" tIns="91425">
+            <a:noAutofit/>
+          </a:bodyPr>
+          <a:lstStyle/>
+          <a:p>
+            <a:pPr indent="0" lvl="0" marL="0" rtl="0" algn="just">
+              <a:lnSpc>
+                <a:spcPct val="150000"/>
+              </a:lnSpc>
+              <a:spcBef>
+                <a:spcPts val="0"/>
+              </a:spcBef>
+              <a:spcAft>
+                <a:spcPts val="0"/>
+              </a:spcAft>
+              <a:buClr>
+                <a:schemeClr val="dk1"/>
+              </a:buClr>
+              <a:buSzPts val="1100"/>
+              <a:buFont typeface="Arial"/>
+              <a:buNone/>
+            </a:pPr>
+            <a:r>
+              <a:rPr b="1" lang="en-US" sz="2000">
+                <a:solidFill>
+                  <a:srgbClr val="0B3D59"/>
+                </a:solidFill>
+                <a:latin typeface="Calibri"/>
+                <a:ea typeface="Calibri"/>
+                <a:cs typeface="Calibri"/>
+                <a:sym typeface="Calibri"/>
+              </a:rPr>
+              <a:t>Phase 1: Proposal &amp; Literature Foundation (Weeks 1–4)</a:t>
+            </a:r>
+            <a:br>
+              <a:rPr b="1" lang="en-US" sz="2000">
+                <a:solidFill>
+                  <a:schemeClr val="dk1"/>
+                </a:solidFill>
+                <a:latin typeface="Calibri"/>
+                <a:ea typeface="Calibri"/>
+                <a:cs typeface="Calibri"/>
+                <a:sym typeface="Calibri"/>
+              </a:rPr>
+            </a:br>
+            <a:r>
+              <a:rPr lang="en-US" sz="2000">
+                <a:solidFill>
+                  <a:schemeClr val="dk1"/>
+                </a:solidFill>
+                <a:latin typeface="Calibri"/>
+                <a:ea typeface="Calibri"/>
+                <a:cs typeface="Calibri"/>
+                <a:sym typeface="Calibri"/>
+              </a:rPr>
+              <a:t>Finalize literature review, gap analysis, problem statement. Build and deliver proposal presentation.</a:t>
+            </a:r>
+            <a:endParaRPr i="1" sz="2000">
+              <a:solidFill>
+                <a:schemeClr val="dk1"/>
+              </a:solidFill>
+              <a:latin typeface="Calibri"/>
+              <a:ea typeface="Calibri"/>
+              <a:cs typeface="Calibri"/>
+              <a:sym typeface="Calibri"/>
+            </a:endParaRPr>
+          </a:p>
+          <a:p>
+            <a:pPr indent="0" lvl="0" marL="0" rtl="0" algn="just">
+              <a:lnSpc>
+                <a:spcPct val="150000"/>
+              </a:lnSpc>
+              <a:spcBef>
+                <a:spcPts val="1200"/>
+              </a:spcBef>
+              <a:spcAft>
+                <a:spcPts val="0"/>
+              </a:spcAft>
+              <a:buClr>
+                <a:schemeClr val="dk1"/>
+              </a:buClr>
+              <a:buSzPts val="1100"/>
+              <a:buFont typeface="Arial"/>
+              <a:buNone/>
+            </a:pPr>
+            <a:r>
+              <a:rPr b="1" lang="en-US" sz="2000">
+                <a:solidFill>
+                  <a:srgbClr val="0B3D59"/>
+                </a:solidFill>
+                <a:latin typeface="Calibri"/>
+                <a:ea typeface="Calibri"/>
+                <a:cs typeface="Calibri"/>
+                <a:sym typeface="Calibri"/>
+              </a:rPr>
+              <a:t>Phase 2: Data Pipeline &amp; Preprocessing (Weeks 5–7)</a:t>
+            </a:r>
+            <a:br>
+              <a:rPr b="1" lang="en-US" sz="2000">
+                <a:solidFill>
+                  <a:schemeClr val="dk1"/>
+                </a:solidFill>
+                <a:latin typeface="Calibri"/>
+                <a:ea typeface="Calibri"/>
+                <a:cs typeface="Calibri"/>
+                <a:sym typeface="Calibri"/>
+              </a:rPr>
+            </a:br>
+            <a:r>
+              <a:rPr lang="en-US" sz="2000">
+                <a:solidFill>
+                  <a:schemeClr val="dk1"/>
+                </a:solidFill>
+                <a:latin typeface="Calibri"/>
+                <a:ea typeface="Calibri"/>
+                <a:cs typeface="Calibri"/>
+                <a:sym typeface="Calibri"/>
+              </a:rPr>
+              <a:t>Collect and standardize all five modality datasets. Address class imbalance. Build train/validation/test splits.</a:t>
+            </a:r>
+            <a:endParaRPr sz="2000">
+              <a:solidFill>
+                <a:schemeClr val="dk1"/>
+              </a:solidFill>
+              <a:latin typeface="Calibri"/>
+              <a:ea typeface="Calibri"/>
+              <a:cs typeface="Calibri"/>
+              <a:sym typeface="Calibri"/>
+            </a:endParaRPr>
+          </a:p>
+          <a:p>
+            <a:pPr indent="0" lvl="0" marL="0" rtl="0" algn="just">
+              <a:lnSpc>
+                <a:spcPct val="150000"/>
+              </a:lnSpc>
+              <a:spcBef>
+                <a:spcPts val="1200"/>
+              </a:spcBef>
+              <a:spcAft>
+                <a:spcPts val="0"/>
+              </a:spcAft>
+              <a:buClr>
+                <a:schemeClr val="dk1"/>
+              </a:buClr>
+              <a:buSzPts val="1100"/>
+              <a:buFont typeface="Arial"/>
+              <a:buNone/>
+            </a:pPr>
+            <a:r>
+              <a:rPr b="1" lang="en-US" sz="2000">
+                <a:solidFill>
+                  <a:srgbClr val="0B3D59"/>
+                </a:solidFill>
+                <a:latin typeface="Calibri"/>
+                <a:ea typeface="Calibri"/>
+                <a:cs typeface="Calibri"/>
+                <a:sym typeface="Calibri"/>
+              </a:rPr>
+              <a:t>Phase 3: Encoder &amp; Fusion Development (Weeks 8–10)</a:t>
+            </a:r>
+            <a:br>
+              <a:rPr b="1" lang="en-US" sz="2000">
+                <a:solidFill>
+                  <a:srgbClr val="0B3D59"/>
+                </a:solidFill>
+                <a:latin typeface="Calibri"/>
+                <a:ea typeface="Calibri"/>
+                <a:cs typeface="Calibri"/>
+                <a:sym typeface="Calibri"/>
+              </a:rPr>
+            </a:br>
+            <a:r>
+              <a:rPr lang="en-US" sz="2000">
+                <a:solidFill>
+                  <a:schemeClr val="dk1"/>
+                </a:solidFill>
+                <a:latin typeface="Calibri"/>
+                <a:ea typeface="Calibri"/>
+                <a:cs typeface="Calibri"/>
+                <a:sym typeface="Calibri"/>
+              </a:rPr>
+              <a:t>Train five ViT-B/16 specialist encoders. Implement the cross-modal attention fusion transformer, designed to handle a missing modality input. Begin mobile app development in parallel.</a:t>
+            </a:r>
+            <a:endParaRPr sz="2000">
+              <a:solidFill>
+                <a:schemeClr val="dk1"/>
+              </a:solidFill>
+              <a:latin typeface="Calibri"/>
+              <a:ea typeface="Calibri"/>
+              <a:cs typeface="Calibri"/>
+              <a:sym typeface="Calibri"/>
+            </a:endParaRPr>
+          </a:p>
+          <a:p>
+            <a:pPr indent="0" lvl="0" marL="0" rtl="0" algn="just">
+              <a:lnSpc>
+                <a:spcPct val="150000"/>
+              </a:lnSpc>
+              <a:spcBef>
+                <a:spcPts val="1200"/>
+              </a:spcBef>
+              <a:spcAft>
+                <a:spcPts val="0"/>
+              </a:spcAft>
+              <a:buNone/>
+            </a:pPr>
+            <a:r>
+              <a:t/>
+            </a:r>
+            <a:endParaRPr b="1" sz="2000">
+              <a:solidFill>
+                <a:schemeClr val="dk1"/>
+              </a:solidFill>
+              <a:latin typeface="Calibri"/>
+              <a:ea typeface="Calibri"/>
+              <a:cs typeface="Calibri"/>
+              <a:sym typeface="Calibri"/>
+            </a:endParaRPr>
+          </a:p>
+        </p:txBody>
+      </p:sp>
+      <p:sp>
+        <p:nvSpPr>
+          <p:cNvPr id="309" name="Google Shape;309;p36"/>
+          <p:cNvSpPr txBox="1"/>
+          <p:nvPr>
+            <p:ph idx="12" type="sldNum"/>
+          </p:nvPr>
+        </p:nvSpPr>
+        <p:spPr>
+          <a:xfrm>
+            <a:off x="6553200" y="6356350"/>
+            <a:ext cx="2133600" cy="365100"/>
+          </a:xfrm>
+          <a:prstGeom prst="rect">
+            <a:avLst/>
+          </a:prstGeom>
+        </p:spPr>
+        <p:txBody>
+          <a:bodyPr anchorCtr="0" anchor="ctr" bIns="45700" lIns="91425" spcFirstLastPara="1" rIns="91425" wrap="square" tIns="45700">
+            <a:noAutofit/>
+          </a:bodyPr>
+          <a:lstStyle/>
+          <a:p>
+            <a:pPr indent="0" lvl="0" marL="0" rtl="0" algn="r">
+              <a:spcBef>
+                <a:spcPts val="0"/>
+              </a:spcBef>
+              <a:spcAft>
+                <a:spcPts val="0"/>
+              </a:spcAft>
+              <a:buClr>
+                <a:srgbClr val="000000"/>
+              </a:buClr>
+              <a:buSzPts val="1200"/>
+              <a:buFont typeface="Arial"/>
+              <a:buNone/>
+            </a:pPr>
+            <a:fld id="{00000000-1234-1234-1234-123412341234}" type="slidenum">
+              <a:rPr lang="en-US"/>
+              <a:t>‹#›</a:t>
+            </a:fld>
+            <a:endParaRPr/>
+          </a:p>
+        </p:txBody>
+      </p:sp>
+    </p:spTree>
+  </p:cSld>
+  <p:clrMapOvr>
+    <a:masterClrMapping/>
+  </p:clrMapOvr>
+</p:sld>
+</file>
+
+<file path=ppt/slides/slide25.xml><?xml version="1.0" encoding="utf-8"?>
+<p:sld xmlns:a="http://schemas.openxmlformats.org/drawingml/2006/main" xmlns:r="http://schemas.openxmlformats.org/officeDocument/2006/relationships" xmlns:mc="http://schemas.openxmlformats.org/markup-compatibility/2006" xmlns:mv="urn:schemas-microsoft-com:mac:vml" xmlns:p="http://schemas.openxmlformats.org/presentationml/2006/main" xmlns:c="http://schemas.openxmlformats.org/drawingml/2006/chart" xmlns:dgm="http://schemas.openxmlformats.org/drawingml/2006/diagram" xmlns:o="urn:schemas-microsoft-com:office:office" xmlns:v="urn:schemas-microsoft-com:vml" xmlns:pvml="urn:schemas-microsoft-com:office:powerpoint" xmlns:com="http://schemas.openxmlformats.org/drawingml/2006/compatibility" xmlns:p14="http://schemas.microsoft.com/office/powerpoint/2010/main" xmlns:p15="http://schemas.microsoft.com/office/powerpoint/2012/main" xmlns:ahyp="http://schemas.microsoft.com/office/drawing/2018/hyperlinkcolor">
+  <p:cSld>
+    <p:spTree>
+      <p:nvGrpSpPr>
+        <p:cNvPr id="313" name="Shape 313"/>
+        <p:cNvGrpSpPr/>
+        <p:nvPr/>
+      </p:nvGrpSpPr>
+      <p:grpSpPr>
+        <a:xfrm>
+          <a:off x="0" y="0"/>
+          <a:ext cx="0" cy="0"/>
+          <a:chOff x="0" y="0"/>
+          <a:chExt cx="0" cy="0"/>
+        </a:xfrm>
+      </p:grpSpPr>
+      <p:sp>
+        <p:nvSpPr>
+          <p:cNvPr id="314" name="Google Shape;314;p37"/>
+          <p:cNvSpPr txBox="1"/>
+          <p:nvPr>
+            <p:ph type="title"/>
+          </p:nvPr>
+        </p:nvSpPr>
+        <p:spPr>
+          <a:xfrm>
+            <a:off x="457200" y="182041"/>
+            <a:ext cx="8229600" cy="1143000"/>
+          </a:xfrm>
+          <a:prstGeom prst="rect">
+            <a:avLst/>
+          </a:prstGeom>
+          <a:noFill/>
+          <a:ln>
+            <a:noFill/>
+          </a:ln>
+        </p:spPr>
+        <p:txBody>
+          <a:bodyPr anchorCtr="0" anchor="ctr" bIns="45700" lIns="91425" spcFirstLastPara="1" rIns="91425" wrap="square" tIns="45700">
+            <a:noAutofit/>
+          </a:bodyPr>
+          <a:lstStyle/>
+          <a:p>
+            <a:pPr indent="0" lvl="0" marL="0" rtl="0" algn="ctr">
+              <a:spcBef>
+                <a:spcPts val="0"/>
+              </a:spcBef>
+              <a:spcAft>
+                <a:spcPts val="0"/>
+              </a:spcAft>
+              <a:buSzPts val="1400"/>
+              <a:buNone/>
+            </a:pPr>
+            <a:r>
+              <a:rPr b="1" lang="en-US" sz="4000">
+                <a:solidFill>
+                  <a:srgbClr val="0B3D59"/>
+                </a:solidFill>
+              </a:rPr>
+              <a:t>Work Breakdown</a:t>
+            </a:r>
+            <a:endParaRPr/>
+          </a:p>
+        </p:txBody>
+      </p:sp>
+      <p:sp>
+        <p:nvSpPr>
+          <p:cNvPr id="315" name="Google Shape;315;p37"/>
+          <p:cNvSpPr txBox="1"/>
+          <p:nvPr/>
+        </p:nvSpPr>
+        <p:spPr>
+          <a:xfrm>
+            <a:off x="342900" y="1418725"/>
+            <a:ext cx="8343900" cy="4292700"/>
+          </a:xfrm>
+          <a:prstGeom prst="rect">
+            <a:avLst/>
+          </a:prstGeom>
+          <a:noFill/>
+          <a:ln>
+            <a:noFill/>
+          </a:ln>
+        </p:spPr>
+        <p:txBody>
+          <a:bodyPr anchorCtr="0" anchor="t" bIns="91425" lIns="91425" spcFirstLastPara="1" rIns="91425" wrap="square" tIns="91425">
+            <a:noAutofit/>
+          </a:bodyPr>
+          <a:lstStyle/>
+          <a:p>
+            <a:pPr indent="0" lvl="0" marL="0" rtl="0" algn="just">
+              <a:lnSpc>
+                <a:spcPct val="150000"/>
+              </a:lnSpc>
+              <a:spcBef>
+                <a:spcPts val="1200"/>
+              </a:spcBef>
+              <a:spcAft>
+                <a:spcPts val="0"/>
+              </a:spcAft>
+              <a:buClr>
+                <a:schemeClr val="dk1"/>
+              </a:buClr>
+              <a:buSzPts val="1100"/>
+              <a:buFont typeface="Arial"/>
+              <a:buNone/>
+            </a:pPr>
+            <a:r>
+              <a:rPr b="1" lang="en-US" sz="2100">
+                <a:solidFill>
+                  <a:srgbClr val="0B3D59"/>
+                </a:solidFill>
+                <a:latin typeface="Calibri"/>
+                <a:ea typeface="Calibri"/>
+                <a:cs typeface="Calibri"/>
+                <a:sym typeface="Calibri"/>
+              </a:rPr>
+              <a:t>Phase 4: Model Testing &amp; App Integration (Weeks 11–13)</a:t>
+            </a:r>
+            <a:br>
+              <a:rPr b="1" lang="en-US" sz="2100">
+                <a:solidFill>
+                  <a:schemeClr val="dk1"/>
+                </a:solidFill>
+                <a:latin typeface="Calibri"/>
+                <a:ea typeface="Calibri"/>
+                <a:cs typeface="Calibri"/>
+                <a:sym typeface="Calibri"/>
+              </a:rPr>
+            </a:br>
+            <a:r>
+              <a:rPr lang="en-US" sz="2100">
+                <a:solidFill>
+                  <a:schemeClr val="dk1"/>
+                </a:solidFill>
+                <a:latin typeface="Calibri"/>
+                <a:ea typeface="Calibri"/>
+                <a:cs typeface="Calibri"/>
+                <a:sym typeface="Calibri"/>
+              </a:rPr>
+              <a:t>Full model training and evaluation. Continue app development, connect app to the model pipeline end-to-end.</a:t>
+            </a:r>
+            <a:endParaRPr sz="2100">
+              <a:solidFill>
+                <a:schemeClr val="dk1"/>
+              </a:solidFill>
+              <a:latin typeface="Calibri"/>
+              <a:ea typeface="Calibri"/>
+              <a:cs typeface="Calibri"/>
+              <a:sym typeface="Calibri"/>
+            </a:endParaRPr>
+          </a:p>
+          <a:p>
+            <a:pPr indent="0" lvl="0" marL="0" rtl="0" algn="just">
+              <a:lnSpc>
+                <a:spcPct val="150000"/>
+              </a:lnSpc>
+              <a:spcBef>
+                <a:spcPts val="1200"/>
+              </a:spcBef>
+              <a:spcAft>
+                <a:spcPts val="0"/>
+              </a:spcAft>
+              <a:buClr>
+                <a:schemeClr val="dk1"/>
+              </a:buClr>
+              <a:buSzPts val="1100"/>
+              <a:buFont typeface="Arial"/>
+              <a:buNone/>
+            </a:pPr>
+            <a:r>
+              <a:rPr b="1" lang="en-US" sz="2100">
+                <a:solidFill>
+                  <a:srgbClr val="0B3D59"/>
+                </a:solidFill>
+                <a:latin typeface="Calibri"/>
+                <a:ea typeface="Calibri"/>
+                <a:cs typeface="Calibri"/>
+                <a:sym typeface="Calibri"/>
+              </a:rPr>
+              <a:t>Phase 5: Integration, Testing &amp; Documentation (Weeks 14–16)</a:t>
+            </a:r>
+            <a:br>
+              <a:rPr b="1" lang="en-US" sz="2100">
+                <a:solidFill>
+                  <a:srgbClr val="0B3D59"/>
+                </a:solidFill>
+                <a:latin typeface="Calibri"/>
+                <a:ea typeface="Calibri"/>
+                <a:cs typeface="Calibri"/>
+                <a:sym typeface="Calibri"/>
+              </a:rPr>
+            </a:br>
+            <a:r>
+              <a:rPr lang="en-US" sz="2100">
+                <a:solidFill>
+                  <a:schemeClr val="dk1"/>
+                </a:solidFill>
+                <a:latin typeface="Calibri"/>
+                <a:ea typeface="Calibri"/>
+                <a:cs typeface="Calibri"/>
+                <a:sym typeface="Calibri"/>
+              </a:rPr>
+              <a:t>Final integration testing between app and model. Benchmark against literature baselines. Finalize documentation.</a:t>
+            </a:r>
+            <a:endParaRPr sz="2100">
+              <a:solidFill>
+                <a:schemeClr val="dk1"/>
+              </a:solidFill>
+              <a:latin typeface="Calibri"/>
+              <a:ea typeface="Calibri"/>
+              <a:cs typeface="Calibri"/>
+              <a:sym typeface="Calibri"/>
+            </a:endParaRPr>
+          </a:p>
+          <a:p>
+            <a:pPr indent="0" lvl="0" marL="0" rtl="0" algn="just">
+              <a:lnSpc>
+                <a:spcPct val="150000"/>
+              </a:lnSpc>
+              <a:spcBef>
+                <a:spcPts val="1200"/>
+              </a:spcBef>
+              <a:spcAft>
+                <a:spcPts val="1200"/>
+              </a:spcAft>
+              <a:buClr>
+                <a:schemeClr val="dk1"/>
+              </a:buClr>
+              <a:buSzPts val="1100"/>
+              <a:buFont typeface="Arial"/>
+              <a:buNone/>
+            </a:pPr>
+            <a:r>
+              <a:rPr b="1" lang="en-US" sz="2100">
+                <a:solidFill>
+                  <a:srgbClr val="0B3D59"/>
+                </a:solidFill>
+                <a:latin typeface="Calibri"/>
+                <a:ea typeface="Calibri"/>
+                <a:cs typeface="Calibri"/>
+                <a:sym typeface="Calibri"/>
+              </a:rPr>
+              <a:t>Phase 6: Part 1 Defense Prep (After Finals)</a:t>
+            </a:r>
+            <a:br>
+              <a:rPr b="1" lang="en-US" sz="2100">
+                <a:solidFill>
+                  <a:schemeClr val="dk1"/>
+                </a:solidFill>
+                <a:latin typeface="Calibri"/>
+                <a:ea typeface="Calibri"/>
+                <a:cs typeface="Calibri"/>
+                <a:sym typeface="Calibri"/>
+              </a:rPr>
+            </a:br>
+            <a:r>
+              <a:rPr lang="en-US" sz="2100">
+                <a:solidFill>
+                  <a:schemeClr val="dk1"/>
+                </a:solidFill>
+                <a:latin typeface="Calibri"/>
+                <a:ea typeface="Calibri"/>
+                <a:cs typeface="Calibri"/>
+                <a:sym typeface="Calibri"/>
+              </a:rPr>
+              <a:t>Rehearse and deliver Part 1 Defense.</a:t>
+            </a:r>
+            <a:endParaRPr b="1" sz="2100">
+              <a:solidFill>
+                <a:schemeClr val="dk1"/>
+              </a:solidFill>
+              <a:latin typeface="Calibri"/>
+              <a:ea typeface="Calibri"/>
+              <a:cs typeface="Calibri"/>
+              <a:sym typeface="Calibri"/>
+            </a:endParaRPr>
+          </a:p>
+        </p:txBody>
+      </p:sp>
+      <p:sp>
+        <p:nvSpPr>
+          <p:cNvPr id="316" name="Google Shape;316;p37"/>
+          <p:cNvSpPr txBox="1"/>
+          <p:nvPr>
+            <p:ph idx="12" type="sldNum"/>
+          </p:nvPr>
+        </p:nvSpPr>
+        <p:spPr>
+          <a:xfrm>
+            <a:off x="6553200" y="6356350"/>
+            <a:ext cx="2133600" cy="365100"/>
+          </a:xfrm>
+          <a:prstGeom prst="rect">
+            <a:avLst/>
+          </a:prstGeom>
+        </p:spPr>
+        <p:txBody>
+          <a:bodyPr anchorCtr="0" anchor="ctr" bIns="45700" lIns="91425" spcFirstLastPara="1" rIns="91425" wrap="square" tIns="45700">
+            <a:noAutofit/>
+          </a:bodyPr>
+          <a:lstStyle/>
+          <a:p>
+            <a:pPr indent="0" lvl="0" marL="0" rtl="0" algn="r">
+              <a:spcBef>
+                <a:spcPts val="0"/>
+              </a:spcBef>
+              <a:spcAft>
+                <a:spcPts val="0"/>
+              </a:spcAft>
+              <a:buClr>
+                <a:srgbClr val="000000"/>
+              </a:buClr>
+              <a:buSzPts val="1200"/>
+              <a:buFont typeface="Arial"/>
+              <a:buNone/>
+            </a:pPr>
+            <a:fld id="{00000000-1234-1234-1234-123412341234}" type="slidenum">
+              <a:rPr lang="en-US"/>
+              <a:t>‹#›</a:t>
+            </a:fld>
+            <a:endParaRPr/>
+          </a:p>
+        </p:txBody>
+      </p:sp>
+    </p:spTree>
+  </p:cSld>
+  <p:clrMapOvr>
+    <a:masterClrMapping/>
+  </p:clrMapOvr>
+</p:sld>
+</file>
+
+<file path=ppt/slides/slide26.xml><?xml version="1.0" encoding="utf-8"?>
+<p:sld xmlns:a="http://schemas.openxmlformats.org/drawingml/2006/main" xmlns:r="http://schemas.openxmlformats.org/officeDocument/2006/relationships" xmlns:mc="http://schemas.openxmlformats.org/markup-compatibility/2006" xmlns:mv="urn:schemas-microsoft-com:mac:vml" xmlns:p="http://schemas.openxmlformats.org/presentationml/2006/main" xmlns:c="http://schemas.openxmlformats.org/drawingml/2006/chart" xmlns:dgm="http://schemas.openxmlformats.org/drawingml/2006/diagram" xmlns:o="urn:schemas-microsoft-com:office:office" xmlns:v="urn:schemas-microsoft-com:vml" xmlns:pvml="urn:schemas-microsoft-com:office:powerpoint" xmlns:com="http://schemas.openxmlformats.org/drawingml/2006/compatibility" xmlns:p14="http://schemas.microsoft.com/office/powerpoint/2010/main" xmlns:p15="http://schemas.microsoft.com/office/powerpoint/2012/main" xmlns:ahyp="http://schemas.microsoft.com/office/drawing/2018/hyperlinkcolor">
+  <p:cSld>
+    <p:spTree>
+      <p:nvGrpSpPr>
+        <p:cNvPr id="320" name="Shape 320"/>
+        <p:cNvGrpSpPr/>
+        <p:nvPr/>
+      </p:nvGrpSpPr>
+      <p:grpSpPr>
+        <a:xfrm>
+          <a:off x="0" y="0"/>
+          <a:ext cx="0" cy="0"/>
+          <a:chOff x="0" y="0"/>
+          <a:chExt cx="0" cy="0"/>
+        </a:xfrm>
+      </p:grpSpPr>
+      <p:sp>
+        <p:nvSpPr>
+          <p:cNvPr id="321" name="Google Shape;321;p38"/>
+          <p:cNvSpPr txBox="1"/>
+          <p:nvPr>
+            <p:ph type="title"/>
+          </p:nvPr>
+        </p:nvSpPr>
+        <p:spPr>
+          <a:xfrm>
+            <a:off x="722313" y="4406900"/>
+            <a:ext cx="7772400" cy="1362075"/>
+          </a:xfrm>
+          <a:prstGeom prst="rect">
+            <a:avLst/>
+          </a:prstGeom>
+          <a:noFill/>
+          <a:ln>
+            <a:noFill/>
+          </a:ln>
+        </p:spPr>
+        <p:txBody>
+          <a:bodyPr anchorCtr="0" anchor="t" bIns="45700" lIns="91425" spcFirstLastPara="1" rIns="91425" wrap="square" tIns="45700">
+            <a:normAutofit/>
+          </a:bodyPr>
+          <a:lstStyle/>
+          <a:p>
+            <a:pPr indent="0" lvl="0" marL="0" rtl="0" algn="l">
+              <a:spcBef>
+                <a:spcPts val="0"/>
+              </a:spcBef>
+              <a:spcAft>
+                <a:spcPts val="0"/>
+              </a:spcAft>
+              <a:buSzPts val="1400"/>
+              <a:buNone/>
+            </a:pPr>
+            <a:r>
+              <a:rPr b="0" lang="en-US" sz="4400">
+                <a:solidFill>
+                  <a:srgbClr val="0B3D59"/>
+                </a:solidFill>
+              </a:rPr>
+              <a:t>Roles &amp; Responsibilities</a:t>
+            </a:r>
+            <a:endParaRPr/>
+          </a:p>
+        </p:txBody>
+      </p:sp>
+      <p:sp>
+        <p:nvSpPr>
+          <p:cNvPr id="322" name="Google Shape;322;p38"/>
+          <p:cNvSpPr txBox="1"/>
+          <p:nvPr>
+            <p:ph idx="1" type="body"/>
+          </p:nvPr>
+        </p:nvSpPr>
+        <p:spPr>
+          <a:xfrm>
+            <a:off x="722313" y="2906713"/>
+            <a:ext cx="7772400" cy="1500187"/>
+          </a:xfrm>
+          <a:prstGeom prst="rect">
+            <a:avLst/>
+          </a:prstGeom>
+          <a:noFill/>
+          <a:ln>
+            <a:noFill/>
+          </a:ln>
+        </p:spPr>
+        <p:txBody>
+          <a:bodyPr anchorCtr="0" anchor="b" bIns="45700" lIns="91425" spcFirstLastPara="1" rIns="91425" wrap="square" tIns="45700">
+            <a:normAutofit/>
+          </a:bodyPr>
+          <a:lstStyle/>
+          <a:p>
+            <a:pPr indent="0" lvl="0" marL="44450" rtl="0" algn="l">
+              <a:lnSpc>
+                <a:spcPct val="100000"/>
+              </a:lnSpc>
+              <a:spcBef>
+                <a:spcPts val="0"/>
+              </a:spcBef>
+              <a:spcAft>
+                <a:spcPts val="0"/>
+              </a:spcAft>
+              <a:buClr>
+                <a:srgbClr val="888888"/>
+              </a:buClr>
+              <a:buSzPts val="2000"/>
+              <a:buFont typeface="Arial"/>
+              <a:buNone/>
+            </a:pPr>
+            <a:r>
+              <a:t/>
+            </a:r>
+            <a:endParaRPr/>
+          </a:p>
+        </p:txBody>
+      </p:sp>
+      <p:sp>
+        <p:nvSpPr>
+          <p:cNvPr id="323" name="Google Shape;323;p38"/>
+          <p:cNvSpPr txBox="1"/>
+          <p:nvPr>
+            <p:ph idx="12" type="sldNum"/>
+          </p:nvPr>
+        </p:nvSpPr>
+        <p:spPr>
+          <a:xfrm>
+            <a:off x="6553200" y="6356350"/>
+            <a:ext cx="2133600" cy="365100"/>
+          </a:xfrm>
+          <a:prstGeom prst="rect">
+            <a:avLst/>
+          </a:prstGeom>
+        </p:spPr>
+        <p:txBody>
+          <a:bodyPr anchorCtr="0" anchor="ctr" bIns="45700" lIns="91425" spcFirstLastPara="1" rIns="91425" wrap="square" tIns="45700">
+            <a:noAutofit/>
+          </a:bodyPr>
+          <a:lstStyle/>
+          <a:p>
+            <a:pPr indent="0" lvl="0" marL="0" rtl="0" algn="r">
+              <a:spcBef>
+                <a:spcPts val="0"/>
+              </a:spcBef>
+              <a:spcAft>
+                <a:spcPts val="0"/>
+              </a:spcAft>
+              <a:buClr>
+                <a:srgbClr val="000000"/>
+              </a:buClr>
+              <a:buSzPts val="1200"/>
+              <a:buFont typeface="Arial"/>
+              <a:buNone/>
+            </a:pPr>
+            <a:fld id="{00000000-1234-1234-1234-123412341234}" type="slidenum">
+              <a:rPr lang="en-US"/>
+              <a:t>‹#›</a:t>
+            </a:fld>
+            <a:endParaRPr/>
+          </a:p>
+        </p:txBody>
+      </p:sp>
+    </p:spTree>
+  </p:cSld>
+  <p:clrMapOvr>
+    <a:masterClrMapping/>
+  </p:clrMapOvr>
+</p:sld>
+</file>
+
+<file path=ppt/slides/slide27.xml><?xml version="1.0" encoding="utf-8"?>
+<p:sld xmlns:a="http://schemas.openxmlformats.org/drawingml/2006/main" xmlns:r="http://schemas.openxmlformats.org/officeDocument/2006/relationships" xmlns:mc="http://schemas.openxmlformats.org/markup-compatibility/2006" xmlns:mv="urn:schemas-microsoft-com:mac:vml" xmlns:p="http://schemas.openxmlformats.org/presentationml/2006/main" xmlns:c="http://schemas.openxmlformats.org/drawingml/2006/chart" xmlns:dgm="http://schemas.openxmlformats.org/drawingml/2006/diagram" xmlns:o="urn:schemas-microsoft-com:office:office" xmlns:v="urn:schemas-microsoft-com:vml" xmlns:pvml="urn:schemas-microsoft-com:office:powerpoint" xmlns:com="http://schemas.openxmlformats.org/drawingml/2006/compatibility" xmlns:p14="http://schemas.microsoft.com/office/powerpoint/2010/main" xmlns:p15="http://schemas.microsoft.com/office/powerpoint/2012/main" xmlns:ahyp="http://schemas.microsoft.com/office/drawing/2018/hyperlinkcolor">
+  <p:cSld>
+    <p:spTree>
+      <p:nvGrpSpPr>
+        <p:cNvPr id="327" name="Shape 327"/>
+        <p:cNvGrpSpPr/>
+        <p:nvPr/>
+      </p:nvGrpSpPr>
+      <p:grpSpPr>
+        <a:xfrm>
+          <a:off x="0" y="0"/>
+          <a:ext cx="0" cy="0"/>
+          <a:chOff x="0" y="0"/>
+          <a:chExt cx="0" cy="0"/>
+        </a:xfrm>
+      </p:grpSpPr>
+      <p:sp>
+        <p:nvSpPr>
+          <p:cNvPr id="328" name="Google Shape;328;p39"/>
           <p:cNvSpPr txBox="1"/>
           <p:nvPr>
             <p:ph type="title"/>
@@ -23028,739 +25374,6 @@
           <a:lstStyle/>
           <a:p>
             <a:pPr indent="0" lvl="0" marL="0" rtl="0" algn="ctr">
-              <a:spcBef>
-                <a:spcPts val="0"/>
-              </a:spcBef>
-              <a:spcAft>
-                <a:spcPts val="0"/>
-              </a:spcAft>
-              <a:buClr>
-                <a:schemeClr val="dk1"/>
-              </a:buClr>
-              <a:buSzPts val="1400"/>
-              <a:buFont typeface="Arial"/>
-              <a:buNone/>
-            </a:pPr>
-            <a:r>
-              <a:rPr b="1" lang="en-US" sz="4000">
-                <a:solidFill>
-                  <a:srgbClr val="0B3D59"/>
-                </a:solidFill>
-              </a:rPr>
-              <a:t>Work Breakdown</a:t>
-            </a:r>
-            <a:endParaRPr/>
-          </a:p>
-        </p:txBody>
-      </p:sp>
-      <p:sp>
-        <p:nvSpPr>
-          <p:cNvPr id="280" name="Google Shape;280;p35"/>
-          <p:cNvSpPr txBox="1"/>
-          <p:nvPr/>
-        </p:nvSpPr>
-        <p:spPr>
-          <a:xfrm>
-            <a:off x="342900" y="1418725"/>
-            <a:ext cx="8343900" cy="4292700"/>
-          </a:xfrm>
-          <a:prstGeom prst="rect">
-            <a:avLst/>
-          </a:prstGeom>
-          <a:noFill/>
-          <a:ln>
-            <a:noFill/>
-          </a:ln>
-        </p:spPr>
-        <p:txBody>
-          <a:bodyPr anchorCtr="0" anchor="t" bIns="91425" lIns="91425" spcFirstLastPara="1" rIns="91425" wrap="square" tIns="91425">
-            <a:noAutofit/>
-          </a:bodyPr>
-          <a:lstStyle/>
-          <a:p>
-            <a:pPr indent="0" lvl="0" marL="0" rtl="0" algn="just">
-              <a:lnSpc>
-                <a:spcPct val="150000"/>
-              </a:lnSpc>
-              <a:spcBef>
-                <a:spcPts val="0"/>
-              </a:spcBef>
-              <a:spcAft>
-                <a:spcPts val="0"/>
-              </a:spcAft>
-              <a:buClr>
-                <a:schemeClr val="dk1"/>
-              </a:buClr>
-              <a:buSzPts val="1100"/>
-              <a:buFont typeface="Arial"/>
-              <a:buNone/>
-            </a:pPr>
-            <a:r>
-              <a:rPr b="1" lang="en-US" sz="1900">
-                <a:solidFill>
-                  <a:srgbClr val="0B3D59"/>
-                </a:solidFill>
-                <a:latin typeface="Calibri"/>
-                <a:ea typeface="Calibri"/>
-                <a:cs typeface="Calibri"/>
-                <a:sym typeface="Calibri"/>
-              </a:rPr>
-              <a:t>Phase 1: Proposal &amp; Literature Foundation (Weeks 1–4)</a:t>
-            </a:r>
-            <a:br>
-              <a:rPr b="1" lang="en-US" sz="1900">
-                <a:solidFill>
-                  <a:schemeClr val="dk1"/>
-                </a:solidFill>
-                <a:latin typeface="Calibri"/>
-                <a:ea typeface="Calibri"/>
-                <a:cs typeface="Calibri"/>
-                <a:sym typeface="Calibri"/>
-              </a:rPr>
-            </a:br>
-            <a:r>
-              <a:rPr lang="en-US" sz="1900">
-                <a:solidFill>
-                  <a:schemeClr val="dk1"/>
-                </a:solidFill>
-                <a:latin typeface="Calibri"/>
-                <a:ea typeface="Calibri"/>
-                <a:cs typeface="Calibri"/>
-                <a:sym typeface="Calibri"/>
-              </a:rPr>
-              <a:t>Finalize literature review, gap analysis, problem statement. Build and deliver proposal presentation.</a:t>
-            </a:r>
-            <a:endParaRPr i="1" sz="1900">
-              <a:solidFill>
-                <a:schemeClr val="dk1"/>
-              </a:solidFill>
-              <a:latin typeface="Calibri"/>
-              <a:ea typeface="Calibri"/>
-              <a:cs typeface="Calibri"/>
-              <a:sym typeface="Calibri"/>
-            </a:endParaRPr>
-          </a:p>
-          <a:p>
-            <a:pPr indent="0" lvl="0" marL="0" rtl="0" algn="just">
-              <a:lnSpc>
-                <a:spcPct val="150000"/>
-              </a:lnSpc>
-              <a:spcBef>
-                <a:spcPts val="1200"/>
-              </a:spcBef>
-              <a:spcAft>
-                <a:spcPts val="0"/>
-              </a:spcAft>
-              <a:buClr>
-                <a:schemeClr val="dk1"/>
-              </a:buClr>
-              <a:buSzPts val="1100"/>
-              <a:buFont typeface="Arial"/>
-              <a:buNone/>
-            </a:pPr>
-            <a:r>
-              <a:rPr b="1" lang="en-US" sz="1900">
-                <a:solidFill>
-                  <a:srgbClr val="0B3D59"/>
-                </a:solidFill>
-                <a:latin typeface="Calibri"/>
-                <a:ea typeface="Calibri"/>
-                <a:cs typeface="Calibri"/>
-                <a:sym typeface="Calibri"/>
-              </a:rPr>
-              <a:t>Phase 2: Data Pipeline &amp; Preprocessing (Weeks 5–7)</a:t>
-            </a:r>
-            <a:br>
-              <a:rPr b="1" lang="en-US" sz="1900">
-                <a:solidFill>
-                  <a:schemeClr val="dk1"/>
-                </a:solidFill>
-                <a:latin typeface="Calibri"/>
-                <a:ea typeface="Calibri"/>
-                <a:cs typeface="Calibri"/>
-                <a:sym typeface="Calibri"/>
-              </a:rPr>
-            </a:br>
-            <a:r>
-              <a:rPr lang="en-US" sz="1900">
-                <a:solidFill>
-                  <a:schemeClr val="dk1"/>
-                </a:solidFill>
-                <a:latin typeface="Calibri"/>
-                <a:ea typeface="Calibri"/>
-                <a:cs typeface="Calibri"/>
-                <a:sym typeface="Calibri"/>
-              </a:rPr>
-              <a:t>Collect and standardize all five modality datasets. Address class imbalance. Build train/validation/test splits.</a:t>
-            </a:r>
-            <a:endParaRPr sz="1900">
-              <a:solidFill>
-                <a:schemeClr val="dk1"/>
-              </a:solidFill>
-              <a:latin typeface="Calibri"/>
-              <a:ea typeface="Calibri"/>
-              <a:cs typeface="Calibri"/>
-              <a:sym typeface="Calibri"/>
-            </a:endParaRPr>
-          </a:p>
-          <a:p>
-            <a:pPr indent="0" lvl="0" marL="0" rtl="0" algn="just">
-              <a:lnSpc>
-                <a:spcPct val="150000"/>
-              </a:lnSpc>
-              <a:spcBef>
-                <a:spcPts val="1200"/>
-              </a:spcBef>
-              <a:spcAft>
-                <a:spcPts val="0"/>
-              </a:spcAft>
-              <a:buClr>
-                <a:schemeClr val="dk1"/>
-              </a:buClr>
-              <a:buSzPts val="1100"/>
-              <a:buFont typeface="Arial"/>
-              <a:buNone/>
-            </a:pPr>
-            <a:r>
-              <a:rPr b="1" lang="en-US" sz="1900">
-                <a:solidFill>
-                  <a:srgbClr val="0B3D59"/>
-                </a:solidFill>
-                <a:latin typeface="Calibri"/>
-                <a:ea typeface="Calibri"/>
-                <a:cs typeface="Calibri"/>
-                <a:sym typeface="Calibri"/>
-              </a:rPr>
-              <a:t>Phase 3: Encoder &amp; Fusion Development (Weeks 8–10)</a:t>
-            </a:r>
-            <a:br>
-              <a:rPr b="1" lang="en-US" sz="1900">
-                <a:solidFill>
-                  <a:srgbClr val="0B3D59"/>
-                </a:solidFill>
-                <a:latin typeface="Calibri"/>
-                <a:ea typeface="Calibri"/>
-                <a:cs typeface="Calibri"/>
-                <a:sym typeface="Calibri"/>
-              </a:rPr>
-            </a:br>
-            <a:r>
-              <a:rPr lang="en-US" sz="1900">
-                <a:solidFill>
-                  <a:schemeClr val="dk1"/>
-                </a:solidFill>
-                <a:latin typeface="Calibri"/>
-                <a:ea typeface="Calibri"/>
-                <a:cs typeface="Calibri"/>
-                <a:sym typeface="Calibri"/>
-              </a:rPr>
-              <a:t>Train five ViT-B/16 specialist encoders. Implement the cross-modal attention fusion transformer, designed to handle a missing modality input. Begin mobile app development in parallel.</a:t>
-            </a:r>
-            <a:endParaRPr sz="1900">
-              <a:solidFill>
-                <a:schemeClr val="dk1"/>
-              </a:solidFill>
-              <a:latin typeface="Calibri"/>
-              <a:ea typeface="Calibri"/>
-              <a:cs typeface="Calibri"/>
-              <a:sym typeface="Calibri"/>
-            </a:endParaRPr>
-          </a:p>
-          <a:p>
-            <a:pPr indent="0" lvl="0" marL="0" rtl="0" algn="just">
-              <a:lnSpc>
-                <a:spcPct val="150000"/>
-              </a:lnSpc>
-              <a:spcBef>
-                <a:spcPts val="1200"/>
-              </a:spcBef>
-              <a:spcAft>
-                <a:spcPts val="0"/>
-              </a:spcAft>
-              <a:buNone/>
-            </a:pPr>
-            <a:r>
-              <a:t/>
-            </a:r>
-            <a:endParaRPr b="1" sz="2800">
-              <a:solidFill>
-                <a:schemeClr val="dk1"/>
-              </a:solidFill>
-              <a:latin typeface="Calibri"/>
-              <a:ea typeface="Calibri"/>
-              <a:cs typeface="Calibri"/>
-              <a:sym typeface="Calibri"/>
-            </a:endParaRPr>
-          </a:p>
-        </p:txBody>
-      </p:sp>
-    </p:spTree>
-  </p:cSld>
-  <p:clrMapOvr>
-    <a:masterClrMapping/>
-  </p:clrMapOvr>
-</p:sld>
-</file>
-
-<file path=ppt/slides/slide24.xml><?xml version="1.0" encoding="utf-8"?>
-<p:sld xmlns:a="http://schemas.openxmlformats.org/drawingml/2006/main" xmlns:r="http://schemas.openxmlformats.org/officeDocument/2006/relationships" xmlns:mc="http://schemas.openxmlformats.org/markup-compatibility/2006" xmlns:mv="urn:schemas-microsoft-com:mac:vml" xmlns:p="http://schemas.openxmlformats.org/presentationml/2006/main" xmlns:c="http://schemas.openxmlformats.org/drawingml/2006/chart" xmlns:dgm="http://schemas.openxmlformats.org/drawingml/2006/diagram" xmlns:o="urn:schemas-microsoft-com:office:office" xmlns:v="urn:schemas-microsoft-com:vml" xmlns:pvml="urn:schemas-microsoft-com:office:powerpoint" xmlns:com="http://schemas.openxmlformats.org/drawingml/2006/compatibility" xmlns:p14="http://schemas.microsoft.com/office/powerpoint/2010/main" xmlns:p15="http://schemas.microsoft.com/office/powerpoint/2012/main" xmlns:ahyp="http://schemas.microsoft.com/office/drawing/2018/hyperlinkcolor">
-  <p:cSld>
-    <p:spTree>
-      <p:nvGrpSpPr>
-        <p:cNvPr id="284" name="Shape 284"/>
-        <p:cNvGrpSpPr/>
-        <p:nvPr/>
-      </p:nvGrpSpPr>
-      <p:grpSpPr>
-        <a:xfrm>
-          <a:off x="0" y="0"/>
-          <a:ext cx="0" cy="0"/>
-          <a:chOff x="0" y="0"/>
-          <a:chExt cx="0" cy="0"/>
-        </a:xfrm>
-      </p:grpSpPr>
-      <p:sp>
-        <p:nvSpPr>
-          <p:cNvPr id="285" name="Google Shape;285;p36"/>
-          <p:cNvSpPr txBox="1"/>
-          <p:nvPr>
-            <p:ph type="title"/>
-          </p:nvPr>
-        </p:nvSpPr>
-        <p:spPr>
-          <a:xfrm>
-            <a:off x="457200" y="274638"/>
-            <a:ext cx="8229600" cy="1143000"/>
-          </a:xfrm>
-          <a:prstGeom prst="rect">
-            <a:avLst/>
-          </a:prstGeom>
-          <a:noFill/>
-          <a:ln>
-            <a:noFill/>
-          </a:ln>
-        </p:spPr>
-        <p:txBody>
-          <a:bodyPr anchorCtr="0" anchor="ctr" bIns="45700" lIns="91425" spcFirstLastPara="1" rIns="91425" wrap="square" tIns="45700">
-            <a:noAutofit/>
-          </a:bodyPr>
-          <a:lstStyle/>
-          <a:p>
-            <a:pPr indent="0" lvl="0" marL="0" rtl="0" algn="ctr">
-              <a:spcBef>
-                <a:spcPts val="0"/>
-              </a:spcBef>
-              <a:spcAft>
-                <a:spcPts val="0"/>
-              </a:spcAft>
-              <a:buSzPts val="1400"/>
-              <a:buNone/>
-            </a:pPr>
-            <a:r>
-              <a:rPr b="1" lang="en-US" sz="4000">
-                <a:solidFill>
-                  <a:srgbClr val="0B3D59"/>
-                </a:solidFill>
-              </a:rPr>
-              <a:t>Work Breakdown</a:t>
-            </a:r>
-            <a:endParaRPr/>
-          </a:p>
-        </p:txBody>
-      </p:sp>
-      <p:sp>
-        <p:nvSpPr>
-          <p:cNvPr id="286" name="Google Shape;286;p36"/>
-          <p:cNvSpPr txBox="1"/>
-          <p:nvPr/>
-        </p:nvSpPr>
-        <p:spPr>
-          <a:xfrm>
-            <a:off x="342900" y="1418725"/>
-            <a:ext cx="8343900" cy="4292700"/>
-          </a:xfrm>
-          <a:prstGeom prst="rect">
-            <a:avLst/>
-          </a:prstGeom>
-          <a:noFill/>
-          <a:ln>
-            <a:noFill/>
-          </a:ln>
-        </p:spPr>
-        <p:txBody>
-          <a:bodyPr anchorCtr="0" anchor="t" bIns="91425" lIns="91425" spcFirstLastPara="1" rIns="91425" wrap="square" tIns="91425">
-            <a:noAutofit/>
-          </a:bodyPr>
-          <a:lstStyle/>
-          <a:p>
-            <a:pPr indent="0" lvl="0" marL="0" rtl="0" algn="just">
-              <a:lnSpc>
-                <a:spcPct val="150000"/>
-              </a:lnSpc>
-              <a:spcBef>
-                <a:spcPts val="1200"/>
-              </a:spcBef>
-              <a:spcAft>
-                <a:spcPts val="0"/>
-              </a:spcAft>
-              <a:buClr>
-                <a:schemeClr val="dk1"/>
-              </a:buClr>
-              <a:buSzPts val="1100"/>
-              <a:buFont typeface="Arial"/>
-              <a:buNone/>
-            </a:pPr>
-            <a:r>
-              <a:rPr b="1" lang="en-US" sz="1900">
-                <a:solidFill>
-                  <a:srgbClr val="0B3D59"/>
-                </a:solidFill>
-                <a:latin typeface="Calibri"/>
-                <a:ea typeface="Calibri"/>
-                <a:cs typeface="Calibri"/>
-                <a:sym typeface="Calibri"/>
-              </a:rPr>
-              <a:t>Phase 4: Model Testing &amp; App Integration (Weeks 11–13)</a:t>
-            </a:r>
-            <a:br>
-              <a:rPr b="1" lang="en-US" sz="1900">
-                <a:solidFill>
-                  <a:schemeClr val="dk1"/>
-                </a:solidFill>
-                <a:latin typeface="Calibri"/>
-                <a:ea typeface="Calibri"/>
-                <a:cs typeface="Calibri"/>
-                <a:sym typeface="Calibri"/>
-              </a:rPr>
-            </a:br>
-            <a:r>
-              <a:rPr lang="en-US" sz="1900">
-                <a:solidFill>
-                  <a:schemeClr val="dk1"/>
-                </a:solidFill>
-                <a:latin typeface="Calibri"/>
-                <a:ea typeface="Calibri"/>
-                <a:cs typeface="Calibri"/>
-                <a:sym typeface="Calibri"/>
-              </a:rPr>
-              <a:t>Full model training and evaluation. Continue app development, connect app to the model pipeline end-to-end.</a:t>
-            </a:r>
-            <a:endParaRPr sz="1900">
-              <a:solidFill>
-                <a:schemeClr val="dk1"/>
-              </a:solidFill>
-              <a:latin typeface="Calibri"/>
-              <a:ea typeface="Calibri"/>
-              <a:cs typeface="Calibri"/>
-              <a:sym typeface="Calibri"/>
-            </a:endParaRPr>
-          </a:p>
-          <a:p>
-            <a:pPr indent="0" lvl="0" marL="0" rtl="0" algn="just">
-              <a:lnSpc>
-                <a:spcPct val="150000"/>
-              </a:lnSpc>
-              <a:spcBef>
-                <a:spcPts val="1200"/>
-              </a:spcBef>
-              <a:spcAft>
-                <a:spcPts val="0"/>
-              </a:spcAft>
-              <a:buClr>
-                <a:schemeClr val="dk1"/>
-              </a:buClr>
-              <a:buSzPts val="1100"/>
-              <a:buFont typeface="Arial"/>
-              <a:buNone/>
-            </a:pPr>
-            <a:r>
-              <a:rPr b="1" lang="en-US" sz="1900">
-                <a:solidFill>
-                  <a:srgbClr val="0B3D59"/>
-                </a:solidFill>
-                <a:latin typeface="Calibri"/>
-                <a:ea typeface="Calibri"/>
-                <a:cs typeface="Calibri"/>
-                <a:sym typeface="Calibri"/>
-              </a:rPr>
-              <a:t>Phase 5: Integration, Testing &amp; Documentation (Weeks 14–16)</a:t>
-            </a:r>
-            <a:br>
-              <a:rPr b="1" lang="en-US" sz="1900">
-                <a:solidFill>
-                  <a:srgbClr val="0B3D59"/>
-                </a:solidFill>
-                <a:latin typeface="Calibri"/>
-                <a:ea typeface="Calibri"/>
-                <a:cs typeface="Calibri"/>
-                <a:sym typeface="Calibri"/>
-              </a:rPr>
-            </a:br>
-            <a:r>
-              <a:rPr lang="en-US" sz="1900">
-                <a:solidFill>
-                  <a:schemeClr val="dk1"/>
-                </a:solidFill>
-                <a:latin typeface="Calibri"/>
-                <a:ea typeface="Calibri"/>
-                <a:cs typeface="Calibri"/>
-                <a:sym typeface="Calibri"/>
-              </a:rPr>
-              <a:t>Final integration testing between app and model. Benchmark against literature baselines. Finalize documentation.</a:t>
-            </a:r>
-            <a:endParaRPr sz="1900">
-              <a:solidFill>
-                <a:schemeClr val="dk1"/>
-              </a:solidFill>
-              <a:latin typeface="Calibri"/>
-              <a:ea typeface="Calibri"/>
-              <a:cs typeface="Calibri"/>
-              <a:sym typeface="Calibri"/>
-            </a:endParaRPr>
-          </a:p>
-          <a:p>
-            <a:pPr indent="0" lvl="0" marL="0" rtl="0" algn="just">
-              <a:lnSpc>
-                <a:spcPct val="150000"/>
-              </a:lnSpc>
-              <a:spcBef>
-                <a:spcPts val="1200"/>
-              </a:spcBef>
-              <a:spcAft>
-                <a:spcPts val="1200"/>
-              </a:spcAft>
-              <a:buClr>
-                <a:schemeClr val="dk1"/>
-              </a:buClr>
-              <a:buSzPts val="1100"/>
-              <a:buFont typeface="Arial"/>
-              <a:buNone/>
-            </a:pPr>
-            <a:r>
-              <a:rPr b="1" lang="en-US" sz="1900">
-                <a:solidFill>
-                  <a:srgbClr val="0B3D59"/>
-                </a:solidFill>
-                <a:latin typeface="Calibri"/>
-                <a:ea typeface="Calibri"/>
-                <a:cs typeface="Calibri"/>
-                <a:sym typeface="Calibri"/>
-              </a:rPr>
-              <a:t>Phase 6: Part 1 Defense Prep (After Finals)</a:t>
-            </a:r>
-            <a:br>
-              <a:rPr b="1" lang="en-US" sz="1900">
-                <a:solidFill>
-                  <a:schemeClr val="dk1"/>
-                </a:solidFill>
-                <a:latin typeface="Calibri"/>
-                <a:ea typeface="Calibri"/>
-                <a:cs typeface="Calibri"/>
-                <a:sym typeface="Calibri"/>
-              </a:rPr>
-            </a:br>
-            <a:r>
-              <a:rPr lang="en-US" sz="1900">
-                <a:solidFill>
-                  <a:schemeClr val="dk1"/>
-                </a:solidFill>
-                <a:latin typeface="Calibri"/>
-                <a:ea typeface="Calibri"/>
-                <a:cs typeface="Calibri"/>
-                <a:sym typeface="Calibri"/>
-              </a:rPr>
-              <a:t>Rehearse and deliver Part 1 Defense.</a:t>
-            </a:r>
-            <a:endParaRPr b="1" sz="1900">
-              <a:solidFill>
-                <a:schemeClr val="dk1"/>
-              </a:solidFill>
-              <a:latin typeface="Calibri"/>
-              <a:ea typeface="Calibri"/>
-              <a:cs typeface="Calibri"/>
-              <a:sym typeface="Calibri"/>
-            </a:endParaRPr>
-          </a:p>
-        </p:txBody>
-      </p:sp>
-    </p:spTree>
-  </p:cSld>
-  <p:clrMapOvr>
-    <a:masterClrMapping/>
-  </p:clrMapOvr>
-</p:sld>
-</file>
-
-<file path=ppt/slides/slide25.xml><?xml version="1.0" encoding="utf-8"?>
-<p:sld xmlns:a="http://schemas.openxmlformats.org/drawingml/2006/main" xmlns:r="http://schemas.openxmlformats.org/officeDocument/2006/relationships" xmlns:mc="http://schemas.openxmlformats.org/markup-compatibility/2006" xmlns:mv="urn:schemas-microsoft-com:mac:vml" xmlns:p="http://schemas.openxmlformats.org/presentationml/2006/main" xmlns:c="http://schemas.openxmlformats.org/drawingml/2006/chart" xmlns:dgm="http://schemas.openxmlformats.org/drawingml/2006/diagram" xmlns:o="urn:schemas-microsoft-com:office:office" xmlns:v="urn:schemas-microsoft-com:vml" xmlns:pvml="urn:schemas-microsoft-com:office:powerpoint" xmlns:com="http://schemas.openxmlformats.org/drawingml/2006/compatibility" xmlns:p14="http://schemas.microsoft.com/office/powerpoint/2010/main" xmlns:p15="http://schemas.microsoft.com/office/powerpoint/2012/main" xmlns:ahyp="http://schemas.microsoft.com/office/drawing/2018/hyperlinkcolor">
-  <p:cSld>
-    <p:spTree>
-      <p:nvGrpSpPr>
-        <p:cNvPr id="290" name="Shape 290"/>
-        <p:cNvGrpSpPr/>
-        <p:nvPr/>
-      </p:nvGrpSpPr>
-      <p:grpSpPr>
-        <a:xfrm>
-          <a:off x="0" y="0"/>
-          <a:ext cx="0" cy="0"/>
-          <a:chOff x="0" y="0"/>
-          <a:chExt cx="0" cy="0"/>
-        </a:xfrm>
-      </p:grpSpPr>
-      <p:sp>
-        <p:nvSpPr>
-          <p:cNvPr id="291" name="Google Shape;291;p37"/>
-          <p:cNvSpPr txBox="1"/>
-          <p:nvPr>
-            <p:ph type="title"/>
-          </p:nvPr>
-        </p:nvSpPr>
-        <p:spPr>
-          <a:xfrm>
-            <a:off x="722313" y="4406900"/>
-            <a:ext cx="7772400" cy="1362075"/>
-          </a:xfrm>
-          <a:prstGeom prst="rect">
-            <a:avLst/>
-          </a:prstGeom>
-          <a:noFill/>
-          <a:ln>
-            <a:noFill/>
-          </a:ln>
-        </p:spPr>
-        <p:txBody>
-          <a:bodyPr anchorCtr="0" anchor="t" bIns="45700" lIns="91425" spcFirstLastPara="1" rIns="91425" wrap="square" tIns="45700">
-            <a:normAutofit/>
-          </a:bodyPr>
-          <a:lstStyle/>
-          <a:p>
-            <a:pPr indent="0" lvl="0" marL="0" rtl="0" algn="l">
-              <a:spcBef>
-                <a:spcPts val="0"/>
-              </a:spcBef>
-              <a:spcAft>
-                <a:spcPts val="0"/>
-              </a:spcAft>
-              <a:buSzPts val="1400"/>
-              <a:buNone/>
-            </a:pPr>
-            <a:r>
-              <a:rPr b="0" lang="en-US" sz="4400">
-                <a:solidFill>
-                  <a:srgbClr val="0B3D59"/>
-                </a:solidFill>
-              </a:rPr>
-              <a:t>Roles &amp; Responsibilities</a:t>
-            </a:r>
-            <a:endParaRPr/>
-          </a:p>
-        </p:txBody>
-      </p:sp>
-      <p:sp>
-        <p:nvSpPr>
-          <p:cNvPr id="292" name="Google Shape;292;p37"/>
-          <p:cNvSpPr txBox="1"/>
-          <p:nvPr>
-            <p:ph idx="1" type="body"/>
-          </p:nvPr>
-        </p:nvSpPr>
-        <p:spPr>
-          <a:xfrm>
-            <a:off x="722313" y="2906713"/>
-            <a:ext cx="7772400" cy="1500187"/>
-          </a:xfrm>
-          <a:prstGeom prst="rect">
-            <a:avLst/>
-          </a:prstGeom>
-          <a:noFill/>
-          <a:ln>
-            <a:noFill/>
-          </a:ln>
-        </p:spPr>
-        <p:txBody>
-          <a:bodyPr anchorCtr="0" anchor="b" bIns="45700" lIns="91425" spcFirstLastPara="1" rIns="91425" wrap="square" tIns="45700">
-            <a:normAutofit/>
-          </a:bodyPr>
-          <a:lstStyle/>
-          <a:p>
-            <a:pPr indent="0" lvl="0" marL="44450" rtl="0" algn="l">
-              <a:lnSpc>
-                <a:spcPct val="100000"/>
-              </a:lnSpc>
-              <a:spcBef>
-                <a:spcPts val="0"/>
-              </a:spcBef>
-              <a:spcAft>
-                <a:spcPts val="0"/>
-              </a:spcAft>
-              <a:buClr>
-                <a:srgbClr val="888888"/>
-              </a:buClr>
-              <a:buSzPts val="2000"/>
-              <a:buFont typeface="Arial"/>
-              <a:buNone/>
-            </a:pPr>
-            <a:r>
-              <a:t/>
-            </a:r>
-            <a:endParaRPr/>
-          </a:p>
-        </p:txBody>
-      </p:sp>
-    </p:spTree>
-  </p:cSld>
-  <p:clrMapOvr>
-    <a:masterClrMapping/>
-  </p:clrMapOvr>
-</p:sld>
-</file>
-
-<file path=ppt/slides/slide26.xml><?xml version="1.0" encoding="utf-8"?>
-<p:sld xmlns:a="http://schemas.openxmlformats.org/drawingml/2006/main" xmlns:r="http://schemas.openxmlformats.org/officeDocument/2006/relationships" xmlns:mc="http://schemas.openxmlformats.org/markup-compatibility/2006" xmlns:mv="urn:schemas-microsoft-com:mac:vml" xmlns:p="http://schemas.openxmlformats.org/presentationml/2006/main" xmlns:c="http://schemas.openxmlformats.org/drawingml/2006/chart" xmlns:dgm="http://schemas.openxmlformats.org/drawingml/2006/diagram" xmlns:o="urn:schemas-microsoft-com:office:office" xmlns:v="urn:schemas-microsoft-com:vml" xmlns:pvml="urn:schemas-microsoft-com:office:powerpoint" xmlns:com="http://schemas.openxmlformats.org/drawingml/2006/compatibility" xmlns:p14="http://schemas.microsoft.com/office/powerpoint/2010/main" xmlns:p15="http://schemas.microsoft.com/office/powerpoint/2012/main" xmlns:ahyp="http://schemas.microsoft.com/office/drawing/2018/hyperlinkcolor">
-  <p:cSld>
-    <p:spTree>
-      <p:nvGrpSpPr>
-        <p:cNvPr id="296" name="Shape 296"/>
-        <p:cNvGrpSpPr/>
-        <p:nvPr/>
-      </p:nvGrpSpPr>
-      <p:grpSpPr>
-        <a:xfrm>
-          <a:off x="0" y="0"/>
-          <a:ext cx="0" cy="0"/>
-          <a:chOff x="0" y="0"/>
-          <a:chExt cx="0" cy="0"/>
-        </a:xfrm>
-      </p:grpSpPr>
-      <p:sp>
-        <p:nvSpPr>
-          <p:cNvPr id="297" name="Google Shape;297;p38"/>
-          <p:cNvSpPr txBox="1"/>
-          <p:nvPr>
-            <p:ph type="title"/>
-          </p:nvPr>
-        </p:nvSpPr>
-        <p:spPr>
-          <a:xfrm>
-            <a:off x="457200" y="274638"/>
-            <a:ext cx="8229600" cy="1143000"/>
-          </a:xfrm>
-          <a:prstGeom prst="rect">
-            <a:avLst/>
-          </a:prstGeom>
-          <a:noFill/>
-          <a:ln>
-            <a:noFill/>
-          </a:ln>
-        </p:spPr>
-        <p:txBody>
-          <a:bodyPr anchorCtr="0" anchor="ctr" bIns="45700" lIns="91425" spcFirstLastPara="1" rIns="91425" wrap="square" tIns="45700">
-            <a:noAutofit/>
-          </a:bodyPr>
-          <a:lstStyle/>
-          <a:p>
-            <a:pPr indent="0" lvl="0" marL="0" rtl="0" algn="ctr">
               <a:lnSpc>
                 <a:spcPct val="100000"/>
               </a:lnSpc>
@@ -23791,7 +25404,7 @@
       </p:sp>
       <p:graphicFrame>
         <p:nvGraphicFramePr>
-          <p:cNvPr id="298" name="Google Shape;298;p38"/>
+          <p:cNvPr id="329" name="Google Shape;329;p39"/>
           <p:cNvGraphicFramePr/>
           <p:nvPr/>
         </p:nvGraphicFramePr>
@@ -23804,7 +25417,7 @@
             <a:tbl>
               <a:tblPr>
                 <a:noFill/>
-                <a:tableStyleId>{B72C5A8D-5030-47FC-9FBE-639BE6E02443}</a:tableStyleId>
+                <a:tableStyleId>{D3DC4119-14DB-422D-BA40-32E6E3949163}</a:tableStyleId>
               </a:tblPr>
               <a:tblGrid>
                 <a:gridCol w="2720975"/>
@@ -24243,6 +25856,51 @@
           </a:graphicData>
         </a:graphic>
       </p:graphicFrame>
+      <p:sp>
+        <p:nvSpPr>
+          <p:cNvPr id="330" name="Google Shape;330;p39"/>
+          <p:cNvSpPr txBox="1"/>
+          <p:nvPr>
+            <p:ph idx="12" type="sldNum"/>
+          </p:nvPr>
+        </p:nvSpPr>
+        <p:spPr>
+          <a:xfrm>
+            <a:off x="6553200" y="6356350"/>
+            <a:ext cx="2133600" cy="365100"/>
+          </a:xfrm>
+          <a:prstGeom prst="rect">
+            <a:avLst/>
+          </a:prstGeom>
+        </p:spPr>
+        <p:txBody>
+          <a:bodyPr anchorCtr="0" anchor="ctr" bIns="45700" lIns="91425" spcFirstLastPara="1" rIns="91425" wrap="square" tIns="45700">
+            <a:noAutofit/>
+          </a:bodyPr>
+          <a:lstStyle/>
+          <a:p>
+            <a:pPr indent="0" lvl="0" marL="0" rtl="0" algn="r">
+              <a:spcBef>
+                <a:spcPts val="0"/>
+              </a:spcBef>
+              <a:spcAft>
+                <a:spcPts val="0"/>
+              </a:spcAft>
+              <a:buClr>
+                <a:srgbClr val="000000"/>
+              </a:buClr>
+              <a:buSzPts val="1200"/>
+              <a:buFont typeface="Arial"/>
+              <a:buNone/>
+            </a:pPr>
+            <a:fld id="{00000000-1234-1234-1234-123412341234}" type="slidenum">
+              <a:rPr lang="en-US"/>
+              <a:t>‹#›</a:t>
+            </a:fld>
+            <a:endParaRPr/>
+          </a:p>
+        </p:txBody>
+      </p:sp>
     </p:spTree>
   </p:cSld>
   <p:clrMapOvr>
@@ -24251,12 +25909,12 @@
 </p:sld>
 </file>
 
-<file path=ppt/slides/slide27.xml><?xml version="1.0" encoding="utf-8"?>
+<file path=ppt/slides/slide28.xml><?xml version="1.0" encoding="utf-8"?>
 <p:sld xmlns:a="http://schemas.openxmlformats.org/drawingml/2006/main" xmlns:r="http://schemas.openxmlformats.org/officeDocument/2006/relationships" xmlns:mc="http://schemas.openxmlformats.org/markup-compatibility/2006" xmlns:mv="urn:schemas-microsoft-com:mac:vml" xmlns:p="http://schemas.openxmlformats.org/presentationml/2006/main" xmlns:c="http://schemas.openxmlformats.org/drawingml/2006/chart" xmlns:dgm="http://schemas.openxmlformats.org/drawingml/2006/diagram" xmlns:o="urn:schemas-microsoft-com:office:office" xmlns:v="urn:schemas-microsoft-com:vml" xmlns:pvml="urn:schemas-microsoft-com:office:powerpoint" xmlns:com="http://schemas.openxmlformats.org/drawingml/2006/compatibility" xmlns:p14="http://schemas.microsoft.com/office/powerpoint/2010/main" xmlns:p15="http://schemas.microsoft.com/office/powerpoint/2012/main" xmlns:ahyp="http://schemas.microsoft.com/office/drawing/2018/hyperlinkcolor">
   <p:cSld>
     <p:spTree>
       <p:nvGrpSpPr>
-        <p:cNvPr id="302" name="Shape 302"/>
+        <p:cNvPr id="334" name="Shape 334"/>
         <p:cNvGrpSpPr/>
         <p:nvPr/>
       </p:nvGrpSpPr>
@@ -24270,7 +25928,7 @@
       </p:grpSpPr>
       <p:sp>
         <p:nvSpPr>
-          <p:cNvPr id="303" name="Google Shape;303;p39"/>
+          <p:cNvPr id="335" name="Google Shape;335;p40"/>
           <p:cNvSpPr txBox="1"/>
           <p:nvPr>
             <p:ph type="title"/>
@@ -24326,7 +25984,7 @@
       </p:sp>
       <p:graphicFrame>
         <p:nvGraphicFramePr>
-          <p:cNvPr id="304" name="Google Shape;304;p39"/>
+          <p:cNvPr id="336" name="Google Shape;336;p40"/>
           <p:cNvGraphicFramePr/>
           <p:nvPr/>
         </p:nvGraphicFramePr>
@@ -24339,7 +25997,7 @@
             <a:tbl>
               <a:tblPr>
                 <a:noFill/>
-                <a:tableStyleId>{B72C5A8D-5030-47FC-9FBE-639BE6E02443}</a:tableStyleId>
+                <a:tableStyleId>{D3DC4119-14DB-422D-BA40-32E6E3949163}</a:tableStyleId>
               </a:tblPr>
               <a:tblGrid>
                 <a:gridCol w="2720975"/>
@@ -24708,28 +26366,8 @@
                           <a:cs typeface="Calibri"/>
                           <a:sym typeface="Calibri"/>
                         </a:rPr>
-                        <a:t> +</a:t>
+                        <a:t> + </a:t>
                       </a:r>
-                      <a:endParaRPr sz="1800">
-                        <a:latin typeface="Calibri"/>
-                        <a:ea typeface="Calibri"/>
-                        <a:cs typeface="Calibri"/>
-                        <a:sym typeface="Calibri"/>
-                      </a:endParaRPr>
-                    </a:p>
-                    <a:p>
-                      <a:pPr indent="0" lvl="0" marL="0" rtl="0" algn="l">
-                        <a:lnSpc>
-                          <a:spcPct val="150000"/>
-                        </a:lnSpc>
-                        <a:spcBef>
-                          <a:spcPts val="0"/>
-                        </a:spcBef>
-                        <a:spcAft>
-                          <a:spcPts val="0"/>
-                        </a:spcAft>
-                        <a:buNone/>
-                      </a:pPr>
                       <a:r>
                         <a:rPr lang="en-US" sz="1800">
                           <a:solidFill>
@@ -24836,6 +26474,216 @@
           </a:graphicData>
         </a:graphic>
       </p:graphicFrame>
+      <p:sp>
+        <p:nvSpPr>
+          <p:cNvPr id="337" name="Google Shape;337;p40"/>
+          <p:cNvSpPr txBox="1"/>
+          <p:nvPr>
+            <p:ph idx="12" type="sldNum"/>
+          </p:nvPr>
+        </p:nvSpPr>
+        <p:spPr>
+          <a:xfrm>
+            <a:off x="6553200" y="6356350"/>
+            <a:ext cx="2133600" cy="365100"/>
+          </a:xfrm>
+          <a:prstGeom prst="rect">
+            <a:avLst/>
+          </a:prstGeom>
+        </p:spPr>
+        <p:txBody>
+          <a:bodyPr anchorCtr="0" anchor="ctr" bIns="45700" lIns="91425" spcFirstLastPara="1" rIns="91425" wrap="square" tIns="45700">
+            <a:noAutofit/>
+          </a:bodyPr>
+          <a:lstStyle/>
+          <a:p>
+            <a:pPr indent="0" lvl="0" marL="0" rtl="0" algn="r">
+              <a:spcBef>
+                <a:spcPts val="0"/>
+              </a:spcBef>
+              <a:spcAft>
+                <a:spcPts val="0"/>
+              </a:spcAft>
+              <a:buClr>
+                <a:srgbClr val="000000"/>
+              </a:buClr>
+              <a:buSzPts val="1200"/>
+              <a:buFont typeface="Arial"/>
+              <a:buNone/>
+            </a:pPr>
+            <a:fld id="{00000000-1234-1234-1234-123412341234}" type="slidenum">
+              <a:rPr lang="en-US"/>
+              <a:t>‹#›</a:t>
+            </a:fld>
+            <a:endParaRPr/>
+          </a:p>
+        </p:txBody>
+      </p:sp>
+    </p:spTree>
+  </p:cSld>
+  <p:clrMapOvr>
+    <a:masterClrMapping/>
+  </p:clrMapOvr>
+</p:sld>
+</file>
+
+<file path=ppt/slides/slide29.xml><?xml version="1.0" encoding="utf-8"?>
+<p:sld xmlns:a="http://schemas.openxmlformats.org/drawingml/2006/main" xmlns:r="http://schemas.openxmlformats.org/officeDocument/2006/relationships" xmlns:mc="http://schemas.openxmlformats.org/markup-compatibility/2006" xmlns:mv="urn:schemas-microsoft-com:mac:vml" xmlns:p="http://schemas.openxmlformats.org/presentationml/2006/main" xmlns:c="http://schemas.openxmlformats.org/drawingml/2006/chart" xmlns:dgm="http://schemas.openxmlformats.org/drawingml/2006/diagram" xmlns:o="urn:schemas-microsoft-com:office:office" xmlns:v="urn:schemas-microsoft-com:vml" xmlns:pvml="urn:schemas-microsoft-com:office:powerpoint" xmlns:com="http://schemas.openxmlformats.org/drawingml/2006/compatibility" xmlns:p14="http://schemas.microsoft.com/office/powerpoint/2010/main" xmlns:p15="http://schemas.microsoft.com/office/powerpoint/2012/main" xmlns:ahyp="http://schemas.microsoft.com/office/drawing/2018/hyperlinkcolor">
+  <p:cSld>
+    <p:spTree>
+      <p:nvGrpSpPr>
+        <p:cNvPr id="341" name="Shape 341"/>
+        <p:cNvGrpSpPr/>
+        <p:nvPr/>
+      </p:nvGrpSpPr>
+      <p:grpSpPr>
+        <a:xfrm>
+          <a:off x="0" y="0"/>
+          <a:ext cx="0" cy="0"/>
+          <a:chOff x="0" y="0"/>
+          <a:chExt cx="0" cy="0"/>
+        </a:xfrm>
+      </p:grpSpPr>
+      <p:sp>
+        <p:nvSpPr>
+          <p:cNvPr id="342" name="Google Shape;342;p41"/>
+          <p:cNvSpPr txBox="1"/>
+          <p:nvPr>
+            <p:ph type="title"/>
+          </p:nvPr>
+        </p:nvSpPr>
+        <p:spPr>
+          <a:xfrm>
+            <a:off x="722313" y="4406900"/>
+            <a:ext cx="7772400" cy="1362000"/>
+          </a:xfrm>
+          <a:prstGeom prst="rect">
+            <a:avLst/>
+          </a:prstGeom>
+          <a:noFill/>
+          <a:ln>
+            <a:noFill/>
+          </a:ln>
+        </p:spPr>
+        <p:txBody>
+          <a:bodyPr anchorCtr="0" anchor="t" bIns="45700" lIns="91425" spcFirstLastPara="1" rIns="91425" wrap="square" tIns="45700">
+            <a:normAutofit/>
+          </a:bodyPr>
+          <a:lstStyle/>
+          <a:p>
+            <a:pPr indent="0" lvl="0" marL="0" rtl="0" algn="l">
+              <a:spcBef>
+                <a:spcPts val="0"/>
+              </a:spcBef>
+              <a:spcAft>
+                <a:spcPts val="0"/>
+              </a:spcAft>
+              <a:buSzPts val="1400"/>
+              <a:buNone/>
+            </a:pPr>
+            <a:r>
+              <a:rPr b="0" lang="en-US" sz="4400">
+                <a:solidFill>
+                  <a:srgbClr val="0B3D59"/>
+                </a:solidFill>
+              </a:rPr>
+              <a:t>Beyond the FYP</a:t>
+            </a:r>
+            <a:endParaRPr/>
+          </a:p>
+        </p:txBody>
+      </p:sp>
+      <p:sp>
+        <p:nvSpPr>
+          <p:cNvPr id="343" name="Google Shape;343;p41"/>
+          <p:cNvSpPr txBox="1"/>
+          <p:nvPr>
+            <p:ph idx="1" type="body"/>
+          </p:nvPr>
+        </p:nvSpPr>
+        <p:spPr>
+          <a:xfrm>
+            <a:off x="722313" y="2906713"/>
+            <a:ext cx="7772400" cy="1500300"/>
+          </a:xfrm>
+          <a:prstGeom prst="rect">
+            <a:avLst/>
+          </a:prstGeom>
+          <a:noFill/>
+          <a:ln>
+            <a:noFill/>
+          </a:ln>
+        </p:spPr>
+        <p:txBody>
+          <a:bodyPr anchorCtr="0" anchor="b" bIns="45700" lIns="91425" spcFirstLastPara="1" rIns="91425" wrap="square" tIns="45700">
+            <a:normAutofit/>
+          </a:bodyPr>
+          <a:lstStyle/>
+          <a:p>
+            <a:pPr indent="0" lvl="0" marL="44450" rtl="0" algn="l">
+              <a:lnSpc>
+                <a:spcPct val="100000"/>
+              </a:lnSpc>
+              <a:spcBef>
+                <a:spcPts val="0"/>
+              </a:spcBef>
+              <a:spcAft>
+                <a:spcPts val="0"/>
+              </a:spcAft>
+              <a:buClr>
+                <a:srgbClr val="888888"/>
+              </a:buClr>
+              <a:buSzPts val="2000"/>
+              <a:buFont typeface="Arial"/>
+              <a:buNone/>
+            </a:pPr>
+            <a:r>
+              <a:t/>
+            </a:r>
+            <a:endParaRPr/>
+          </a:p>
+        </p:txBody>
+      </p:sp>
+      <p:sp>
+        <p:nvSpPr>
+          <p:cNvPr id="344" name="Google Shape;344;p41"/>
+          <p:cNvSpPr txBox="1"/>
+          <p:nvPr>
+            <p:ph idx="12" type="sldNum"/>
+          </p:nvPr>
+        </p:nvSpPr>
+        <p:spPr>
+          <a:xfrm>
+            <a:off x="6553200" y="6356350"/>
+            <a:ext cx="2133600" cy="365100"/>
+          </a:xfrm>
+          <a:prstGeom prst="rect">
+            <a:avLst/>
+          </a:prstGeom>
+        </p:spPr>
+        <p:txBody>
+          <a:bodyPr anchorCtr="0" anchor="ctr" bIns="45700" lIns="91425" spcFirstLastPara="1" rIns="91425" wrap="square" tIns="45700">
+            <a:noAutofit/>
+          </a:bodyPr>
+          <a:lstStyle/>
+          <a:p>
+            <a:pPr indent="0" lvl="0" marL="0" rtl="0" algn="r">
+              <a:spcBef>
+                <a:spcPts val="0"/>
+              </a:spcBef>
+              <a:spcAft>
+                <a:spcPts val="0"/>
+              </a:spcAft>
+              <a:buNone/>
+            </a:pPr>
+            <a:fld id="{00000000-1234-1234-1234-123412341234}" type="slidenum">
+              <a:rPr lang="en-US"/>
+              <a:t>‹#›</a:t>
+            </a:fld>
+            <a:endParaRPr/>
+          </a:p>
+        </p:txBody>
+      </p:sp>
     </p:spTree>
   </p:cSld>
   <p:clrMapOvr>
@@ -24849,7 +26697,7 @@
   <p:cSld>
     <p:spTree>
       <p:nvGrpSpPr>
-        <p:cNvPr id="96" name="Shape 96"/>
+        <p:cNvPr id="97" name="Shape 97"/>
         <p:cNvGrpSpPr/>
         <p:nvPr/>
       </p:nvGrpSpPr>
@@ -24863,7 +26711,481 @@
       </p:grpSpPr>
       <p:sp>
         <p:nvSpPr>
-          <p:cNvPr id="97" name="Google Shape;97;p15"/>
+          <p:cNvPr id="98" name="Google Shape;98;p15"/>
+          <p:cNvSpPr txBox="1"/>
+          <p:nvPr>
+            <p:ph type="title"/>
+          </p:nvPr>
+        </p:nvSpPr>
+        <p:spPr>
+          <a:xfrm>
+            <a:off x="457200" y="101747"/>
+            <a:ext cx="8229600" cy="1143000"/>
+          </a:xfrm>
+          <a:prstGeom prst="rect">
+            <a:avLst/>
+          </a:prstGeom>
+          <a:noFill/>
+          <a:ln>
+            <a:noFill/>
+          </a:ln>
+        </p:spPr>
+        <p:txBody>
+          <a:bodyPr anchorCtr="0" anchor="ctr" bIns="45700" lIns="91425" spcFirstLastPara="1" rIns="91425" wrap="square" tIns="45700">
+            <a:noAutofit/>
+          </a:bodyPr>
+          <a:lstStyle/>
+          <a:p>
+            <a:pPr indent="0" lvl="0" marL="0" rtl="0" algn="ctr">
+              <a:lnSpc>
+                <a:spcPct val="100000"/>
+              </a:lnSpc>
+              <a:spcBef>
+                <a:spcPts val="0"/>
+              </a:spcBef>
+              <a:spcAft>
+                <a:spcPts val="0"/>
+              </a:spcAft>
+              <a:buSzPts val="1400"/>
+              <a:buNone/>
+            </a:pPr>
+            <a:r>
+              <a:rPr lang="en-US">
+                <a:solidFill>
+                  <a:srgbClr val="0B3D59"/>
+                </a:solidFill>
+              </a:rPr>
+              <a:t>Table of Content</a:t>
+            </a:r>
+            <a:endParaRPr>
+              <a:solidFill>
+                <a:srgbClr val="0B3D59"/>
+              </a:solidFill>
+            </a:endParaRPr>
+          </a:p>
+        </p:txBody>
+      </p:sp>
+      <p:sp>
+        <p:nvSpPr>
+          <p:cNvPr id="99" name="Google Shape;99;p15"/>
+          <p:cNvSpPr txBox="1"/>
+          <p:nvPr>
+            <p:ph idx="1" type="body"/>
+          </p:nvPr>
+        </p:nvSpPr>
+        <p:spPr>
+          <a:xfrm>
+            <a:off x="457200" y="1191540"/>
+            <a:ext cx="8229600" cy="4526100"/>
+          </a:xfrm>
+          <a:prstGeom prst="rect">
+            <a:avLst/>
+          </a:prstGeom>
+          <a:noFill/>
+          <a:ln>
+            <a:noFill/>
+          </a:ln>
+        </p:spPr>
+        <p:txBody>
+          <a:bodyPr anchorCtr="0" anchor="t" bIns="45700" lIns="91425" spcFirstLastPara="1" rIns="91425" wrap="square" tIns="45700">
+            <a:noAutofit/>
+          </a:bodyPr>
+          <a:lstStyle/>
+          <a:p>
+            <a:pPr indent="-368300" lvl="0" marL="457200" rtl="0" algn="just">
+              <a:lnSpc>
+                <a:spcPct val="115000"/>
+              </a:lnSpc>
+              <a:spcBef>
+                <a:spcPts val="600"/>
+              </a:spcBef>
+              <a:spcAft>
+                <a:spcPts val="0"/>
+              </a:spcAft>
+              <a:buClr>
+                <a:srgbClr val="13232E"/>
+              </a:buClr>
+              <a:buSzPts val="2200"/>
+              <a:buFont typeface="Calibri"/>
+              <a:buChar char="○"/>
+            </a:pPr>
+            <a:r>
+              <a:rPr lang="en-US" sz="2200">
+                <a:solidFill>
+                  <a:srgbClr val="13232E"/>
+                </a:solidFill>
+              </a:rPr>
+              <a:t>Introduction and Background</a:t>
+            </a:r>
+            <a:endParaRPr sz="2200">
+              <a:solidFill>
+                <a:srgbClr val="13232E"/>
+              </a:solidFill>
+            </a:endParaRPr>
+          </a:p>
+          <a:p>
+            <a:pPr indent="-368300" lvl="0" marL="457200" rtl="0" algn="just">
+              <a:lnSpc>
+                <a:spcPct val="115000"/>
+              </a:lnSpc>
+              <a:spcBef>
+                <a:spcPts val="600"/>
+              </a:spcBef>
+              <a:spcAft>
+                <a:spcPts val="0"/>
+              </a:spcAft>
+              <a:buClr>
+                <a:srgbClr val="13232E"/>
+              </a:buClr>
+              <a:buSzPts val="2200"/>
+              <a:buFont typeface="Calibri"/>
+              <a:buChar char="○"/>
+            </a:pPr>
+            <a:r>
+              <a:rPr lang="en-US" sz="2200">
+                <a:solidFill>
+                  <a:srgbClr val="13232E"/>
+                </a:solidFill>
+              </a:rPr>
+              <a:t>Literature Review and Summary Table</a:t>
+            </a:r>
+            <a:endParaRPr sz="2200">
+              <a:solidFill>
+                <a:srgbClr val="13232E"/>
+              </a:solidFill>
+            </a:endParaRPr>
+          </a:p>
+          <a:p>
+            <a:pPr indent="-368300" lvl="0" marL="457200" rtl="0" algn="just">
+              <a:lnSpc>
+                <a:spcPct val="115000"/>
+              </a:lnSpc>
+              <a:spcBef>
+                <a:spcPts val="600"/>
+              </a:spcBef>
+              <a:spcAft>
+                <a:spcPts val="0"/>
+              </a:spcAft>
+              <a:buClr>
+                <a:srgbClr val="13232E"/>
+              </a:buClr>
+              <a:buSzPts val="2200"/>
+              <a:buFont typeface="Calibri"/>
+              <a:buChar char="○"/>
+            </a:pPr>
+            <a:r>
+              <a:rPr lang="en-US" sz="2200">
+                <a:solidFill>
+                  <a:srgbClr val="13232E"/>
+                </a:solidFill>
+              </a:rPr>
+              <a:t>Gap Analysis</a:t>
+            </a:r>
+            <a:endParaRPr sz="2200">
+              <a:solidFill>
+                <a:srgbClr val="13232E"/>
+              </a:solidFill>
+            </a:endParaRPr>
+          </a:p>
+          <a:p>
+            <a:pPr indent="-368300" lvl="0" marL="457200" rtl="0" algn="just">
+              <a:lnSpc>
+                <a:spcPct val="115000"/>
+              </a:lnSpc>
+              <a:spcBef>
+                <a:spcPts val="600"/>
+              </a:spcBef>
+              <a:spcAft>
+                <a:spcPts val="0"/>
+              </a:spcAft>
+              <a:buClr>
+                <a:srgbClr val="13232E"/>
+              </a:buClr>
+              <a:buSzPts val="2200"/>
+              <a:buFont typeface="Calibri"/>
+              <a:buChar char="○"/>
+            </a:pPr>
+            <a:r>
+              <a:rPr lang="en-US" sz="2200">
+                <a:solidFill>
+                  <a:srgbClr val="13232E"/>
+                </a:solidFill>
+              </a:rPr>
+              <a:t>Problem Statement</a:t>
+            </a:r>
+            <a:endParaRPr sz="2200">
+              <a:solidFill>
+                <a:srgbClr val="13232E"/>
+              </a:solidFill>
+            </a:endParaRPr>
+          </a:p>
+          <a:p>
+            <a:pPr indent="-368300" lvl="0" marL="457200" rtl="0" algn="just">
+              <a:lnSpc>
+                <a:spcPct val="115000"/>
+              </a:lnSpc>
+              <a:spcBef>
+                <a:spcPts val="600"/>
+              </a:spcBef>
+              <a:spcAft>
+                <a:spcPts val="0"/>
+              </a:spcAft>
+              <a:buClr>
+                <a:srgbClr val="13232E"/>
+              </a:buClr>
+              <a:buSzPts val="2200"/>
+              <a:buFont typeface="Calibri"/>
+              <a:buChar char="○"/>
+            </a:pPr>
+            <a:r>
+              <a:rPr lang="en-US" sz="2200">
+                <a:solidFill>
+                  <a:srgbClr val="13232E"/>
+                </a:solidFill>
+              </a:rPr>
+              <a:t>Proposed Solution &amp; Methodology</a:t>
+            </a:r>
+            <a:endParaRPr sz="2200">
+              <a:solidFill>
+                <a:srgbClr val="13232E"/>
+              </a:solidFill>
+            </a:endParaRPr>
+          </a:p>
+          <a:p>
+            <a:pPr indent="-368300" lvl="0" marL="457200" rtl="0" algn="just">
+              <a:lnSpc>
+                <a:spcPct val="115000"/>
+              </a:lnSpc>
+              <a:spcBef>
+                <a:spcPts val="600"/>
+              </a:spcBef>
+              <a:spcAft>
+                <a:spcPts val="0"/>
+              </a:spcAft>
+              <a:buClr>
+                <a:srgbClr val="13232E"/>
+              </a:buClr>
+              <a:buSzPts val="2200"/>
+              <a:buFont typeface="Calibri"/>
+              <a:buChar char="○"/>
+            </a:pPr>
+            <a:r>
+              <a:rPr lang="en-US" sz="2200">
+                <a:solidFill>
+                  <a:srgbClr val="13232E"/>
+                </a:solidFill>
+              </a:rPr>
+              <a:t>Project Scope and Evaluation Plan</a:t>
+            </a:r>
+            <a:endParaRPr sz="2200">
+              <a:solidFill>
+                <a:srgbClr val="13232E"/>
+              </a:solidFill>
+            </a:endParaRPr>
+          </a:p>
+          <a:p>
+            <a:pPr indent="-368300" lvl="0" marL="457200" rtl="0" algn="just">
+              <a:lnSpc>
+                <a:spcPct val="115000"/>
+              </a:lnSpc>
+              <a:spcBef>
+                <a:spcPts val="600"/>
+              </a:spcBef>
+              <a:spcAft>
+                <a:spcPts val="0"/>
+              </a:spcAft>
+              <a:buClr>
+                <a:srgbClr val="13232E"/>
+              </a:buClr>
+              <a:buSzPts val="2200"/>
+              <a:buFont typeface="Calibri"/>
+              <a:buChar char="○"/>
+            </a:pPr>
+            <a:r>
+              <a:rPr lang="en-US" sz="2200">
+                <a:solidFill>
+                  <a:srgbClr val="13232E"/>
+                </a:solidFill>
+              </a:rPr>
+              <a:t>Challenges and Risk Mitigation</a:t>
+            </a:r>
+            <a:endParaRPr sz="2200">
+              <a:solidFill>
+                <a:srgbClr val="13232E"/>
+              </a:solidFill>
+            </a:endParaRPr>
+          </a:p>
+          <a:p>
+            <a:pPr indent="-368300" lvl="0" marL="457200" rtl="0" algn="just">
+              <a:lnSpc>
+                <a:spcPct val="115000"/>
+              </a:lnSpc>
+              <a:spcBef>
+                <a:spcPts val="600"/>
+              </a:spcBef>
+              <a:spcAft>
+                <a:spcPts val="0"/>
+              </a:spcAft>
+              <a:buClr>
+                <a:srgbClr val="13232E"/>
+              </a:buClr>
+              <a:buSzPts val="2200"/>
+              <a:buFont typeface="Calibri"/>
+              <a:buChar char="○"/>
+            </a:pPr>
+            <a:r>
+              <a:rPr lang="en-US" sz="2200">
+                <a:solidFill>
+                  <a:srgbClr val="13232E"/>
+                </a:solidFill>
+              </a:rPr>
+              <a:t>Work Breakdown Structure</a:t>
+            </a:r>
+            <a:endParaRPr sz="2200">
+              <a:solidFill>
+                <a:srgbClr val="13232E"/>
+              </a:solidFill>
+            </a:endParaRPr>
+          </a:p>
+          <a:p>
+            <a:pPr indent="-368300" lvl="0" marL="457200" rtl="0" algn="just">
+              <a:lnSpc>
+                <a:spcPct val="115000"/>
+              </a:lnSpc>
+              <a:spcBef>
+                <a:spcPts val="600"/>
+              </a:spcBef>
+              <a:spcAft>
+                <a:spcPts val="0"/>
+              </a:spcAft>
+              <a:buClr>
+                <a:srgbClr val="13232E"/>
+              </a:buClr>
+              <a:buSzPts val="2200"/>
+              <a:buFont typeface="Calibri"/>
+              <a:buChar char="○"/>
+            </a:pPr>
+            <a:r>
+              <a:rPr lang="en-US" sz="2200">
+                <a:solidFill>
+                  <a:srgbClr val="13232E"/>
+                </a:solidFill>
+              </a:rPr>
+              <a:t>Roles and Responsibilities</a:t>
+            </a:r>
+            <a:endParaRPr sz="2200">
+              <a:solidFill>
+                <a:srgbClr val="13232E"/>
+              </a:solidFill>
+            </a:endParaRPr>
+          </a:p>
+          <a:p>
+            <a:pPr indent="-368300" lvl="0" marL="457200" rtl="0" algn="just">
+              <a:lnSpc>
+                <a:spcPct val="115000"/>
+              </a:lnSpc>
+              <a:spcBef>
+                <a:spcPts val="600"/>
+              </a:spcBef>
+              <a:spcAft>
+                <a:spcPts val="0"/>
+              </a:spcAft>
+              <a:buClr>
+                <a:srgbClr val="13232E"/>
+              </a:buClr>
+              <a:buSzPts val="2200"/>
+              <a:buFont typeface="Calibri"/>
+              <a:buChar char="○"/>
+            </a:pPr>
+            <a:r>
+              <a:rPr lang="en-US" sz="2200">
+                <a:solidFill>
+                  <a:srgbClr val="13232E"/>
+                </a:solidFill>
+              </a:rPr>
+              <a:t>Beyond the FYP</a:t>
+            </a:r>
+            <a:endParaRPr sz="2200">
+              <a:solidFill>
+                <a:srgbClr val="13232E"/>
+              </a:solidFill>
+            </a:endParaRPr>
+          </a:p>
+        </p:txBody>
+      </p:sp>
+      <p:sp>
+        <p:nvSpPr>
+          <p:cNvPr id="100" name="Google Shape;100;p15"/>
+          <p:cNvSpPr txBox="1"/>
+          <p:nvPr>
+            <p:ph idx="12" type="sldNum"/>
+          </p:nvPr>
+        </p:nvSpPr>
+        <p:spPr>
+          <a:xfrm>
+            <a:off x="6553200" y="6356350"/>
+            <a:ext cx="2133600" cy="365100"/>
+          </a:xfrm>
+          <a:prstGeom prst="rect">
+            <a:avLst/>
+          </a:prstGeom>
+        </p:spPr>
+        <p:txBody>
+          <a:bodyPr anchorCtr="0" anchor="ctr" bIns="45700" lIns="91425" spcFirstLastPara="1" rIns="91425" wrap="square" tIns="45700">
+            <a:noAutofit/>
+          </a:bodyPr>
+          <a:lstStyle/>
+          <a:p>
+            <a:pPr indent="0" lvl="0" marL="0" rtl="0" algn="r">
+              <a:spcBef>
+                <a:spcPts val="0"/>
+              </a:spcBef>
+              <a:spcAft>
+                <a:spcPts val="0"/>
+              </a:spcAft>
+              <a:buClr>
+                <a:srgbClr val="000000"/>
+              </a:buClr>
+              <a:buSzPts val="1200"/>
+              <a:buFont typeface="Arial"/>
+              <a:buNone/>
+            </a:pPr>
+            <a:fld id="{00000000-1234-1234-1234-123412341234}" type="slidenum">
+              <a:rPr lang="en-US"/>
+              <a:t>‹#›</a:t>
+            </a:fld>
+            <a:endParaRPr/>
+          </a:p>
+        </p:txBody>
+      </p:sp>
+    </p:spTree>
+  </p:cSld>
+  <p:clrMapOvr>
+    <a:masterClrMapping/>
+  </p:clrMapOvr>
+</p:sld>
+</file>
+
+<file path=ppt/slides/slide30.xml><?xml version="1.0" encoding="utf-8"?>
+<p:sld xmlns:a="http://schemas.openxmlformats.org/drawingml/2006/main" xmlns:r="http://schemas.openxmlformats.org/officeDocument/2006/relationships" xmlns:mc="http://schemas.openxmlformats.org/markup-compatibility/2006" xmlns:mv="urn:schemas-microsoft-com:mac:vml" xmlns:p="http://schemas.openxmlformats.org/presentationml/2006/main" xmlns:c="http://schemas.openxmlformats.org/drawingml/2006/chart" xmlns:dgm="http://schemas.openxmlformats.org/drawingml/2006/diagram" xmlns:o="urn:schemas-microsoft-com:office:office" xmlns:v="urn:schemas-microsoft-com:vml" xmlns:pvml="urn:schemas-microsoft-com:office:powerpoint" xmlns:com="http://schemas.openxmlformats.org/drawingml/2006/compatibility" xmlns:p14="http://schemas.microsoft.com/office/powerpoint/2010/main" xmlns:p15="http://schemas.microsoft.com/office/powerpoint/2012/main" xmlns:ahyp="http://schemas.microsoft.com/office/drawing/2018/hyperlinkcolor">
+  <p:cSld>
+    <p:spTree>
+      <p:nvGrpSpPr>
+        <p:cNvPr id="348" name="Shape 348"/>
+        <p:cNvGrpSpPr/>
+        <p:nvPr/>
+      </p:nvGrpSpPr>
+      <p:grpSpPr>
+        <a:xfrm>
+          <a:off x="0" y="0"/>
+          <a:ext cx="0" cy="0"/>
+          <a:chOff x="0" y="0"/>
+          <a:chExt cx="0" cy="0"/>
+        </a:xfrm>
+      </p:grpSpPr>
+      <p:sp>
+        <p:nvSpPr>
+          <p:cNvPr id="349" name="Google Shape;349;p42"/>
           <p:cNvSpPr txBox="1"/>
           <p:nvPr>
             <p:ph type="title"/>
@@ -24889,9 +27211,6 @@
           <a:lstStyle/>
           <a:p>
             <a:pPr indent="0" lvl="0" marL="0" rtl="0" algn="ctr">
-              <a:lnSpc>
-                <a:spcPct val="100000"/>
-              </a:lnSpc>
               <a:spcBef>
                 <a:spcPts val="0"/>
               </a:spcBef>
@@ -24902,14 +27221,14 @@
               <a:buNone/>
             </a:pPr>
             <a:r>
-              <a:rPr lang="en-US">
+              <a:rPr b="1" lang="en-US" sz="4000">
                 <a:solidFill>
                   <a:srgbClr val="0B3D59"/>
                 </a:solidFill>
               </a:rPr>
-              <a:t>Table of Content</a:t>
+              <a:t>Beyond the FYP</a:t>
             </a:r>
-            <a:endParaRPr>
+            <a:endParaRPr b="1" sz="4000">
               <a:solidFill>
                 <a:srgbClr val="0B3D59"/>
               </a:solidFill>
@@ -24919,16 +27238,315 @@
       </p:sp>
       <p:sp>
         <p:nvSpPr>
-          <p:cNvPr id="98" name="Google Shape;98;p15"/>
+          <p:cNvPr id="350" name="Google Shape;350;p42"/>
+          <p:cNvSpPr txBox="1"/>
+          <p:nvPr/>
+        </p:nvSpPr>
+        <p:spPr>
+          <a:xfrm>
+            <a:off x="342900" y="1418725"/>
+            <a:ext cx="8343900" cy="4292700"/>
+          </a:xfrm>
+          <a:prstGeom prst="rect">
+            <a:avLst/>
+          </a:prstGeom>
+          <a:noFill/>
+          <a:ln>
+            <a:noFill/>
+          </a:ln>
+        </p:spPr>
+        <p:txBody>
+          <a:bodyPr anchorCtr="0" anchor="t" bIns="91425" lIns="91425" spcFirstLastPara="1" rIns="91425" wrap="square" tIns="91425">
+            <a:noAutofit/>
+          </a:bodyPr>
+          <a:lstStyle/>
+          <a:p>
+            <a:pPr indent="-387350" lvl="0" marL="457200" rtl="0" algn="just">
+              <a:lnSpc>
+                <a:spcPct val="150000"/>
+              </a:lnSpc>
+              <a:spcBef>
+                <a:spcPts val="600"/>
+              </a:spcBef>
+              <a:spcAft>
+                <a:spcPts val="0"/>
+              </a:spcAft>
+              <a:buClr>
+                <a:schemeClr val="dk1"/>
+              </a:buClr>
+              <a:buSzPts val="2000"/>
+              <a:buFont typeface="Calibri"/>
+              <a:buChar char="○"/>
+            </a:pPr>
+            <a:r>
+              <a:rPr b="1" lang="en-US" sz="2000">
+                <a:solidFill>
+                  <a:schemeClr val="dk1"/>
+                </a:solidFill>
+                <a:latin typeface="Calibri"/>
+                <a:ea typeface="Calibri"/>
+                <a:cs typeface="Calibri"/>
+                <a:sym typeface="Calibri"/>
+              </a:rPr>
+              <a:t>Publication. </a:t>
+            </a:r>
+            <a:r>
+              <a:rPr lang="en-US" sz="2000">
+                <a:solidFill>
+                  <a:schemeClr val="dk1"/>
+                </a:solidFill>
+                <a:latin typeface="Calibri"/>
+                <a:ea typeface="Calibri"/>
+                <a:cs typeface="Calibri"/>
+                <a:sym typeface="Calibri"/>
+              </a:rPr>
+              <a:t>A submission targeting MICCAI or ISBI or a suitable workshop, based  on fusion vs. baseline and missing modality ablations.</a:t>
+            </a:r>
+            <a:endParaRPr sz="2000">
+              <a:solidFill>
+                <a:schemeClr val="dk1"/>
+              </a:solidFill>
+              <a:latin typeface="Calibri"/>
+              <a:ea typeface="Calibri"/>
+              <a:cs typeface="Calibri"/>
+              <a:sym typeface="Calibri"/>
+            </a:endParaRPr>
+          </a:p>
+          <a:p>
+            <a:pPr indent="-387350" lvl="0" marL="457200" rtl="0" algn="just">
+              <a:lnSpc>
+                <a:spcPct val="150000"/>
+              </a:lnSpc>
+              <a:spcBef>
+                <a:spcPts val="600"/>
+              </a:spcBef>
+              <a:spcAft>
+                <a:spcPts val="0"/>
+              </a:spcAft>
+              <a:buClr>
+                <a:schemeClr val="dk1"/>
+              </a:buClr>
+              <a:buSzPts val="2000"/>
+              <a:buFont typeface="Calibri"/>
+              <a:buChar char="○"/>
+            </a:pPr>
+            <a:r>
+              <a:rPr b="1" lang="en-US" sz="2000">
+                <a:solidFill>
+                  <a:schemeClr val="dk1"/>
+                </a:solidFill>
+                <a:latin typeface="Calibri"/>
+                <a:ea typeface="Calibri"/>
+                <a:cs typeface="Calibri"/>
+                <a:sym typeface="Calibri"/>
+              </a:rPr>
+              <a:t>Clinical pilot. </a:t>
+            </a:r>
+            <a:r>
+              <a:rPr lang="en-US" sz="2000">
+                <a:solidFill>
+                  <a:schemeClr val="dk1"/>
+                </a:solidFill>
+                <a:latin typeface="Calibri"/>
+                <a:ea typeface="Calibri"/>
+                <a:cs typeface="Calibri"/>
+                <a:sym typeface="Calibri"/>
+              </a:rPr>
+              <a:t>Partner with a clinic to collect real, consented data and evaluate the system prospectively. Pilot and publication run in parallel.</a:t>
+            </a:r>
+            <a:endParaRPr sz="2000">
+              <a:solidFill>
+                <a:schemeClr val="dk1"/>
+              </a:solidFill>
+              <a:latin typeface="Calibri"/>
+              <a:ea typeface="Calibri"/>
+              <a:cs typeface="Calibri"/>
+              <a:sym typeface="Calibri"/>
+            </a:endParaRPr>
+          </a:p>
+          <a:p>
+            <a:pPr indent="-387350" lvl="0" marL="457200" rtl="0" algn="just">
+              <a:lnSpc>
+                <a:spcPct val="150000"/>
+              </a:lnSpc>
+              <a:spcBef>
+                <a:spcPts val="600"/>
+              </a:spcBef>
+              <a:spcAft>
+                <a:spcPts val="0"/>
+              </a:spcAft>
+              <a:buClr>
+                <a:schemeClr val="dk1"/>
+              </a:buClr>
+              <a:buSzPts val="2000"/>
+              <a:buFont typeface="Calibri"/>
+              <a:buChar char="○"/>
+            </a:pPr>
+            <a:r>
+              <a:rPr b="1" lang="en-US" sz="2000">
+                <a:solidFill>
+                  <a:schemeClr val="dk1"/>
+                </a:solidFill>
+                <a:latin typeface="Calibri"/>
+                <a:ea typeface="Calibri"/>
+                <a:cs typeface="Calibri"/>
+                <a:sym typeface="Calibri"/>
+              </a:rPr>
+              <a:t>Regulatory. </a:t>
+            </a:r>
+            <a:r>
+              <a:rPr lang="en-US" sz="2000">
+                <a:solidFill>
+                  <a:schemeClr val="dk1"/>
+                </a:solidFill>
+                <a:latin typeface="Calibri"/>
+                <a:ea typeface="Calibri"/>
+                <a:cs typeface="Calibri"/>
+                <a:sym typeface="Calibri"/>
+              </a:rPr>
+              <a:t>The pilot is the gate toward DRAP approval, which is required before any clinical use.</a:t>
+            </a:r>
+            <a:endParaRPr sz="2000">
+              <a:solidFill>
+                <a:schemeClr val="dk1"/>
+              </a:solidFill>
+              <a:latin typeface="Calibri"/>
+              <a:ea typeface="Calibri"/>
+              <a:cs typeface="Calibri"/>
+              <a:sym typeface="Calibri"/>
+            </a:endParaRPr>
+          </a:p>
+          <a:p>
+            <a:pPr indent="-387350" lvl="0" marL="457200" rtl="0" algn="just">
+              <a:lnSpc>
+                <a:spcPct val="150000"/>
+              </a:lnSpc>
+              <a:spcBef>
+                <a:spcPts val="600"/>
+              </a:spcBef>
+              <a:spcAft>
+                <a:spcPts val="0"/>
+              </a:spcAft>
+              <a:buClr>
+                <a:schemeClr val="dk1"/>
+              </a:buClr>
+              <a:buSzPts val="2000"/>
+              <a:buFont typeface="Calibri"/>
+              <a:buChar char="○"/>
+            </a:pPr>
+            <a:r>
+              <a:rPr b="1" lang="en-US" sz="2000">
+                <a:solidFill>
+                  <a:schemeClr val="dk1"/>
+                </a:solidFill>
+                <a:latin typeface="Calibri"/>
+                <a:ea typeface="Calibri"/>
+                <a:cs typeface="Calibri"/>
+                <a:sym typeface="Calibri"/>
+              </a:rPr>
+              <a:t>Deployment routes once approved. </a:t>
+            </a:r>
+            <a:r>
+              <a:rPr lang="en-US" sz="2000">
+                <a:solidFill>
+                  <a:schemeClr val="dk1"/>
+                </a:solidFill>
+                <a:latin typeface="Calibri"/>
+                <a:ea typeface="Calibri"/>
+                <a:cs typeface="Calibri"/>
+                <a:sym typeface="Calibri"/>
+              </a:rPr>
+              <a:t>A second-opinion app for doctors, an API for health platforms, and a CDS licence for clinics, health camps and telehealth providers.</a:t>
+            </a:r>
+            <a:endParaRPr b="1" sz="2000">
+              <a:solidFill>
+                <a:srgbClr val="0B3D59"/>
+              </a:solidFill>
+              <a:latin typeface="Calibri"/>
+              <a:ea typeface="Calibri"/>
+              <a:cs typeface="Calibri"/>
+              <a:sym typeface="Calibri"/>
+            </a:endParaRPr>
+          </a:p>
+        </p:txBody>
+      </p:sp>
+      <p:sp>
+        <p:nvSpPr>
+          <p:cNvPr id="351" name="Google Shape;351;p42"/>
           <p:cNvSpPr txBox="1"/>
           <p:nvPr>
-            <p:ph idx="1" type="body"/>
+            <p:ph idx="12" type="sldNum"/>
           </p:nvPr>
         </p:nvSpPr>
         <p:spPr>
           <a:xfrm>
-            <a:off x="457200" y="1447800"/>
-            <a:ext cx="8229600" cy="4526100"/>
+            <a:off x="6553200" y="6356350"/>
+            <a:ext cx="2133600" cy="365100"/>
+          </a:xfrm>
+          <a:prstGeom prst="rect">
+            <a:avLst/>
+          </a:prstGeom>
+        </p:spPr>
+        <p:txBody>
+          <a:bodyPr anchorCtr="0" anchor="ctr" bIns="45700" lIns="91425" spcFirstLastPara="1" rIns="91425" wrap="square" tIns="45700">
+            <a:noAutofit/>
+          </a:bodyPr>
+          <a:lstStyle/>
+          <a:p>
+            <a:pPr indent="0" lvl="0" marL="0" rtl="0" algn="r">
+              <a:spcBef>
+                <a:spcPts val="0"/>
+              </a:spcBef>
+              <a:spcAft>
+                <a:spcPts val="0"/>
+              </a:spcAft>
+              <a:buNone/>
+            </a:pPr>
+            <a:fld id="{00000000-1234-1234-1234-123412341234}" type="slidenum">
+              <a:rPr lang="en-US"/>
+              <a:t>‹#›</a:t>
+            </a:fld>
+            <a:endParaRPr/>
+          </a:p>
+        </p:txBody>
+      </p:sp>
+    </p:spTree>
+  </p:cSld>
+  <p:clrMapOvr>
+    <a:masterClrMapping/>
+  </p:clrMapOvr>
+</p:sld>
+</file>
+
+<file path=ppt/slides/slide31.xml><?xml version="1.0" encoding="utf-8"?>
+<p:sld xmlns:a="http://schemas.openxmlformats.org/drawingml/2006/main" xmlns:r="http://schemas.openxmlformats.org/officeDocument/2006/relationships" xmlns:mc="http://schemas.openxmlformats.org/markup-compatibility/2006" xmlns:mv="urn:schemas-microsoft-com:mac:vml" xmlns:p="http://schemas.openxmlformats.org/presentationml/2006/main" xmlns:c="http://schemas.openxmlformats.org/drawingml/2006/chart" xmlns:dgm="http://schemas.openxmlformats.org/drawingml/2006/diagram" xmlns:o="urn:schemas-microsoft-com:office:office" xmlns:v="urn:schemas-microsoft-com:vml" xmlns:pvml="urn:schemas-microsoft-com:office:powerpoint" xmlns:com="http://schemas.openxmlformats.org/drawingml/2006/compatibility" xmlns:p14="http://schemas.microsoft.com/office/powerpoint/2010/main" xmlns:p15="http://schemas.microsoft.com/office/powerpoint/2012/main" xmlns:ahyp="http://schemas.microsoft.com/office/drawing/2018/hyperlinkcolor">
+  <p:cSld>
+    <p:spTree>
+      <p:nvGrpSpPr>
+        <p:cNvPr id="355" name="Shape 355"/>
+        <p:cNvGrpSpPr/>
+        <p:nvPr/>
+      </p:nvGrpSpPr>
+      <p:grpSpPr>
+        <a:xfrm>
+          <a:off x="0" y="0"/>
+          <a:ext cx="0" cy="0"/>
+          <a:chOff x="0" y="0"/>
+          <a:chExt cx="0" cy="0"/>
+        </a:xfrm>
+      </p:grpSpPr>
+      <p:sp>
+        <p:nvSpPr>
+          <p:cNvPr id="356" name="Google Shape;356;p43"/>
+          <p:cNvSpPr txBox="1"/>
+          <p:nvPr>
+            <p:ph type="title"/>
+          </p:nvPr>
+        </p:nvSpPr>
+        <p:spPr>
+          <a:xfrm>
+            <a:off x="722313" y="4406900"/>
+            <a:ext cx="7772400" cy="1362000"/>
           </a:xfrm>
           <a:prstGeom prst="rect">
             <a:avLst/>
@@ -24940,25 +27558,19 @@
         </p:spPr>
         <p:txBody>
           <a:bodyPr anchorCtr="0" anchor="t" bIns="45700" lIns="91425" spcFirstLastPara="1" rIns="91425" wrap="square" tIns="45700">
-            <a:noAutofit/>
+            <a:normAutofit/>
           </a:bodyPr>
           <a:lstStyle/>
           <a:p>
-            <a:pPr indent="-342900" lvl="0" marL="342900" rtl="0" algn="l">
-              <a:lnSpc>
-                <a:spcPct val="100000"/>
-              </a:lnSpc>
-              <a:spcBef>
-                <a:spcPts val="0"/>
-              </a:spcBef>
-              <a:spcAft>
-                <a:spcPts val="0"/>
-              </a:spcAft>
-              <a:buClr>
-                <a:srgbClr val="0B3D59"/>
-              </a:buClr>
-              <a:buSzPts val="3200"/>
-              <a:buChar char="•"/>
+            <a:pPr indent="0" lvl="0" marL="0" rtl="0" algn="l">
+              <a:spcBef>
+                <a:spcPts val="0"/>
+              </a:spcBef>
+              <a:spcAft>
+                <a:spcPts val="0"/>
+              </a:spcAft>
+              <a:buSzPts val="1400"/>
+              <a:buNone/>
             </a:pPr>
             <a:r>
               <a:rPr lang="en-US">
@@ -24966,230 +27578,106 @@
                   <a:srgbClr val="0B3D59"/>
                 </a:solidFill>
               </a:rPr>
-              <a:t>Introduction and Background</a:t>
+              <a:t>Thank You</a:t>
             </a:r>
-            <a:endParaRPr>
+            <a:endParaRPr b="0" sz="4400">
               <a:solidFill>
                 <a:srgbClr val="0B3D59"/>
               </a:solidFill>
             </a:endParaRPr>
           </a:p>
+        </p:txBody>
+      </p:sp>
+      <p:sp>
+        <p:nvSpPr>
+          <p:cNvPr id="357" name="Google Shape;357;p43"/>
+          <p:cNvSpPr txBox="1"/>
+          <p:nvPr>
+            <p:ph idx="1" type="body"/>
+          </p:nvPr>
+        </p:nvSpPr>
+        <p:spPr>
+          <a:xfrm>
+            <a:off x="722313" y="2906713"/>
+            <a:ext cx="7772400" cy="1500300"/>
+          </a:xfrm>
+          <a:prstGeom prst="rect">
+            <a:avLst/>
+          </a:prstGeom>
+          <a:noFill/>
+          <a:ln>
+            <a:noFill/>
+          </a:ln>
+        </p:spPr>
+        <p:txBody>
+          <a:bodyPr anchorCtr="0" anchor="b" bIns="45700" lIns="91425" spcFirstLastPara="1" rIns="91425" wrap="square" tIns="45700">
+            <a:normAutofit/>
+          </a:bodyPr>
+          <a:lstStyle/>
           <a:p>
-            <a:pPr indent="-342900" lvl="0" marL="342900" rtl="0" algn="l">
-              <a:lnSpc>
-                <a:spcPct val="100000"/>
-              </a:lnSpc>
-              <a:spcBef>
-                <a:spcPts val="640"/>
-              </a:spcBef>
-              <a:spcAft>
-                <a:spcPts val="0"/>
-              </a:spcAft>
-              <a:buClr>
-                <a:srgbClr val="0B3D59"/>
-              </a:buClr>
-              <a:buSzPts val="3200"/>
-              <a:buChar char="•"/>
+            <a:pPr indent="0" lvl="0" marL="0" rtl="0" algn="l">
+              <a:spcBef>
+                <a:spcPts val="600"/>
+              </a:spcBef>
+              <a:spcAft>
+                <a:spcPts val="0"/>
+              </a:spcAft>
+              <a:buClr>
+                <a:schemeClr val="dk1"/>
+              </a:buClr>
+              <a:buSzPts val="1600"/>
+              <a:buFont typeface="Arial"/>
+              <a:buNone/>
             </a:pPr>
             <a:r>
-              <a:rPr lang="en-US">
+              <a:rPr lang="en-US" sz="1600">
                 <a:solidFill>
-                  <a:srgbClr val="0B3D59"/>
+                  <a:schemeClr val="dk1"/>
                 </a:solidFill>
               </a:rPr>
-              <a:t>Literature Review and Summary Table</a:t>
+              <a:t>GLANCE: Clinical Decision Support for Non-Invasive Screening</a:t>
             </a:r>
-            <a:endParaRPr>
-              <a:solidFill>
-                <a:srgbClr val="0B3D59"/>
-              </a:solidFill>
-            </a:endParaRPr>
+            <a:endParaRPr/>
           </a:p>
+        </p:txBody>
+      </p:sp>
+      <p:sp>
+        <p:nvSpPr>
+          <p:cNvPr id="358" name="Google Shape;358;p43"/>
+          <p:cNvSpPr txBox="1"/>
+          <p:nvPr>
+            <p:ph idx="12" type="sldNum"/>
+          </p:nvPr>
+        </p:nvSpPr>
+        <p:spPr>
+          <a:xfrm>
+            <a:off x="6553200" y="6356350"/>
+            <a:ext cx="2133600" cy="365100"/>
+          </a:xfrm>
+          <a:prstGeom prst="rect">
+            <a:avLst/>
+          </a:prstGeom>
+        </p:spPr>
+        <p:txBody>
+          <a:bodyPr anchorCtr="0" anchor="ctr" bIns="45700" lIns="91425" spcFirstLastPara="1" rIns="91425" wrap="square" tIns="45700">
+            <a:noAutofit/>
+          </a:bodyPr>
+          <a:lstStyle/>
           <a:p>
-            <a:pPr indent="-342900" lvl="0" marL="342900" rtl="0" algn="l">
-              <a:lnSpc>
-                <a:spcPct val="100000"/>
-              </a:lnSpc>
-              <a:spcBef>
-                <a:spcPts val="640"/>
-              </a:spcBef>
-              <a:spcAft>
-                <a:spcPts val="0"/>
-              </a:spcAft>
-              <a:buClr>
-                <a:srgbClr val="0B3D59"/>
-              </a:buClr>
-              <a:buSzPts val="3200"/>
-              <a:buChar char="•"/>
+            <a:pPr indent="0" lvl="0" marL="0" rtl="0" algn="r">
+              <a:spcBef>
+                <a:spcPts val="0"/>
+              </a:spcBef>
+              <a:spcAft>
+                <a:spcPts val="0"/>
+              </a:spcAft>
+              <a:buNone/>
             </a:pPr>
-            <a:r>
-              <a:rPr lang="en-US">
-                <a:solidFill>
-                  <a:srgbClr val="0B3D59"/>
-                </a:solidFill>
-              </a:rPr>
-              <a:t>Gap Analysis</a:t>
-            </a:r>
-            <a:endParaRPr>
-              <a:solidFill>
-                <a:srgbClr val="0B3D59"/>
-              </a:solidFill>
-            </a:endParaRPr>
-          </a:p>
-          <a:p>
-            <a:pPr indent="-342900" lvl="0" marL="342900" rtl="0" algn="l">
-              <a:lnSpc>
-                <a:spcPct val="100000"/>
-              </a:lnSpc>
-              <a:spcBef>
-                <a:spcPts val="640"/>
-              </a:spcBef>
-              <a:spcAft>
-                <a:spcPts val="0"/>
-              </a:spcAft>
-              <a:buClr>
-                <a:srgbClr val="0B3D59"/>
-              </a:buClr>
-              <a:buSzPts val="3200"/>
-              <a:buChar char="•"/>
-            </a:pPr>
-            <a:r>
-              <a:rPr lang="en-US">
-                <a:solidFill>
-                  <a:srgbClr val="0B3D59"/>
-                </a:solidFill>
-              </a:rPr>
-              <a:t>Problem Statement</a:t>
-            </a:r>
-            <a:endParaRPr>
-              <a:solidFill>
-                <a:srgbClr val="0B3D59"/>
-              </a:solidFill>
-            </a:endParaRPr>
-          </a:p>
-          <a:p>
-            <a:pPr indent="-342900" lvl="0" marL="342900" rtl="0" algn="l">
-              <a:lnSpc>
-                <a:spcPct val="100000"/>
-              </a:lnSpc>
-              <a:spcBef>
-                <a:spcPts val="640"/>
-              </a:spcBef>
-              <a:spcAft>
-                <a:spcPts val="0"/>
-              </a:spcAft>
-              <a:buClr>
-                <a:srgbClr val="0B3D59"/>
-              </a:buClr>
-              <a:buSzPts val="3200"/>
-              <a:buChar char="•"/>
-            </a:pPr>
-            <a:r>
-              <a:rPr lang="en-US">
-                <a:solidFill>
-                  <a:srgbClr val="0B3D59"/>
-                </a:solidFill>
-              </a:rPr>
-              <a:t>Proposed Solution &amp; Methodology</a:t>
-            </a:r>
-            <a:endParaRPr>
-              <a:solidFill>
-                <a:srgbClr val="0B3D59"/>
-              </a:solidFill>
-            </a:endParaRPr>
-          </a:p>
-          <a:p>
-            <a:pPr indent="-342900" lvl="0" marL="342900" rtl="0" algn="l">
-              <a:lnSpc>
-                <a:spcPct val="100000"/>
-              </a:lnSpc>
-              <a:spcBef>
-                <a:spcPts val="640"/>
-              </a:spcBef>
-              <a:spcAft>
-                <a:spcPts val="0"/>
-              </a:spcAft>
-              <a:buClr>
-                <a:srgbClr val="0B3D59"/>
-              </a:buClr>
-              <a:buSzPts val="3200"/>
-              <a:buChar char="•"/>
-            </a:pPr>
-            <a:r>
-              <a:rPr lang="en-US">
-                <a:solidFill>
-                  <a:srgbClr val="0B3D59"/>
-                </a:solidFill>
-              </a:rPr>
-              <a:t>Project Scope</a:t>
-            </a:r>
-            <a:endParaRPr>
-              <a:solidFill>
-                <a:srgbClr val="0B3D59"/>
-              </a:solidFill>
-            </a:endParaRPr>
-          </a:p>
-          <a:p>
-            <a:pPr indent="-342900" lvl="0" marL="342900" rtl="0" algn="l">
-              <a:lnSpc>
-                <a:spcPct val="100000"/>
-              </a:lnSpc>
-              <a:spcBef>
-                <a:spcPts val="640"/>
-              </a:spcBef>
-              <a:spcAft>
-                <a:spcPts val="0"/>
-              </a:spcAft>
-              <a:buClr>
-                <a:srgbClr val="0B3D59"/>
-              </a:buClr>
-              <a:buSzPts val="3200"/>
-              <a:buChar char="•"/>
-            </a:pPr>
-            <a:r>
-              <a:rPr lang="en-US">
-                <a:solidFill>
-                  <a:srgbClr val="0B3D59"/>
-                </a:solidFill>
-              </a:rPr>
-              <a:t>Work Breakdown Structure</a:t>
-            </a:r>
-            <a:endParaRPr>
-              <a:solidFill>
-                <a:srgbClr val="0B3D59"/>
-              </a:solidFill>
-            </a:endParaRPr>
-          </a:p>
-          <a:p>
-            <a:pPr indent="-342900" lvl="0" marL="342900" rtl="0" algn="l">
-              <a:lnSpc>
-                <a:spcPct val="100000"/>
-              </a:lnSpc>
-              <a:spcBef>
-                <a:spcPts val="640"/>
-              </a:spcBef>
-              <a:spcAft>
-                <a:spcPts val="0"/>
-              </a:spcAft>
-              <a:buClr>
-                <a:srgbClr val="0B3D59"/>
-              </a:buClr>
-              <a:buSzPts val="3200"/>
-              <a:buChar char="•"/>
-            </a:pPr>
-            <a:r>
-              <a:rPr lang="en-US">
-                <a:solidFill>
-                  <a:srgbClr val="0B3D59"/>
-                </a:solidFill>
-              </a:rPr>
-              <a:t>Roles and Responsibilities</a:t>
-            </a:r>
-            <a:endParaRPr>
-              <a:solidFill>
-                <a:srgbClr val="0B3D59"/>
-              </a:solidFill>
-            </a:endParaRPr>
+            <a:fld id="{00000000-1234-1234-1234-123412341234}" type="slidenum">
+              <a:rPr lang="en-US"/>
+              <a:t>‹#›</a:t>
+            </a:fld>
+            <a:endParaRPr/>
           </a:p>
         </p:txBody>
       </p:sp>
@@ -25206,7 +27694,7 @@
   <p:cSld>
     <p:spTree>
       <p:nvGrpSpPr>
-        <p:cNvPr id="102" name="Shape 102"/>
+        <p:cNvPr id="104" name="Shape 104"/>
         <p:cNvGrpSpPr/>
         <p:nvPr/>
       </p:nvGrpSpPr>
@@ -25220,7 +27708,7 @@
       </p:grpSpPr>
       <p:sp>
         <p:nvSpPr>
-          <p:cNvPr id="103" name="Google Shape;103;p16"/>
+          <p:cNvPr id="105" name="Google Shape;105;p16"/>
           <p:cNvSpPr txBox="1"/>
           <p:nvPr>
             <p:ph type="title"/>
@@ -25276,7 +27764,7 @@
       </p:sp>
       <p:sp>
         <p:nvSpPr>
-          <p:cNvPr id="104" name="Google Shape;104;p16"/>
+          <p:cNvPr id="106" name="Google Shape;106;p16"/>
           <p:cNvSpPr txBox="1"/>
           <p:nvPr>
             <p:ph idx="1" type="body"/>
@@ -25325,6 +27813,51 @@
           </a:p>
         </p:txBody>
       </p:sp>
+      <p:sp>
+        <p:nvSpPr>
+          <p:cNvPr id="107" name="Google Shape;107;p16"/>
+          <p:cNvSpPr txBox="1"/>
+          <p:nvPr>
+            <p:ph idx="12" type="sldNum"/>
+          </p:nvPr>
+        </p:nvSpPr>
+        <p:spPr>
+          <a:xfrm>
+            <a:off x="6553200" y="6356350"/>
+            <a:ext cx="2133600" cy="365100"/>
+          </a:xfrm>
+          <a:prstGeom prst="rect">
+            <a:avLst/>
+          </a:prstGeom>
+        </p:spPr>
+        <p:txBody>
+          <a:bodyPr anchorCtr="0" anchor="ctr" bIns="45700" lIns="91425" spcFirstLastPara="1" rIns="91425" wrap="square" tIns="45700">
+            <a:noAutofit/>
+          </a:bodyPr>
+          <a:lstStyle/>
+          <a:p>
+            <a:pPr indent="0" lvl="0" marL="0" rtl="0" algn="r">
+              <a:spcBef>
+                <a:spcPts val="0"/>
+              </a:spcBef>
+              <a:spcAft>
+                <a:spcPts val="0"/>
+              </a:spcAft>
+              <a:buClr>
+                <a:srgbClr val="000000"/>
+              </a:buClr>
+              <a:buSzPts val="1200"/>
+              <a:buFont typeface="Arial"/>
+              <a:buNone/>
+            </a:pPr>
+            <a:fld id="{00000000-1234-1234-1234-123412341234}" type="slidenum">
+              <a:rPr lang="en-US"/>
+              <a:t>‹#›</a:t>
+            </a:fld>
+            <a:endParaRPr/>
+          </a:p>
+        </p:txBody>
+      </p:sp>
     </p:spTree>
   </p:cSld>
   <p:clrMapOvr>
@@ -25338,7 +27871,7 @@
   <p:cSld>
     <p:spTree>
       <p:nvGrpSpPr>
-        <p:cNvPr id="108" name="Shape 108"/>
+        <p:cNvPr id="111" name="Shape 111"/>
         <p:cNvGrpSpPr/>
         <p:nvPr/>
       </p:nvGrpSpPr>
@@ -25352,7 +27885,7 @@
       </p:grpSpPr>
       <p:sp>
         <p:nvSpPr>
-          <p:cNvPr id="109" name="Google Shape;109;p17"/>
+          <p:cNvPr id="112" name="Google Shape;112;p17"/>
           <p:cNvSpPr txBox="1"/>
           <p:nvPr>
             <p:ph type="title"/>
@@ -25405,7 +27938,7 @@
       </p:sp>
       <p:graphicFrame>
         <p:nvGraphicFramePr>
-          <p:cNvPr id="110" name="Google Shape;110;p17"/>
+          <p:cNvPr id="113" name="Google Shape;113;p17"/>
           <p:cNvGraphicFramePr/>
           <p:nvPr/>
         </p:nvGraphicFramePr>
@@ -25418,7 +27951,7 @@
             <a:tbl>
               <a:tblPr>
                 <a:noFill/>
-                <a:tableStyleId>{5F5D670A-1C51-49B9-9B8F-6BC062B6B0A7}</a:tableStyleId>
+                <a:tableStyleId>{40C852DD-9957-4312-98B3-2853B80A6055}</a:tableStyleId>
               </a:tblPr>
               <a:tblGrid>
                 <a:gridCol w="2743175"/>
@@ -27038,7 +29571,7 @@
       </p:graphicFrame>
       <p:sp>
         <p:nvSpPr>
-          <p:cNvPr id="111" name="Google Shape;111;p17"/>
+          <p:cNvPr id="114" name="Google Shape;114;p17"/>
           <p:cNvSpPr txBox="1"/>
           <p:nvPr/>
         </p:nvSpPr>
@@ -27096,7 +29629,7 @@
       </p:sp>
       <p:sp>
         <p:nvSpPr>
-          <p:cNvPr id="112" name="Google Shape;112;p17"/>
+          <p:cNvPr id="115" name="Google Shape;115;p17"/>
           <p:cNvSpPr txBox="1"/>
           <p:nvPr/>
         </p:nvSpPr>
@@ -27152,6 +29685,51 @@
           </a:p>
         </p:txBody>
       </p:sp>
+      <p:sp>
+        <p:nvSpPr>
+          <p:cNvPr id="116" name="Google Shape;116;p17"/>
+          <p:cNvSpPr txBox="1"/>
+          <p:nvPr>
+            <p:ph idx="12" type="sldNum"/>
+          </p:nvPr>
+        </p:nvSpPr>
+        <p:spPr>
+          <a:xfrm>
+            <a:off x="6553200" y="6356350"/>
+            <a:ext cx="2133600" cy="365100"/>
+          </a:xfrm>
+          <a:prstGeom prst="rect">
+            <a:avLst/>
+          </a:prstGeom>
+        </p:spPr>
+        <p:txBody>
+          <a:bodyPr anchorCtr="0" anchor="ctr" bIns="45700" lIns="91425" spcFirstLastPara="1" rIns="91425" wrap="square" tIns="45700">
+            <a:noAutofit/>
+          </a:bodyPr>
+          <a:lstStyle/>
+          <a:p>
+            <a:pPr indent="0" lvl="0" marL="0" rtl="0" algn="r">
+              <a:spcBef>
+                <a:spcPts val="0"/>
+              </a:spcBef>
+              <a:spcAft>
+                <a:spcPts val="0"/>
+              </a:spcAft>
+              <a:buClr>
+                <a:srgbClr val="000000"/>
+              </a:buClr>
+              <a:buSzPts val="1200"/>
+              <a:buFont typeface="Arial"/>
+              <a:buNone/>
+            </a:pPr>
+            <a:fld id="{00000000-1234-1234-1234-123412341234}" type="slidenum">
+              <a:rPr lang="en-US"/>
+              <a:t>‹#›</a:t>
+            </a:fld>
+            <a:endParaRPr/>
+          </a:p>
+        </p:txBody>
+      </p:sp>
     </p:spTree>
   </p:cSld>
   <p:clrMapOvr>
@@ -27165,7 +29743,7 @@
   <p:cSld>
     <p:spTree>
       <p:nvGrpSpPr>
-        <p:cNvPr id="116" name="Shape 116"/>
+        <p:cNvPr id="120" name="Shape 120"/>
         <p:cNvGrpSpPr/>
         <p:nvPr/>
       </p:nvGrpSpPr>
@@ -27179,7 +29757,7 @@
       </p:grpSpPr>
       <p:sp>
         <p:nvSpPr>
-          <p:cNvPr id="117" name="Google Shape;117;p18"/>
+          <p:cNvPr id="121" name="Google Shape;121;p18"/>
           <p:cNvSpPr txBox="1"/>
           <p:nvPr>
             <p:ph type="title"/>
@@ -27187,7 +29765,7 @@
         </p:nvSpPr>
         <p:spPr>
           <a:xfrm>
-            <a:off x="457200" y="274638"/>
+            <a:off x="467299" y="108135"/>
             <a:ext cx="8229600" cy="1143000"/>
           </a:xfrm>
           <a:prstGeom prst="rect">
@@ -27232,13 +29810,13 @@
       </p:sp>
       <p:sp>
         <p:nvSpPr>
-          <p:cNvPr id="118" name="Google Shape;118;p18"/>
+          <p:cNvPr id="122" name="Google Shape;122;p18"/>
           <p:cNvSpPr/>
           <p:nvPr/>
         </p:nvSpPr>
         <p:spPr>
           <a:xfrm>
-            <a:off x="548653" y="1580406"/>
+            <a:off x="424653" y="1359033"/>
             <a:ext cx="164700" cy="164700"/>
           </a:xfrm>
           <a:prstGeom prst="ellipse">
@@ -27283,13 +29861,13 @@
       </p:sp>
       <p:sp>
         <p:nvSpPr>
-          <p:cNvPr id="119" name="Google Shape;119;p18"/>
+          <p:cNvPr id="123" name="Google Shape;123;p18"/>
           <p:cNvSpPr/>
           <p:nvPr/>
         </p:nvSpPr>
         <p:spPr>
           <a:xfrm>
-            <a:off x="896165" y="1443109"/>
+            <a:off x="664864" y="1224279"/>
             <a:ext cx="7761900" cy="411600"/>
           </a:xfrm>
           <a:prstGeom prst="rect">
@@ -27346,13 +29924,13 @@
       </p:sp>
       <p:sp>
         <p:nvSpPr>
-          <p:cNvPr id="120" name="Google Shape;120;p18"/>
+          <p:cNvPr id="124" name="Google Shape;124;p18"/>
           <p:cNvSpPr/>
           <p:nvPr/>
         </p:nvSpPr>
         <p:spPr>
           <a:xfrm>
-            <a:off x="924980" y="1775085"/>
+            <a:off x="677967" y="1634575"/>
             <a:ext cx="7761900" cy="764400"/>
           </a:xfrm>
           <a:prstGeom prst="rect">
@@ -27460,13 +30038,13 @@
       </p:sp>
       <p:sp>
         <p:nvSpPr>
-          <p:cNvPr id="121" name="Google Shape;121;p18"/>
+          <p:cNvPr id="125" name="Google Shape;125;p18"/>
           <p:cNvSpPr/>
           <p:nvPr/>
         </p:nvSpPr>
         <p:spPr>
           <a:xfrm>
-            <a:off x="548653" y="3088678"/>
+            <a:off x="424653" y="2983898"/>
             <a:ext cx="164700" cy="164700"/>
           </a:xfrm>
           <a:prstGeom prst="ellipse">
@@ -27511,13 +30089,13 @@
       </p:sp>
       <p:sp>
         <p:nvSpPr>
-          <p:cNvPr id="122" name="Google Shape;122;p18"/>
+          <p:cNvPr id="126" name="Google Shape;126;p18"/>
           <p:cNvSpPr/>
           <p:nvPr/>
         </p:nvSpPr>
         <p:spPr>
           <a:xfrm>
-            <a:off x="924980" y="2942835"/>
+            <a:off x="664880" y="2824980"/>
             <a:ext cx="7761900" cy="411600"/>
           </a:xfrm>
           <a:prstGeom prst="rect">
@@ -27574,13 +30152,13 @@
       </p:sp>
       <p:sp>
         <p:nvSpPr>
-          <p:cNvPr id="123" name="Google Shape;123;p18"/>
+          <p:cNvPr id="127" name="Google Shape;127;p18"/>
           <p:cNvSpPr/>
           <p:nvPr/>
         </p:nvSpPr>
         <p:spPr>
           <a:xfrm>
-            <a:off x="924980" y="3278034"/>
+            <a:off x="674979" y="3224949"/>
             <a:ext cx="7761900" cy="764400"/>
           </a:xfrm>
           <a:prstGeom prst="rect">
@@ -27640,13 +30218,13 @@
       </p:sp>
       <p:sp>
         <p:nvSpPr>
-          <p:cNvPr id="124" name="Google Shape;124;p18"/>
+          <p:cNvPr id="128" name="Google Shape;128;p18"/>
           <p:cNvSpPr/>
           <p:nvPr/>
         </p:nvSpPr>
         <p:spPr>
           <a:xfrm>
-            <a:off x="548653" y="4513144"/>
+            <a:off x="424653" y="4562202"/>
             <a:ext cx="164700" cy="164700"/>
           </a:xfrm>
           <a:prstGeom prst="ellipse">
@@ -27691,13 +30269,13 @@
       </p:sp>
       <p:sp>
         <p:nvSpPr>
-          <p:cNvPr id="125" name="Google Shape;125;p18"/>
+          <p:cNvPr id="129" name="Google Shape;129;p18"/>
           <p:cNvSpPr/>
           <p:nvPr/>
         </p:nvSpPr>
         <p:spPr>
           <a:xfrm>
-            <a:off x="881757" y="4378487"/>
+            <a:off x="701157" y="4425682"/>
             <a:ext cx="7761900" cy="411600"/>
           </a:xfrm>
           <a:prstGeom prst="rect">
@@ -27754,13 +30332,13 @@
       </p:sp>
       <p:sp>
         <p:nvSpPr>
-          <p:cNvPr id="126" name="Google Shape;126;p18"/>
+          <p:cNvPr id="130" name="Google Shape;130;p18"/>
           <p:cNvSpPr/>
           <p:nvPr/>
         </p:nvSpPr>
         <p:spPr>
           <a:xfrm>
-            <a:off x="924980" y="4737760"/>
+            <a:off x="701155" y="4801578"/>
             <a:ext cx="7761900" cy="764400"/>
           </a:xfrm>
           <a:prstGeom prst="rect">
@@ -27815,6 +30393,51 @@
               <a:cs typeface="Calibri"/>
               <a:sym typeface="Calibri"/>
             </a:endParaRPr>
+          </a:p>
+        </p:txBody>
+      </p:sp>
+      <p:sp>
+        <p:nvSpPr>
+          <p:cNvPr id="131" name="Google Shape;131;p18"/>
+          <p:cNvSpPr txBox="1"/>
+          <p:nvPr>
+            <p:ph idx="12" type="sldNum"/>
+          </p:nvPr>
+        </p:nvSpPr>
+        <p:spPr>
+          <a:xfrm>
+            <a:off x="6553200" y="6356350"/>
+            <a:ext cx="2133600" cy="365100"/>
+          </a:xfrm>
+          <a:prstGeom prst="rect">
+            <a:avLst/>
+          </a:prstGeom>
+        </p:spPr>
+        <p:txBody>
+          <a:bodyPr anchorCtr="0" anchor="ctr" bIns="45700" lIns="91425" spcFirstLastPara="1" rIns="91425" wrap="square" tIns="45700">
+            <a:noAutofit/>
+          </a:bodyPr>
+          <a:lstStyle/>
+          <a:p>
+            <a:pPr indent="0" lvl="0" marL="0" rtl="0" algn="r">
+              <a:spcBef>
+                <a:spcPts val="0"/>
+              </a:spcBef>
+              <a:spcAft>
+                <a:spcPts val="0"/>
+              </a:spcAft>
+              <a:buClr>
+                <a:srgbClr val="000000"/>
+              </a:buClr>
+              <a:buSzPts val="1200"/>
+              <a:buFont typeface="Arial"/>
+              <a:buNone/>
+            </a:pPr>
+            <a:fld id="{00000000-1234-1234-1234-123412341234}" type="slidenum">
+              <a:rPr lang="en-US"/>
+              <a:t>‹#›</a:t>
+            </a:fld>
+            <a:endParaRPr/>
           </a:p>
         </p:txBody>
       </p:sp>
@@ -27845,164 +30468,6 @@
                             <p:childTnLst>
                               <p:par>
                                 <p:cTn fill="hold" nodeType="clickEffect" presetClass="entr" presetID="10" presetSubtype="0">
-                                  <p:stCondLst>
-                                    <p:cond delay="0"/>
-                                  </p:stCondLst>
-                                  <p:childTnLst>
-                                    <p:set>
-                                      <p:cBhvr>
-                                        <p:cTn dur="1" fill="hold">
-                                          <p:stCondLst>
-                                            <p:cond delay="0"/>
-                                          </p:stCondLst>
-                                        </p:cTn>
-                                        <p:tgtEl>
-                                          <p:spTgt spid="118"/>
-                                        </p:tgtEl>
-                                        <p:attrNameLst>
-                                          <p:attrName>style.visibility</p:attrName>
-                                        </p:attrNameLst>
-                                      </p:cBhvr>
-                                      <p:to>
-                                        <p:strVal val="visible"/>
-                                      </p:to>
-                                    </p:set>
-                                    <p:animEffect filter="fade" transition="in">
-                                      <p:cBhvr>
-                                        <p:cTn dur="1000"/>
-                                        <p:tgtEl>
-                                          <p:spTgt spid="118"/>
-                                        </p:tgtEl>
-                                      </p:cBhvr>
-                                    </p:animEffect>
-                                  </p:childTnLst>
-                                </p:cTn>
-                              </p:par>
-                              <p:par>
-                                <p:cTn fill="hold" nodeType="withEffect" presetClass="entr" presetID="10" presetSubtype="0">
-                                  <p:stCondLst>
-                                    <p:cond delay="0"/>
-                                  </p:stCondLst>
-                                  <p:childTnLst>
-                                    <p:set>
-                                      <p:cBhvr>
-                                        <p:cTn dur="1" fill="hold">
-                                          <p:stCondLst>
-                                            <p:cond delay="0"/>
-                                          </p:stCondLst>
-                                        </p:cTn>
-                                        <p:tgtEl>
-                                          <p:spTgt spid="119"/>
-                                        </p:tgtEl>
-                                        <p:attrNameLst>
-                                          <p:attrName>style.visibility</p:attrName>
-                                        </p:attrNameLst>
-                                      </p:cBhvr>
-                                      <p:to>
-                                        <p:strVal val="visible"/>
-                                      </p:to>
-                                    </p:set>
-                                    <p:animEffect filter="fade" transition="in">
-                                      <p:cBhvr>
-                                        <p:cTn dur="1000"/>
-                                        <p:tgtEl>
-                                          <p:spTgt spid="119"/>
-                                        </p:tgtEl>
-                                      </p:cBhvr>
-                                    </p:animEffect>
-                                  </p:childTnLst>
-                                </p:cTn>
-                              </p:par>
-                              <p:par>
-                                <p:cTn fill="hold" nodeType="withEffect" presetClass="entr" presetID="10" presetSubtype="0">
-                                  <p:stCondLst>
-                                    <p:cond delay="0"/>
-                                  </p:stCondLst>
-                                  <p:childTnLst>
-                                    <p:set>
-                                      <p:cBhvr>
-                                        <p:cTn dur="1" fill="hold">
-                                          <p:stCondLst>
-                                            <p:cond delay="0"/>
-                                          </p:stCondLst>
-                                        </p:cTn>
-                                        <p:tgtEl>
-                                          <p:spTgt spid="120"/>
-                                        </p:tgtEl>
-                                        <p:attrNameLst>
-                                          <p:attrName>style.visibility</p:attrName>
-                                        </p:attrNameLst>
-                                      </p:cBhvr>
-                                      <p:to>
-                                        <p:strVal val="visible"/>
-                                      </p:to>
-                                    </p:set>
-                                    <p:animEffect filter="fade" transition="in">
-                                      <p:cBhvr>
-                                        <p:cTn dur="1000"/>
-                                        <p:tgtEl>
-                                          <p:spTgt spid="120"/>
-                                        </p:tgtEl>
-                                      </p:cBhvr>
-                                    </p:animEffect>
-                                  </p:childTnLst>
-                                </p:cTn>
-                              </p:par>
-                            </p:childTnLst>
-                          </p:cTn>
-                        </p:par>
-                      </p:childTnLst>
-                    </p:cTn>
-                  </p:par>
-                  <p:par>
-                    <p:cTn fill="hold">
-                      <p:stCondLst>
-                        <p:cond delay="indefinite"/>
-                      </p:stCondLst>
-                      <p:childTnLst>
-                        <p:par>
-                          <p:cTn fill="hold">
-                            <p:stCondLst>
-                              <p:cond delay="0"/>
-                            </p:stCondLst>
-                            <p:childTnLst>
-                              <p:par>
-                                <p:cTn fill="hold" nodeType="clickEffect" presetClass="entr" presetID="10" presetSubtype="0">
-                                  <p:stCondLst>
-                                    <p:cond delay="0"/>
-                                  </p:stCondLst>
-                                  <p:childTnLst>
-                                    <p:set>
-                                      <p:cBhvr>
-                                        <p:cTn dur="1" fill="hold">
-                                          <p:stCondLst>
-                                            <p:cond delay="0"/>
-                                          </p:stCondLst>
-                                        </p:cTn>
-                                        <p:tgtEl>
-                                          <p:spTgt spid="121"/>
-                                        </p:tgtEl>
-                                        <p:attrNameLst>
-                                          <p:attrName>style.visibility</p:attrName>
-                                        </p:attrNameLst>
-                                      </p:cBhvr>
-                                      <p:to>
-                                        <p:strVal val="visible"/>
-                                      </p:to>
-                                    </p:set>
-                                    <p:animEffect filter="fade" transition="in">
-                                      <p:cBhvr>
-                                        <p:cTn dur="1000"/>
-                                        <p:tgtEl>
-                                          <p:spTgt spid="121"/>
-                                        </p:tgtEl>
-                                      </p:cBhvr>
-                                    </p:animEffect>
-                                  </p:childTnLst>
-                                </p:cTn>
-                              </p:par>
-                              <p:par>
-                                <p:cTn fill="hold" nodeType="withEffect" presetClass="entr" presetID="10" presetSubtype="0">
                                   <p:stCondLst>
                                     <p:cond delay="0"/>
                                   </p:stCondLst>
@@ -28071,26 +30536,8 @@
                                   </p:childTnLst>
                                 </p:cTn>
                               </p:par>
-                            </p:childTnLst>
-                          </p:cTn>
-                        </p:par>
-                      </p:childTnLst>
-                    </p:cTn>
-                  </p:par>
-                  <p:par>
-                    <p:cTn fill="hold">
-                      <p:stCondLst>
-                        <p:cond delay="indefinite"/>
-                      </p:stCondLst>
-                      <p:childTnLst>
-                        <p:par>
-                          <p:cTn fill="hold">
-                            <p:stCondLst>
-                              <p:cond delay="0"/>
-                            </p:stCondLst>
-                            <p:childTnLst>
                               <p:par>
-                                <p:cTn fill="hold" nodeType="clickEffect" presetClass="entr" presetID="10" presetSubtype="0">
+                                <p:cTn fill="hold" nodeType="withEffect" presetClass="entr" presetID="10" presetSubtype="0">
                                   <p:stCondLst>
                                     <p:cond delay="0"/>
                                   </p:stCondLst>
@@ -28124,8 +30571,26 @@
                                   </p:childTnLst>
                                 </p:cTn>
                               </p:par>
+                            </p:childTnLst>
+                          </p:cTn>
+                        </p:par>
+                      </p:childTnLst>
+                    </p:cTn>
+                  </p:par>
+                  <p:par>
+                    <p:cTn fill="hold">
+                      <p:stCondLst>
+                        <p:cond delay="indefinite"/>
+                      </p:stCondLst>
+                      <p:childTnLst>
+                        <p:par>
+                          <p:cTn fill="hold">
+                            <p:stCondLst>
+                              <p:cond delay="0"/>
+                            </p:stCondLst>
+                            <p:childTnLst>
                               <p:par>
-                                <p:cTn fill="hold" nodeType="withEffect" presetClass="entr" presetID="10" presetSubtype="0">
+                                <p:cTn fill="hold" nodeType="clickEffect" presetClass="entr" presetID="10" presetSubtype="0">
                                   <p:stCondLst>
                                     <p:cond delay="0"/>
                                   </p:stCondLst>
@@ -28194,6 +30659,164 @@
                                   </p:childTnLst>
                                 </p:cTn>
                               </p:par>
+                              <p:par>
+                                <p:cTn fill="hold" nodeType="withEffect" presetClass="entr" presetID="10" presetSubtype="0">
+                                  <p:stCondLst>
+                                    <p:cond delay="0"/>
+                                  </p:stCondLst>
+                                  <p:childTnLst>
+                                    <p:set>
+                                      <p:cBhvr>
+                                        <p:cTn dur="1" fill="hold">
+                                          <p:stCondLst>
+                                            <p:cond delay="0"/>
+                                          </p:stCondLst>
+                                        </p:cTn>
+                                        <p:tgtEl>
+                                          <p:spTgt spid="127"/>
+                                        </p:tgtEl>
+                                        <p:attrNameLst>
+                                          <p:attrName>style.visibility</p:attrName>
+                                        </p:attrNameLst>
+                                      </p:cBhvr>
+                                      <p:to>
+                                        <p:strVal val="visible"/>
+                                      </p:to>
+                                    </p:set>
+                                    <p:animEffect filter="fade" transition="in">
+                                      <p:cBhvr>
+                                        <p:cTn dur="1000"/>
+                                        <p:tgtEl>
+                                          <p:spTgt spid="127"/>
+                                        </p:tgtEl>
+                                      </p:cBhvr>
+                                    </p:animEffect>
+                                  </p:childTnLst>
+                                </p:cTn>
+                              </p:par>
+                            </p:childTnLst>
+                          </p:cTn>
+                        </p:par>
+                      </p:childTnLst>
+                    </p:cTn>
+                  </p:par>
+                  <p:par>
+                    <p:cTn fill="hold">
+                      <p:stCondLst>
+                        <p:cond delay="indefinite"/>
+                      </p:stCondLst>
+                      <p:childTnLst>
+                        <p:par>
+                          <p:cTn fill="hold">
+                            <p:stCondLst>
+                              <p:cond delay="0"/>
+                            </p:stCondLst>
+                            <p:childTnLst>
+                              <p:par>
+                                <p:cTn fill="hold" nodeType="clickEffect" presetClass="entr" presetID="10" presetSubtype="0">
+                                  <p:stCondLst>
+                                    <p:cond delay="0"/>
+                                  </p:stCondLst>
+                                  <p:childTnLst>
+                                    <p:set>
+                                      <p:cBhvr>
+                                        <p:cTn dur="1" fill="hold">
+                                          <p:stCondLst>
+                                            <p:cond delay="0"/>
+                                          </p:stCondLst>
+                                        </p:cTn>
+                                        <p:tgtEl>
+                                          <p:spTgt spid="128"/>
+                                        </p:tgtEl>
+                                        <p:attrNameLst>
+                                          <p:attrName>style.visibility</p:attrName>
+                                        </p:attrNameLst>
+                                      </p:cBhvr>
+                                      <p:to>
+                                        <p:strVal val="visible"/>
+                                      </p:to>
+                                    </p:set>
+                                    <p:animEffect filter="fade" transition="in">
+                                      <p:cBhvr>
+                                        <p:cTn dur="1000"/>
+                                        <p:tgtEl>
+                                          <p:spTgt spid="128"/>
+                                        </p:tgtEl>
+                                      </p:cBhvr>
+                                    </p:animEffect>
+                                  </p:childTnLst>
+                                </p:cTn>
+                              </p:par>
+                              <p:par>
+                                <p:cTn fill="hold" nodeType="withEffect" presetClass="entr" presetID="10" presetSubtype="0">
+                                  <p:stCondLst>
+                                    <p:cond delay="0"/>
+                                  </p:stCondLst>
+                                  <p:childTnLst>
+                                    <p:set>
+                                      <p:cBhvr>
+                                        <p:cTn dur="1" fill="hold">
+                                          <p:stCondLst>
+                                            <p:cond delay="0"/>
+                                          </p:stCondLst>
+                                        </p:cTn>
+                                        <p:tgtEl>
+                                          <p:spTgt spid="129"/>
+                                        </p:tgtEl>
+                                        <p:attrNameLst>
+                                          <p:attrName>style.visibility</p:attrName>
+                                        </p:attrNameLst>
+                                      </p:cBhvr>
+                                      <p:to>
+                                        <p:strVal val="visible"/>
+                                      </p:to>
+                                    </p:set>
+                                    <p:animEffect filter="fade" transition="in">
+                                      <p:cBhvr>
+                                        <p:cTn dur="1000"/>
+                                        <p:tgtEl>
+                                          <p:spTgt spid="129"/>
+                                        </p:tgtEl>
+                                      </p:cBhvr>
+                                    </p:animEffect>
+                                  </p:childTnLst>
+                                </p:cTn>
+                              </p:par>
+                              <p:par>
+                                <p:cTn fill="hold" nodeType="withEffect" presetClass="entr" presetID="10" presetSubtype="0">
+                                  <p:stCondLst>
+                                    <p:cond delay="0"/>
+                                  </p:stCondLst>
+                                  <p:childTnLst>
+                                    <p:set>
+                                      <p:cBhvr>
+                                        <p:cTn dur="1" fill="hold">
+                                          <p:stCondLst>
+                                            <p:cond delay="0"/>
+                                          </p:stCondLst>
+                                        </p:cTn>
+                                        <p:tgtEl>
+                                          <p:spTgt spid="130"/>
+                                        </p:tgtEl>
+                                        <p:attrNameLst>
+                                          <p:attrName>style.visibility</p:attrName>
+                                        </p:attrNameLst>
+                                      </p:cBhvr>
+                                      <p:to>
+                                        <p:strVal val="visible"/>
+                                      </p:to>
+                                    </p:set>
+                                    <p:animEffect filter="fade" transition="in">
+                                      <p:cBhvr>
+                                        <p:cTn dur="1000"/>
+                                        <p:tgtEl>
+                                          <p:spTgt spid="130"/>
+                                        </p:tgtEl>
+                                      </p:cBhvr>
+                                    </p:animEffect>
+                                  </p:childTnLst>
+                                </p:cTn>
+                              </p:par>
                             </p:childTnLst>
                           </p:cTn>
                         </p:par>
@@ -28230,7 +30853,7 @@
   <p:cSld>
     <p:spTree>
       <p:nvGrpSpPr>
-        <p:cNvPr id="130" name="Shape 130"/>
+        <p:cNvPr id="135" name="Shape 135"/>
         <p:cNvGrpSpPr/>
         <p:nvPr/>
       </p:nvGrpSpPr>
@@ -28244,7 +30867,7 @@
       </p:grpSpPr>
       <p:sp>
         <p:nvSpPr>
-          <p:cNvPr id="131" name="Google Shape;131;p19"/>
+          <p:cNvPr id="136" name="Google Shape;136;p19"/>
           <p:cNvSpPr txBox="1"/>
           <p:nvPr>
             <p:ph type="title"/>
@@ -28300,7 +30923,7 @@
       </p:sp>
       <p:sp>
         <p:nvSpPr>
-          <p:cNvPr id="132" name="Google Shape;132;p19"/>
+          <p:cNvPr id="137" name="Google Shape;137;p19"/>
           <p:cNvSpPr txBox="1"/>
           <p:nvPr>
             <p:ph idx="1" type="body"/>
@@ -28349,6 +30972,51 @@
           </a:p>
         </p:txBody>
       </p:sp>
+      <p:sp>
+        <p:nvSpPr>
+          <p:cNvPr id="138" name="Google Shape;138;p19"/>
+          <p:cNvSpPr txBox="1"/>
+          <p:nvPr>
+            <p:ph idx="12" type="sldNum"/>
+          </p:nvPr>
+        </p:nvSpPr>
+        <p:spPr>
+          <a:xfrm>
+            <a:off x="6553200" y="6356350"/>
+            <a:ext cx="2133600" cy="365100"/>
+          </a:xfrm>
+          <a:prstGeom prst="rect">
+            <a:avLst/>
+          </a:prstGeom>
+        </p:spPr>
+        <p:txBody>
+          <a:bodyPr anchorCtr="0" anchor="ctr" bIns="45700" lIns="91425" spcFirstLastPara="1" rIns="91425" wrap="square" tIns="45700">
+            <a:noAutofit/>
+          </a:bodyPr>
+          <a:lstStyle/>
+          <a:p>
+            <a:pPr indent="0" lvl="0" marL="0" rtl="0" algn="r">
+              <a:spcBef>
+                <a:spcPts val="0"/>
+              </a:spcBef>
+              <a:spcAft>
+                <a:spcPts val="0"/>
+              </a:spcAft>
+              <a:buClr>
+                <a:srgbClr val="000000"/>
+              </a:buClr>
+              <a:buSzPts val="1200"/>
+              <a:buFont typeface="Arial"/>
+              <a:buNone/>
+            </a:pPr>
+            <a:fld id="{00000000-1234-1234-1234-123412341234}" type="slidenum">
+              <a:rPr lang="en-US"/>
+              <a:t>‹#›</a:t>
+            </a:fld>
+            <a:endParaRPr/>
+          </a:p>
+        </p:txBody>
+      </p:sp>
     </p:spTree>
   </p:cSld>
   <p:clrMapOvr>
@@ -28362,7 +31030,7 @@
   <p:cSld>
     <p:spTree>
       <p:nvGrpSpPr>
-        <p:cNvPr id="136" name="Shape 136"/>
+        <p:cNvPr id="142" name="Shape 142"/>
         <p:cNvGrpSpPr/>
         <p:nvPr/>
       </p:nvGrpSpPr>
@@ -28376,7 +31044,7 @@
       </p:grpSpPr>
       <p:sp>
         <p:nvSpPr>
-          <p:cNvPr id="137" name="Google Shape;137;p20"/>
+          <p:cNvPr id="143" name="Google Shape;143;p20"/>
           <p:cNvSpPr txBox="1"/>
           <p:nvPr>
             <p:ph type="title"/>
@@ -28421,12 +31089,12 @@
       </p:sp>
       <p:graphicFrame>
         <p:nvGraphicFramePr>
-          <p:cNvPr id="138" name="Google Shape;138;p20"/>
+          <p:cNvPr id="144" name="Google Shape;144;p20"/>
           <p:cNvGraphicFramePr/>
           <p:nvPr/>
         </p:nvGraphicFramePr>
         <p:xfrm>
-          <a:off x="457200" y="1609200"/>
+          <a:off x="457200" y="1564595"/>
           <a:ext cx="3000000" cy="3000000"/>
         </p:xfrm>
         <a:graphic>
@@ -28434,7 +31102,7 @@
             <a:tbl>
               <a:tblPr>
                 <a:noFill/>
-                <a:tableStyleId>{B72C5A8D-5030-47FC-9FBE-639BE6E02443}</a:tableStyleId>
+                <a:tableStyleId>{D3DC4119-14DB-422D-BA40-32E6E3949163}</a:tableStyleId>
               </a:tblPr>
               <a:tblGrid>
                 <a:gridCol w="2057400"/>
@@ -29187,6 +31855,51 @@
           </a:graphicData>
         </a:graphic>
       </p:graphicFrame>
+      <p:sp>
+        <p:nvSpPr>
+          <p:cNvPr id="145" name="Google Shape;145;p20"/>
+          <p:cNvSpPr txBox="1"/>
+          <p:nvPr>
+            <p:ph idx="12" type="sldNum"/>
+          </p:nvPr>
+        </p:nvSpPr>
+        <p:spPr>
+          <a:xfrm>
+            <a:off x="6553200" y="6356350"/>
+            <a:ext cx="2133600" cy="365100"/>
+          </a:xfrm>
+          <a:prstGeom prst="rect">
+            <a:avLst/>
+          </a:prstGeom>
+        </p:spPr>
+        <p:txBody>
+          <a:bodyPr anchorCtr="0" anchor="ctr" bIns="45700" lIns="91425" spcFirstLastPara="1" rIns="91425" wrap="square" tIns="45700">
+            <a:noAutofit/>
+          </a:bodyPr>
+          <a:lstStyle/>
+          <a:p>
+            <a:pPr indent="0" lvl="0" marL="0" rtl="0" algn="r">
+              <a:spcBef>
+                <a:spcPts val="0"/>
+              </a:spcBef>
+              <a:spcAft>
+                <a:spcPts val="0"/>
+              </a:spcAft>
+              <a:buClr>
+                <a:srgbClr val="000000"/>
+              </a:buClr>
+              <a:buSzPts val="1200"/>
+              <a:buFont typeface="Arial"/>
+              <a:buNone/>
+            </a:pPr>
+            <a:fld id="{00000000-1234-1234-1234-123412341234}" type="slidenum">
+              <a:rPr lang="en-US"/>
+              <a:t>‹#›</a:t>
+            </a:fld>
+            <a:endParaRPr/>
+          </a:p>
+        </p:txBody>
+      </p:sp>
     </p:spTree>
   </p:cSld>
   <p:clrMapOvr>
@@ -29226,7 +31939,7 @@
                                           </p:stCondLst>
                                         </p:cTn>
                                         <p:tgtEl>
-                                          <p:spTgt spid="138"/>
+                                          <p:spTgt spid="144"/>
                                         </p:tgtEl>
                                         <p:attrNameLst>
                                           <p:attrName>style.visibility</p:attrName>
@@ -29275,7 +31988,7 @@
   <p:cSld>
     <p:spTree>
       <p:nvGrpSpPr>
-        <p:cNvPr id="142" name="Shape 142"/>
+        <p:cNvPr id="149" name="Shape 149"/>
         <p:cNvGrpSpPr/>
         <p:nvPr/>
       </p:nvGrpSpPr>
@@ -29289,7 +32002,7 @@
       </p:grpSpPr>
       <p:sp>
         <p:nvSpPr>
-          <p:cNvPr id="143" name="Google Shape;143;p21"/>
+          <p:cNvPr id="150" name="Google Shape;150;p21"/>
           <p:cNvSpPr txBox="1"/>
           <p:nvPr>
             <p:ph type="title"/>
@@ -29342,12 +32055,12 @@
       </p:sp>
       <p:graphicFrame>
         <p:nvGraphicFramePr>
-          <p:cNvPr id="144" name="Google Shape;144;p21"/>
+          <p:cNvPr id="151" name="Google Shape;151;p21"/>
           <p:cNvGraphicFramePr/>
           <p:nvPr/>
         </p:nvGraphicFramePr>
         <p:xfrm>
-          <a:off x="457200" y="1609200"/>
+          <a:off x="457200" y="1534859"/>
           <a:ext cx="3000000" cy="3000000"/>
         </p:xfrm>
         <a:graphic>
@@ -29355,7 +32068,7 @@
             <a:tbl>
               <a:tblPr>
                 <a:noFill/>
-                <a:tableStyleId>{B72C5A8D-5030-47FC-9FBE-639BE6E02443}</a:tableStyleId>
+                <a:tableStyleId>{D3DC4119-14DB-422D-BA40-32E6E3949163}</a:tableStyleId>
               </a:tblPr>
               <a:tblGrid>
                 <a:gridCol w="2057400"/>
@@ -30009,6 +32722,51 @@
           </a:graphicData>
         </a:graphic>
       </p:graphicFrame>
+      <p:sp>
+        <p:nvSpPr>
+          <p:cNvPr id="152" name="Google Shape;152;p21"/>
+          <p:cNvSpPr txBox="1"/>
+          <p:nvPr>
+            <p:ph idx="12" type="sldNum"/>
+          </p:nvPr>
+        </p:nvSpPr>
+        <p:spPr>
+          <a:xfrm>
+            <a:off x="6553200" y="6356350"/>
+            <a:ext cx="2133600" cy="365100"/>
+          </a:xfrm>
+          <a:prstGeom prst="rect">
+            <a:avLst/>
+          </a:prstGeom>
+        </p:spPr>
+        <p:txBody>
+          <a:bodyPr anchorCtr="0" anchor="ctr" bIns="45700" lIns="91425" spcFirstLastPara="1" rIns="91425" wrap="square" tIns="45700">
+            <a:noAutofit/>
+          </a:bodyPr>
+          <a:lstStyle/>
+          <a:p>
+            <a:pPr indent="0" lvl="0" marL="0" rtl="0" algn="r">
+              <a:spcBef>
+                <a:spcPts val="0"/>
+              </a:spcBef>
+              <a:spcAft>
+                <a:spcPts val="0"/>
+              </a:spcAft>
+              <a:buClr>
+                <a:srgbClr val="000000"/>
+              </a:buClr>
+              <a:buSzPts val="1200"/>
+              <a:buFont typeface="Arial"/>
+              <a:buNone/>
+            </a:pPr>
+            <a:fld id="{00000000-1234-1234-1234-123412341234}" type="slidenum">
+              <a:rPr lang="en-US"/>
+              <a:t>‹#›</a:t>
+            </a:fld>
+            <a:endParaRPr/>
+          </a:p>
+        </p:txBody>
+      </p:sp>
     </p:spTree>
   </p:cSld>
   <p:clrMapOvr>
@@ -30018,6 +32776,285 @@
 </file>
 
 <file path=ppt/theme/theme1.xml><?xml version="1.0" encoding="utf-8"?>
+<a:theme xmlns:a="http://schemas.openxmlformats.org/drawingml/2006/main" xmlns:r="http://schemas.openxmlformats.org/officeDocument/2006/relationships">
+  <a:themeElements>
+    <a:clrScheme name="Default">
+      <a:dk1>
+        <a:srgbClr val="000000"/>
+      </a:dk1>
+      <a:lt1>
+        <a:srgbClr val="FFFFFF"/>
+      </a:lt1>
+      <a:dk2>
+        <a:srgbClr val="158158"/>
+      </a:dk2>
+      <a:lt2>
+        <a:srgbClr val="F3F3F3"/>
+      </a:lt2>
+      <a:accent1>
+        <a:srgbClr val="058DC7"/>
+      </a:accent1>
+      <a:accent2>
+        <a:srgbClr val="50B432"/>
+      </a:accent2>
+      <a:accent3>
+        <a:srgbClr val="ED561B"/>
+      </a:accent3>
+      <a:accent4>
+        <a:srgbClr val="EDEF00"/>
+      </a:accent4>
+      <a:accent5>
+        <a:srgbClr val="24CBE5"/>
+      </a:accent5>
+      <a:accent6>
+        <a:srgbClr val="64E572"/>
+      </a:accent6>
+      <a:hlink>
+        <a:srgbClr val="2200CC"/>
+      </a:hlink>
+      <a:folHlink>
+        <a:srgbClr val="551A8B"/>
+      </a:folHlink>
+    </a:clrScheme>
+    <a:fontScheme name="Office">
+      <a:majorFont>
+        <a:latin typeface="Arial"/>
+        <a:ea typeface=""/>
+        <a:cs typeface=""/>
+        <a:font script="Jpan" typeface="ＭＳ Ｐゴシック"/>
+        <a:font script="Hang" typeface="맑은 고딕"/>
+        <a:font script="Hans" typeface="宋体"/>
+        <a:font script="Hant" typeface="新細明體"/>
+        <a:font script="Arab" typeface="Times New Roman"/>
+        <a:font script="Hebr" typeface="Times New Roman"/>
+        <a:font script="Thai" typeface="Angsana New"/>
+        <a:font script="Ethi" typeface="Nyala"/>
+        <a:font script="Beng" typeface="Vrinda"/>
+        <a:font script="Gujr" typeface="Shruti"/>
+        <a:font script="Khmr" typeface="MoolBoran"/>
+        <a:font script="Knda" typeface="Tunga"/>
+        <a:font script="Guru" typeface="Raavi"/>
+        <a:font script="Cans" typeface="Euphemia"/>
+        <a:font script="Cher" typeface="Plantagenet Cherokee"/>
+        <a:font script="Yiii" typeface="Microsoft Yi Baiti"/>
+        <a:font script="Tibt" typeface="Microsoft Himalaya"/>
+        <a:font script="Thaa" typeface="MV Boli"/>
+        <a:font script="Deva" typeface="Mangal"/>
+        <a:font script="Telu" typeface="Gautami"/>
+        <a:font script="Taml" typeface="Latha"/>
+        <a:font script="Syrc" typeface="Estrangelo Edessa"/>
+        <a:font script="Orya" typeface="Kalinga"/>
+        <a:font script="Mlym" typeface="Kartika"/>
+        <a:font script="Laoo" typeface="DokChampa"/>
+        <a:font script="Sinh" typeface="Iskoola Pota"/>
+        <a:font script="Mong" typeface="Mongolian Baiti"/>
+        <a:font script="Viet" typeface="Times New Roman"/>
+        <a:font script="Uigh" typeface="Microsoft Uighur"/>
+        <a:font script="Geor" typeface="Sylfaen"/>
+      </a:majorFont>
+      <a:minorFont>
+        <a:latin typeface="Arial"/>
+        <a:ea typeface=""/>
+        <a:cs typeface=""/>
+        <a:font script="Jpan" typeface="ＭＳ Ｐゴシック"/>
+        <a:font script="Hang" typeface="맑은 고딕"/>
+        <a:font script="Hans" typeface="宋体"/>
+        <a:font script="Hant" typeface="新細明體"/>
+        <a:font script="Arab" typeface="Arial"/>
+        <a:font script="Hebr" typeface="Arial"/>
+        <a:font script="Thai" typeface="Cordia New"/>
+        <a:font script="Ethi" typeface="Nyala"/>
+        <a:font script="Beng" typeface="Vrinda"/>
+        <a:font script="Gujr" typeface="Shruti"/>
+        <a:font script="Khmr" typeface="DaunPenh"/>
+        <a:font script="Knda" typeface="Tunga"/>
+        <a:font script="Guru" typeface="Raavi"/>
+        <a:font script="Cans" typeface="Euphemia"/>
+        <a:font script="Cher" typeface="Plantagenet Cherokee"/>
+        <a:font script="Yiii" typeface="Microsoft Yi Baiti"/>
+        <a:font script="Tibt" typeface="Microsoft Himalaya"/>
+        <a:font script="Thaa" typeface="MV Boli"/>
+        <a:font script="Deva" typeface="Mangal"/>
+        <a:font script="Telu" typeface="Gautami"/>
+        <a:font script="Taml" typeface="Latha"/>
+        <a:font script="Syrc" typeface="Estrangelo Edessa"/>
+        <a:font script="Orya" typeface="Kalinga"/>
+        <a:font script="Mlym" typeface="Kartika"/>
+        <a:font script="Laoo" typeface="DokChampa"/>
+        <a:font script="Sinh" typeface="Iskoola Pota"/>
+        <a:font script="Mong" typeface="Mongolian Baiti"/>
+        <a:font script="Viet" typeface="Arial"/>
+        <a:font script="Uigh" typeface="Microsoft Uighur"/>
+        <a:font script="Geor" typeface="Sylfaen"/>
+      </a:minorFont>
+    </a:fontScheme>
+    <a:fmtScheme name="Office">
+      <a:fillStyleLst>
+        <a:solidFill>
+          <a:schemeClr val="phClr"/>
+        </a:solidFill>
+        <a:gradFill rotWithShape="1">
+          <a:gsLst>
+            <a:gs pos="0">
+              <a:schemeClr val="phClr">
+                <a:tint val="50000"/>
+                <a:satMod val="300000"/>
+              </a:schemeClr>
+            </a:gs>
+            <a:gs pos="35000">
+              <a:schemeClr val="phClr">
+                <a:tint val="37000"/>
+                <a:satMod val="300000"/>
+              </a:schemeClr>
+            </a:gs>
+            <a:gs pos="100000">
+              <a:schemeClr val="phClr">
+                <a:tint val="15000"/>
+                <a:satMod val="350000"/>
+              </a:schemeClr>
+            </a:gs>
+          </a:gsLst>
+          <a:lin ang="16200000" scaled="1"/>
+        </a:gradFill>
+        <a:gradFill rotWithShape="1">
+          <a:gsLst>
+            <a:gs pos="0">
+              <a:schemeClr val="phClr">
+                <a:tint val="100000"/>
+                <a:shade val="100000"/>
+                <a:satMod val="130000"/>
+              </a:schemeClr>
+            </a:gs>
+            <a:gs pos="100000">
+              <a:schemeClr val="phClr">
+                <a:tint val="50000"/>
+                <a:shade val="100000"/>
+                <a:satMod val="350000"/>
+              </a:schemeClr>
+            </a:gs>
+          </a:gsLst>
+          <a:lin ang="16200000" scaled="0"/>
+        </a:gradFill>
+      </a:fillStyleLst>
+      <a:lnStyleLst>
+        <a:ln w="9525" cap="flat" cmpd="sng" algn="ctr">
+          <a:solidFill>
+            <a:schemeClr val="phClr">
+              <a:shade val="95000"/>
+              <a:satMod val="105000"/>
+            </a:schemeClr>
+          </a:solidFill>
+          <a:prstDash val="solid"/>
+        </a:ln>
+        <a:ln w="25400" cap="flat" cmpd="sng" algn="ctr">
+          <a:solidFill>
+            <a:schemeClr val="phClr"/>
+          </a:solidFill>
+          <a:prstDash val="solid"/>
+        </a:ln>
+        <a:ln w="38100" cap="flat" cmpd="sng" algn="ctr">
+          <a:solidFill>
+            <a:schemeClr val="phClr"/>
+          </a:solidFill>
+          <a:prstDash val="solid"/>
+        </a:ln>
+      </a:lnStyleLst>
+      <a:effectStyleLst>
+        <a:effectStyle>
+          <a:effectLst>
+            <a:outerShdw blurRad="40000" dist="20000" dir="5400000" rotWithShape="0">
+              <a:srgbClr val="000000">
+                <a:alpha val="38000"/>
+              </a:srgbClr>
+            </a:outerShdw>
+          </a:effectLst>
+        </a:effectStyle>
+        <a:effectStyle>
+          <a:effectLst>
+            <a:outerShdw blurRad="40000" dist="23000" dir="5400000" rotWithShape="0">
+              <a:srgbClr val="000000">
+                <a:alpha val="35000"/>
+              </a:srgbClr>
+            </a:outerShdw>
+          </a:effectLst>
+        </a:effectStyle>
+        <a:effectStyle>
+          <a:effectLst>
+            <a:outerShdw blurRad="40000" dist="23000" dir="5400000" rotWithShape="0">
+              <a:srgbClr val="000000">
+                <a:alpha val="35000"/>
+              </a:srgbClr>
+            </a:outerShdw>
+          </a:effectLst>
+          <a:scene3d>
+            <a:camera prst="orthographicFront">
+              <a:rot lat="0" lon="0" rev="0"/>
+            </a:camera>
+            <a:lightRig rig="threePt" dir="t">
+              <a:rot lat="0" lon="0" rev="1200000"/>
+            </a:lightRig>
+          </a:scene3d>
+          <a:sp3d>
+            <a:bevelT w="63500" h="25400"/>
+          </a:sp3d>
+        </a:effectStyle>
+      </a:effectStyleLst>
+      <a:bgFillStyleLst>
+        <a:solidFill>
+          <a:schemeClr val="phClr"/>
+        </a:solidFill>
+        <a:gradFill rotWithShape="1">
+          <a:gsLst>
+            <a:gs pos="0">
+              <a:schemeClr val="phClr">
+                <a:tint val="40000"/>
+                <a:satMod val="350000"/>
+              </a:schemeClr>
+            </a:gs>
+            <a:gs pos="40000">
+              <a:schemeClr val="phClr">
+                <a:tint val="45000"/>
+                <a:shade val="99000"/>
+                <a:satMod val="350000"/>
+              </a:schemeClr>
+            </a:gs>
+            <a:gs pos="100000">
+              <a:schemeClr val="phClr">
+                <a:shade val="20000"/>
+                <a:satMod val="255000"/>
+              </a:schemeClr>
+            </a:gs>
+          </a:gsLst>
+          <a:path path="circle">
+            <a:fillToRect l="50000" t="-80000" r="50000" b="180000"/>
+          </a:path>
+        </a:gradFill>
+        <a:gradFill rotWithShape="1">
+          <a:gsLst>
+            <a:gs pos="0">
+              <a:schemeClr val="phClr">
+                <a:tint val="80000"/>
+                <a:satMod val="300000"/>
+              </a:schemeClr>
+            </a:gs>
+            <a:gs pos="100000">
+              <a:schemeClr val="phClr">
+                <a:shade val="30000"/>
+                <a:satMod val="200000"/>
+              </a:schemeClr>
+            </a:gs>
+          </a:gsLst>
+          <a:path path="circle">
+            <a:fillToRect l="50000" t="50000" r="50000" b="50000"/>
+          </a:path>
+        </a:gradFill>
+      </a:bgFillStyleLst>
+    </a:fmtScheme>
+  </a:themeElements>
+</a:theme>
+</file>
+
+<file path=ppt/theme/theme2.xml><?xml version="1.0" encoding="utf-8"?>
 <a:theme xmlns:a="http://schemas.openxmlformats.org/drawingml/2006/main" xmlns:r="http://schemas.openxmlformats.org/officeDocument/2006/relationships" name="Office Theme">
   <a:themeElements>
     <a:clrScheme name="Office">
@@ -30294,283 +33331,4 @@
     </a:fmtScheme>
   </a:themeElements>
 </a:theme>
-</file>
-
-<file path=ppt/theme/theme2.xml><?xml version="1.0" encoding="utf-8"?>
-<a:theme xmlns:a="http://schemas.openxmlformats.org/drawingml/2006/main" xmlns:r="http://schemas.openxmlformats.org/officeDocument/2006/relationships">
-  <a:themeElements>
-    <a:clrScheme name="Default">
-      <a:dk1>
-        <a:srgbClr val="000000"/>
-      </a:dk1>
-      <a:lt1>
-        <a:srgbClr val="FFFFFF"/>
-      </a:lt1>
-      <a:dk2>
-        <a:srgbClr val="158158"/>
-      </a:dk2>
-      <a:lt2>
-        <a:srgbClr val="F3F3F3"/>
-      </a:lt2>
-      <a:accent1>
-        <a:srgbClr val="058DC7"/>
-      </a:accent1>
-      <a:accent2>
-        <a:srgbClr val="50B432"/>
-      </a:accent2>
-      <a:accent3>
-        <a:srgbClr val="ED561B"/>
-      </a:accent3>
-      <a:accent4>
-        <a:srgbClr val="EDEF00"/>
-      </a:accent4>
-      <a:accent5>
-        <a:srgbClr val="24CBE5"/>
-      </a:accent5>
-      <a:accent6>
-        <a:srgbClr val="64E572"/>
-      </a:accent6>
-      <a:hlink>
-        <a:srgbClr val="2200CC"/>
-      </a:hlink>
-      <a:folHlink>
-        <a:srgbClr val="551A8B"/>
-      </a:folHlink>
-    </a:clrScheme>
-    <a:fontScheme name="Office">
-      <a:majorFont>
-        <a:latin typeface="Arial"/>
-        <a:ea typeface=""/>
-        <a:cs typeface=""/>
-        <a:font script="Jpan" typeface="ＭＳ Ｐゴシック"/>
-        <a:font script="Hang" typeface="맑은 고딕"/>
-        <a:font script="Hans" typeface="宋体"/>
-        <a:font script="Hant" typeface="新細明體"/>
-        <a:font script="Arab" typeface="Times New Roman"/>
-        <a:font script="Hebr" typeface="Times New Roman"/>
-        <a:font script="Thai" typeface="Angsana New"/>
-        <a:font script="Ethi" typeface="Nyala"/>
-        <a:font script="Beng" typeface="Vrinda"/>
-        <a:font script="Gujr" typeface="Shruti"/>
-        <a:font script="Khmr" typeface="MoolBoran"/>
-        <a:font script="Knda" typeface="Tunga"/>
-        <a:font script="Guru" typeface="Raavi"/>
-        <a:font script="Cans" typeface="Euphemia"/>
-        <a:font script="Cher" typeface="Plantagenet Cherokee"/>
-        <a:font script="Yiii" typeface="Microsoft Yi Baiti"/>
-        <a:font script="Tibt" typeface="Microsoft Himalaya"/>
-        <a:font script="Thaa" typeface="MV Boli"/>
-        <a:font script="Deva" typeface="Mangal"/>
-        <a:font script="Telu" typeface="Gautami"/>
-        <a:font script="Taml" typeface="Latha"/>
-        <a:font script="Syrc" typeface="Estrangelo Edessa"/>
-        <a:font script="Orya" typeface="Kalinga"/>
-        <a:font script="Mlym" typeface="Kartika"/>
-        <a:font script="Laoo" typeface="DokChampa"/>
-        <a:font script="Sinh" typeface="Iskoola Pota"/>
-        <a:font script="Mong" typeface="Mongolian Baiti"/>
-        <a:font script="Viet" typeface="Times New Roman"/>
-        <a:font script="Uigh" typeface="Microsoft Uighur"/>
-        <a:font script="Geor" typeface="Sylfaen"/>
-      </a:majorFont>
-      <a:minorFont>
-        <a:latin typeface="Arial"/>
-        <a:ea typeface=""/>
-        <a:cs typeface=""/>
-        <a:font script="Jpan" typeface="ＭＳ Ｐゴシック"/>
-        <a:font script="Hang" typeface="맑은 고딕"/>
-        <a:font script="Hans" typeface="宋体"/>
-        <a:font script="Hant" typeface="新細明體"/>
-        <a:font script="Arab" typeface="Arial"/>
-        <a:font script="Hebr" typeface="Arial"/>
-        <a:font script="Thai" typeface="Cordia New"/>
-        <a:font script="Ethi" typeface="Nyala"/>
-        <a:font script="Beng" typeface="Vrinda"/>
-        <a:font script="Gujr" typeface="Shruti"/>
-        <a:font script="Khmr" typeface="DaunPenh"/>
-        <a:font script="Knda" typeface="Tunga"/>
-        <a:font script="Guru" typeface="Raavi"/>
-        <a:font script="Cans" typeface="Euphemia"/>
-        <a:font script="Cher" typeface="Plantagenet Cherokee"/>
-        <a:font script="Yiii" typeface="Microsoft Yi Baiti"/>
-        <a:font script="Tibt" typeface="Microsoft Himalaya"/>
-        <a:font script="Thaa" typeface="MV Boli"/>
-        <a:font script="Deva" typeface="Mangal"/>
-        <a:font script="Telu" typeface="Gautami"/>
-        <a:font script="Taml" typeface="Latha"/>
-        <a:font script="Syrc" typeface="Estrangelo Edessa"/>
-        <a:font script="Orya" typeface="Kalinga"/>
-        <a:font script="Mlym" typeface="Kartika"/>
-        <a:font script="Laoo" typeface="DokChampa"/>
-        <a:font script="Sinh" typeface="Iskoola Pota"/>
-        <a:font script="Mong" typeface="Mongolian Baiti"/>
-        <a:font script="Viet" typeface="Arial"/>
-        <a:font script="Uigh" typeface="Microsoft Uighur"/>
-        <a:font script="Geor" typeface="Sylfaen"/>
-      </a:minorFont>
-    </a:fontScheme>
-    <a:fmtScheme name="Office">
-      <a:fillStyleLst>
-        <a:solidFill>
-          <a:schemeClr val="phClr"/>
-        </a:solidFill>
-        <a:gradFill rotWithShape="1">
-          <a:gsLst>
-            <a:gs pos="0">
-              <a:schemeClr val="phClr">
-                <a:tint val="50000"/>
-                <a:satMod val="300000"/>
-              </a:schemeClr>
-            </a:gs>
-            <a:gs pos="35000">
-              <a:schemeClr val="phClr">
-                <a:tint val="37000"/>
-                <a:satMod val="300000"/>
-              </a:schemeClr>
-            </a:gs>
-            <a:gs pos="100000">
-              <a:schemeClr val="phClr">
-                <a:tint val="15000"/>
-                <a:satMod val="350000"/>
-              </a:schemeClr>
-            </a:gs>
-          </a:gsLst>
-          <a:lin ang="16200000" scaled="1"/>
-        </a:gradFill>
-        <a:gradFill rotWithShape="1">
-          <a:gsLst>
-            <a:gs pos="0">
-              <a:schemeClr val="phClr">
-                <a:tint val="100000"/>
-                <a:shade val="100000"/>
-                <a:satMod val="130000"/>
-              </a:schemeClr>
-            </a:gs>
-            <a:gs pos="100000">
-              <a:schemeClr val="phClr">
-                <a:tint val="50000"/>
-                <a:shade val="100000"/>
-                <a:satMod val="350000"/>
-              </a:schemeClr>
-            </a:gs>
-          </a:gsLst>
-          <a:lin ang="16200000" scaled="0"/>
-        </a:gradFill>
-      </a:fillStyleLst>
-      <a:lnStyleLst>
-        <a:ln w="9525" cap="flat" cmpd="sng" algn="ctr">
-          <a:solidFill>
-            <a:schemeClr val="phClr">
-              <a:shade val="95000"/>
-              <a:satMod val="105000"/>
-            </a:schemeClr>
-          </a:solidFill>
-          <a:prstDash val="solid"/>
-        </a:ln>
-        <a:ln w="25400" cap="flat" cmpd="sng" algn="ctr">
-          <a:solidFill>
-            <a:schemeClr val="phClr"/>
-          </a:solidFill>
-          <a:prstDash val="solid"/>
-        </a:ln>
-        <a:ln w="38100" cap="flat" cmpd="sng" algn="ctr">
-          <a:solidFill>
-            <a:schemeClr val="phClr"/>
-          </a:solidFill>
-          <a:prstDash val="solid"/>
-        </a:ln>
-      </a:lnStyleLst>
-      <a:effectStyleLst>
-        <a:effectStyle>
-          <a:effectLst>
-            <a:outerShdw blurRad="40000" dist="20000" dir="5400000" rotWithShape="0">
-              <a:srgbClr val="000000">
-                <a:alpha val="38000"/>
-              </a:srgbClr>
-            </a:outerShdw>
-          </a:effectLst>
-        </a:effectStyle>
-        <a:effectStyle>
-          <a:effectLst>
-            <a:outerShdw blurRad="40000" dist="23000" dir="5400000" rotWithShape="0">
-              <a:srgbClr val="000000">
-                <a:alpha val="35000"/>
-              </a:srgbClr>
-            </a:outerShdw>
-          </a:effectLst>
-        </a:effectStyle>
-        <a:effectStyle>
-          <a:effectLst>
-            <a:outerShdw blurRad="40000" dist="23000" dir="5400000" rotWithShape="0">
-              <a:srgbClr val="000000">
-                <a:alpha val="35000"/>
-              </a:srgbClr>
-            </a:outerShdw>
-          </a:effectLst>
-          <a:scene3d>
-            <a:camera prst="orthographicFront">
-              <a:rot lat="0" lon="0" rev="0"/>
-            </a:camera>
-            <a:lightRig rig="threePt" dir="t">
-              <a:rot lat="0" lon="0" rev="1200000"/>
-            </a:lightRig>
-          </a:scene3d>
-          <a:sp3d>
-            <a:bevelT w="63500" h="25400"/>
-          </a:sp3d>
-        </a:effectStyle>
-      </a:effectStyleLst>
-      <a:bgFillStyleLst>
-        <a:solidFill>
-          <a:schemeClr val="phClr"/>
-        </a:solidFill>
-        <a:gradFill rotWithShape="1">
-          <a:gsLst>
-            <a:gs pos="0">
-              <a:schemeClr val="phClr">
-                <a:tint val="40000"/>
-                <a:satMod val="350000"/>
-              </a:schemeClr>
-            </a:gs>
-            <a:gs pos="40000">
-              <a:schemeClr val="phClr">
-                <a:tint val="45000"/>
-                <a:shade val="99000"/>
-                <a:satMod val="350000"/>
-              </a:schemeClr>
-            </a:gs>
-            <a:gs pos="100000">
-              <a:schemeClr val="phClr">
-                <a:shade val="20000"/>
-                <a:satMod val="255000"/>
-              </a:schemeClr>
-            </a:gs>
-          </a:gsLst>
-          <a:path path="circle">
-            <a:fillToRect l="50000" t="-80000" r="50000" b="180000"/>
-          </a:path>
-        </a:gradFill>
-        <a:gradFill rotWithShape="1">
-          <a:gsLst>
-            <a:gs pos="0">
-              <a:schemeClr val="phClr">
-                <a:tint val="80000"/>
-                <a:satMod val="300000"/>
-              </a:schemeClr>
-            </a:gs>
-            <a:gs pos="100000">
-              <a:schemeClr val="phClr">
-                <a:shade val="30000"/>
-                <a:satMod val="200000"/>
-              </a:schemeClr>
-            </a:gs>
-          </a:gsLst>
-          <a:path path="circle">
-            <a:fillToRect l="50000" t="50000" r="50000" b="50000"/>
-          </a:path>
-        </a:gradFill>
-      </a:bgFillStyleLst>
-    </a:fmtScheme>
-  </a:themeElements>
-</a:theme>
 </file>